--- a/slides/1-intro.pptx
+++ b/slides/1-intro.pptx
@@ -136,7 +136,7 @@
 <file path=ppt/revisionInfo.xml><?xml version="1.0" encoding="utf-8"?>
 <p1510:revInfo xmlns:a="http://schemas.openxmlformats.org/drawingml/2006/main" xmlns:r="http://schemas.openxmlformats.org/officeDocument/2006/relationships" xmlns:p1510="http://schemas.microsoft.com/office/powerpoint/2015/10/main">
   <p1510:revLst>
-    <p1510:client id="{319BC8FD-C455-96ED-2801-3920832F5F55}" v="17" dt="2025-09-13T08:47:10.864"/>
+    <p1510:client id="{E26B6609-0461-3689-64DB-6E59DF0EFC74}" v="4" dt="2025-09-30T10:40:58.045"/>
   </p1510:revLst>
 </p1510:revInfo>
 </file>
@@ -162,6 +162,30 @@
             <pc:docMk/>
             <pc:sldMk cId="570589333" sldId="259"/>
             <ac:spMk id="3" creationId="{D83C43F5-34A7-8640-01DC-E67800E0C470}"/>
+          </ac:spMkLst>
+        </pc:spChg>
+      </pc:sldChg>
+    </pc:docChg>
+  </pc:docChgLst>
+  <pc:docChgLst>
+    <pc:chgData name="Ryan Daniels" userId="S::rkd43@cam.ac.uk::aaa4fbe9-f474-4140-b10b-5257398ac308" providerId="AD" clId="Web-{E26B6609-0461-3689-64DB-6E59DF0EFC74}"/>
+    <pc:docChg chg="modSld">
+      <pc:chgData name="Ryan Daniels" userId="S::rkd43@cam.ac.uk::aaa4fbe9-f474-4140-b10b-5257398ac308" providerId="AD" clId="Web-{E26B6609-0461-3689-64DB-6E59DF0EFC74}" dt="2025-09-30T10:40:58.045" v="3" actId="20577"/>
+      <pc:docMkLst>
+        <pc:docMk/>
+      </pc:docMkLst>
+      <pc:sldChg chg="modSp">
+        <pc:chgData name="Ryan Daniels" userId="S::rkd43@cam.ac.uk::aaa4fbe9-f474-4140-b10b-5257398ac308" providerId="AD" clId="Web-{E26B6609-0461-3689-64DB-6E59DF0EFC74}" dt="2025-09-30T10:40:58.045" v="3" actId="20577"/>
+        <pc:sldMkLst>
+          <pc:docMk/>
+          <pc:sldMk cId="1719520842" sldId="273"/>
+        </pc:sldMkLst>
+        <pc:spChg chg="mod">
+          <ac:chgData name="Ryan Daniels" userId="S::rkd43@cam.ac.uk::aaa4fbe9-f474-4140-b10b-5257398ac308" providerId="AD" clId="Web-{E26B6609-0461-3689-64DB-6E59DF0EFC74}" dt="2025-09-30T10:40:58.045" v="3" actId="20577"/>
+          <ac:spMkLst>
+            <pc:docMk/>
+            <pc:sldMk cId="1719520842" sldId="273"/>
+            <ac:spMk id="3" creationId="{8E3982A0-7BFF-76E6-00A2-2D4A08CAC85F}"/>
           </ac:spMkLst>
         </pc:spChg>
       </pc:sldChg>
@@ -196,681 +220,6 @@
           </ac:spMkLst>
         </pc:spChg>
       </pc:sldChg>
-      <pc:sldChg chg="modSp new del">
-        <pc:chgData name="Ryan Daniels" userId="S::rkd43@cam.ac.uk::aaa4fbe9-f474-4140-b10b-5257398ac308" providerId="AD" clId="Web-{61261352-28B5-F6B1-1A56-AB06BC1060C3}" dt="2025-09-03T11:59:39.309" v="38"/>
-        <pc:sldMkLst>
-          <pc:docMk/>
-          <pc:sldMk cId="3506924465" sldId="275"/>
-        </pc:sldMkLst>
-      </pc:sldChg>
-    </pc:docChg>
-  </pc:docChgLst>
-  <pc:docChgLst>
-    <pc:chgData name="Ryan Daniels" userId="S::rkd43@cam.ac.uk::aaa4fbe9-f474-4140-b10b-5257398ac308" providerId="AD" clId="Web-{18FF2062-0BBC-DAD2-02B5-122056399AF9}"/>
-    <pc:docChg chg="addSld modSld sldOrd">
-      <pc:chgData name="Ryan Daniels" userId="S::rkd43@cam.ac.uk::aaa4fbe9-f474-4140-b10b-5257398ac308" providerId="AD" clId="Web-{18FF2062-0BBC-DAD2-02B5-122056399AF9}" dt="2025-07-01T11:14:59.690" v="377" actId="20577"/>
-      <pc:docMkLst>
-        <pc:docMk/>
-      </pc:docMkLst>
-      <pc:sldChg chg="modSp">
-        <pc:chgData name="Ryan Daniels" userId="S::rkd43@cam.ac.uk::aaa4fbe9-f474-4140-b10b-5257398ac308" providerId="AD" clId="Web-{18FF2062-0BBC-DAD2-02B5-122056399AF9}" dt="2025-06-30T20:51:05.903" v="316" actId="20577"/>
-        <pc:sldMkLst>
-          <pc:docMk/>
-          <pc:sldMk cId="3011003677" sldId="261"/>
-        </pc:sldMkLst>
-      </pc:sldChg>
-      <pc:sldChg chg="modSp addAnim delAnim">
-        <pc:chgData name="Ryan Daniels" userId="S::rkd43@cam.ac.uk::aaa4fbe9-f474-4140-b10b-5257398ac308" providerId="AD" clId="Web-{18FF2062-0BBC-DAD2-02B5-122056399AF9}" dt="2025-06-30T20:26:51.106" v="35" actId="20577"/>
-        <pc:sldMkLst>
-          <pc:docMk/>
-          <pc:sldMk cId="1865729139" sldId="266"/>
-        </pc:sldMkLst>
-      </pc:sldChg>
-      <pc:sldChg chg="modSp add replId delAnim">
-        <pc:chgData name="Ryan Daniels" userId="S::rkd43@cam.ac.uk::aaa4fbe9-f474-4140-b10b-5257398ac308" providerId="AD" clId="Web-{18FF2062-0BBC-DAD2-02B5-122056399AF9}" dt="2025-06-30T20:27:53.389" v="47"/>
-        <pc:sldMkLst>
-          <pc:docMk/>
-          <pc:sldMk cId="288595263" sldId="267"/>
-        </pc:sldMkLst>
-      </pc:sldChg>
-      <pc:sldChg chg="modSp add replId delAnim">
-        <pc:chgData name="Ryan Daniels" userId="S::rkd43@cam.ac.uk::aaa4fbe9-f474-4140-b10b-5257398ac308" providerId="AD" clId="Web-{18FF2062-0BBC-DAD2-02B5-122056399AF9}" dt="2025-06-30T20:28:42.987" v="55"/>
-        <pc:sldMkLst>
-          <pc:docMk/>
-          <pc:sldMk cId="459657627" sldId="268"/>
-        </pc:sldMkLst>
-      </pc:sldChg>
-      <pc:sldChg chg="modSp add replId delAnim">
-        <pc:chgData name="Ryan Daniels" userId="S::rkd43@cam.ac.uk::aaa4fbe9-f474-4140-b10b-5257398ac308" providerId="AD" clId="Web-{18FF2062-0BBC-DAD2-02B5-122056399AF9}" dt="2025-06-30T20:28:46.362" v="57"/>
-        <pc:sldMkLst>
-          <pc:docMk/>
-          <pc:sldMk cId="490861023" sldId="269"/>
-        </pc:sldMkLst>
-      </pc:sldChg>
-      <pc:sldChg chg="modSp add replId">
-        <pc:chgData name="Ryan Daniels" userId="S::rkd43@cam.ac.uk::aaa4fbe9-f474-4140-b10b-5257398ac308" providerId="AD" clId="Web-{18FF2062-0BBC-DAD2-02B5-122056399AF9}" dt="2025-06-30T20:32:42.466" v="70" actId="20577"/>
-        <pc:sldMkLst>
-          <pc:docMk/>
-          <pc:sldMk cId="1534518163" sldId="270"/>
-        </pc:sldMkLst>
-      </pc:sldChg>
-      <pc:sldChg chg="modSp add replId addAnim">
-        <pc:chgData name="Ryan Daniels" userId="S::rkd43@cam.ac.uk::aaa4fbe9-f474-4140-b10b-5257398ac308" providerId="AD" clId="Web-{18FF2062-0BBC-DAD2-02B5-122056399AF9}" dt="2025-06-30T20:44:40.168" v="268"/>
-        <pc:sldMkLst>
-          <pc:docMk/>
-          <pc:sldMk cId="2760384188" sldId="271"/>
-        </pc:sldMkLst>
-      </pc:sldChg>
-      <pc:sldChg chg="modSp add replId addAnim">
-        <pc:chgData name="Ryan Daniels" userId="S::rkd43@cam.ac.uk::aaa4fbe9-f474-4140-b10b-5257398ac308" providerId="AD" clId="Web-{18FF2062-0BBC-DAD2-02B5-122056399AF9}" dt="2025-06-30T20:44:48.934" v="269"/>
-        <pc:sldMkLst>
-          <pc:docMk/>
-          <pc:sldMk cId="3516369541" sldId="272"/>
-        </pc:sldMkLst>
-      </pc:sldChg>
-      <pc:sldChg chg="modSp new addAnim delAnim">
-        <pc:chgData name="Ryan Daniels" userId="S::rkd43@cam.ac.uk::aaa4fbe9-f474-4140-b10b-5257398ac308" providerId="AD" clId="Web-{18FF2062-0BBC-DAD2-02B5-122056399AF9}" dt="2025-07-01T11:13:44.297" v="355" actId="20577"/>
-        <pc:sldMkLst>
-          <pc:docMk/>
-          <pc:sldMk cId="1719520842" sldId="273"/>
-        </pc:sldMkLst>
-      </pc:sldChg>
-      <pc:sldChg chg="modSp add ord replId delAnim">
-        <pc:chgData name="Ryan Daniels" userId="S::rkd43@cam.ac.uk::aaa4fbe9-f474-4140-b10b-5257398ac308" providerId="AD" clId="Web-{18FF2062-0BBC-DAD2-02B5-122056399AF9}" dt="2025-07-01T11:14:59.690" v="377" actId="20577"/>
-        <pc:sldMkLst>
-          <pc:docMk/>
-          <pc:sldMk cId="3607703828" sldId="274"/>
-        </pc:sldMkLst>
-      </pc:sldChg>
-    </pc:docChg>
-  </pc:docChgLst>
-  <pc:docChgLst>
-    <pc:chgData name="Ryan Daniels" userId="S::rkd43@cam.ac.uk::aaa4fbe9-f474-4140-b10b-5257398ac308" providerId="AD" clId="Web-{66FA9984-1297-DB07-42B1-D9D9D0C443D0}"/>
-    <pc:docChg chg="modSld addMainMaster delMainMaster">
-      <pc:chgData name="Ryan Daniels" userId="S::rkd43@cam.ac.uk::aaa4fbe9-f474-4140-b10b-5257398ac308" providerId="AD" clId="Web-{66FA9984-1297-DB07-42B1-D9D9D0C443D0}" dt="2025-06-17T14:36:17.194" v="2"/>
-      <pc:docMkLst>
-        <pc:docMk/>
-      </pc:docMkLst>
-      <pc:sldChg chg="modSp mod modClrScheme chgLayout">
-        <pc:chgData name="Ryan Daniels" userId="S::rkd43@cam.ac.uk::aaa4fbe9-f474-4140-b10b-5257398ac308" providerId="AD" clId="Web-{66FA9984-1297-DB07-42B1-D9D9D0C443D0}" dt="2025-06-17T14:36:17.194" v="2"/>
-        <pc:sldMkLst>
-          <pc:docMk/>
-          <pc:sldMk cId="109857222" sldId="256"/>
-        </pc:sldMkLst>
-      </pc:sldChg>
-      <pc:sldChg chg="modSp mod modClrScheme chgLayout">
-        <pc:chgData name="Ryan Daniels" userId="S::rkd43@cam.ac.uk::aaa4fbe9-f474-4140-b10b-5257398ac308" providerId="AD" clId="Web-{66FA9984-1297-DB07-42B1-D9D9D0C443D0}" dt="2025-06-17T14:36:17.194" v="2"/>
-        <pc:sldMkLst>
-          <pc:docMk/>
-          <pc:sldMk cId="2776984732" sldId="257"/>
-        </pc:sldMkLst>
-      </pc:sldChg>
-      <pc:sldChg chg="modSp mod modClrScheme chgLayout">
-        <pc:chgData name="Ryan Daniels" userId="S::rkd43@cam.ac.uk::aaa4fbe9-f474-4140-b10b-5257398ac308" providerId="AD" clId="Web-{66FA9984-1297-DB07-42B1-D9D9D0C443D0}" dt="2025-06-17T14:36:17.194" v="2"/>
-        <pc:sldMkLst>
-          <pc:docMk/>
-          <pc:sldMk cId="3802117303" sldId="258"/>
-        </pc:sldMkLst>
-      </pc:sldChg>
-      <pc:sldChg chg="modSp mod modClrScheme chgLayout">
-        <pc:chgData name="Ryan Daniels" userId="S::rkd43@cam.ac.uk::aaa4fbe9-f474-4140-b10b-5257398ac308" providerId="AD" clId="Web-{66FA9984-1297-DB07-42B1-D9D9D0C443D0}" dt="2025-06-17T14:36:17.194" v="2"/>
-        <pc:sldMkLst>
-          <pc:docMk/>
-          <pc:sldMk cId="570589333" sldId="259"/>
-        </pc:sldMkLst>
-      </pc:sldChg>
-      <pc:sldChg chg="modSp mod modClrScheme chgLayout">
-        <pc:chgData name="Ryan Daniels" userId="S::rkd43@cam.ac.uk::aaa4fbe9-f474-4140-b10b-5257398ac308" providerId="AD" clId="Web-{66FA9984-1297-DB07-42B1-D9D9D0C443D0}" dt="2025-06-17T14:36:17.194" v="2"/>
-        <pc:sldMkLst>
-          <pc:docMk/>
-          <pc:sldMk cId="3408820217" sldId="260"/>
-        </pc:sldMkLst>
-      </pc:sldChg>
-      <pc:sldChg chg="modSp mod modClrScheme chgLayout">
-        <pc:chgData name="Ryan Daniels" userId="S::rkd43@cam.ac.uk::aaa4fbe9-f474-4140-b10b-5257398ac308" providerId="AD" clId="Web-{66FA9984-1297-DB07-42B1-D9D9D0C443D0}" dt="2025-06-17T14:36:17.194" v="2"/>
-        <pc:sldMkLst>
-          <pc:docMk/>
-          <pc:sldMk cId="3011003677" sldId="261"/>
-        </pc:sldMkLst>
-      </pc:sldChg>
-      <pc:sldChg chg="modSp mod modClrScheme chgLayout">
-        <pc:chgData name="Ryan Daniels" userId="S::rkd43@cam.ac.uk::aaa4fbe9-f474-4140-b10b-5257398ac308" providerId="AD" clId="Web-{66FA9984-1297-DB07-42B1-D9D9D0C443D0}" dt="2025-06-17T14:36:17.194" v="2"/>
-        <pc:sldMkLst>
-          <pc:docMk/>
-          <pc:sldMk cId="2828243406" sldId="262"/>
-        </pc:sldMkLst>
-      </pc:sldChg>
-      <pc:sldChg chg="modSp mod modClrScheme chgLayout">
-        <pc:chgData name="Ryan Daniels" userId="S::rkd43@cam.ac.uk::aaa4fbe9-f474-4140-b10b-5257398ac308" providerId="AD" clId="Web-{66FA9984-1297-DB07-42B1-D9D9D0C443D0}" dt="2025-06-17T14:36:17.194" v="2"/>
-        <pc:sldMkLst>
-          <pc:docMk/>
-          <pc:sldMk cId="455639456" sldId="263"/>
-        </pc:sldMkLst>
-      </pc:sldChg>
-      <pc:sldChg chg="modSp mod modClrScheme chgLayout">
-        <pc:chgData name="Ryan Daniels" userId="S::rkd43@cam.ac.uk::aaa4fbe9-f474-4140-b10b-5257398ac308" providerId="AD" clId="Web-{66FA9984-1297-DB07-42B1-D9D9D0C443D0}" dt="2025-06-17T14:36:17.194" v="2"/>
-        <pc:sldMkLst>
-          <pc:docMk/>
-          <pc:sldMk cId="1409691837" sldId="264"/>
-        </pc:sldMkLst>
-      </pc:sldChg>
-      <pc:sldChg chg="modSp mod modClrScheme chgLayout">
-        <pc:chgData name="Ryan Daniels" userId="S::rkd43@cam.ac.uk::aaa4fbe9-f474-4140-b10b-5257398ac308" providerId="AD" clId="Web-{66FA9984-1297-DB07-42B1-D9D9D0C443D0}" dt="2025-06-17T14:36:17.194" v="2"/>
-        <pc:sldMkLst>
-          <pc:docMk/>
-          <pc:sldMk cId="1834275082" sldId="265"/>
-        </pc:sldMkLst>
-      </pc:sldChg>
-      <pc:sldChg chg="modSp mod modClrScheme chgLayout">
-        <pc:chgData name="Ryan Daniels" userId="S::rkd43@cam.ac.uk::aaa4fbe9-f474-4140-b10b-5257398ac308" providerId="AD" clId="Web-{66FA9984-1297-DB07-42B1-D9D9D0C443D0}" dt="2025-06-17T14:36:17.194" v="2"/>
-        <pc:sldMkLst>
-          <pc:docMk/>
-          <pc:sldMk cId="1865729139" sldId="266"/>
-        </pc:sldMkLst>
-      </pc:sldChg>
-      <pc:sldMasterChg chg="del delSldLayout">
-        <pc:chgData name="Ryan Daniels" userId="S::rkd43@cam.ac.uk::aaa4fbe9-f474-4140-b10b-5257398ac308" providerId="AD" clId="Web-{66FA9984-1297-DB07-42B1-D9D9D0C443D0}" dt="2025-06-17T14:36:07.271" v="0"/>
-        <pc:sldMasterMkLst>
-          <pc:docMk/>
-          <pc:sldMasterMk cId="2460954070" sldId="2147483660"/>
-        </pc:sldMasterMkLst>
-        <pc:sldLayoutChg chg="del">
-          <pc:chgData name="Ryan Daniels" userId="S::rkd43@cam.ac.uk::aaa4fbe9-f474-4140-b10b-5257398ac308" providerId="AD" clId="Web-{66FA9984-1297-DB07-42B1-D9D9D0C443D0}" dt="2025-06-17T14:36:07.271" v="0"/>
-          <pc:sldLayoutMkLst>
-            <pc:docMk/>
-            <pc:sldMasterMk cId="2460954070" sldId="2147483660"/>
-            <pc:sldLayoutMk cId="2385387890" sldId="2147483661"/>
-          </pc:sldLayoutMkLst>
-        </pc:sldLayoutChg>
-        <pc:sldLayoutChg chg="del">
-          <pc:chgData name="Ryan Daniels" userId="S::rkd43@cam.ac.uk::aaa4fbe9-f474-4140-b10b-5257398ac308" providerId="AD" clId="Web-{66FA9984-1297-DB07-42B1-D9D9D0C443D0}" dt="2025-06-17T14:36:07.271" v="0"/>
-          <pc:sldLayoutMkLst>
-            <pc:docMk/>
-            <pc:sldMasterMk cId="2460954070" sldId="2147483660"/>
-            <pc:sldLayoutMk cId="949138452" sldId="2147483662"/>
-          </pc:sldLayoutMkLst>
-        </pc:sldLayoutChg>
-        <pc:sldLayoutChg chg="del">
-          <pc:chgData name="Ryan Daniels" userId="S::rkd43@cam.ac.uk::aaa4fbe9-f474-4140-b10b-5257398ac308" providerId="AD" clId="Web-{66FA9984-1297-DB07-42B1-D9D9D0C443D0}" dt="2025-06-17T14:36:07.271" v="0"/>
-          <pc:sldLayoutMkLst>
-            <pc:docMk/>
-            <pc:sldMasterMk cId="2460954070" sldId="2147483660"/>
-            <pc:sldLayoutMk cId="2591524520" sldId="2147483663"/>
-          </pc:sldLayoutMkLst>
-        </pc:sldLayoutChg>
-        <pc:sldLayoutChg chg="del">
-          <pc:chgData name="Ryan Daniels" userId="S::rkd43@cam.ac.uk::aaa4fbe9-f474-4140-b10b-5257398ac308" providerId="AD" clId="Web-{66FA9984-1297-DB07-42B1-D9D9D0C443D0}" dt="2025-06-17T14:36:07.271" v="0"/>
-          <pc:sldLayoutMkLst>
-            <pc:docMk/>
-            <pc:sldMasterMk cId="2460954070" sldId="2147483660"/>
-            <pc:sldLayoutMk cId="1203092039" sldId="2147483664"/>
-          </pc:sldLayoutMkLst>
-        </pc:sldLayoutChg>
-        <pc:sldLayoutChg chg="del">
-          <pc:chgData name="Ryan Daniels" userId="S::rkd43@cam.ac.uk::aaa4fbe9-f474-4140-b10b-5257398ac308" providerId="AD" clId="Web-{66FA9984-1297-DB07-42B1-D9D9D0C443D0}" dt="2025-06-17T14:36:07.271" v="0"/>
-          <pc:sldLayoutMkLst>
-            <pc:docMk/>
-            <pc:sldMasterMk cId="2460954070" sldId="2147483660"/>
-            <pc:sldLayoutMk cId="3733172339" sldId="2147483665"/>
-          </pc:sldLayoutMkLst>
-        </pc:sldLayoutChg>
-        <pc:sldLayoutChg chg="del">
-          <pc:chgData name="Ryan Daniels" userId="S::rkd43@cam.ac.uk::aaa4fbe9-f474-4140-b10b-5257398ac308" providerId="AD" clId="Web-{66FA9984-1297-DB07-42B1-D9D9D0C443D0}" dt="2025-06-17T14:36:07.271" v="0"/>
-          <pc:sldLayoutMkLst>
-            <pc:docMk/>
-            <pc:sldMasterMk cId="2460954070" sldId="2147483660"/>
-            <pc:sldLayoutMk cId="3210312558" sldId="2147483666"/>
-          </pc:sldLayoutMkLst>
-        </pc:sldLayoutChg>
-        <pc:sldLayoutChg chg="del">
-          <pc:chgData name="Ryan Daniels" userId="S::rkd43@cam.ac.uk::aaa4fbe9-f474-4140-b10b-5257398ac308" providerId="AD" clId="Web-{66FA9984-1297-DB07-42B1-D9D9D0C443D0}" dt="2025-06-17T14:36:07.271" v="0"/>
-          <pc:sldLayoutMkLst>
-            <pc:docMk/>
-            <pc:sldMasterMk cId="2460954070" sldId="2147483660"/>
-            <pc:sldLayoutMk cId="3146388984" sldId="2147483667"/>
-          </pc:sldLayoutMkLst>
-        </pc:sldLayoutChg>
-        <pc:sldLayoutChg chg="del">
-          <pc:chgData name="Ryan Daniels" userId="S::rkd43@cam.ac.uk::aaa4fbe9-f474-4140-b10b-5257398ac308" providerId="AD" clId="Web-{66FA9984-1297-DB07-42B1-D9D9D0C443D0}" dt="2025-06-17T14:36:07.271" v="0"/>
-          <pc:sldLayoutMkLst>
-            <pc:docMk/>
-            <pc:sldMasterMk cId="2460954070" sldId="2147483660"/>
-            <pc:sldLayoutMk cId="3171841454" sldId="2147483668"/>
-          </pc:sldLayoutMkLst>
-        </pc:sldLayoutChg>
-        <pc:sldLayoutChg chg="del">
-          <pc:chgData name="Ryan Daniels" userId="S::rkd43@cam.ac.uk::aaa4fbe9-f474-4140-b10b-5257398ac308" providerId="AD" clId="Web-{66FA9984-1297-DB07-42B1-D9D9D0C443D0}" dt="2025-06-17T14:36:07.271" v="0"/>
-          <pc:sldLayoutMkLst>
-            <pc:docMk/>
-            <pc:sldMasterMk cId="2460954070" sldId="2147483660"/>
-            <pc:sldLayoutMk cId="1718958274" sldId="2147483669"/>
-          </pc:sldLayoutMkLst>
-        </pc:sldLayoutChg>
-        <pc:sldLayoutChg chg="del">
-          <pc:chgData name="Ryan Daniels" userId="S::rkd43@cam.ac.uk::aaa4fbe9-f474-4140-b10b-5257398ac308" providerId="AD" clId="Web-{66FA9984-1297-DB07-42B1-D9D9D0C443D0}" dt="2025-06-17T14:36:07.271" v="0"/>
-          <pc:sldLayoutMkLst>
-            <pc:docMk/>
-            <pc:sldMasterMk cId="2460954070" sldId="2147483660"/>
-            <pc:sldLayoutMk cId="2202905451" sldId="2147483670"/>
-          </pc:sldLayoutMkLst>
-        </pc:sldLayoutChg>
-        <pc:sldLayoutChg chg="del">
-          <pc:chgData name="Ryan Daniels" userId="S::rkd43@cam.ac.uk::aaa4fbe9-f474-4140-b10b-5257398ac308" providerId="AD" clId="Web-{66FA9984-1297-DB07-42B1-D9D9D0C443D0}" dt="2025-06-17T14:36:07.271" v="0"/>
-          <pc:sldLayoutMkLst>
-            <pc:docMk/>
-            <pc:sldMasterMk cId="2460954070" sldId="2147483660"/>
-            <pc:sldLayoutMk cId="3479445657" sldId="2147483671"/>
-          </pc:sldLayoutMkLst>
-        </pc:sldLayoutChg>
-      </pc:sldMasterChg>
-      <pc:sldMasterChg chg="add del addSldLayout delSldLayout modSldLayout">
-        <pc:chgData name="Ryan Daniels" userId="S::rkd43@cam.ac.uk::aaa4fbe9-f474-4140-b10b-5257398ac308" providerId="AD" clId="Web-{66FA9984-1297-DB07-42B1-D9D9D0C443D0}" dt="2025-06-17T14:36:15.241" v="1"/>
-        <pc:sldMasterMkLst>
-          <pc:docMk/>
-          <pc:sldMasterMk cId="2055110940" sldId="2147483672"/>
-        </pc:sldMasterMkLst>
-        <pc:sldLayoutChg chg="add del mod replId">
-          <pc:chgData name="Ryan Daniels" userId="S::rkd43@cam.ac.uk::aaa4fbe9-f474-4140-b10b-5257398ac308" providerId="AD" clId="Web-{66FA9984-1297-DB07-42B1-D9D9D0C443D0}" dt="2025-06-17T14:36:15.241" v="1"/>
-          <pc:sldLayoutMkLst>
-            <pc:docMk/>
-            <pc:sldMasterMk cId="2055110940" sldId="2147483672"/>
-            <pc:sldLayoutMk cId="2729814945" sldId="2147483673"/>
-          </pc:sldLayoutMkLst>
-        </pc:sldLayoutChg>
-        <pc:sldLayoutChg chg="add del mod replId">
-          <pc:chgData name="Ryan Daniels" userId="S::rkd43@cam.ac.uk::aaa4fbe9-f474-4140-b10b-5257398ac308" providerId="AD" clId="Web-{66FA9984-1297-DB07-42B1-D9D9D0C443D0}" dt="2025-06-17T14:36:15.241" v="1"/>
-          <pc:sldLayoutMkLst>
-            <pc:docMk/>
-            <pc:sldMasterMk cId="2055110940" sldId="2147483672"/>
-            <pc:sldLayoutMk cId="4186517850" sldId="2147483674"/>
-          </pc:sldLayoutMkLst>
-        </pc:sldLayoutChg>
-        <pc:sldLayoutChg chg="add del mod replId">
-          <pc:chgData name="Ryan Daniels" userId="S::rkd43@cam.ac.uk::aaa4fbe9-f474-4140-b10b-5257398ac308" providerId="AD" clId="Web-{66FA9984-1297-DB07-42B1-D9D9D0C443D0}" dt="2025-06-17T14:36:15.241" v="1"/>
-          <pc:sldLayoutMkLst>
-            <pc:docMk/>
-            <pc:sldMasterMk cId="2055110940" sldId="2147483672"/>
-            <pc:sldLayoutMk cId="4073447601" sldId="2147483675"/>
-          </pc:sldLayoutMkLst>
-        </pc:sldLayoutChg>
-        <pc:sldLayoutChg chg="add del mod replId">
-          <pc:chgData name="Ryan Daniels" userId="S::rkd43@cam.ac.uk::aaa4fbe9-f474-4140-b10b-5257398ac308" providerId="AD" clId="Web-{66FA9984-1297-DB07-42B1-D9D9D0C443D0}" dt="2025-06-17T14:36:15.241" v="1"/>
-          <pc:sldLayoutMkLst>
-            <pc:docMk/>
-            <pc:sldMasterMk cId="2055110940" sldId="2147483672"/>
-            <pc:sldLayoutMk cId="689555587" sldId="2147483676"/>
-          </pc:sldLayoutMkLst>
-        </pc:sldLayoutChg>
-        <pc:sldLayoutChg chg="add del mod replId">
-          <pc:chgData name="Ryan Daniels" userId="S::rkd43@cam.ac.uk::aaa4fbe9-f474-4140-b10b-5257398ac308" providerId="AD" clId="Web-{66FA9984-1297-DB07-42B1-D9D9D0C443D0}" dt="2025-06-17T14:36:15.241" v="1"/>
-          <pc:sldLayoutMkLst>
-            <pc:docMk/>
-            <pc:sldMasterMk cId="2055110940" sldId="2147483672"/>
-            <pc:sldLayoutMk cId="1250712085" sldId="2147483677"/>
-          </pc:sldLayoutMkLst>
-        </pc:sldLayoutChg>
-        <pc:sldLayoutChg chg="add del mod replId">
-          <pc:chgData name="Ryan Daniels" userId="S::rkd43@cam.ac.uk::aaa4fbe9-f474-4140-b10b-5257398ac308" providerId="AD" clId="Web-{66FA9984-1297-DB07-42B1-D9D9D0C443D0}" dt="2025-06-17T14:36:15.241" v="1"/>
-          <pc:sldLayoutMkLst>
-            <pc:docMk/>
-            <pc:sldMasterMk cId="2055110940" sldId="2147483672"/>
-            <pc:sldLayoutMk cId="1908829154" sldId="2147483678"/>
-          </pc:sldLayoutMkLst>
-        </pc:sldLayoutChg>
-        <pc:sldLayoutChg chg="add del mod replId">
-          <pc:chgData name="Ryan Daniels" userId="S::rkd43@cam.ac.uk::aaa4fbe9-f474-4140-b10b-5257398ac308" providerId="AD" clId="Web-{66FA9984-1297-DB07-42B1-D9D9D0C443D0}" dt="2025-06-17T14:36:15.241" v="1"/>
-          <pc:sldLayoutMkLst>
-            <pc:docMk/>
-            <pc:sldMasterMk cId="2055110940" sldId="2147483672"/>
-            <pc:sldLayoutMk cId="732328988" sldId="2147483679"/>
-          </pc:sldLayoutMkLst>
-        </pc:sldLayoutChg>
-        <pc:sldLayoutChg chg="add del mod replId">
-          <pc:chgData name="Ryan Daniels" userId="S::rkd43@cam.ac.uk::aaa4fbe9-f474-4140-b10b-5257398ac308" providerId="AD" clId="Web-{66FA9984-1297-DB07-42B1-D9D9D0C443D0}" dt="2025-06-17T14:36:15.241" v="1"/>
-          <pc:sldLayoutMkLst>
-            <pc:docMk/>
-            <pc:sldMasterMk cId="2055110940" sldId="2147483672"/>
-            <pc:sldLayoutMk cId="2243372565" sldId="2147483680"/>
-          </pc:sldLayoutMkLst>
-        </pc:sldLayoutChg>
-        <pc:sldLayoutChg chg="add del mod replId">
-          <pc:chgData name="Ryan Daniels" userId="S::rkd43@cam.ac.uk::aaa4fbe9-f474-4140-b10b-5257398ac308" providerId="AD" clId="Web-{66FA9984-1297-DB07-42B1-D9D9D0C443D0}" dt="2025-06-17T14:36:15.241" v="1"/>
-          <pc:sldLayoutMkLst>
-            <pc:docMk/>
-            <pc:sldMasterMk cId="2055110940" sldId="2147483672"/>
-            <pc:sldLayoutMk cId="3155551187" sldId="2147483681"/>
-          </pc:sldLayoutMkLst>
-        </pc:sldLayoutChg>
-        <pc:sldLayoutChg chg="add del mod replId">
-          <pc:chgData name="Ryan Daniels" userId="S::rkd43@cam.ac.uk::aaa4fbe9-f474-4140-b10b-5257398ac308" providerId="AD" clId="Web-{66FA9984-1297-DB07-42B1-D9D9D0C443D0}" dt="2025-06-17T14:36:15.241" v="1"/>
-          <pc:sldLayoutMkLst>
-            <pc:docMk/>
-            <pc:sldMasterMk cId="2055110940" sldId="2147483672"/>
-            <pc:sldLayoutMk cId="951678835" sldId="2147483682"/>
-          </pc:sldLayoutMkLst>
-        </pc:sldLayoutChg>
-        <pc:sldLayoutChg chg="add del mod replId">
-          <pc:chgData name="Ryan Daniels" userId="S::rkd43@cam.ac.uk::aaa4fbe9-f474-4140-b10b-5257398ac308" providerId="AD" clId="Web-{66FA9984-1297-DB07-42B1-D9D9D0C443D0}" dt="2025-06-17T14:36:15.241" v="1"/>
-          <pc:sldLayoutMkLst>
-            <pc:docMk/>
-            <pc:sldMasterMk cId="2055110940" sldId="2147483672"/>
-            <pc:sldLayoutMk cId="2767807970" sldId="2147483683"/>
-          </pc:sldLayoutMkLst>
-        </pc:sldLayoutChg>
-      </pc:sldMasterChg>
-      <pc:sldMasterChg chg="add del addSldLayout delSldLayout modSldLayout">
-        <pc:chgData name="Ryan Daniels" userId="S::rkd43@cam.ac.uk::aaa4fbe9-f474-4140-b10b-5257398ac308" providerId="AD" clId="Web-{66FA9984-1297-DB07-42B1-D9D9D0C443D0}" dt="2025-06-17T14:36:17.194" v="2"/>
-        <pc:sldMasterMkLst>
-          <pc:docMk/>
-          <pc:sldMasterMk cId="819875423" sldId="2147483684"/>
-        </pc:sldMasterMkLst>
-        <pc:sldLayoutChg chg="add del mod replId">
-          <pc:chgData name="Ryan Daniels" userId="S::rkd43@cam.ac.uk::aaa4fbe9-f474-4140-b10b-5257398ac308" providerId="AD" clId="Web-{66FA9984-1297-DB07-42B1-D9D9D0C443D0}" dt="2025-06-17T14:36:17.194" v="2"/>
-          <pc:sldLayoutMkLst>
-            <pc:docMk/>
-            <pc:sldMasterMk cId="819875423" sldId="2147483684"/>
-            <pc:sldLayoutMk cId="2773126515" sldId="2147483685"/>
-          </pc:sldLayoutMkLst>
-        </pc:sldLayoutChg>
-        <pc:sldLayoutChg chg="add del mod replId">
-          <pc:chgData name="Ryan Daniels" userId="S::rkd43@cam.ac.uk::aaa4fbe9-f474-4140-b10b-5257398ac308" providerId="AD" clId="Web-{66FA9984-1297-DB07-42B1-D9D9D0C443D0}" dt="2025-06-17T14:36:17.194" v="2"/>
-          <pc:sldLayoutMkLst>
-            <pc:docMk/>
-            <pc:sldMasterMk cId="819875423" sldId="2147483684"/>
-            <pc:sldLayoutMk cId="2530099027" sldId="2147483686"/>
-          </pc:sldLayoutMkLst>
-        </pc:sldLayoutChg>
-        <pc:sldLayoutChg chg="add del mod replId">
-          <pc:chgData name="Ryan Daniels" userId="S::rkd43@cam.ac.uk::aaa4fbe9-f474-4140-b10b-5257398ac308" providerId="AD" clId="Web-{66FA9984-1297-DB07-42B1-D9D9D0C443D0}" dt="2025-06-17T14:36:17.194" v="2"/>
-          <pc:sldLayoutMkLst>
-            <pc:docMk/>
-            <pc:sldMasterMk cId="819875423" sldId="2147483684"/>
-            <pc:sldLayoutMk cId="568452127" sldId="2147483687"/>
-          </pc:sldLayoutMkLst>
-        </pc:sldLayoutChg>
-        <pc:sldLayoutChg chg="add del mod replId">
-          <pc:chgData name="Ryan Daniels" userId="S::rkd43@cam.ac.uk::aaa4fbe9-f474-4140-b10b-5257398ac308" providerId="AD" clId="Web-{66FA9984-1297-DB07-42B1-D9D9D0C443D0}" dt="2025-06-17T14:36:17.194" v="2"/>
-          <pc:sldLayoutMkLst>
-            <pc:docMk/>
-            <pc:sldMasterMk cId="819875423" sldId="2147483684"/>
-            <pc:sldLayoutMk cId="1940790982" sldId="2147483688"/>
-          </pc:sldLayoutMkLst>
-        </pc:sldLayoutChg>
-        <pc:sldLayoutChg chg="add del mod replId">
-          <pc:chgData name="Ryan Daniels" userId="S::rkd43@cam.ac.uk::aaa4fbe9-f474-4140-b10b-5257398ac308" providerId="AD" clId="Web-{66FA9984-1297-DB07-42B1-D9D9D0C443D0}" dt="2025-06-17T14:36:17.194" v="2"/>
-          <pc:sldLayoutMkLst>
-            <pc:docMk/>
-            <pc:sldMasterMk cId="819875423" sldId="2147483684"/>
-            <pc:sldLayoutMk cId="3104327962" sldId="2147483689"/>
-          </pc:sldLayoutMkLst>
-        </pc:sldLayoutChg>
-        <pc:sldLayoutChg chg="add del mod replId">
-          <pc:chgData name="Ryan Daniels" userId="S::rkd43@cam.ac.uk::aaa4fbe9-f474-4140-b10b-5257398ac308" providerId="AD" clId="Web-{66FA9984-1297-DB07-42B1-D9D9D0C443D0}" dt="2025-06-17T14:36:17.194" v="2"/>
-          <pc:sldLayoutMkLst>
-            <pc:docMk/>
-            <pc:sldMasterMk cId="819875423" sldId="2147483684"/>
-            <pc:sldLayoutMk cId="170188911" sldId="2147483690"/>
-          </pc:sldLayoutMkLst>
-        </pc:sldLayoutChg>
-        <pc:sldLayoutChg chg="add del mod replId">
-          <pc:chgData name="Ryan Daniels" userId="S::rkd43@cam.ac.uk::aaa4fbe9-f474-4140-b10b-5257398ac308" providerId="AD" clId="Web-{66FA9984-1297-DB07-42B1-D9D9D0C443D0}" dt="2025-06-17T14:36:17.194" v="2"/>
-          <pc:sldLayoutMkLst>
-            <pc:docMk/>
-            <pc:sldMasterMk cId="819875423" sldId="2147483684"/>
-            <pc:sldLayoutMk cId="4201638502" sldId="2147483691"/>
-          </pc:sldLayoutMkLst>
-        </pc:sldLayoutChg>
-        <pc:sldLayoutChg chg="add del mod replId">
-          <pc:chgData name="Ryan Daniels" userId="S::rkd43@cam.ac.uk::aaa4fbe9-f474-4140-b10b-5257398ac308" providerId="AD" clId="Web-{66FA9984-1297-DB07-42B1-D9D9D0C443D0}" dt="2025-06-17T14:36:17.194" v="2"/>
-          <pc:sldLayoutMkLst>
-            <pc:docMk/>
-            <pc:sldMasterMk cId="819875423" sldId="2147483684"/>
-            <pc:sldLayoutMk cId="2989150192" sldId="2147483692"/>
-          </pc:sldLayoutMkLst>
-        </pc:sldLayoutChg>
-        <pc:sldLayoutChg chg="add del mod replId">
-          <pc:chgData name="Ryan Daniels" userId="S::rkd43@cam.ac.uk::aaa4fbe9-f474-4140-b10b-5257398ac308" providerId="AD" clId="Web-{66FA9984-1297-DB07-42B1-D9D9D0C443D0}" dt="2025-06-17T14:36:17.194" v="2"/>
-          <pc:sldLayoutMkLst>
-            <pc:docMk/>
-            <pc:sldMasterMk cId="819875423" sldId="2147483684"/>
-            <pc:sldLayoutMk cId="791824927" sldId="2147483693"/>
-          </pc:sldLayoutMkLst>
-        </pc:sldLayoutChg>
-        <pc:sldLayoutChg chg="add del mod replId">
-          <pc:chgData name="Ryan Daniels" userId="S::rkd43@cam.ac.uk::aaa4fbe9-f474-4140-b10b-5257398ac308" providerId="AD" clId="Web-{66FA9984-1297-DB07-42B1-D9D9D0C443D0}" dt="2025-06-17T14:36:17.194" v="2"/>
-          <pc:sldLayoutMkLst>
-            <pc:docMk/>
-            <pc:sldMasterMk cId="819875423" sldId="2147483684"/>
-            <pc:sldLayoutMk cId="3516590136" sldId="2147483694"/>
-          </pc:sldLayoutMkLst>
-        </pc:sldLayoutChg>
-        <pc:sldLayoutChg chg="add del mod replId">
-          <pc:chgData name="Ryan Daniels" userId="S::rkd43@cam.ac.uk::aaa4fbe9-f474-4140-b10b-5257398ac308" providerId="AD" clId="Web-{66FA9984-1297-DB07-42B1-D9D9D0C443D0}" dt="2025-06-17T14:36:17.194" v="2"/>
-          <pc:sldLayoutMkLst>
-            <pc:docMk/>
-            <pc:sldMasterMk cId="819875423" sldId="2147483684"/>
-            <pc:sldLayoutMk cId="122760176" sldId="2147483695"/>
-          </pc:sldLayoutMkLst>
-        </pc:sldLayoutChg>
-      </pc:sldMasterChg>
-      <pc:sldMasterChg chg="add addSldLayout modSldLayout">
-        <pc:chgData name="Ryan Daniels" userId="S::rkd43@cam.ac.uk::aaa4fbe9-f474-4140-b10b-5257398ac308" providerId="AD" clId="Web-{66FA9984-1297-DB07-42B1-D9D9D0C443D0}" dt="2025-06-17T14:36:17.194" v="2"/>
-        <pc:sldMasterMkLst>
-          <pc:docMk/>
-          <pc:sldMasterMk cId="2566986982" sldId="2147483696"/>
-        </pc:sldMasterMkLst>
-        <pc:sldLayoutChg chg="add mod replId">
-          <pc:chgData name="Ryan Daniels" userId="S::rkd43@cam.ac.uk::aaa4fbe9-f474-4140-b10b-5257398ac308" providerId="AD" clId="Web-{66FA9984-1297-DB07-42B1-D9D9D0C443D0}" dt="2025-06-17T14:36:17.194" v="2"/>
-          <pc:sldLayoutMkLst>
-            <pc:docMk/>
-            <pc:sldMasterMk cId="2566986982" sldId="2147483696"/>
-            <pc:sldLayoutMk cId="2661217146" sldId="2147483697"/>
-          </pc:sldLayoutMkLst>
-        </pc:sldLayoutChg>
-        <pc:sldLayoutChg chg="add mod replId">
-          <pc:chgData name="Ryan Daniels" userId="S::rkd43@cam.ac.uk::aaa4fbe9-f474-4140-b10b-5257398ac308" providerId="AD" clId="Web-{66FA9984-1297-DB07-42B1-D9D9D0C443D0}" dt="2025-06-17T14:36:17.194" v="2"/>
-          <pc:sldLayoutMkLst>
-            <pc:docMk/>
-            <pc:sldMasterMk cId="2566986982" sldId="2147483696"/>
-            <pc:sldLayoutMk cId="1221414830" sldId="2147483698"/>
-          </pc:sldLayoutMkLst>
-        </pc:sldLayoutChg>
-        <pc:sldLayoutChg chg="add mod replId">
-          <pc:chgData name="Ryan Daniels" userId="S::rkd43@cam.ac.uk::aaa4fbe9-f474-4140-b10b-5257398ac308" providerId="AD" clId="Web-{66FA9984-1297-DB07-42B1-D9D9D0C443D0}" dt="2025-06-17T14:36:17.194" v="2"/>
-          <pc:sldLayoutMkLst>
-            <pc:docMk/>
-            <pc:sldMasterMk cId="2566986982" sldId="2147483696"/>
-            <pc:sldLayoutMk cId="115500601" sldId="2147483699"/>
-          </pc:sldLayoutMkLst>
-        </pc:sldLayoutChg>
-        <pc:sldLayoutChg chg="add mod replId">
-          <pc:chgData name="Ryan Daniels" userId="S::rkd43@cam.ac.uk::aaa4fbe9-f474-4140-b10b-5257398ac308" providerId="AD" clId="Web-{66FA9984-1297-DB07-42B1-D9D9D0C443D0}" dt="2025-06-17T14:36:17.194" v="2"/>
-          <pc:sldLayoutMkLst>
-            <pc:docMk/>
-            <pc:sldMasterMk cId="2566986982" sldId="2147483696"/>
-            <pc:sldLayoutMk cId="210809345" sldId="2147483700"/>
-          </pc:sldLayoutMkLst>
-        </pc:sldLayoutChg>
-        <pc:sldLayoutChg chg="add mod replId">
-          <pc:chgData name="Ryan Daniels" userId="S::rkd43@cam.ac.uk::aaa4fbe9-f474-4140-b10b-5257398ac308" providerId="AD" clId="Web-{66FA9984-1297-DB07-42B1-D9D9D0C443D0}" dt="2025-06-17T14:36:17.194" v="2"/>
-          <pc:sldLayoutMkLst>
-            <pc:docMk/>
-            <pc:sldMasterMk cId="2566986982" sldId="2147483696"/>
-            <pc:sldLayoutMk cId="1764180412" sldId="2147483701"/>
-          </pc:sldLayoutMkLst>
-        </pc:sldLayoutChg>
-        <pc:sldLayoutChg chg="add mod replId">
-          <pc:chgData name="Ryan Daniels" userId="S::rkd43@cam.ac.uk::aaa4fbe9-f474-4140-b10b-5257398ac308" providerId="AD" clId="Web-{66FA9984-1297-DB07-42B1-D9D9D0C443D0}" dt="2025-06-17T14:36:17.194" v="2"/>
-          <pc:sldLayoutMkLst>
-            <pc:docMk/>
-            <pc:sldMasterMk cId="2566986982" sldId="2147483696"/>
-            <pc:sldLayoutMk cId="137392330" sldId="2147483702"/>
-          </pc:sldLayoutMkLst>
-        </pc:sldLayoutChg>
-        <pc:sldLayoutChg chg="add mod replId">
-          <pc:chgData name="Ryan Daniels" userId="S::rkd43@cam.ac.uk::aaa4fbe9-f474-4140-b10b-5257398ac308" providerId="AD" clId="Web-{66FA9984-1297-DB07-42B1-D9D9D0C443D0}" dt="2025-06-17T14:36:17.194" v="2"/>
-          <pc:sldLayoutMkLst>
-            <pc:docMk/>
-            <pc:sldMasterMk cId="2566986982" sldId="2147483696"/>
-            <pc:sldLayoutMk cId="299030596" sldId="2147483703"/>
-          </pc:sldLayoutMkLst>
-        </pc:sldLayoutChg>
-        <pc:sldLayoutChg chg="add mod replId">
-          <pc:chgData name="Ryan Daniels" userId="S::rkd43@cam.ac.uk::aaa4fbe9-f474-4140-b10b-5257398ac308" providerId="AD" clId="Web-{66FA9984-1297-DB07-42B1-D9D9D0C443D0}" dt="2025-06-17T14:36:17.194" v="2"/>
-          <pc:sldLayoutMkLst>
-            <pc:docMk/>
-            <pc:sldMasterMk cId="2566986982" sldId="2147483696"/>
-            <pc:sldLayoutMk cId="4118341341" sldId="2147483704"/>
-          </pc:sldLayoutMkLst>
-        </pc:sldLayoutChg>
-        <pc:sldLayoutChg chg="add mod replId">
-          <pc:chgData name="Ryan Daniels" userId="S::rkd43@cam.ac.uk::aaa4fbe9-f474-4140-b10b-5257398ac308" providerId="AD" clId="Web-{66FA9984-1297-DB07-42B1-D9D9D0C443D0}" dt="2025-06-17T14:36:17.194" v="2"/>
-          <pc:sldLayoutMkLst>
-            <pc:docMk/>
-            <pc:sldMasterMk cId="2566986982" sldId="2147483696"/>
-            <pc:sldLayoutMk cId="450196488" sldId="2147483705"/>
-          </pc:sldLayoutMkLst>
-        </pc:sldLayoutChg>
-        <pc:sldLayoutChg chg="add mod replId">
-          <pc:chgData name="Ryan Daniels" userId="S::rkd43@cam.ac.uk::aaa4fbe9-f474-4140-b10b-5257398ac308" providerId="AD" clId="Web-{66FA9984-1297-DB07-42B1-D9D9D0C443D0}" dt="2025-06-17T14:36:17.194" v="2"/>
-          <pc:sldLayoutMkLst>
-            <pc:docMk/>
-            <pc:sldMasterMk cId="2566986982" sldId="2147483696"/>
-            <pc:sldLayoutMk cId="4136549470" sldId="2147483706"/>
-          </pc:sldLayoutMkLst>
-        </pc:sldLayoutChg>
-        <pc:sldLayoutChg chg="add mod replId">
-          <pc:chgData name="Ryan Daniels" userId="S::rkd43@cam.ac.uk::aaa4fbe9-f474-4140-b10b-5257398ac308" providerId="AD" clId="Web-{66FA9984-1297-DB07-42B1-D9D9D0C443D0}" dt="2025-06-17T14:36:17.194" v="2"/>
-          <pc:sldLayoutMkLst>
-            <pc:docMk/>
-            <pc:sldMasterMk cId="2566986982" sldId="2147483696"/>
-            <pc:sldLayoutMk cId="1035061791" sldId="2147483707"/>
-          </pc:sldLayoutMkLst>
-        </pc:sldLayoutChg>
-      </pc:sldMasterChg>
-    </pc:docChg>
-  </pc:docChgLst>
-  <pc:docChgLst>
-    <pc:chgData name="Ryan Daniels" userId="S::rkd43@cam.ac.uk::aaa4fbe9-f474-4140-b10b-5257398ac308" providerId="AD" clId="Web-{7298A54E-B507-B0BE-DC4E-587E9C54C5F7}"/>
-    <pc:docChg chg="addSld delSld modSld sldOrd">
-      <pc:chgData name="Ryan Daniels" userId="S::rkd43@cam.ac.uk::aaa4fbe9-f474-4140-b10b-5257398ac308" providerId="AD" clId="Web-{7298A54E-B507-B0BE-DC4E-587E9C54C5F7}" dt="2025-06-13T11:29:10.661" v="1105" actId="20577"/>
-      <pc:docMkLst>
-        <pc:docMk/>
-      </pc:docMkLst>
-      <pc:sldChg chg="modSp">
-        <pc:chgData name="Ryan Daniels" userId="S::rkd43@cam.ac.uk::aaa4fbe9-f474-4140-b10b-5257398ac308" providerId="AD" clId="Web-{7298A54E-B507-B0BE-DC4E-587E9C54C5F7}" dt="2025-06-13T09:17:11.819" v="28" actId="20577"/>
-        <pc:sldMkLst>
-          <pc:docMk/>
-          <pc:sldMk cId="109857222" sldId="256"/>
-        </pc:sldMkLst>
-      </pc:sldChg>
-      <pc:sldChg chg="modSp new">
-        <pc:chgData name="Ryan Daniels" userId="S::rkd43@cam.ac.uk::aaa4fbe9-f474-4140-b10b-5257398ac308" providerId="AD" clId="Web-{7298A54E-B507-B0BE-DC4E-587E9C54C5F7}" dt="2025-06-13T10:35:51.102" v="1023" actId="20577"/>
-        <pc:sldMkLst>
-          <pc:docMk/>
-          <pc:sldMk cId="2776984732" sldId="257"/>
-        </pc:sldMkLst>
-      </pc:sldChg>
-      <pc:sldChg chg="new del">
-        <pc:chgData name="Ryan Daniels" userId="S::rkd43@cam.ac.uk::aaa4fbe9-f474-4140-b10b-5257398ac308" providerId="AD" clId="Web-{7298A54E-B507-B0BE-DC4E-587E9C54C5F7}" dt="2025-06-13T08:58:39.236" v="1"/>
-        <pc:sldMkLst>
-          <pc:docMk/>
-          <pc:sldMk cId="2979638681" sldId="257"/>
-        </pc:sldMkLst>
-      </pc:sldChg>
-      <pc:sldChg chg="addSp delSp modSp new addAnim delAnim modAnim">
-        <pc:chgData name="Ryan Daniels" userId="S::rkd43@cam.ac.uk::aaa4fbe9-f474-4140-b10b-5257398ac308" providerId="AD" clId="Web-{7298A54E-B507-B0BE-DC4E-587E9C54C5F7}" dt="2025-06-13T10:39:00.999" v="1079"/>
-        <pc:sldMkLst>
-          <pc:docMk/>
-          <pc:sldMk cId="3802117303" sldId="258"/>
-        </pc:sldMkLst>
-      </pc:sldChg>
-      <pc:sldChg chg="addSp modSp new addAnim modAnim">
-        <pc:chgData name="Ryan Daniels" userId="S::rkd43@cam.ac.uk::aaa4fbe9-f474-4140-b10b-5257398ac308" providerId="AD" clId="Web-{7298A54E-B507-B0BE-DC4E-587E9C54C5F7}" dt="2025-06-13T09:53:42.852" v="326"/>
-        <pc:sldMkLst>
-          <pc:docMk/>
-          <pc:sldMk cId="570589333" sldId="259"/>
-        </pc:sldMkLst>
-      </pc:sldChg>
-      <pc:sldChg chg="add del replId">
-        <pc:chgData name="Ryan Daniels" userId="S::rkd43@cam.ac.uk::aaa4fbe9-f474-4140-b10b-5257398ac308" providerId="AD" clId="Web-{7298A54E-B507-B0BE-DC4E-587E9C54C5F7}" dt="2025-06-13T09:43:26.877" v="225"/>
-        <pc:sldMkLst>
-          <pc:docMk/>
-          <pc:sldMk cId="2653770474" sldId="259"/>
-        </pc:sldMkLst>
-      </pc:sldChg>
-      <pc:sldChg chg="add del replId">
-        <pc:chgData name="Ryan Daniels" userId="S::rkd43@cam.ac.uk::aaa4fbe9-f474-4140-b10b-5257398ac308" providerId="AD" clId="Web-{7298A54E-B507-B0BE-DC4E-587E9C54C5F7}" dt="2025-06-13T09:43:25.908" v="224"/>
-        <pc:sldMkLst>
-          <pc:docMk/>
-          <pc:sldMk cId="2614785151" sldId="260"/>
-        </pc:sldMkLst>
-      </pc:sldChg>
-      <pc:sldChg chg="modSp new addAnim modNotes">
-        <pc:chgData name="Ryan Daniels" userId="S::rkd43@cam.ac.uk::aaa4fbe9-f474-4140-b10b-5257398ac308" providerId="AD" clId="Web-{7298A54E-B507-B0BE-DC4E-587E9C54C5F7}" dt="2025-06-13T10:08:50.229" v="560" actId="20577"/>
-        <pc:sldMkLst>
-          <pc:docMk/>
-          <pc:sldMk cId="3408820217" sldId="260"/>
-        </pc:sldMkLst>
-      </pc:sldChg>
-      <pc:sldChg chg="modSp new">
-        <pc:chgData name="Ryan Daniels" userId="S::rkd43@cam.ac.uk::aaa4fbe9-f474-4140-b10b-5257398ac308" providerId="AD" clId="Web-{7298A54E-B507-B0BE-DC4E-587E9C54C5F7}" dt="2025-06-13T10:05:30.581" v="480" actId="20577"/>
-        <pc:sldMkLst>
-          <pc:docMk/>
-          <pc:sldMk cId="3011003677" sldId="261"/>
-        </pc:sldMkLst>
-      </pc:sldChg>
-      <pc:sldChg chg="modSp new">
-        <pc:chgData name="Ryan Daniels" userId="S::rkd43@cam.ac.uk::aaa4fbe9-f474-4140-b10b-5257398ac308" providerId="AD" clId="Web-{7298A54E-B507-B0BE-DC4E-587E9C54C5F7}" dt="2025-06-13T10:08:41.854" v="559" actId="20577"/>
-        <pc:sldMkLst>
-          <pc:docMk/>
-          <pc:sldMk cId="2828243406" sldId="262"/>
-        </pc:sldMkLst>
-      </pc:sldChg>
-      <pc:sldChg chg="addSp delSp modSp new">
-        <pc:chgData name="Ryan Daniels" userId="S::rkd43@cam.ac.uk::aaa4fbe9-f474-4140-b10b-5257398ac308" providerId="AD" clId="Web-{7298A54E-B507-B0BE-DC4E-587E9C54C5F7}" dt="2025-06-13T10:30:40.903" v="902"/>
-        <pc:sldMkLst>
-          <pc:docMk/>
-          <pc:sldMk cId="455639456" sldId="263"/>
-        </pc:sldMkLst>
-      </pc:sldChg>
-      <pc:sldChg chg="modSp new">
-        <pc:chgData name="Ryan Daniels" userId="S::rkd43@cam.ac.uk::aaa4fbe9-f474-4140-b10b-5257398ac308" providerId="AD" clId="Web-{7298A54E-B507-B0BE-DC4E-587E9C54C5F7}" dt="2025-06-13T10:32:45.220" v="933" actId="20577"/>
-        <pc:sldMkLst>
-          <pc:docMk/>
-          <pc:sldMk cId="1409691837" sldId="264"/>
-        </pc:sldMkLst>
-      </pc:sldChg>
-      <pc:sldChg chg="modSp new ord addAnim">
-        <pc:chgData name="Ryan Daniels" userId="S::rkd43@cam.ac.uk::aaa4fbe9-f474-4140-b10b-5257398ac308" providerId="AD" clId="Web-{7298A54E-B507-B0BE-DC4E-587E9C54C5F7}" dt="2025-06-13T10:35:15.835" v="1020"/>
-        <pc:sldMkLst>
-          <pc:docMk/>
-          <pc:sldMk cId="1834275082" sldId="265"/>
-        </pc:sldMkLst>
-      </pc:sldChg>
-      <pc:sldChg chg="modSp new">
-        <pc:chgData name="Ryan Daniels" userId="S::rkd43@cam.ac.uk::aaa4fbe9-f474-4140-b10b-5257398ac308" providerId="AD" clId="Web-{7298A54E-B507-B0BE-DC4E-587E9C54C5F7}" dt="2025-06-13T11:29:10.661" v="1105" actId="20577"/>
-        <pc:sldMkLst>
-          <pc:docMk/>
-          <pc:sldMk cId="1865729139" sldId="266"/>
-        </pc:sldMkLst>
-      </pc:sldChg>
-    </pc:docChg>
-  </pc:docChgLst>
-  <pc:docChgLst>
-    <pc:chgData name="Ryan Daniels" userId="S::rkd43@cam.ac.uk::aaa4fbe9-f474-4140-b10b-5257398ac308" providerId="AD" clId="Web-{5F819EE1-08D4-61C3-7B5E-537D82061095}"/>
-    <pc:docChg chg="modSld">
-      <pc:chgData name="Ryan Daniels" userId="S::rkd43@cam.ac.uk::aaa4fbe9-f474-4140-b10b-5257398ac308" providerId="AD" clId="Web-{5F819EE1-08D4-61C3-7B5E-537D82061095}" dt="2025-07-30T16:57:24.556" v="1" actId="1076"/>
-      <pc:docMkLst>
-        <pc:docMk/>
-      </pc:docMkLst>
-      <pc:sldChg chg="modSp">
-        <pc:chgData name="Ryan Daniels" userId="S::rkd43@cam.ac.uk::aaa4fbe9-f474-4140-b10b-5257398ac308" providerId="AD" clId="Web-{5F819EE1-08D4-61C3-7B5E-537D82061095}" dt="2025-07-30T16:57:24.556" v="1" actId="1076"/>
-        <pc:sldMkLst>
-          <pc:docMk/>
-          <pc:sldMk cId="570589333" sldId="259"/>
-        </pc:sldMkLst>
-      </pc:sldChg>
     </pc:docChg>
   </pc:docChgLst>
   <pc:docChgLst>
@@ -880,45 +229,6 @@
       <pc:docMkLst>
         <pc:docMk/>
       </pc:docMkLst>
-      <pc:sldChg chg="addSp delSp modSp new del">
-        <pc:chgData name="Ryan Daniels" userId="S::rkd43@cam.ac.uk::aaa4fbe9-f474-4140-b10b-5257398ac308" providerId="AD" clId="Web-{319BC8FD-C455-96ED-2801-3920832F5F55}" dt="2025-09-13T08:47:10.864" v="13"/>
-        <pc:sldMkLst>
-          <pc:docMk/>
-          <pc:sldMk cId="3362305236" sldId="275"/>
-        </pc:sldMkLst>
-        <pc:spChg chg="mod">
-          <ac:chgData name="Ryan Daniels" userId="S::rkd43@cam.ac.uk::aaa4fbe9-f474-4140-b10b-5257398ac308" providerId="AD" clId="Web-{319BC8FD-C455-96ED-2801-3920832F5F55}" dt="2025-09-13T08:44:45.221" v="3" actId="20577"/>
-          <ac:spMkLst>
-            <pc:docMk/>
-            <pc:sldMk cId="3362305236" sldId="275"/>
-            <ac:spMk id="2" creationId="{2363C0B7-87FB-4E91-7E38-615E8140109D}"/>
-          </ac:spMkLst>
-        </pc:spChg>
-        <pc:spChg chg="del mod">
-          <ac:chgData name="Ryan Daniels" userId="S::rkd43@cam.ac.uk::aaa4fbe9-f474-4140-b10b-5257398ac308" providerId="AD" clId="Web-{319BC8FD-C455-96ED-2801-3920832F5F55}" dt="2025-09-13T08:45:20.488" v="5"/>
-          <ac:spMkLst>
-            <pc:docMk/>
-            <pc:sldMk cId="3362305236" sldId="275"/>
-            <ac:spMk id="3" creationId="{9BB34098-0379-9296-50B4-0B1330CB6587}"/>
-          </ac:spMkLst>
-        </pc:spChg>
-        <pc:picChg chg="add mod">
-          <ac:chgData name="Ryan Daniels" userId="S::rkd43@cam.ac.uk::aaa4fbe9-f474-4140-b10b-5257398ac308" providerId="AD" clId="Web-{319BC8FD-C455-96ED-2801-3920832F5F55}" dt="2025-09-13T08:45:31.644" v="9" actId="14100"/>
-          <ac:picMkLst>
-            <pc:docMk/>
-            <pc:sldMk cId="3362305236" sldId="275"/>
-            <ac:picMk id="4" creationId="{C0857385-4310-2005-51E1-570F5346EA66}"/>
-          </ac:picMkLst>
-        </pc:picChg>
-        <pc:picChg chg="add mod">
-          <ac:chgData name="Ryan Daniels" userId="S::rkd43@cam.ac.uk::aaa4fbe9-f474-4140-b10b-5257398ac308" providerId="AD" clId="Web-{319BC8FD-C455-96ED-2801-3920832F5F55}" dt="2025-09-13T08:46:41.082" v="12" actId="1076"/>
-          <ac:picMkLst>
-            <pc:docMk/>
-            <pc:sldMk cId="3362305236" sldId="275"/>
-            <ac:picMk id="5" creationId="{47861EA1-675B-8F61-3B01-F3C485559C4E}"/>
-          </ac:picMkLst>
-        </pc:picChg>
-      </pc:sldChg>
     </pc:docChg>
   </pc:docChgLst>
 </pc:chgInfo>
@@ -1005,7 +315,7 @@
           </a:lstStyle>
           <a:p>
             <a:fld id="{2DE082D9-00CE-4FDC-82D3-FDE16CD37225}" type="datetimeFigureOut">
-              <a:t>9/13/2025</a:t>
+              <a:t>9/30/2025</a:t>
             </a:fld>
             <a:endParaRPr lang="en-US"/>
           </a:p>
@@ -1502,7 +812,7 @@
           <a:p>
             <a:fld id="{C764DE79-268F-4C1A-8933-263129D2AF90}" type="datetimeFigureOut">
               <a:rPr lang="en-US" dirty="0"/>
-              <a:t>9/13/2025</a:t>
+              <a:t>9/30/2025</a:t>
             </a:fld>
             <a:endParaRPr lang="en-US" dirty="0"/>
           </a:p>
@@ -1670,7 +980,7 @@
           <a:p>
             <a:fld id="{C764DE79-268F-4C1A-8933-263129D2AF90}" type="datetimeFigureOut">
               <a:rPr lang="en-US" dirty="0"/>
-              <a:t>9/13/2025</a:t>
+              <a:t>9/30/2025</a:t>
             </a:fld>
             <a:endParaRPr lang="en-US" dirty="0"/>
           </a:p>
@@ -1848,7 +1158,7 @@
           <a:p>
             <a:fld id="{C764DE79-268F-4C1A-8933-263129D2AF90}" type="datetimeFigureOut">
               <a:rPr lang="en-US" dirty="0"/>
-              <a:t>9/13/2025</a:t>
+              <a:t>9/30/2025</a:t>
             </a:fld>
             <a:endParaRPr lang="en-US" dirty="0"/>
           </a:p>
@@ -2016,7 +1326,7 @@
           <a:p>
             <a:fld id="{C764DE79-268F-4C1A-8933-263129D2AF90}" type="datetimeFigureOut">
               <a:rPr lang="en-US" dirty="0"/>
-              <a:t>9/13/2025</a:t>
+              <a:t>9/30/2025</a:t>
             </a:fld>
             <a:endParaRPr lang="en-US" dirty="0"/>
           </a:p>
@@ -2261,7 +1571,7 @@
           <a:p>
             <a:fld id="{C764DE79-268F-4C1A-8933-263129D2AF90}" type="datetimeFigureOut">
               <a:rPr lang="en-US" dirty="0"/>
-              <a:t>9/13/2025</a:t>
+              <a:t>9/30/2025</a:t>
             </a:fld>
             <a:endParaRPr lang="en-US" dirty="0"/>
           </a:p>
@@ -2490,7 +1800,7 @@
           <a:p>
             <a:fld id="{C764DE79-268F-4C1A-8933-263129D2AF90}" type="datetimeFigureOut">
               <a:rPr lang="en-US" dirty="0"/>
-              <a:t>9/13/2025</a:t>
+              <a:t>9/30/2025</a:t>
             </a:fld>
             <a:endParaRPr lang="en-US" dirty="0"/>
           </a:p>
@@ -2854,7 +2164,7 @@
           <a:p>
             <a:fld id="{C764DE79-268F-4C1A-8933-263129D2AF90}" type="datetimeFigureOut">
               <a:rPr lang="en-US" dirty="0"/>
-              <a:t>9/13/2025</a:t>
+              <a:t>9/30/2025</a:t>
             </a:fld>
             <a:endParaRPr lang="en-US" dirty="0"/>
           </a:p>
@@ -2971,7 +2281,7 @@
           <a:p>
             <a:fld id="{C764DE79-268F-4C1A-8933-263129D2AF90}" type="datetimeFigureOut">
               <a:rPr lang="en-US" dirty="0"/>
-              <a:t>9/13/2025</a:t>
+              <a:t>9/30/2025</a:t>
             </a:fld>
             <a:endParaRPr lang="en-US" dirty="0"/>
           </a:p>
@@ -3066,7 +2376,7 @@
           <a:p>
             <a:fld id="{C764DE79-268F-4C1A-8933-263129D2AF90}" type="datetimeFigureOut">
               <a:rPr lang="en-US" dirty="0"/>
-              <a:t>9/13/2025</a:t>
+              <a:t>9/30/2025</a:t>
             </a:fld>
             <a:endParaRPr lang="en-US" dirty="0"/>
           </a:p>
@@ -3341,7 +2651,7 @@
           <a:p>
             <a:fld id="{C764DE79-268F-4C1A-8933-263129D2AF90}" type="datetimeFigureOut">
               <a:rPr lang="en-US" dirty="0"/>
-              <a:t>9/13/2025</a:t>
+              <a:t>9/30/2025</a:t>
             </a:fld>
             <a:endParaRPr lang="en-US" dirty="0"/>
           </a:p>
@@ -3593,7 +2903,7 @@
           <a:p>
             <a:fld id="{C764DE79-268F-4C1A-8933-263129D2AF90}" type="datetimeFigureOut">
               <a:rPr lang="en-US" dirty="0"/>
-              <a:t>9/13/2025</a:t>
+              <a:t>9/30/2025</a:t>
             </a:fld>
             <a:endParaRPr lang="en-US" dirty="0"/>
           </a:p>
@@ -3804,7 +3114,7 @@
           <a:p>
             <a:fld id="{C764DE79-268F-4C1A-8933-263129D2AF90}" type="datetimeFigureOut">
               <a:rPr lang="en-US" dirty="0"/>
-              <a:t>9/13/2025</a:t>
+              <a:t>9/30/2025</a:t>
             </a:fld>
             <a:endParaRPr lang="en-US" dirty="0"/>
           </a:p>
@@ -6265,15 +5575,6 @@
             </a:pPr>
             <a:endParaRPr lang="en-US" dirty="0"/>
           </a:p>
-          <a:p>
-            <a:pPr marL="0" indent="0">
-              <a:buNone/>
-            </a:pPr>
-            <a:r>
-              <a:rPr lang="en-US" dirty="0"/>
-              <a:t>And we'll come back to this idea again, and again...</a:t>
-            </a:r>
-          </a:p>
         </p:txBody>
       </p:sp>
     </p:spTree>
@@ -6323,55 +5624,6 @@
                                           <p:spTgt spid="3">
                                             <p:txEl>
                                               <p:pRg st="2" end="2"/>
-                                            </p:txEl>
-                                          </p:spTgt>
-                                        </p:tgtEl>
-                                        <p:attrNameLst>
-                                          <p:attrName>style.visibility</p:attrName>
-                                        </p:attrNameLst>
-                                      </p:cBhvr>
-                                      <p:to>
-                                        <p:strVal val="visible"/>
-                                      </p:to>
-                                    </p:set>
-                                  </p:childTnLst>
-                                </p:cTn>
-                              </p:par>
-                            </p:childTnLst>
-                          </p:cTn>
-                        </p:par>
-                      </p:childTnLst>
-                    </p:cTn>
-                  </p:par>
-                  <p:par>
-                    <p:cTn id="7" fill="hold">
-                      <p:stCondLst>
-                        <p:cond delay="indefinite"/>
-                      </p:stCondLst>
-                      <p:childTnLst>
-                        <p:par>
-                          <p:cTn id="8" fill="hold">
-                            <p:stCondLst>
-                              <p:cond delay="0"/>
-                            </p:stCondLst>
-                            <p:childTnLst>
-                              <p:par>
-                                <p:cTn id="9" presetID="1" presetClass="entr" presetSubtype="0" fill="hold" grpId="0" nodeType="clickEffect">
-                                  <p:stCondLst>
-                                    <p:cond delay="0"/>
-                                  </p:stCondLst>
-                                  <p:childTnLst>
-                                    <p:set>
-                                      <p:cBhvr>
-                                        <p:cTn id="10" dur="1" fill="hold">
-                                          <p:stCondLst>
-                                            <p:cond delay="0"/>
-                                          </p:stCondLst>
-                                        </p:cTn>
-                                        <p:tgtEl>
-                                          <p:spTgt spid="3">
-                                            <p:txEl>
-                                              <p:pRg st="4" end="4"/>
                                             </p:txEl>
                                           </p:spTgt>
                                         </p:tgtEl>

--- a/slides/1-intro.pptx
+++ b/slides/1-intro.pptx
@@ -315,7 +315,7 @@
           </a:lstStyle>
           <a:p>
             <a:fld id="{2DE082D9-00CE-4FDC-82D3-FDE16CD37225}" type="datetimeFigureOut">
-              <a:t>9/30/2025</a:t>
+              <a:t>4/30/26</a:t>
             </a:fld>
             <a:endParaRPr lang="en-US"/>
           </a:p>
@@ -812,7 +812,7 @@
           <a:p>
             <a:fld id="{C764DE79-268F-4C1A-8933-263129D2AF90}" type="datetimeFigureOut">
               <a:rPr lang="en-US" dirty="0"/>
-              <a:t>9/30/2025</a:t>
+              <a:t>4/30/26</a:t>
             </a:fld>
             <a:endParaRPr lang="en-US" dirty="0"/>
           </a:p>
@@ -980,7 +980,7 @@
           <a:p>
             <a:fld id="{C764DE79-268F-4C1A-8933-263129D2AF90}" type="datetimeFigureOut">
               <a:rPr lang="en-US" dirty="0"/>
-              <a:t>9/30/2025</a:t>
+              <a:t>4/30/26</a:t>
             </a:fld>
             <a:endParaRPr lang="en-US" dirty="0"/>
           </a:p>
@@ -1158,7 +1158,7 @@
           <a:p>
             <a:fld id="{C764DE79-268F-4C1A-8933-263129D2AF90}" type="datetimeFigureOut">
               <a:rPr lang="en-US" dirty="0"/>
-              <a:t>9/30/2025</a:t>
+              <a:t>4/30/26</a:t>
             </a:fld>
             <a:endParaRPr lang="en-US" dirty="0"/>
           </a:p>
@@ -1326,7 +1326,7 @@
           <a:p>
             <a:fld id="{C764DE79-268F-4C1A-8933-263129D2AF90}" type="datetimeFigureOut">
               <a:rPr lang="en-US" dirty="0"/>
-              <a:t>9/30/2025</a:t>
+              <a:t>4/30/26</a:t>
             </a:fld>
             <a:endParaRPr lang="en-US" dirty="0"/>
           </a:p>
@@ -1571,7 +1571,7 @@
           <a:p>
             <a:fld id="{C764DE79-268F-4C1A-8933-263129D2AF90}" type="datetimeFigureOut">
               <a:rPr lang="en-US" dirty="0"/>
-              <a:t>9/30/2025</a:t>
+              <a:t>4/30/26</a:t>
             </a:fld>
             <a:endParaRPr lang="en-US" dirty="0"/>
           </a:p>
@@ -1800,7 +1800,7 @@
           <a:p>
             <a:fld id="{C764DE79-268F-4C1A-8933-263129D2AF90}" type="datetimeFigureOut">
               <a:rPr lang="en-US" dirty="0"/>
-              <a:t>9/30/2025</a:t>
+              <a:t>4/30/26</a:t>
             </a:fld>
             <a:endParaRPr lang="en-US" dirty="0"/>
           </a:p>
@@ -2164,7 +2164,7 @@
           <a:p>
             <a:fld id="{C764DE79-268F-4C1A-8933-263129D2AF90}" type="datetimeFigureOut">
               <a:rPr lang="en-US" dirty="0"/>
-              <a:t>9/30/2025</a:t>
+              <a:t>4/30/26</a:t>
             </a:fld>
             <a:endParaRPr lang="en-US" dirty="0"/>
           </a:p>
@@ -2281,7 +2281,7 @@
           <a:p>
             <a:fld id="{C764DE79-268F-4C1A-8933-263129D2AF90}" type="datetimeFigureOut">
               <a:rPr lang="en-US" dirty="0"/>
-              <a:t>9/30/2025</a:t>
+              <a:t>4/30/26</a:t>
             </a:fld>
             <a:endParaRPr lang="en-US" dirty="0"/>
           </a:p>
@@ -2376,7 +2376,7 @@
           <a:p>
             <a:fld id="{C764DE79-268F-4C1A-8933-263129D2AF90}" type="datetimeFigureOut">
               <a:rPr lang="en-US" dirty="0"/>
-              <a:t>9/30/2025</a:t>
+              <a:t>4/30/26</a:t>
             </a:fld>
             <a:endParaRPr lang="en-US" dirty="0"/>
           </a:p>
@@ -2651,7 +2651,7 @@
           <a:p>
             <a:fld id="{C764DE79-268F-4C1A-8933-263129D2AF90}" type="datetimeFigureOut">
               <a:rPr lang="en-US" dirty="0"/>
-              <a:t>9/30/2025</a:t>
+              <a:t>4/30/26</a:t>
             </a:fld>
             <a:endParaRPr lang="en-US" dirty="0"/>
           </a:p>
@@ -2903,7 +2903,7 @@
           <a:p>
             <a:fld id="{C764DE79-268F-4C1A-8933-263129D2AF90}" type="datetimeFigureOut">
               <a:rPr lang="en-US" dirty="0"/>
-              <a:t>9/30/2025</a:t>
+              <a:t>4/30/26</a:t>
             </a:fld>
             <a:endParaRPr lang="en-US" dirty="0"/>
           </a:p>
@@ -3114,7 +3114,7 @@
           <a:p>
             <a:fld id="{C764DE79-268F-4C1A-8933-263129D2AF90}" type="datetimeFigureOut">
               <a:rPr lang="en-US" dirty="0"/>
-              <a:t>9/30/2025</a:t>
+              <a:t>4/30/26</a:t>
             </a:fld>
             <a:endParaRPr lang="en-US" dirty="0"/>
           </a:p>
@@ -6035,33 +6035,33 @@
           <a:custGeom>
             <a:avLst/>
             <a:gdLst>
-              <a:gd name="connsiteX0" fmla="*/ 0 w 457200"/>
-              <a:gd name="connsiteY0" fmla="*/ 228600 h 457200"/>
-              <a:gd name="connsiteX1" fmla="*/ 228600 w 457200"/>
-              <a:gd name="connsiteY1" fmla="*/ 0 h 457200"/>
-              <a:gd name="connsiteX2" fmla="*/ 457200 w 457200"/>
-              <a:gd name="connsiteY2" fmla="*/ 228600 h 457200"/>
-              <a:gd name="connsiteX3" fmla="*/ 228600 w 457200"/>
-              <a:gd name="connsiteY3" fmla="*/ 457200 h 457200"/>
-              <a:gd name="connsiteX4" fmla="*/ 0 w 457200"/>
-              <a:gd name="connsiteY4" fmla="*/ 228600 h 457200"/>
+              <a:gd name="csX0" fmla="*/ 0 w 457200"/>
+              <a:gd name="csY0" fmla="*/ 228600 h 457200"/>
+              <a:gd name="csX1" fmla="*/ 228600 w 457200"/>
+              <a:gd name="csY1" fmla="*/ 0 h 457200"/>
+              <a:gd name="csX2" fmla="*/ 457200 w 457200"/>
+              <a:gd name="csY2" fmla="*/ 228600 h 457200"/>
+              <a:gd name="csX3" fmla="*/ 228600 w 457200"/>
+              <a:gd name="csY3" fmla="*/ 457200 h 457200"/>
+              <a:gd name="csX4" fmla="*/ 0 w 457200"/>
+              <a:gd name="csY4" fmla="*/ 228600 h 457200"/>
             </a:gdLst>
             <a:ahLst/>
             <a:cxnLst>
               <a:cxn ang="0">
-                <a:pos x="connsiteX0" y="connsiteY0"/>
-              </a:cxn>
-              <a:cxn ang="0">
-                <a:pos x="connsiteX1" y="connsiteY1"/>
-              </a:cxn>
-              <a:cxn ang="0">
-                <a:pos x="connsiteX2" y="connsiteY2"/>
-              </a:cxn>
-              <a:cxn ang="0">
-                <a:pos x="connsiteX3" y="connsiteY3"/>
-              </a:cxn>
-              <a:cxn ang="0">
-                <a:pos x="connsiteX4" y="connsiteY4"/>
+                <a:pos x="csX0" y="csY0"/>
+              </a:cxn>
+              <a:cxn ang="0">
+                <a:pos x="csX1" y="csY1"/>
+              </a:cxn>
+              <a:cxn ang="0">
+                <a:pos x="csX2" y="csY2"/>
+              </a:cxn>
+              <a:cxn ang="0">
+                <a:pos x="csX3" y="csY3"/>
+              </a:cxn>
+              <a:cxn ang="0">
+                <a:pos x="csX4" y="csY4"/>
               </a:cxn>
             </a:cxnLst>
             <a:rect l="l" t="t" r="r" b="b"/>
@@ -6302,33 +6302,33 @@
           <a:custGeom>
             <a:avLst/>
             <a:gdLst>
-              <a:gd name="connsiteX0" fmla="*/ 0 w 457200"/>
-              <a:gd name="connsiteY0" fmla="*/ 228600 h 457200"/>
-              <a:gd name="connsiteX1" fmla="*/ 228600 w 457200"/>
-              <a:gd name="connsiteY1" fmla="*/ 0 h 457200"/>
-              <a:gd name="connsiteX2" fmla="*/ 457200 w 457200"/>
-              <a:gd name="connsiteY2" fmla="*/ 228600 h 457200"/>
-              <a:gd name="connsiteX3" fmla="*/ 228600 w 457200"/>
-              <a:gd name="connsiteY3" fmla="*/ 457200 h 457200"/>
-              <a:gd name="connsiteX4" fmla="*/ 0 w 457200"/>
-              <a:gd name="connsiteY4" fmla="*/ 228600 h 457200"/>
+              <a:gd name="csX0" fmla="*/ 0 w 457200"/>
+              <a:gd name="csY0" fmla="*/ 228600 h 457200"/>
+              <a:gd name="csX1" fmla="*/ 228600 w 457200"/>
+              <a:gd name="csY1" fmla="*/ 0 h 457200"/>
+              <a:gd name="csX2" fmla="*/ 457200 w 457200"/>
+              <a:gd name="csY2" fmla="*/ 228600 h 457200"/>
+              <a:gd name="csX3" fmla="*/ 228600 w 457200"/>
+              <a:gd name="csY3" fmla="*/ 457200 h 457200"/>
+              <a:gd name="csX4" fmla="*/ 0 w 457200"/>
+              <a:gd name="csY4" fmla="*/ 228600 h 457200"/>
             </a:gdLst>
             <a:ahLst/>
             <a:cxnLst>
               <a:cxn ang="0">
-                <a:pos x="connsiteX0" y="connsiteY0"/>
-              </a:cxn>
-              <a:cxn ang="0">
-                <a:pos x="connsiteX1" y="connsiteY1"/>
-              </a:cxn>
-              <a:cxn ang="0">
-                <a:pos x="connsiteX2" y="connsiteY2"/>
-              </a:cxn>
-              <a:cxn ang="0">
-                <a:pos x="connsiteX3" y="connsiteY3"/>
-              </a:cxn>
-              <a:cxn ang="0">
-                <a:pos x="connsiteX4" y="connsiteY4"/>
+                <a:pos x="csX0" y="csY0"/>
+              </a:cxn>
+              <a:cxn ang="0">
+                <a:pos x="csX1" y="csY1"/>
+              </a:cxn>
+              <a:cxn ang="0">
+                <a:pos x="csX2" y="csY2"/>
+              </a:cxn>
+              <a:cxn ang="0">
+                <a:pos x="csX3" y="csY3"/>
+              </a:cxn>
+              <a:cxn ang="0">
+                <a:pos x="csX4" y="csY4"/>
               </a:cxn>
             </a:cxnLst>
             <a:rect l="l" t="t" r="r" b="b"/>
@@ -6448,33 +6448,33 @@
           <a:custGeom>
             <a:avLst/>
             <a:gdLst>
-              <a:gd name="connsiteX0" fmla="*/ 0 w 457200"/>
-              <a:gd name="connsiteY0" fmla="*/ 228600 h 457200"/>
-              <a:gd name="connsiteX1" fmla="*/ 228600 w 457200"/>
-              <a:gd name="connsiteY1" fmla="*/ 0 h 457200"/>
-              <a:gd name="connsiteX2" fmla="*/ 457200 w 457200"/>
-              <a:gd name="connsiteY2" fmla="*/ 228600 h 457200"/>
-              <a:gd name="connsiteX3" fmla="*/ 228600 w 457200"/>
-              <a:gd name="connsiteY3" fmla="*/ 457200 h 457200"/>
-              <a:gd name="connsiteX4" fmla="*/ 0 w 457200"/>
-              <a:gd name="connsiteY4" fmla="*/ 228600 h 457200"/>
+              <a:gd name="csX0" fmla="*/ 0 w 457200"/>
+              <a:gd name="csY0" fmla="*/ 228600 h 457200"/>
+              <a:gd name="csX1" fmla="*/ 228600 w 457200"/>
+              <a:gd name="csY1" fmla="*/ 0 h 457200"/>
+              <a:gd name="csX2" fmla="*/ 457200 w 457200"/>
+              <a:gd name="csY2" fmla="*/ 228600 h 457200"/>
+              <a:gd name="csX3" fmla="*/ 228600 w 457200"/>
+              <a:gd name="csY3" fmla="*/ 457200 h 457200"/>
+              <a:gd name="csX4" fmla="*/ 0 w 457200"/>
+              <a:gd name="csY4" fmla="*/ 228600 h 457200"/>
             </a:gdLst>
             <a:ahLst/>
             <a:cxnLst>
               <a:cxn ang="0">
-                <a:pos x="connsiteX0" y="connsiteY0"/>
-              </a:cxn>
-              <a:cxn ang="0">
-                <a:pos x="connsiteX1" y="connsiteY1"/>
-              </a:cxn>
-              <a:cxn ang="0">
-                <a:pos x="connsiteX2" y="connsiteY2"/>
-              </a:cxn>
-              <a:cxn ang="0">
-                <a:pos x="connsiteX3" y="connsiteY3"/>
-              </a:cxn>
-              <a:cxn ang="0">
-                <a:pos x="connsiteX4" y="connsiteY4"/>
+                <a:pos x="csX0" y="csY0"/>
+              </a:cxn>
+              <a:cxn ang="0">
+                <a:pos x="csX1" y="csY1"/>
+              </a:cxn>
+              <a:cxn ang="0">
+                <a:pos x="csX2" y="csY2"/>
+              </a:cxn>
+              <a:cxn ang="0">
+                <a:pos x="csX3" y="csY3"/>
+              </a:cxn>
+              <a:cxn ang="0">
+                <a:pos x="csX4" y="csY4"/>
               </a:cxn>
             </a:cxnLst>
             <a:rect l="l" t="t" r="r" b="b"/>
@@ -6594,33 +6594,33 @@
           <a:custGeom>
             <a:avLst/>
             <a:gdLst>
-              <a:gd name="connsiteX0" fmla="*/ 0 w 457200"/>
-              <a:gd name="connsiteY0" fmla="*/ 228600 h 457200"/>
-              <a:gd name="connsiteX1" fmla="*/ 228600 w 457200"/>
-              <a:gd name="connsiteY1" fmla="*/ 0 h 457200"/>
-              <a:gd name="connsiteX2" fmla="*/ 457200 w 457200"/>
-              <a:gd name="connsiteY2" fmla="*/ 228600 h 457200"/>
-              <a:gd name="connsiteX3" fmla="*/ 228600 w 457200"/>
-              <a:gd name="connsiteY3" fmla="*/ 457200 h 457200"/>
-              <a:gd name="connsiteX4" fmla="*/ 0 w 457200"/>
-              <a:gd name="connsiteY4" fmla="*/ 228600 h 457200"/>
+              <a:gd name="csX0" fmla="*/ 0 w 457200"/>
+              <a:gd name="csY0" fmla="*/ 228600 h 457200"/>
+              <a:gd name="csX1" fmla="*/ 228600 w 457200"/>
+              <a:gd name="csY1" fmla="*/ 0 h 457200"/>
+              <a:gd name="csX2" fmla="*/ 457200 w 457200"/>
+              <a:gd name="csY2" fmla="*/ 228600 h 457200"/>
+              <a:gd name="csX3" fmla="*/ 228600 w 457200"/>
+              <a:gd name="csY3" fmla="*/ 457200 h 457200"/>
+              <a:gd name="csX4" fmla="*/ 0 w 457200"/>
+              <a:gd name="csY4" fmla="*/ 228600 h 457200"/>
             </a:gdLst>
             <a:ahLst/>
             <a:cxnLst>
               <a:cxn ang="0">
-                <a:pos x="connsiteX0" y="connsiteY0"/>
-              </a:cxn>
-              <a:cxn ang="0">
-                <a:pos x="connsiteX1" y="connsiteY1"/>
-              </a:cxn>
-              <a:cxn ang="0">
-                <a:pos x="connsiteX2" y="connsiteY2"/>
-              </a:cxn>
-              <a:cxn ang="0">
-                <a:pos x="connsiteX3" y="connsiteY3"/>
-              </a:cxn>
-              <a:cxn ang="0">
-                <a:pos x="connsiteX4" y="connsiteY4"/>
+                <a:pos x="csX0" y="csY0"/>
+              </a:cxn>
+              <a:cxn ang="0">
+                <a:pos x="csX1" y="csY1"/>
+              </a:cxn>
+              <a:cxn ang="0">
+                <a:pos x="csX2" y="csY2"/>
+              </a:cxn>
+              <a:cxn ang="0">
+                <a:pos x="csX3" y="csY3"/>
+              </a:cxn>
+              <a:cxn ang="0">
+                <a:pos x="csX4" y="csY4"/>
               </a:cxn>
             </a:cxnLst>
             <a:rect l="l" t="t" r="r" b="b"/>
@@ -6740,33 +6740,33 @@
           <a:custGeom>
             <a:avLst/>
             <a:gdLst>
-              <a:gd name="connsiteX0" fmla="*/ 0 w 457200"/>
-              <a:gd name="connsiteY0" fmla="*/ 228600 h 457200"/>
-              <a:gd name="connsiteX1" fmla="*/ 228600 w 457200"/>
-              <a:gd name="connsiteY1" fmla="*/ 0 h 457200"/>
-              <a:gd name="connsiteX2" fmla="*/ 457200 w 457200"/>
-              <a:gd name="connsiteY2" fmla="*/ 228600 h 457200"/>
-              <a:gd name="connsiteX3" fmla="*/ 228600 w 457200"/>
-              <a:gd name="connsiteY3" fmla="*/ 457200 h 457200"/>
-              <a:gd name="connsiteX4" fmla="*/ 0 w 457200"/>
-              <a:gd name="connsiteY4" fmla="*/ 228600 h 457200"/>
+              <a:gd name="csX0" fmla="*/ 0 w 457200"/>
+              <a:gd name="csY0" fmla="*/ 228600 h 457200"/>
+              <a:gd name="csX1" fmla="*/ 228600 w 457200"/>
+              <a:gd name="csY1" fmla="*/ 0 h 457200"/>
+              <a:gd name="csX2" fmla="*/ 457200 w 457200"/>
+              <a:gd name="csY2" fmla="*/ 228600 h 457200"/>
+              <a:gd name="csX3" fmla="*/ 228600 w 457200"/>
+              <a:gd name="csY3" fmla="*/ 457200 h 457200"/>
+              <a:gd name="csX4" fmla="*/ 0 w 457200"/>
+              <a:gd name="csY4" fmla="*/ 228600 h 457200"/>
             </a:gdLst>
             <a:ahLst/>
             <a:cxnLst>
               <a:cxn ang="0">
-                <a:pos x="connsiteX0" y="connsiteY0"/>
-              </a:cxn>
-              <a:cxn ang="0">
-                <a:pos x="connsiteX1" y="connsiteY1"/>
-              </a:cxn>
-              <a:cxn ang="0">
-                <a:pos x="connsiteX2" y="connsiteY2"/>
-              </a:cxn>
-              <a:cxn ang="0">
-                <a:pos x="connsiteX3" y="connsiteY3"/>
-              </a:cxn>
-              <a:cxn ang="0">
-                <a:pos x="connsiteX4" y="connsiteY4"/>
+                <a:pos x="csX0" y="csY0"/>
+              </a:cxn>
+              <a:cxn ang="0">
+                <a:pos x="csX1" y="csY1"/>
+              </a:cxn>
+              <a:cxn ang="0">
+                <a:pos x="csX2" y="csY2"/>
+              </a:cxn>
+              <a:cxn ang="0">
+                <a:pos x="csX3" y="csY3"/>
+              </a:cxn>
+              <a:cxn ang="0">
+                <a:pos x="csX4" y="csY4"/>
               </a:cxn>
             </a:cxnLst>
             <a:rect l="l" t="t" r="r" b="b"/>
@@ -6886,33 +6886,33 @@
           <a:custGeom>
             <a:avLst/>
             <a:gdLst>
-              <a:gd name="connsiteX0" fmla="*/ 0 w 457200"/>
-              <a:gd name="connsiteY0" fmla="*/ 228600 h 457200"/>
-              <a:gd name="connsiteX1" fmla="*/ 228600 w 457200"/>
-              <a:gd name="connsiteY1" fmla="*/ 0 h 457200"/>
-              <a:gd name="connsiteX2" fmla="*/ 457200 w 457200"/>
-              <a:gd name="connsiteY2" fmla="*/ 228600 h 457200"/>
-              <a:gd name="connsiteX3" fmla="*/ 228600 w 457200"/>
-              <a:gd name="connsiteY3" fmla="*/ 457200 h 457200"/>
-              <a:gd name="connsiteX4" fmla="*/ 0 w 457200"/>
-              <a:gd name="connsiteY4" fmla="*/ 228600 h 457200"/>
+              <a:gd name="csX0" fmla="*/ 0 w 457200"/>
+              <a:gd name="csY0" fmla="*/ 228600 h 457200"/>
+              <a:gd name="csX1" fmla="*/ 228600 w 457200"/>
+              <a:gd name="csY1" fmla="*/ 0 h 457200"/>
+              <a:gd name="csX2" fmla="*/ 457200 w 457200"/>
+              <a:gd name="csY2" fmla="*/ 228600 h 457200"/>
+              <a:gd name="csX3" fmla="*/ 228600 w 457200"/>
+              <a:gd name="csY3" fmla="*/ 457200 h 457200"/>
+              <a:gd name="csX4" fmla="*/ 0 w 457200"/>
+              <a:gd name="csY4" fmla="*/ 228600 h 457200"/>
             </a:gdLst>
             <a:ahLst/>
             <a:cxnLst>
               <a:cxn ang="0">
-                <a:pos x="connsiteX0" y="connsiteY0"/>
-              </a:cxn>
-              <a:cxn ang="0">
-                <a:pos x="connsiteX1" y="connsiteY1"/>
-              </a:cxn>
-              <a:cxn ang="0">
-                <a:pos x="connsiteX2" y="connsiteY2"/>
-              </a:cxn>
-              <a:cxn ang="0">
-                <a:pos x="connsiteX3" y="connsiteY3"/>
-              </a:cxn>
-              <a:cxn ang="0">
-                <a:pos x="connsiteX4" y="connsiteY4"/>
+                <a:pos x="csX0" y="csY0"/>
+              </a:cxn>
+              <a:cxn ang="0">
+                <a:pos x="csX1" y="csY1"/>
+              </a:cxn>
+              <a:cxn ang="0">
+                <a:pos x="csX2" y="csY2"/>
+              </a:cxn>
+              <a:cxn ang="0">
+                <a:pos x="csX3" y="csY3"/>
+              </a:cxn>
+              <a:cxn ang="0">
+                <a:pos x="csX4" y="csY4"/>
               </a:cxn>
             </a:cxnLst>
             <a:rect l="l" t="t" r="r" b="b"/>
@@ -7032,33 +7032,33 @@
           <a:custGeom>
             <a:avLst/>
             <a:gdLst>
-              <a:gd name="connsiteX0" fmla="*/ 0 w 457200"/>
-              <a:gd name="connsiteY0" fmla="*/ 228600 h 457200"/>
-              <a:gd name="connsiteX1" fmla="*/ 228600 w 457200"/>
-              <a:gd name="connsiteY1" fmla="*/ 0 h 457200"/>
-              <a:gd name="connsiteX2" fmla="*/ 457200 w 457200"/>
-              <a:gd name="connsiteY2" fmla="*/ 228600 h 457200"/>
-              <a:gd name="connsiteX3" fmla="*/ 228600 w 457200"/>
-              <a:gd name="connsiteY3" fmla="*/ 457200 h 457200"/>
-              <a:gd name="connsiteX4" fmla="*/ 0 w 457200"/>
-              <a:gd name="connsiteY4" fmla="*/ 228600 h 457200"/>
+              <a:gd name="csX0" fmla="*/ 0 w 457200"/>
+              <a:gd name="csY0" fmla="*/ 228600 h 457200"/>
+              <a:gd name="csX1" fmla="*/ 228600 w 457200"/>
+              <a:gd name="csY1" fmla="*/ 0 h 457200"/>
+              <a:gd name="csX2" fmla="*/ 457200 w 457200"/>
+              <a:gd name="csY2" fmla="*/ 228600 h 457200"/>
+              <a:gd name="csX3" fmla="*/ 228600 w 457200"/>
+              <a:gd name="csY3" fmla="*/ 457200 h 457200"/>
+              <a:gd name="csX4" fmla="*/ 0 w 457200"/>
+              <a:gd name="csY4" fmla="*/ 228600 h 457200"/>
             </a:gdLst>
             <a:ahLst/>
             <a:cxnLst>
               <a:cxn ang="0">
-                <a:pos x="connsiteX0" y="connsiteY0"/>
-              </a:cxn>
-              <a:cxn ang="0">
-                <a:pos x="connsiteX1" y="connsiteY1"/>
-              </a:cxn>
-              <a:cxn ang="0">
-                <a:pos x="connsiteX2" y="connsiteY2"/>
-              </a:cxn>
-              <a:cxn ang="0">
-                <a:pos x="connsiteX3" y="connsiteY3"/>
-              </a:cxn>
-              <a:cxn ang="0">
-                <a:pos x="connsiteX4" y="connsiteY4"/>
+                <a:pos x="csX0" y="csY0"/>
+              </a:cxn>
+              <a:cxn ang="0">
+                <a:pos x="csX1" y="csY1"/>
+              </a:cxn>
+              <a:cxn ang="0">
+                <a:pos x="csX2" y="csY2"/>
+              </a:cxn>
+              <a:cxn ang="0">
+                <a:pos x="csX3" y="csY3"/>
+              </a:cxn>
+              <a:cxn ang="0">
+                <a:pos x="csX4" y="csY4"/>
               </a:cxn>
             </a:cxnLst>
             <a:rect l="l" t="t" r="r" b="b"/>
@@ -7178,33 +7178,33 @@
           <a:custGeom>
             <a:avLst/>
             <a:gdLst>
-              <a:gd name="connsiteX0" fmla="*/ 0 w 457200"/>
-              <a:gd name="connsiteY0" fmla="*/ 228600 h 457200"/>
-              <a:gd name="connsiteX1" fmla="*/ 228600 w 457200"/>
-              <a:gd name="connsiteY1" fmla="*/ 0 h 457200"/>
-              <a:gd name="connsiteX2" fmla="*/ 457200 w 457200"/>
-              <a:gd name="connsiteY2" fmla="*/ 228600 h 457200"/>
-              <a:gd name="connsiteX3" fmla="*/ 228600 w 457200"/>
-              <a:gd name="connsiteY3" fmla="*/ 457200 h 457200"/>
-              <a:gd name="connsiteX4" fmla="*/ 0 w 457200"/>
-              <a:gd name="connsiteY4" fmla="*/ 228600 h 457200"/>
+              <a:gd name="csX0" fmla="*/ 0 w 457200"/>
+              <a:gd name="csY0" fmla="*/ 228600 h 457200"/>
+              <a:gd name="csX1" fmla="*/ 228600 w 457200"/>
+              <a:gd name="csY1" fmla="*/ 0 h 457200"/>
+              <a:gd name="csX2" fmla="*/ 457200 w 457200"/>
+              <a:gd name="csY2" fmla="*/ 228600 h 457200"/>
+              <a:gd name="csX3" fmla="*/ 228600 w 457200"/>
+              <a:gd name="csY3" fmla="*/ 457200 h 457200"/>
+              <a:gd name="csX4" fmla="*/ 0 w 457200"/>
+              <a:gd name="csY4" fmla="*/ 228600 h 457200"/>
             </a:gdLst>
             <a:ahLst/>
             <a:cxnLst>
               <a:cxn ang="0">
-                <a:pos x="connsiteX0" y="connsiteY0"/>
-              </a:cxn>
-              <a:cxn ang="0">
-                <a:pos x="connsiteX1" y="connsiteY1"/>
-              </a:cxn>
-              <a:cxn ang="0">
-                <a:pos x="connsiteX2" y="connsiteY2"/>
-              </a:cxn>
-              <a:cxn ang="0">
-                <a:pos x="connsiteX3" y="connsiteY3"/>
-              </a:cxn>
-              <a:cxn ang="0">
-                <a:pos x="connsiteX4" y="connsiteY4"/>
+                <a:pos x="csX0" y="csY0"/>
+              </a:cxn>
+              <a:cxn ang="0">
+                <a:pos x="csX1" y="csY1"/>
+              </a:cxn>
+              <a:cxn ang="0">
+                <a:pos x="csX2" y="csY2"/>
+              </a:cxn>
+              <a:cxn ang="0">
+                <a:pos x="csX3" y="csY3"/>
+              </a:cxn>
+              <a:cxn ang="0">
+                <a:pos x="csX4" y="csY4"/>
               </a:cxn>
             </a:cxnLst>
             <a:rect l="l" t="t" r="r" b="b"/>
@@ -7324,63 +7324,63 @@
           <a:custGeom>
             <a:avLst/>
             <a:gdLst>
-              <a:gd name="connsiteX0" fmla="*/ 0 w 2333625"/>
-              <a:gd name="connsiteY0" fmla="*/ 0 h 369332"/>
-              <a:gd name="connsiteX1" fmla="*/ 583406 w 2333625"/>
-              <a:gd name="connsiteY1" fmla="*/ 0 h 369332"/>
-              <a:gd name="connsiteX2" fmla="*/ 1213485 w 2333625"/>
-              <a:gd name="connsiteY2" fmla="*/ 0 h 369332"/>
-              <a:gd name="connsiteX3" fmla="*/ 1773555 w 2333625"/>
-              <a:gd name="connsiteY3" fmla="*/ 0 h 369332"/>
-              <a:gd name="connsiteX4" fmla="*/ 2333625 w 2333625"/>
-              <a:gd name="connsiteY4" fmla="*/ 0 h 369332"/>
-              <a:gd name="connsiteX5" fmla="*/ 2333625 w 2333625"/>
-              <a:gd name="connsiteY5" fmla="*/ 369332 h 369332"/>
-              <a:gd name="connsiteX6" fmla="*/ 1703546 w 2333625"/>
-              <a:gd name="connsiteY6" fmla="*/ 369332 h 369332"/>
-              <a:gd name="connsiteX7" fmla="*/ 1143476 w 2333625"/>
-              <a:gd name="connsiteY7" fmla="*/ 369332 h 369332"/>
-              <a:gd name="connsiteX8" fmla="*/ 583406 w 2333625"/>
-              <a:gd name="connsiteY8" fmla="*/ 369332 h 369332"/>
-              <a:gd name="connsiteX9" fmla="*/ 0 w 2333625"/>
-              <a:gd name="connsiteY9" fmla="*/ 369332 h 369332"/>
-              <a:gd name="connsiteX10" fmla="*/ 0 w 2333625"/>
-              <a:gd name="connsiteY10" fmla="*/ 0 h 369332"/>
+              <a:gd name="csX0" fmla="*/ 0 w 2333625"/>
+              <a:gd name="csY0" fmla="*/ 0 h 369332"/>
+              <a:gd name="csX1" fmla="*/ 583406 w 2333625"/>
+              <a:gd name="csY1" fmla="*/ 0 h 369332"/>
+              <a:gd name="csX2" fmla="*/ 1213485 w 2333625"/>
+              <a:gd name="csY2" fmla="*/ 0 h 369332"/>
+              <a:gd name="csX3" fmla="*/ 1773555 w 2333625"/>
+              <a:gd name="csY3" fmla="*/ 0 h 369332"/>
+              <a:gd name="csX4" fmla="*/ 2333625 w 2333625"/>
+              <a:gd name="csY4" fmla="*/ 0 h 369332"/>
+              <a:gd name="csX5" fmla="*/ 2333625 w 2333625"/>
+              <a:gd name="csY5" fmla="*/ 369332 h 369332"/>
+              <a:gd name="csX6" fmla="*/ 1703546 w 2333625"/>
+              <a:gd name="csY6" fmla="*/ 369332 h 369332"/>
+              <a:gd name="csX7" fmla="*/ 1143476 w 2333625"/>
+              <a:gd name="csY7" fmla="*/ 369332 h 369332"/>
+              <a:gd name="csX8" fmla="*/ 583406 w 2333625"/>
+              <a:gd name="csY8" fmla="*/ 369332 h 369332"/>
+              <a:gd name="csX9" fmla="*/ 0 w 2333625"/>
+              <a:gd name="csY9" fmla="*/ 369332 h 369332"/>
+              <a:gd name="csX10" fmla="*/ 0 w 2333625"/>
+              <a:gd name="csY10" fmla="*/ 0 h 369332"/>
             </a:gdLst>
             <a:ahLst/>
             <a:cxnLst>
               <a:cxn ang="0">
-                <a:pos x="connsiteX0" y="connsiteY0"/>
-              </a:cxn>
-              <a:cxn ang="0">
-                <a:pos x="connsiteX1" y="connsiteY1"/>
-              </a:cxn>
-              <a:cxn ang="0">
-                <a:pos x="connsiteX2" y="connsiteY2"/>
-              </a:cxn>
-              <a:cxn ang="0">
-                <a:pos x="connsiteX3" y="connsiteY3"/>
-              </a:cxn>
-              <a:cxn ang="0">
-                <a:pos x="connsiteX4" y="connsiteY4"/>
-              </a:cxn>
-              <a:cxn ang="0">
-                <a:pos x="connsiteX5" y="connsiteY5"/>
-              </a:cxn>
-              <a:cxn ang="0">
-                <a:pos x="connsiteX6" y="connsiteY6"/>
-              </a:cxn>
-              <a:cxn ang="0">
-                <a:pos x="connsiteX7" y="connsiteY7"/>
-              </a:cxn>
-              <a:cxn ang="0">
-                <a:pos x="connsiteX8" y="connsiteY8"/>
-              </a:cxn>
-              <a:cxn ang="0">
-                <a:pos x="connsiteX9" y="connsiteY9"/>
-              </a:cxn>
-              <a:cxn ang="0">
-                <a:pos x="connsiteX10" y="connsiteY10"/>
+                <a:pos x="csX0" y="csY0"/>
+              </a:cxn>
+              <a:cxn ang="0">
+                <a:pos x="csX1" y="csY1"/>
+              </a:cxn>
+              <a:cxn ang="0">
+                <a:pos x="csX2" y="csY2"/>
+              </a:cxn>
+              <a:cxn ang="0">
+                <a:pos x="csX3" y="csY3"/>
+              </a:cxn>
+              <a:cxn ang="0">
+                <a:pos x="csX4" y="csY4"/>
+              </a:cxn>
+              <a:cxn ang="0">
+                <a:pos x="csX5" y="csY5"/>
+              </a:cxn>
+              <a:cxn ang="0">
+                <a:pos x="csX6" y="csY6"/>
+              </a:cxn>
+              <a:cxn ang="0">
+                <a:pos x="csX7" y="csY7"/>
+              </a:cxn>
+              <a:cxn ang="0">
+                <a:pos x="csX8" y="csY8"/>
+              </a:cxn>
+              <a:cxn ang="0">
+                <a:pos x="csX9" y="csY9"/>
+              </a:cxn>
+              <a:cxn ang="0">
+                <a:pos x="csX10" y="csY10"/>
               </a:cxn>
             </a:cxnLst>
             <a:rect l="l" t="t" r="r" b="b"/>
@@ -7565,63 +7565,63 @@
           <a:custGeom>
             <a:avLst/>
             <a:gdLst>
-              <a:gd name="connsiteX0" fmla="*/ 0 w 2333625"/>
-              <a:gd name="connsiteY0" fmla="*/ 0 h 369332"/>
-              <a:gd name="connsiteX1" fmla="*/ 583406 w 2333625"/>
-              <a:gd name="connsiteY1" fmla="*/ 0 h 369332"/>
-              <a:gd name="connsiteX2" fmla="*/ 1213485 w 2333625"/>
-              <a:gd name="connsiteY2" fmla="*/ 0 h 369332"/>
-              <a:gd name="connsiteX3" fmla="*/ 1773555 w 2333625"/>
-              <a:gd name="connsiteY3" fmla="*/ 0 h 369332"/>
-              <a:gd name="connsiteX4" fmla="*/ 2333625 w 2333625"/>
-              <a:gd name="connsiteY4" fmla="*/ 0 h 369332"/>
-              <a:gd name="connsiteX5" fmla="*/ 2333625 w 2333625"/>
-              <a:gd name="connsiteY5" fmla="*/ 369332 h 369332"/>
-              <a:gd name="connsiteX6" fmla="*/ 1703546 w 2333625"/>
-              <a:gd name="connsiteY6" fmla="*/ 369332 h 369332"/>
-              <a:gd name="connsiteX7" fmla="*/ 1143476 w 2333625"/>
-              <a:gd name="connsiteY7" fmla="*/ 369332 h 369332"/>
-              <a:gd name="connsiteX8" fmla="*/ 583406 w 2333625"/>
-              <a:gd name="connsiteY8" fmla="*/ 369332 h 369332"/>
-              <a:gd name="connsiteX9" fmla="*/ 0 w 2333625"/>
-              <a:gd name="connsiteY9" fmla="*/ 369332 h 369332"/>
-              <a:gd name="connsiteX10" fmla="*/ 0 w 2333625"/>
-              <a:gd name="connsiteY10" fmla="*/ 0 h 369332"/>
+              <a:gd name="csX0" fmla="*/ 0 w 2333625"/>
+              <a:gd name="csY0" fmla="*/ 0 h 369332"/>
+              <a:gd name="csX1" fmla="*/ 583406 w 2333625"/>
+              <a:gd name="csY1" fmla="*/ 0 h 369332"/>
+              <a:gd name="csX2" fmla="*/ 1213485 w 2333625"/>
+              <a:gd name="csY2" fmla="*/ 0 h 369332"/>
+              <a:gd name="csX3" fmla="*/ 1773555 w 2333625"/>
+              <a:gd name="csY3" fmla="*/ 0 h 369332"/>
+              <a:gd name="csX4" fmla="*/ 2333625 w 2333625"/>
+              <a:gd name="csY4" fmla="*/ 0 h 369332"/>
+              <a:gd name="csX5" fmla="*/ 2333625 w 2333625"/>
+              <a:gd name="csY5" fmla="*/ 369332 h 369332"/>
+              <a:gd name="csX6" fmla="*/ 1703546 w 2333625"/>
+              <a:gd name="csY6" fmla="*/ 369332 h 369332"/>
+              <a:gd name="csX7" fmla="*/ 1143476 w 2333625"/>
+              <a:gd name="csY7" fmla="*/ 369332 h 369332"/>
+              <a:gd name="csX8" fmla="*/ 583406 w 2333625"/>
+              <a:gd name="csY8" fmla="*/ 369332 h 369332"/>
+              <a:gd name="csX9" fmla="*/ 0 w 2333625"/>
+              <a:gd name="csY9" fmla="*/ 369332 h 369332"/>
+              <a:gd name="csX10" fmla="*/ 0 w 2333625"/>
+              <a:gd name="csY10" fmla="*/ 0 h 369332"/>
             </a:gdLst>
             <a:ahLst/>
             <a:cxnLst>
               <a:cxn ang="0">
-                <a:pos x="connsiteX0" y="connsiteY0"/>
-              </a:cxn>
-              <a:cxn ang="0">
-                <a:pos x="connsiteX1" y="connsiteY1"/>
-              </a:cxn>
-              <a:cxn ang="0">
-                <a:pos x="connsiteX2" y="connsiteY2"/>
-              </a:cxn>
-              <a:cxn ang="0">
-                <a:pos x="connsiteX3" y="connsiteY3"/>
-              </a:cxn>
-              <a:cxn ang="0">
-                <a:pos x="connsiteX4" y="connsiteY4"/>
-              </a:cxn>
-              <a:cxn ang="0">
-                <a:pos x="connsiteX5" y="connsiteY5"/>
-              </a:cxn>
-              <a:cxn ang="0">
-                <a:pos x="connsiteX6" y="connsiteY6"/>
-              </a:cxn>
-              <a:cxn ang="0">
-                <a:pos x="connsiteX7" y="connsiteY7"/>
-              </a:cxn>
-              <a:cxn ang="0">
-                <a:pos x="connsiteX8" y="connsiteY8"/>
-              </a:cxn>
-              <a:cxn ang="0">
-                <a:pos x="connsiteX9" y="connsiteY9"/>
-              </a:cxn>
-              <a:cxn ang="0">
-                <a:pos x="connsiteX10" y="connsiteY10"/>
+                <a:pos x="csX0" y="csY0"/>
+              </a:cxn>
+              <a:cxn ang="0">
+                <a:pos x="csX1" y="csY1"/>
+              </a:cxn>
+              <a:cxn ang="0">
+                <a:pos x="csX2" y="csY2"/>
+              </a:cxn>
+              <a:cxn ang="0">
+                <a:pos x="csX3" y="csY3"/>
+              </a:cxn>
+              <a:cxn ang="0">
+                <a:pos x="csX4" y="csY4"/>
+              </a:cxn>
+              <a:cxn ang="0">
+                <a:pos x="csX5" y="csY5"/>
+              </a:cxn>
+              <a:cxn ang="0">
+                <a:pos x="csX6" y="csY6"/>
+              </a:cxn>
+              <a:cxn ang="0">
+                <a:pos x="csX7" y="csY7"/>
+              </a:cxn>
+              <a:cxn ang="0">
+                <a:pos x="csX8" y="csY8"/>
+              </a:cxn>
+              <a:cxn ang="0">
+                <a:pos x="csX9" y="csY9"/>
+              </a:cxn>
+              <a:cxn ang="0">
+                <a:pos x="csX10" y="csY10"/>
               </a:cxn>
             </a:cxnLst>
             <a:rect l="l" t="t" r="r" b="b"/>
@@ -7806,63 +7806,63 @@
           <a:custGeom>
             <a:avLst/>
             <a:gdLst>
-              <a:gd name="connsiteX0" fmla="*/ 0 w 2333625"/>
-              <a:gd name="connsiteY0" fmla="*/ 0 h 369332"/>
-              <a:gd name="connsiteX1" fmla="*/ 583406 w 2333625"/>
-              <a:gd name="connsiteY1" fmla="*/ 0 h 369332"/>
-              <a:gd name="connsiteX2" fmla="*/ 1213485 w 2333625"/>
-              <a:gd name="connsiteY2" fmla="*/ 0 h 369332"/>
-              <a:gd name="connsiteX3" fmla="*/ 1773555 w 2333625"/>
-              <a:gd name="connsiteY3" fmla="*/ 0 h 369332"/>
-              <a:gd name="connsiteX4" fmla="*/ 2333625 w 2333625"/>
-              <a:gd name="connsiteY4" fmla="*/ 0 h 369332"/>
-              <a:gd name="connsiteX5" fmla="*/ 2333625 w 2333625"/>
-              <a:gd name="connsiteY5" fmla="*/ 369332 h 369332"/>
-              <a:gd name="connsiteX6" fmla="*/ 1703546 w 2333625"/>
-              <a:gd name="connsiteY6" fmla="*/ 369332 h 369332"/>
-              <a:gd name="connsiteX7" fmla="*/ 1143476 w 2333625"/>
-              <a:gd name="connsiteY7" fmla="*/ 369332 h 369332"/>
-              <a:gd name="connsiteX8" fmla="*/ 583406 w 2333625"/>
-              <a:gd name="connsiteY8" fmla="*/ 369332 h 369332"/>
-              <a:gd name="connsiteX9" fmla="*/ 0 w 2333625"/>
-              <a:gd name="connsiteY9" fmla="*/ 369332 h 369332"/>
-              <a:gd name="connsiteX10" fmla="*/ 0 w 2333625"/>
-              <a:gd name="connsiteY10" fmla="*/ 0 h 369332"/>
+              <a:gd name="csX0" fmla="*/ 0 w 2333625"/>
+              <a:gd name="csY0" fmla="*/ 0 h 369332"/>
+              <a:gd name="csX1" fmla="*/ 583406 w 2333625"/>
+              <a:gd name="csY1" fmla="*/ 0 h 369332"/>
+              <a:gd name="csX2" fmla="*/ 1213485 w 2333625"/>
+              <a:gd name="csY2" fmla="*/ 0 h 369332"/>
+              <a:gd name="csX3" fmla="*/ 1773555 w 2333625"/>
+              <a:gd name="csY3" fmla="*/ 0 h 369332"/>
+              <a:gd name="csX4" fmla="*/ 2333625 w 2333625"/>
+              <a:gd name="csY4" fmla="*/ 0 h 369332"/>
+              <a:gd name="csX5" fmla="*/ 2333625 w 2333625"/>
+              <a:gd name="csY5" fmla="*/ 369332 h 369332"/>
+              <a:gd name="csX6" fmla="*/ 1703546 w 2333625"/>
+              <a:gd name="csY6" fmla="*/ 369332 h 369332"/>
+              <a:gd name="csX7" fmla="*/ 1143476 w 2333625"/>
+              <a:gd name="csY7" fmla="*/ 369332 h 369332"/>
+              <a:gd name="csX8" fmla="*/ 583406 w 2333625"/>
+              <a:gd name="csY8" fmla="*/ 369332 h 369332"/>
+              <a:gd name="csX9" fmla="*/ 0 w 2333625"/>
+              <a:gd name="csY9" fmla="*/ 369332 h 369332"/>
+              <a:gd name="csX10" fmla="*/ 0 w 2333625"/>
+              <a:gd name="csY10" fmla="*/ 0 h 369332"/>
             </a:gdLst>
             <a:ahLst/>
             <a:cxnLst>
               <a:cxn ang="0">
-                <a:pos x="connsiteX0" y="connsiteY0"/>
-              </a:cxn>
-              <a:cxn ang="0">
-                <a:pos x="connsiteX1" y="connsiteY1"/>
-              </a:cxn>
-              <a:cxn ang="0">
-                <a:pos x="connsiteX2" y="connsiteY2"/>
-              </a:cxn>
-              <a:cxn ang="0">
-                <a:pos x="connsiteX3" y="connsiteY3"/>
-              </a:cxn>
-              <a:cxn ang="0">
-                <a:pos x="connsiteX4" y="connsiteY4"/>
-              </a:cxn>
-              <a:cxn ang="0">
-                <a:pos x="connsiteX5" y="connsiteY5"/>
-              </a:cxn>
-              <a:cxn ang="0">
-                <a:pos x="connsiteX6" y="connsiteY6"/>
-              </a:cxn>
-              <a:cxn ang="0">
-                <a:pos x="connsiteX7" y="connsiteY7"/>
-              </a:cxn>
-              <a:cxn ang="0">
-                <a:pos x="connsiteX8" y="connsiteY8"/>
-              </a:cxn>
-              <a:cxn ang="0">
-                <a:pos x="connsiteX9" y="connsiteY9"/>
-              </a:cxn>
-              <a:cxn ang="0">
-                <a:pos x="connsiteX10" y="connsiteY10"/>
+                <a:pos x="csX0" y="csY0"/>
+              </a:cxn>
+              <a:cxn ang="0">
+                <a:pos x="csX1" y="csY1"/>
+              </a:cxn>
+              <a:cxn ang="0">
+                <a:pos x="csX2" y="csY2"/>
+              </a:cxn>
+              <a:cxn ang="0">
+                <a:pos x="csX3" y="csY3"/>
+              </a:cxn>
+              <a:cxn ang="0">
+                <a:pos x="csX4" y="csY4"/>
+              </a:cxn>
+              <a:cxn ang="0">
+                <a:pos x="csX5" y="csY5"/>
+              </a:cxn>
+              <a:cxn ang="0">
+                <a:pos x="csX6" y="csY6"/>
+              </a:cxn>
+              <a:cxn ang="0">
+                <a:pos x="csX7" y="csY7"/>
+              </a:cxn>
+              <a:cxn ang="0">
+                <a:pos x="csX8" y="csY8"/>
+              </a:cxn>
+              <a:cxn ang="0">
+                <a:pos x="csX9" y="csY9"/>
+              </a:cxn>
+              <a:cxn ang="0">
+                <a:pos x="csX10" y="csY10"/>
               </a:cxn>
             </a:cxnLst>
             <a:rect l="l" t="t" r="r" b="b"/>
@@ -8047,63 +8047,63 @@
           <a:custGeom>
             <a:avLst/>
             <a:gdLst>
-              <a:gd name="connsiteX0" fmla="*/ 0 w 2333625"/>
-              <a:gd name="connsiteY0" fmla="*/ 0 h 369332"/>
-              <a:gd name="connsiteX1" fmla="*/ 583406 w 2333625"/>
-              <a:gd name="connsiteY1" fmla="*/ 0 h 369332"/>
-              <a:gd name="connsiteX2" fmla="*/ 1213485 w 2333625"/>
-              <a:gd name="connsiteY2" fmla="*/ 0 h 369332"/>
-              <a:gd name="connsiteX3" fmla="*/ 1773555 w 2333625"/>
-              <a:gd name="connsiteY3" fmla="*/ 0 h 369332"/>
-              <a:gd name="connsiteX4" fmla="*/ 2333625 w 2333625"/>
-              <a:gd name="connsiteY4" fmla="*/ 0 h 369332"/>
-              <a:gd name="connsiteX5" fmla="*/ 2333625 w 2333625"/>
-              <a:gd name="connsiteY5" fmla="*/ 369332 h 369332"/>
-              <a:gd name="connsiteX6" fmla="*/ 1703546 w 2333625"/>
-              <a:gd name="connsiteY6" fmla="*/ 369332 h 369332"/>
-              <a:gd name="connsiteX7" fmla="*/ 1143476 w 2333625"/>
-              <a:gd name="connsiteY7" fmla="*/ 369332 h 369332"/>
-              <a:gd name="connsiteX8" fmla="*/ 583406 w 2333625"/>
-              <a:gd name="connsiteY8" fmla="*/ 369332 h 369332"/>
-              <a:gd name="connsiteX9" fmla="*/ 0 w 2333625"/>
-              <a:gd name="connsiteY9" fmla="*/ 369332 h 369332"/>
-              <a:gd name="connsiteX10" fmla="*/ 0 w 2333625"/>
-              <a:gd name="connsiteY10" fmla="*/ 0 h 369332"/>
+              <a:gd name="csX0" fmla="*/ 0 w 2333625"/>
+              <a:gd name="csY0" fmla="*/ 0 h 369332"/>
+              <a:gd name="csX1" fmla="*/ 583406 w 2333625"/>
+              <a:gd name="csY1" fmla="*/ 0 h 369332"/>
+              <a:gd name="csX2" fmla="*/ 1213485 w 2333625"/>
+              <a:gd name="csY2" fmla="*/ 0 h 369332"/>
+              <a:gd name="csX3" fmla="*/ 1773555 w 2333625"/>
+              <a:gd name="csY3" fmla="*/ 0 h 369332"/>
+              <a:gd name="csX4" fmla="*/ 2333625 w 2333625"/>
+              <a:gd name="csY4" fmla="*/ 0 h 369332"/>
+              <a:gd name="csX5" fmla="*/ 2333625 w 2333625"/>
+              <a:gd name="csY5" fmla="*/ 369332 h 369332"/>
+              <a:gd name="csX6" fmla="*/ 1703546 w 2333625"/>
+              <a:gd name="csY6" fmla="*/ 369332 h 369332"/>
+              <a:gd name="csX7" fmla="*/ 1143476 w 2333625"/>
+              <a:gd name="csY7" fmla="*/ 369332 h 369332"/>
+              <a:gd name="csX8" fmla="*/ 583406 w 2333625"/>
+              <a:gd name="csY8" fmla="*/ 369332 h 369332"/>
+              <a:gd name="csX9" fmla="*/ 0 w 2333625"/>
+              <a:gd name="csY9" fmla="*/ 369332 h 369332"/>
+              <a:gd name="csX10" fmla="*/ 0 w 2333625"/>
+              <a:gd name="csY10" fmla="*/ 0 h 369332"/>
             </a:gdLst>
             <a:ahLst/>
             <a:cxnLst>
               <a:cxn ang="0">
-                <a:pos x="connsiteX0" y="connsiteY0"/>
-              </a:cxn>
-              <a:cxn ang="0">
-                <a:pos x="connsiteX1" y="connsiteY1"/>
-              </a:cxn>
-              <a:cxn ang="0">
-                <a:pos x="connsiteX2" y="connsiteY2"/>
-              </a:cxn>
-              <a:cxn ang="0">
-                <a:pos x="connsiteX3" y="connsiteY3"/>
-              </a:cxn>
-              <a:cxn ang="0">
-                <a:pos x="connsiteX4" y="connsiteY4"/>
-              </a:cxn>
-              <a:cxn ang="0">
-                <a:pos x="connsiteX5" y="connsiteY5"/>
-              </a:cxn>
-              <a:cxn ang="0">
-                <a:pos x="connsiteX6" y="connsiteY6"/>
-              </a:cxn>
-              <a:cxn ang="0">
-                <a:pos x="connsiteX7" y="connsiteY7"/>
-              </a:cxn>
-              <a:cxn ang="0">
-                <a:pos x="connsiteX8" y="connsiteY8"/>
-              </a:cxn>
-              <a:cxn ang="0">
-                <a:pos x="connsiteX9" y="connsiteY9"/>
-              </a:cxn>
-              <a:cxn ang="0">
-                <a:pos x="connsiteX10" y="connsiteY10"/>
+                <a:pos x="csX0" y="csY0"/>
+              </a:cxn>
+              <a:cxn ang="0">
+                <a:pos x="csX1" y="csY1"/>
+              </a:cxn>
+              <a:cxn ang="0">
+                <a:pos x="csX2" y="csY2"/>
+              </a:cxn>
+              <a:cxn ang="0">
+                <a:pos x="csX3" y="csY3"/>
+              </a:cxn>
+              <a:cxn ang="0">
+                <a:pos x="csX4" y="csY4"/>
+              </a:cxn>
+              <a:cxn ang="0">
+                <a:pos x="csX5" y="csY5"/>
+              </a:cxn>
+              <a:cxn ang="0">
+                <a:pos x="csX6" y="csY6"/>
+              </a:cxn>
+              <a:cxn ang="0">
+                <a:pos x="csX7" y="csY7"/>
+              </a:cxn>
+              <a:cxn ang="0">
+                <a:pos x="csX8" y="csY8"/>
+              </a:cxn>
+              <a:cxn ang="0">
+                <a:pos x="csX9" y="csY9"/>
+              </a:cxn>
+              <a:cxn ang="0">
+                <a:pos x="csX10" y="csY10"/>
               </a:cxn>
             </a:cxnLst>
             <a:rect l="l" t="t" r="r" b="b"/>
@@ -8288,33 +8288,33 @@
           <a:custGeom>
             <a:avLst/>
             <a:gdLst>
-              <a:gd name="connsiteX0" fmla="*/ 0 w 457200"/>
-              <a:gd name="connsiteY0" fmla="*/ 228600 h 457200"/>
-              <a:gd name="connsiteX1" fmla="*/ 228600 w 457200"/>
-              <a:gd name="connsiteY1" fmla="*/ 0 h 457200"/>
-              <a:gd name="connsiteX2" fmla="*/ 457200 w 457200"/>
-              <a:gd name="connsiteY2" fmla="*/ 228600 h 457200"/>
-              <a:gd name="connsiteX3" fmla="*/ 228600 w 457200"/>
-              <a:gd name="connsiteY3" fmla="*/ 457200 h 457200"/>
-              <a:gd name="connsiteX4" fmla="*/ 0 w 457200"/>
-              <a:gd name="connsiteY4" fmla="*/ 228600 h 457200"/>
+              <a:gd name="csX0" fmla="*/ 0 w 457200"/>
+              <a:gd name="csY0" fmla="*/ 228600 h 457200"/>
+              <a:gd name="csX1" fmla="*/ 228600 w 457200"/>
+              <a:gd name="csY1" fmla="*/ 0 h 457200"/>
+              <a:gd name="csX2" fmla="*/ 457200 w 457200"/>
+              <a:gd name="csY2" fmla="*/ 228600 h 457200"/>
+              <a:gd name="csX3" fmla="*/ 228600 w 457200"/>
+              <a:gd name="csY3" fmla="*/ 457200 h 457200"/>
+              <a:gd name="csX4" fmla="*/ 0 w 457200"/>
+              <a:gd name="csY4" fmla="*/ 228600 h 457200"/>
             </a:gdLst>
             <a:ahLst/>
             <a:cxnLst>
               <a:cxn ang="0">
-                <a:pos x="connsiteX0" y="connsiteY0"/>
-              </a:cxn>
-              <a:cxn ang="0">
-                <a:pos x="connsiteX1" y="connsiteY1"/>
-              </a:cxn>
-              <a:cxn ang="0">
-                <a:pos x="connsiteX2" y="connsiteY2"/>
-              </a:cxn>
-              <a:cxn ang="0">
-                <a:pos x="connsiteX3" y="connsiteY3"/>
-              </a:cxn>
-              <a:cxn ang="0">
-                <a:pos x="connsiteX4" y="connsiteY4"/>
+                <a:pos x="csX0" y="csY0"/>
+              </a:cxn>
+              <a:cxn ang="0">
+                <a:pos x="csX1" y="csY1"/>
+              </a:cxn>
+              <a:cxn ang="0">
+                <a:pos x="csX2" y="csY2"/>
+              </a:cxn>
+              <a:cxn ang="0">
+                <a:pos x="csX3" y="csY3"/>
+              </a:cxn>
+              <a:cxn ang="0">
+                <a:pos x="csX4" y="csY4"/>
               </a:cxn>
             </a:cxnLst>
             <a:rect l="l" t="t" r="r" b="b"/>
@@ -8434,33 +8434,33 @@
           <a:custGeom>
             <a:avLst/>
             <a:gdLst>
-              <a:gd name="connsiteX0" fmla="*/ 0 w 457200"/>
-              <a:gd name="connsiteY0" fmla="*/ 228600 h 457200"/>
-              <a:gd name="connsiteX1" fmla="*/ 228600 w 457200"/>
-              <a:gd name="connsiteY1" fmla="*/ 0 h 457200"/>
-              <a:gd name="connsiteX2" fmla="*/ 457200 w 457200"/>
-              <a:gd name="connsiteY2" fmla="*/ 228600 h 457200"/>
-              <a:gd name="connsiteX3" fmla="*/ 228600 w 457200"/>
-              <a:gd name="connsiteY3" fmla="*/ 457200 h 457200"/>
-              <a:gd name="connsiteX4" fmla="*/ 0 w 457200"/>
-              <a:gd name="connsiteY4" fmla="*/ 228600 h 457200"/>
+              <a:gd name="csX0" fmla="*/ 0 w 457200"/>
+              <a:gd name="csY0" fmla="*/ 228600 h 457200"/>
+              <a:gd name="csX1" fmla="*/ 228600 w 457200"/>
+              <a:gd name="csY1" fmla="*/ 0 h 457200"/>
+              <a:gd name="csX2" fmla="*/ 457200 w 457200"/>
+              <a:gd name="csY2" fmla="*/ 228600 h 457200"/>
+              <a:gd name="csX3" fmla="*/ 228600 w 457200"/>
+              <a:gd name="csY3" fmla="*/ 457200 h 457200"/>
+              <a:gd name="csX4" fmla="*/ 0 w 457200"/>
+              <a:gd name="csY4" fmla="*/ 228600 h 457200"/>
             </a:gdLst>
             <a:ahLst/>
             <a:cxnLst>
               <a:cxn ang="0">
-                <a:pos x="connsiteX0" y="connsiteY0"/>
-              </a:cxn>
-              <a:cxn ang="0">
-                <a:pos x="connsiteX1" y="connsiteY1"/>
-              </a:cxn>
-              <a:cxn ang="0">
-                <a:pos x="connsiteX2" y="connsiteY2"/>
-              </a:cxn>
-              <a:cxn ang="0">
-                <a:pos x="connsiteX3" y="connsiteY3"/>
-              </a:cxn>
-              <a:cxn ang="0">
-                <a:pos x="connsiteX4" y="connsiteY4"/>
+                <a:pos x="csX0" y="csY0"/>
+              </a:cxn>
+              <a:cxn ang="0">
+                <a:pos x="csX1" y="csY1"/>
+              </a:cxn>
+              <a:cxn ang="0">
+                <a:pos x="csX2" y="csY2"/>
+              </a:cxn>
+              <a:cxn ang="0">
+                <a:pos x="csX3" y="csY3"/>
+              </a:cxn>
+              <a:cxn ang="0">
+                <a:pos x="csX4" y="csY4"/>
               </a:cxn>
             </a:cxnLst>
             <a:rect l="l" t="t" r="r" b="b"/>
@@ -8580,63 +8580,63 @@
           <a:custGeom>
             <a:avLst/>
             <a:gdLst>
-              <a:gd name="connsiteX0" fmla="*/ 0 w 2333625"/>
-              <a:gd name="connsiteY0" fmla="*/ 0 h 369332"/>
-              <a:gd name="connsiteX1" fmla="*/ 583406 w 2333625"/>
-              <a:gd name="connsiteY1" fmla="*/ 0 h 369332"/>
-              <a:gd name="connsiteX2" fmla="*/ 1213485 w 2333625"/>
-              <a:gd name="connsiteY2" fmla="*/ 0 h 369332"/>
-              <a:gd name="connsiteX3" fmla="*/ 1773555 w 2333625"/>
-              <a:gd name="connsiteY3" fmla="*/ 0 h 369332"/>
-              <a:gd name="connsiteX4" fmla="*/ 2333625 w 2333625"/>
-              <a:gd name="connsiteY4" fmla="*/ 0 h 369332"/>
-              <a:gd name="connsiteX5" fmla="*/ 2333625 w 2333625"/>
-              <a:gd name="connsiteY5" fmla="*/ 369332 h 369332"/>
-              <a:gd name="connsiteX6" fmla="*/ 1703546 w 2333625"/>
-              <a:gd name="connsiteY6" fmla="*/ 369332 h 369332"/>
-              <a:gd name="connsiteX7" fmla="*/ 1143476 w 2333625"/>
-              <a:gd name="connsiteY7" fmla="*/ 369332 h 369332"/>
-              <a:gd name="connsiteX8" fmla="*/ 583406 w 2333625"/>
-              <a:gd name="connsiteY8" fmla="*/ 369332 h 369332"/>
-              <a:gd name="connsiteX9" fmla="*/ 0 w 2333625"/>
-              <a:gd name="connsiteY9" fmla="*/ 369332 h 369332"/>
-              <a:gd name="connsiteX10" fmla="*/ 0 w 2333625"/>
-              <a:gd name="connsiteY10" fmla="*/ 0 h 369332"/>
+              <a:gd name="csX0" fmla="*/ 0 w 2333625"/>
+              <a:gd name="csY0" fmla="*/ 0 h 369332"/>
+              <a:gd name="csX1" fmla="*/ 583406 w 2333625"/>
+              <a:gd name="csY1" fmla="*/ 0 h 369332"/>
+              <a:gd name="csX2" fmla="*/ 1213485 w 2333625"/>
+              <a:gd name="csY2" fmla="*/ 0 h 369332"/>
+              <a:gd name="csX3" fmla="*/ 1773555 w 2333625"/>
+              <a:gd name="csY3" fmla="*/ 0 h 369332"/>
+              <a:gd name="csX4" fmla="*/ 2333625 w 2333625"/>
+              <a:gd name="csY4" fmla="*/ 0 h 369332"/>
+              <a:gd name="csX5" fmla="*/ 2333625 w 2333625"/>
+              <a:gd name="csY5" fmla="*/ 369332 h 369332"/>
+              <a:gd name="csX6" fmla="*/ 1703546 w 2333625"/>
+              <a:gd name="csY6" fmla="*/ 369332 h 369332"/>
+              <a:gd name="csX7" fmla="*/ 1143476 w 2333625"/>
+              <a:gd name="csY7" fmla="*/ 369332 h 369332"/>
+              <a:gd name="csX8" fmla="*/ 583406 w 2333625"/>
+              <a:gd name="csY8" fmla="*/ 369332 h 369332"/>
+              <a:gd name="csX9" fmla="*/ 0 w 2333625"/>
+              <a:gd name="csY9" fmla="*/ 369332 h 369332"/>
+              <a:gd name="csX10" fmla="*/ 0 w 2333625"/>
+              <a:gd name="csY10" fmla="*/ 0 h 369332"/>
             </a:gdLst>
             <a:ahLst/>
             <a:cxnLst>
               <a:cxn ang="0">
-                <a:pos x="connsiteX0" y="connsiteY0"/>
-              </a:cxn>
-              <a:cxn ang="0">
-                <a:pos x="connsiteX1" y="connsiteY1"/>
-              </a:cxn>
-              <a:cxn ang="0">
-                <a:pos x="connsiteX2" y="connsiteY2"/>
-              </a:cxn>
-              <a:cxn ang="0">
-                <a:pos x="connsiteX3" y="connsiteY3"/>
-              </a:cxn>
-              <a:cxn ang="0">
-                <a:pos x="connsiteX4" y="connsiteY4"/>
-              </a:cxn>
-              <a:cxn ang="0">
-                <a:pos x="connsiteX5" y="connsiteY5"/>
-              </a:cxn>
-              <a:cxn ang="0">
-                <a:pos x="connsiteX6" y="connsiteY6"/>
-              </a:cxn>
-              <a:cxn ang="0">
-                <a:pos x="connsiteX7" y="connsiteY7"/>
-              </a:cxn>
-              <a:cxn ang="0">
-                <a:pos x="connsiteX8" y="connsiteY8"/>
-              </a:cxn>
-              <a:cxn ang="0">
-                <a:pos x="connsiteX9" y="connsiteY9"/>
-              </a:cxn>
-              <a:cxn ang="0">
-                <a:pos x="connsiteX10" y="connsiteY10"/>
+                <a:pos x="csX0" y="csY0"/>
+              </a:cxn>
+              <a:cxn ang="0">
+                <a:pos x="csX1" y="csY1"/>
+              </a:cxn>
+              <a:cxn ang="0">
+                <a:pos x="csX2" y="csY2"/>
+              </a:cxn>
+              <a:cxn ang="0">
+                <a:pos x="csX3" y="csY3"/>
+              </a:cxn>
+              <a:cxn ang="0">
+                <a:pos x="csX4" y="csY4"/>
+              </a:cxn>
+              <a:cxn ang="0">
+                <a:pos x="csX5" y="csY5"/>
+              </a:cxn>
+              <a:cxn ang="0">
+                <a:pos x="csX6" y="csY6"/>
+              </a:cxn>
+              <a:cxn ang="0">
+                <a:pos x="csX7" y="csY7"/>
+              </a:cxn>
+              <a:cxn ang="0">
+                <a:pos x="csX8" y="csY8"/>
+              </a:cxn>
+              <a:cxn ang="0">
+                <a:pos x="csX9" y="csY9"/>
+              </a:cxn>
+              <a:cxn ang="0">
+                <a:pos x="csX10" y="csY10"/>
               </a:cxn>
             </a:cxnLst>
             <a:rect l="l" t="t" r="r" b="b"/>
@@ -10227,33 +10227,33 @@
           <a:custGeom>
             <a:avLst/>
             <a:gdLst>
-              <a:gd name="connsiteX0" fmla="*/ 0 w 457200"/>
-              <a:gd name="connsiteY0" fmla="*/ 228600 h 457200"/>
-              <a:gd name="connsiteX1" fmla="*/ 228600 w 457200"/>
-              <a:gd name="connsiteY1" fmla="*/ 0 h 457200"/>
-              <a:gd name="connsiteX2" fmla="*/ 457200 w 457200"/>
-              <a:gd name="connsiteY2" fmla="*/ 228600 h 457200"/>
-              <a:gd name="connsiteX3" fmla="*/ 228600 w 457200"/>
-              <a:gd name="connsiteY3" fmla="*/ 457200 h 457200"/>
-              <a:gd name="connsiteX4" fmla="*/ 0 w 457200"/>
-              <a:gd name="connsiteY4" fmla="*/ 228600 h 457200"/>
+              <a:gd name="csX0" fmla="*/ 0 w 457200"/>
+              <a:gd name="csY0" fmla="*/ 228600 h 457200"/>
+              <a:gd name="csX1" fmla="*/ 228600 w 457200"/>
+              <a:gd name="csY1" fmla="*/ 0 h 457200"/>
+              <a:gd name="csX2" fmla="*/ 457200 w 457200"/>
+              <a:gd name="csY2" fmla="*/ 228600 h 457200"/>
+              <a:gd name="csX3" fmla="*/ 228600 w 457200"/>
+              <a:gd name="csY3" fmla="*/ 457200 h 457200"/>
+              <a:gd name="csX4" fmla="*/ 0 w 457200"/>
+              <a:gd name="csY4" fmla="*/ 228600 h 457200"/>
             </a:gdLst>
             <a:ahLst/>
             <a:cxnLst>
               <a:cxn ang="0">
-                <a:pos x="connsiteX0" y="connsiteY0"/>
-              </a:cxn>
-              <a:cxn ang="0">
-                <a:pos x="connsiteX1" y="connsiteY1"/>
-              </a:cxn>
-              <a:cxn ang="0">
-                <a:pos x="connsiteX2" y="connsiteY2"/>
-              </a:cxn>
-              <a:cxn ang="0">
-                <a:pos x="connsiteX3" y="connsiteY3"/>
-              </a:cxn>
-              <a:cxn ang="0">
-                <a:pos x="connsiteX4" y="connsiteY4"/>
+                <a:pos x="csX0" y="csY0"/>
+              </a:cxn>
+              <a:cxn ang="0">
+                <a:pos x="csX1" y="csY1"/>
+              </a:cxn>
+              <a:cxn ang="0">
+                <a:pos x="csX2" y="csY2"/>
+              </a:cxn>
+              <a:cxn ang="0">
+                <a:pos x="csX3" y="csY3"/>
+              </a:cxn>
+              <a:cxn ang="0">
+                <a:pos x="csX4" y="csY4"/>
               </a:cxn>
             </a:cxnLst>
             <a:rect l="l" t="t" r="r" b="b"/>
@@ -10494,33 +10494,33 @@
           <a:custGeom>
             <a:avLst/>
             <a:gdLst>
-              <a:gd name="connsiteX0" fmla="*/ 0 w 457200"/>
-              <a:gd name="connsiteY0" fmla="*/ 228600 h 457200"/>
-              <a:gd name="connsiteX1" fmla="*/ 228600 w 457200"/>
-              <a:gd name="connsiteY1" fmla="*/ 0 h 457200"/>
-              <a:gd name="connsiteX2" fmla="*/ 457200 w 457200"/>
-              <a:gd name="connsiteY2" fmla="*/ 228600 h 457200"/>
-              <a:gd name="connsiteX3" fmla="*/ 228600 w 457200"/>
-              <a:gd name="connsiteY3" fmla="*/ 457200 h 457200"/>
-              <a:gd name="connsiteX4" fmla="*/ 0 w 457200"/>
-              <a:gd name="connsiteY4" fmla="*/ 228600 h 457200"/>
+              <a:gd name="csX0" fmla="*/ 0 w 457200"/>
+              <a:gd name="csY0" fmla="*/ 228600 h 457200"/>
+              <a:gd name="csX1" fmla="*/ 228600 w 457200"/>
+              <a:gd name="csY1" fmla="*/ 0 h 457200"/>
+              <a:gd name="csX2" fmla="*/ 457200 w 457200"/>
+              <a:gd name="csY2" fmla="*/ 228600 h 457200"/>
+              <a:gd name="csX3" fmla="*/ 228600 w 457200"/>
+              <a:gd name="csY3" fmla="*/ 457200 h 457200"/>
+              <a:gd name="csX4" fmla="*/ 0 w 457200"/>
+              <a:gd name="csY4" fmla="*/ 228600 h 457200"/>
             </a:gdLst>
             <a:ahLst/>
             <a:cxnLst>
               <a:cxn ang="0">
-                <a:pos x="connsiteX0" y="connsiteY0"/>
-              </a:cxn>
-              <a:cxn ang="0">
-                <a:pos x="connsiteX1" y="connsiteY1"/>
-              </a:cxn>
-              <a:cxn ang="0">
-                <a:pos x="connsiteX2" y="connsiteY2"/>
-              </a:cxn>
-              <a:cxn ang="0">
-                <a:pos x="connsiteX3" y="connsiteY3"/>
-              </a:cxn>
-              <a:cxn ang="0">
-                <a:pos x="connsiteX4" y="connsiteY4"/>
+                <a:pos x="csX0" y="csY0"/>
+              </a:cxn>
+              <a:cxn ang="0">
+                <a:pos x="csX1" y="csY1"/>
+              </a:cxn>
+              <a:cxn ang="0">
+                <a:pos x="csX2" y="csY2"/>
+              </a:cxn>
+              <a:cxn ang="0">
+                <a:pos x="csX3" y="csY3"/>
+              </a:cxn>
+              <a:cxn ang="0">
+                <a:pos x="csX4" y="csY4"/>
               </a:cxn>
             </a:cxnLst>
             <a:rect l="l" t="t" r="r" b="b"/>
@@ -10640,33 +10640,33 @@
           <a:custGeom>
             <a:avLst/>
             <a:gdLst>
-              <a:gd name="connsiteX0" fmla="*/ 0 w 457200"/>
-              <a:gd name="connsiteY0" fmla="*/ 228600 h 457200"/>
-              <a:gd name="connsiteX1" fmla="*/ 228600 w 457200"/>
-              <a:gd name="connsiteY1" fmla="*/ 0 h 457200"/>
-              <a:gd name="connsiteX2" fmla="*/ 457200 w 457200"/>
-              <a:gd name="connsiteY2" fmla="*/ 228600 h 457200"/>
-              <a:gd name="connsiteX3" fmla="*/ 228600 w 457200"/>
-              <a:gd name="connsiteY3" fmla="*/ 457200 h 457200"/>
-              <a:gd name="connsiteX4" fmla="*/ 0 w 457200"/>
-              <a:gd name="connsiteY4" fmla="*/ 228600 h 457200"/>
+              <a:gd name="csX0" fmla="*/ 0 w 457200"/>
+              <a:gd name="csY0" fmla="*/ 228600 h 457200"/>
+              <a:gd name="csX1" fmla="*/ 228600 w 457200"/>
+              <a:gd name="csY1" fmla="*/ 0 h 457200"/>
+              <a:gd name="csX2" fmla="*/ 457200 w 457200"/>
+              <a:gd name="csY2" fmla="*/ 228600 h 457200"/>
+              <a:gd name="csX3" fmla="*/ 228600 w 457200"/>
+              <a:gd name="csY3" fmla="*/ 457200 h 457200"/>
+              <a:gd name="csX4" fmla="*/ 0 w 457200"/>
+              <a:gd name="csY4" fmla="*/ 228600 h 457200"/>
             </a:gdLst>
             <a:ahLst/>
             <a:cxnLst>
               <a:cxn ang="0">
-                <a:pos x="connsiteX0" y="connsiteY0"/>
-              </a:cxn>
-              <a:cxn ang="0">
-                <a:pos x="connsiteX1" y="connsiteY1"/>
-              </a:cxn>
-              <a:cxn ang="0">
-                <a:pos x="connsiteX2" y="connsiteY2"/>
-              </a:cxn>
-              <a:cxn ang="0">
-                <a:pos x="connsiteX3" y="connsiteY3"/>
-              </a:cxn>
-              <a:cxn ang="0">
-                <a:pos x="connsiteX4" y="connsiteY4"/>
+                <a:pos x="csX0" y="csY0"/>
+              </a:cxn>
+              <a:cxn ang="0">
+                <a:pos x="csX1" y="csY1"/>
+              </a:cxn>
+              <a:cxn ang="0">
+                <a:pos x="csX2" y="csY2"/>
+              </a:cxn>
+              <a:cxn ang="0">
+                <a:pos x="csX3" y="csY3"/>
+              </a:cxn>
+              <a:cxn ang="0">
+                <a:pos x="csX4" y="csY4"/>
               </a:cxn>
             </a:cxnLst>
             <a:rect l="l" t="t" r="r" b="b"/>
@@ -10786,33 +10786,33 @@
           <a:custGeom>
             <a:avLst/>
             <a:gdLst>
-              <a:gd name="connsiteX0" fmla="*/ 0 w 457200"/>
-              <a:gd name="connsiteY0" fmla="*/ 228600 h 457200"/>
-              <a:gd name="connsiteX1" fmla="*/ 228600 w 457200"/>
-              <a:gd name="connsiteY1" fmla="*/ 0 h 457200"/>
-              <a:gd name="connsiteX2" fmla="*/ 457200 w 457200"/>
-              <a:gd name="connsiteY2" fmla="*/ 228600 h 457200"/>
-              <a:gd name="connsiteX3" fmla="*/ 228600 w 457200"/>
-              <a:gd name="connsiteY3" fmla="*/ 457200 h 457200"/>
-              <a:gd name="connsiteX4" fmla="*/ 0 w 457200"/>
-              <a:gd name="connsiteY4" fmla="*/ 228600 h 457200"/>
+              <a:gd name="csX0" fmla="*/ 0 w 457200"/>
+              <a:gd name="csY0" fmla="*/ 228600 h 457200"/>
+              <a:gd name="csX1" fmla="*/ 228600 w 457200"/>
+              <a:gd name="csY1" fmla="*/ 0 h 457200"/>
+              <a:gd name="csX2" fmla="*/ 457200 w 457200"/>
+              <a:gd name="csY2" fmla="*/ 228600 h 457200"/>
+              <a:gd name="csX3" fmla="*/ 228600 w 457200"/>
+              <a:gd name="csY3" fmla="*/ 457200 h 457200"/>
+              <a:gd name="csX4" fmla="*/ 0 w 457200"/>
+              <a:gd name="csY4" fmla="*/ 228600 h 457200"/>
             </a:gdLst>
             <a:ahLst/>
             <a:cxnLst>
               <a:cxn ang="0">
-                <a:pos x="connsiteX0" y="connsiteY0"/>
-              </a:cxn>
-              <a:cxn ang="0">
-                <a:pos x="connsiteX1" y="connsiteY1"/>
-              </a:cxn>
-              <a:cxn ang="0">
-                <a:pos x="connsiteX2" y="connsiteY2"/>
-              </a:cxn>
-              <a:cxn ang="0">
-                <a:pos x="connsiteX3" y="connsiteY3"/>
-              </a:cxn>
-              <a:cxn ang="0">
-                <a:pos x="connsiteX4" y="connsiteY4"/>
+                <a:pos x="csX0" y="csY0"/>
+              </a:cxn>
+              <a:cxn ang="0">
+                <a:pos x="csX1" y="csY1"/>
+              </a:cxn>
+              <a:cxn ang="0">
+                <a:pos x="csX2" y="csY2"/>
+              </a:cxn>
+              <a:cxn ang="0">
+                <a:pos x="csX3" y="csY3"/>
+              </a:cxn>
+              <a:cxn ang="0">
+                <a:pos x="csX4" y="csY4"/>
               </a:cxn>
             </a:cxnLst>
             <a:rect l="l" t="t" r="r" b="b"/>
@@ -10932,33 +10932,33 @@
           <a:custGeom>
             <a:avLst/>
             <a:gdLst>
-              <a:gd name="connsiteX0" fmla="*/ 0 w 457200"/>
-              <a:gd name="connsiteY0" fmla="*/ 228600 h 457200"/>
-              <a:gd name="connsiteX1" fmla="*/ 228600 w 457200"/>
-              <a:gd name="connsiteY1" fmla="*/ 0 h 457200"/>
-              <a:gd name="connsiteX2" fmla="*/ 457200 w 457200"/>
-              <a:gd name="connsiteY2" fmla="*/ 228600 h 457200"/>
-              <a:gd name="connsiteX3" fmla="*/ 228600 w 457200"/>
-              <a:gd name="connsiteY3" fmla="*/ 457200 h 457200"/>
-              <a:gd name="connsiteX4" fmla="*/ 0 w 457200"/>
-              <a:gd name="connsiteY4" fmla="*/ 228600 h 457200"/>
+              <a:gd name="csX0" fmla="*/ 0 w 457200"/>
+              <a:gd name="csY0" fmla="*/ 228600 h 457200"/>
+              <a:gd name="csX1" fmla="*/ 228600 w 457200"/>
+              <a:gd name="csY1" fmla="*/ 0 h 457200"/>
+              <a:gd name="csX2" fmla="*/ 457200 w 457200"/>
+              <a:gd name="csY2" fmla="*/ 228600 h 457200"/>
+              <a:gd name="csX3" fmla="*/ 228600 w 457200"/>
+              <a:gd name="csY3" fmla="*/ 457200 h 457200"/>
+              <a:gd name="csX4" fmla="*/ 0 w 457200"/>
+              <a:gd name="csY4" fmla="*/ 228600 h 457200"/>
             </a:gdLst>
             <a:ahLst/>
             <a:cxnLst>
               <a:cxn ang="0">
-                <a:pos x="connsiteX0" y="connsiteY0"/>
-              </a:cxn>
-              <a:cxn ang="0">
-                <a:pos x="connsiteX1" y="connsiteY1"/>
-              </a:cxn>
-              <a:cxn ang="0">
-                <a:pos x="connsiteX2" y="connsiteY2"/>
-              </a:cxn>
-              <a:cxn ang="0">
-                <a:pos x="connsiteX3" y="connsiteY3"/>
-              </a:cxn>
-              <a:cxn ang="0">
-                <a:pos x="connsiteX4" y="connsiteY4"/>
+                <a:pos x="csX0" y="csY0"/>
+              </a:cxn>
+              <a:cxn ang="0">
+                <a:pos x="csX1" y="csY1"/>
+              </a:cxn>
+              <a:cxn ang="0">
+                <a:pos x="csX2" y="csY2"/>
+              </a:cxn>
+              <a:cxn ang="0">
+                <a:pos x="csX3" y="csY3"/>
+              </a:cxn>
+              <a:cxn ang="0">
+                <a:pos x="csX4" y="csY4"/>
               </a:cxn>
             </a:cxnLst>
             <a:rect l="l" t="t" r="r" b="b"/>
@@ -11078,33 +11078,33 @@
           <a:custGeom>
             <a:avLst/>
             <a:gdLst>
-              <a:gd name="connsiteX0" fmla="*/ 0 w 457200"/>
-              <a:gd name="connsiteY0" fmla="*/ 228600 h 457200"/>
-              <a:gd name="connsiteX1" fmla="*/ 228600 w 457200"/>
-              <a:gd name="connsiteY1" fmla="*/ 0 h 457200"/>
-              <a:gd name="connsiteX2" fmla="*/ 457200 w 457200"/>
-              <a:gd name="connsiteY2" fmla="*/ 228600 h 457200"/>
-              <a:gd name="connsiteX3" fmla="*/ 228600 w 457200"/>
-              <a:gd name="connsiteY3" fmla="*/ 457200 h 457200"/>
-              <a:gd name="connsiteX4" fmla="*/ 0 w 457200"/>
-              <a:gd name="connsiteY4" fmla="*/ 228600 h 457200"/>
+              <a:gd name="csX0" fmla="*/ 0 w 457200"/>
+              <a:gd name="csY0" fmla="*/ 228600 h 457200"/>
+              <a:gd name="csX1" fmla="*/ 228600 w 457200"/>
+              <a:gd name="csY1" fmla="*/ 0 h 457200"/>
+              <a:gd name="csX2" fmla="*/ 457200 w 457200"/>
+              <a:gd name="csY2" fmla="*/ 228600 h 457200"/>
+              <a:gd name="csX3" fmla="*/ 228600 w 457200"/>
+              <a:gd name="csY3" fmla="*/ 457200 h 457200"/>
+              <a:gd name="csX4" fmla="*/ 0 w 457200"/>
+              <a:gd name="csY4" fmla="*/ 228600 h 457200"/>
             </a:gdLst>
             <a:ahLst/>
             <a:cxnLst>
               <a:cxn ang="0">
-                <a:pos x="connsiteX0" y="connsiteY0"/>
-              </a:cxn>
-              <a:cxn ang="0">
-                <a:pos x="connsiteX1" y="connsiteY1"/>
-              </a:cxn>
-              <a:cxn ang="0">
-                <a:pos x="connsiteX2" y="connsiteY2"/>
-              </a:cxn>
-              <a:cxn ang="0">
-                <a:pos x="connsiteX3" y="connsiteY3"/>
-              </a:cxn>
-              <a:cxn ang="0">
-                <a:pos x="connsiteX4" y="connsiteY4"/>
+                <a:pos x="csX0" y="csY0"/>
+              </a:cxn>
+              <a:cxn ang="0">
+                <a:pos x="csX1" y="csY1"/>
+              </a:cxn>
+              <a:cxn ang="0">
+                <a:pos x="csX2" y="csY2"/>
+              </a:cxn>
+              <a:cxn ang="0">
+                <a:pos x="csX3" y="csY3"/>
+              </a:cxn>
+              <a:cxn ang="0">
+                <a:pos x="csX4" y="csY4"/>
               </a:cxn>
             </a:cxnLst>
             <a:rect l="l" t="t" r="r" b="b"/>
@@ -11224,33 +11224,33 @@
           <a:custGeom>
             <a:avLst/>
             <a:gdLst>
-              <a:gd name="connsiteX0" fmla="*/ 0 w 457200"/>
-              <a:gd name="connsiteY0" fmla="*/ 228600 h 457200"/>
-              <a:gd name="connsiteX1" fmla="*/ 228600 w 457200"/>
-              <a:gd name="connsiteY1" fmla="*/ 0 h 457200"/>
-              <a:gd name="connsiteX2" fmla="*/ 457200 w 457200"/>
-              <a:gd name="connsiteY2" fmla="*/ 228600 h 457200"/>
-              <a:gd name="connsiteX3" fmla="*/ 228600 w 457200"/>
-              <a:gd name="connsiteY3" fmla="*/ 457200 h 457200"/>
-              <a:gd name="connsiteX4" fmla="*/ 0 w 457200"/>
-              <a:gd name="connsiteY4" fmla="*/ 228600 h 457200"/>
+              <a:gd name="csX0" fmla="*/ 0 w 457200"/>
+              <a:gd name="csY0" fmla="*/ 228600 h 457200"/>
+              <a:gd name="csX1" fmla="*/ 228600 w 457200"/>
+              <a:gd name="csY1" fmla="*/ 0 h 457200"/>
+              <a:gd name="csX2" fmla="*/ 457200 w 457200"/>
+              <a:gd name="csY2" fmla="*/ 228600 h 457200"/>
+              <a:gd name="csX3" fmla="*/ 228600 w 457200"/>
+              <a:gd name="csY3" fmla="*/ 457200 h 457200"/>
+              <a:gd name="csX4" fmla="*/ 0 w 457200"/>
+              <a:gd name="csY4" fmla="*/ 228600 h 457200"/>
             </a:gdLst>
             <a:ahLst/>
             <a:cxnLst>
               <a:cxn ang="0">
-                <a:pos x="connsiteX0" y="connsiteY0"/>
-              </a:cxn>
-              <a:cxn ang="0">
-                <a:pos x="connsiteX1" y="connsiteY1"/>
-              </a:cxn>
-              <a:cxn ang="0">
-                <a:pos x="connsiteX2" y="connsiteY2"/>
-              </a:cxn>
-              <a:cxn ang="0">
-                <a:pos x="connsiteX3" y="connsiteY3"/>
-              </a:cxn>
-              <a:cxn ang="0">
-                <a:pos x="connsiteX4" y="connsiteY4"/>
+                <a:pos x="csX0" y="csY0"/>
+              </a:cxn>
+              <a:cxn ang="0">
+                <a:pos x="csX1" y="csY1"/>
+              </a:cxn>
+              <a:cxn ang="0">
+                <a:pos x="csX2" y="csY2"/>
+              </a:cxn>
+              <a:cxn ang="0">
+                <a:pos x="csX3" y="csY3"/>
+              </a:cxn>
+              <a:cxn ang="0">
+                <a:pos x="csX4" y="csY4"/>
               </a:cxn>
             </a:cxnLst>
             <a:rect l="l" t="t" r="r" b="b"/>
@@ -11370,33 +11370,33 @@
           <a:custGeom>
             <a:avLst/>
             <a:gdLst>
-              <a:gd name="connsiteX0" fmla="*/ 0 w 457200"/>
-              <a:gd name="connsiteY0" fmla="*/ 228600 h 457200"/>
-              <a:gd name="connsiteX1" fmla="*/ 228600 w 457200"/>
-              <a:gd name="connsiteY1" fmla="*/ 0 h 457200"/>
-              <a:gd name="connsiteX2" fmla="*/ 457200 w 457200"/>
-              <a:gd name="connsiteY2" fmla="*/ 228600 h 457200"/>
-              <a:gd name="connsiteX3" fmla="*/ 228600 w 457200"/>
-              <a:gd name="connsiteY3" fmla="*/ 457200 h 457200"/>
-              <a:gd name="connsiteX4" fmla="*/ 0 w 457200"/>
-              <a:gd name="connsiteY4" fmla="*/ 228600 h 457200"/>
+              <a:gd name="csX0" fmla="*/ 0 w 457200"/>
+              <a:gd name="csY0" fmla="*/ 228600 h 457200"/>
+              <a:gd name="csX1" fmla="*/ 228600 w 457200"/>
+              <a:gd name="csY1" fmla="*/ 0 h 457200"/>
+              <a:gd name="csX2" fmla="*/ 457200 w 457200"/>
+              <a:gd name="csY2" fmla="*/ 228600 h 457200"/>
+              <a:gd name="csX3" fmla="*/ 228600 w 457200"/>
+              <a:gd name="csY3" fmla="*/ 457200 h 457200"/>
+              <a:gd name="csX4" fmla="*/ 0 w 457200"/>
+              <a:gd name="csY4" fmla="*/ 228600 h 457200"/>
             </a:gdLst>
             <a:ahLst/>
             <a:cxnLst>
               <a:cxn ang="0">
-                <a:pos x="connsiteX0" y="connsiteY0"/>
-              </a:cxn>
-              <a:cxn ang="0">
-                <a:pos x="connsiteX1" y="connsiteY1"/>
-              </a:cxn>
-              <a:cxn ang="0">
-                <a:pos x="connsiteX2" y="connsiteY2"/>
-              </a:cxn>
-              <a:cxn ang="0">
-                <a:pos x="connsiteX3" y="connsiteY3"/>
-              </a:cxn>
-              <a:cxn ang="0">
-                <a:pos x="connsiteX4" y="connsiteY4"/>
+                <a:pos x="csX0" y="csY0"/>
+              </a:cxn>
+              <a:cxn ang="0">
+                <a:pos x="csX1" y="csY1"/>
+              </a:cxn>
+              <a:cxn ang="0">
+                <a:pos x="csX2" y="csY2"/>
+              </a:cxn>
+              <a:cxn ang="0">
+                <a:pos x="csX3" y="csY3"/>
+              </a:cxn>
+              <a:cxn ang="0">
+                <a:pos x="csX4" y="csY4"/>
               </a:cxn>
             </a:cxnLst>
             <a:rect l="l" t="t" r="r" b="b"/>
@@ -11516,63 +11516,63 @@
           <a:custGeom>
             <a:avLst/>
             <a:gdLst>
-              <a:gd name="connsiteX0" fmla="*/ 0 w 2333625"/>
-              <a:gd name="connsiteY0" fmla="*/ 0 h 369332"/>
-              <a:gd name="connsiteX1" fmla="*/ 583406 w 2333625"/>
-              <a:gd name="connsiteY1" fmla="*/ 0 h 369332"/>
-              <a:gd name="connsiteX2" fmla="*/ 1213485 w 2333625"/>
-              <a:gd name="connsiteY2" fmla="*/ 0 h 369332"/>
-              <a:gd name="connsiteX3" fmla="*/ 1773555 w 2333625"/>
-              <a:gd name="connsiteY3" fmla="*/ 0 h 369332"/>
-              <a:gd name="connsiteX4" fmla="*/ 2333625 w 2333625"/>
-              <a:gd name="connsiteY4" fmla="*/ 0 h 369332"/>
-              <a:gd name="connsiteX5" fmla="*/ 2333625 w 2333625"/>
-              <a:gd name="connsiteY5" fmla="*/ 369332 h 369332"/>
-              <a:gd name="connsiteX6" fmla="*/ 1703546 w 2333625"/>
-              <a:gd name="connsiteY6" fmla="*/ 369332 h 369332"/>
-              <a:gd name="connsiteX7" fmla="*/ 1143476 w 2333625"/>
-              <a:gd name="connsiteY7" fmla="*/ 369332 h 369332"/>
-              <a:gd name="connsiteX8" fmla="*/ 583406 w 2333625"/>
-              <a:gd name="connsiteY8" fmla="*/ 369332 h 369332"/>
-              <a:gd name="connsiteX9" fmla="*/ 0 w 2333625"/>
-              <a:gd name="connsiteY9" fmla="*/ 369332 h 369332"/>
-              <a:gd name="connsiteX10" fmla="*/ 0 w 2333625"/>
-              <a:gd name="connsiteY10" fmla="*/ 0 h 369332"/>
+              <a:gd name="csX0" fmla="*/ 0 w 2333625"/>
+              <a:gd name="csY0" fmla="*/ 0 h 369332"/>
+              <a:gd name="csX1" fmla="*/ 583406 w 2333625"/>
+              <a:gd name="csY1" fmla="*/ 0 h 369332"/>
+              <a:gd name="csX2" fmla="*/ 1213485 w 2333625"/>
+              <a:gd name="csY2" fmla="*/ 0 h 369332"/>
+              <a:gd name="csX3" fmla="*/ 1773555 w 2333625"/>
+              <a:gd name="csY3" fmla="*/ 0 h 369332"/>
+              <a:gd name="csX4" fmla="*/ 2333625 w 2333625"/>
+              <a:gd name="csY4" fmla="*/ 0 h 369332"/>
+              <a:gd name="csX5" fmla="*/ 2333625 w 2333625"/>
+              <a:gd name="csY5" fmla="*/ 369332 h 369332"/>
+              <a:gd name="csX6" fmla="*/ 1703546 w 2333625"/>
+              <a:gd name="csY6" fmla="*/ 369332 h 369332"/>
+              <a:gd name="csX7" fmla="*/ 1143476 w 2333625"/>
+              <a:gd name="csY7" fmla="*/ 369332 h 369332"/>
+              <a:gd name="csX8" fmla="*/ 583406 w 2333625"/>
+              <a:gd name="csY8" fmla="*/ 369332 h 369332"/>
+              <a:gd name="csX9" fmla="*/ 0 w 2333625"/>
+              <a:gd name="csY9" fmla="*/ 369332 h 369332"/>
+              <a:gd name="csX10" fmla="*/ 0 w 2333625"/>
+              <a:gd name="csY10" fmla="*/ 0 h 369332"/>
             </a:gdLst>
             <a:ahLst/>
             <a:cxnLst>
               <a:cxn ang="0">
-                <a:pos x="connsiteX0" y="connsiteY0"/>
-              </a:cxn>
-              <a:cxn ang="0">
-                <a:pos x="connsiteX1" y="connsiteY1"/>
-              </a:cxn>
-              <a:cxn ang="0">
-                <a:pos x="connsiteX2" y="connsiteY2"/>
-              </a:cxn>
-              <a:cxn ang="0">
-                <a:pos x="connsiteX3" y="connsiteY3"/>
-              </a:cxn>
-              <a:cxn ang="0">
-                <a:pos x="connsiteX4" y="connsiteY4"/>
-              </a:cxn>
-              <a:cxn ang="0">
-                <a:pos x="connsiteX5" y="connsiteY5"/>
-              </a:cxn>
-              <a:cxn ang="0">
-                <a:pos x="connsiteX6" y="connsiteY6"/>
-              </a:cxn>
-              <a:cxn ang="0">
-                <a:pos x="connsiteX7" y="connsiteY7"/>
-              </a:cxn>
-              <a:cxn ang="0">
-                <a:pos x="connsiteX8" y="connsiteY8"/>
-              </a:cxn>
-              <a:cxn ang="0">
-                <a:pos x="connsiteX9" y="connsiteY9"/>
-              </a:cxn>
-              <a:cxn ang="0">
-                <a:pos x="connsiteX10" y="connsiteY10"/>
+                <a:pos x="csX0" y="csY0"/>
+              </a:cxn>
+              <a:cxn ang="0">
+                <a:pos x="csX1" y="csY1"/>
+              </a:cxn>
+              <a:cxn ang="0">
+                <a:pos x="csX2" y="csY2"/>
+              </a:cxn>
+              <a:cxn ang="0">
+                <a:pos x="csX3" y="csY3"/>
+              </a:cxn>
+              <a:cxn ang="0">
+                <a:pos x="csX4" y="csY4"/>
+              </a:cxn>
+              <a:cxn ang="0">
+                <a:pos x="csX5" y="csY5"/>
+              </a:cxn>
+              <a:cxn ang="0">
+                <a:pos x="csX6" y="csY6"/>
+              </a:cxn>
+              <a:cxn ang="0">
+                <a:pos x="csX7" y="csY7"/>
+              </a:cxn>
+              <a:cxn ang="0">
+                <a:pos x="csX8" y="csY8"/>
+              </a:cxn>
+              <a:cxn ang="0">
+                <a:pos x="csX9" y="csY9"/>
+              </a:cxn>
+              <a:cxn ang="0">
+                <a:pos x="csX10" y="csY10"/>
               </a:cxn>
             </a:cxnLst>
             <a:rect l="l" t="t" r="r" b="b"/>
@@ -11757,63 +11757,63 @@
           <a:custGeom>
             <a:avLst/>
             <a:gdLst>
-              <a:gd name="connsiteX0" fmla="*/ 0 w 2333625"/>
-              <a:gd name="connsiteY0" fmla="*/ 0 h 369332"/>
-              <a:gd name="connsiteX1" fmla="*/ 583406 w 2333625"/>
-              <a:gd name="connsiteY1" fmla="*/ 0 h 369332"/>
-              <a:gd name="connsiteX2" fmla="*/ 1213485 w 2333625"/>
-              <a:gd name="connsiteY2" fmla="*/ 0 h 369332"/>
-              <a:gd name="connsiteX3" fmla="*/ 1773555 w 2333625"/>
-              <a:gd name="connsiteY3" fmla="*/ 0 h 369332"/>
-              <a:gd name="connsiteX4" fmla="*/ 2333625 w 2333625"/>
-              <a:gd name="connsiteY4" fmla="*/ 0 h 369332"/>
-              <a:gd name="connsiteX5" fmla="*/ 2333625 w 2333625"/>
-              <a:gd name="connsiteY5" fmla="*/ 369332 h 369332"/>
-              <a:gd name="connsiteX6" fmla="*/ 1703546 w 2333625"/>
-              <a:gd name="connsiteY6" fmla="*/ 369332 h 369332"/>
-              <a:gd name="connsiteX7" fmla="*/ 1143476 w 2333625"/>
-              <a:gd name="connsiteY7" fmla="*/ 369332 h 369332"/>
-              <a:gd name="connsiteX8" fmla="*/ 583406 w 2333625"/>
-              <a:gd name="connsiteY8" fmla="*/ 369332 h 369332"/>
-              <a:gd name="connsiteX9" fmla="*/ 0 w 2333625"/>
-              <a:gd name="connsiteY9" fmla="*/ 369332 h 369332"/>
-              <a:gd name="connsiteX10" fmla="*/ 0 w 2333625"/>
-              <a:gd name="connsiteY10" fmla="*/ 0 h 369332"/>
+              <a:gd name="csX0" fmla="*/ 0 w 2333625"/>
+              <a:gd name="csY0" fmla="*/ 0 h 369332"/>
+              <a:gd name="csX1" fmla="*/ 583406 w 2333625"/>
+              <a:gd name="csY1" fmla="*/ 0 h 369332"/>
+              <a:gd name="csX2" fmla="*/ 1213485 w 2333625"/>
+              <a:gd name="csY2" fmla="*/ 0 h 369332"/>
+              <a:gd name="csX3" fmla="*/ 1773555 w 2333625"/>
+              <a:gd name="csY3" fmla="*/ 0 h 369332"/>
+              <a:gd name="csX4" fmla="*/ 2333625 w 2333625"/>
+              <a:gd name="csY4" fmla="*/ 0 h 369332"/>
+              <a:gd name="csX5" fmla="*/ 2333625 w 2333625"/>
+              <a:gd name="csY5" fmla="*/ 369332 h 369332"/>
+              <a:gd name="csX6" fmla="*/ 1703546 w 2333625"/>
+              <a:gd name="csY6" fmla="*/ 369332 h 369332"/>
+              <a:gd name="csX7" fmla="*/ 1143476 w 2333625"/>
+              <a:gd name="csY7" fmla="*/ 369332 h 369332"/>
+              <a:gd name="csX8" fmla="*/ 583406 w 2333625"/>
+              <a:gd name="csY8" fmla="*/ 369332 h 369332"/>
+              <a:gd name="csX9" fmla="*/ 0 w 2333625"/>
+              <a:gd name="csY9" fmla="*/ 369332 h 369332"/>
+              <a:gd name="csX10" fmla="*/ 0 w 2333625"/>
+              <a:gd name="csY10" fmla="*/ 0 h 369332"/>
             </a:gdLst>
             <a:ahLst/>
             <a:cxnLst>
               <a:cxn ang="0">
-                <a:pos x="connsiteX0" y="connsiteY0"/>
-              </a:cxn>
-              <a:cxn ang="0">
-                <a:pos x="connsiteX1" y="connsiteY1"/>
-              </a:cxn>
-              <a:cxn ang="0">
-                <a:pos x="connsiteX2" y="connsiteY2"/>
-              </a:cxn>
-              <a:cxn ang="0">
-                <a:pos x="connsiteX3" y="connsiteY3"/>
-              </a:cxn>
-              <a:cxn ang="0">
-                <a:pos x="connsiteX4" y="connsiteY4"/>
-              </a:cxn>
-              <a:cxn ang="0">
-                <a:pos x="connsiteX5" y="connsiteY5"/>
-              </a:cxn>
-              <a:cxn ang="0">
-                <a:pos x="connsiteX6" y="connsiteY6"/>
-              </a:cxn>
-              <a:cxn ang="0">
-                <a:pos x="connsiteX7" y="connsiteY7"/>
-              </a:cxn>
-              <a:cxn ang="0">
-                <a:pos x="connsiteX8" y="connsiteY8"/>
-              </a:cxn>
-              <a:cxn ang="0">
-                <a:pos x="connsiteX9" y="connsiteY9"/>
-              </a:cxn>
-              <a:cxn ang="0">
-                <a:pos x="connsiteX10" y="connsiteY10"/>
+                <a:pos x="csX0" y="csY0"/>
+              </a:cxn>
+              <a:cxn ang="0">
+                <a:pos x="csX1" y="csY1"/>
+              </a:cxn>
+              <a:cxn ang="0">
+                <a:pos x="csX2" y="csY2"/>
+              </a:cxn>
+              <a:cxn ang="0">
+                <a:pos x="csX3" y="csY3"/>
+              </a:cxn>
+              <a:cxn ang="0">
+                <a:pos x="csX4" y="csY4"/>
+              </a:cxn>
+              <a:cxn ang="0">
+                <a:pos x="csX5" y="csY5"/>
+              </a:cxn>
+              <a:cxn ang="0">
+                <a:pos x="csX6" y="csY6"/>
+              </a:cxn>
+              <a:cxn ang="0">
+                <a:pos x="csX7" y="csY7"/>
+              </a:cxn>
+              <a:cxn ang="0">
+                <a:pos x="csX8" y="csY8"/>
+              </a:cxn>
+              <a:cxn ang="0">
+                <a:pos x="csX9" y="csY9"/>
+              </a:cxn>
+              <a:cxn ang="0">
+                <a:pos x="csX10" y="csY10"/>
               </a:cxn>
             </a:cxnLst>
             <a:rect l="l" t="t" r="r" b="b"/>
@@ -11998,63 +11998,63 @@
           <a:custGeom>
             <a:avLst/>
             <a:gdLst>
-              <a:gd name="connsiteX0" fmla="*/ 0 w 2333625"/>
-              <a:gd name="connsiteY0" fmla="*/ 0 h 369332"/>
-              <a:gd name="connsiteX1" fmla="*/ 583406 w 2333625"/>
-              <a:gd name="connsiteY1" fmla="*/ 0 h 369332"/>
-              <a:gd name="connsiteX2" fmla="*/ 1213485 w 2333625"/>
-              <a:gd name="connsiteY2" fmla="*/ 0 h 369332"/>
-              <a:gd name="connsiteX3" fmla="*/ 1773555 w 2333625"/>
-              <a:gd name="connsiteY3" fmla="*/ 0 h 369332"/>
-              <a:gd name="connsiteX4" fmla="*/ 2333625 w 2333625"/>
-              <a:gd name="connsiteY4" fmla="*/ 0 h 369332"/>
-              <a:gd name="connsiteX5" fmla="*/ 2333625 w 2333625"/>
-              <a:gd name="connsiteY5" fmla="*/ 369332 h 369332"/>
-              <a:gd name="connsiteX6" fmla="*/ 1703546 w 2333625"/>
-              <a:gd name="connsiteY6" fmla="*/ 369332 h 369332"/>
-              <a:gd name="connsiteX7" fmla="*/ 1143476 w 2333625"/>
-              <a:gd name="connsiteY7" fmla="*/ 369332 h 369332"/>
-              <a:gd name="connsiteX8" fmla="*/ 583406 w 2333625"/>
-              <a:gd name="connsiteY8" fmla="*/ 369332 h 369332"/>
-              <a:gd name="connsiteX9" fmla="*/ 0 w 2333625"/>
-              <a:gd name="connsiteY9" fmla="*/ 369332 h 369332"/>
-              <a:gd name="connsiteX10" fmla="*/ 0 w 2333625"/>
-              <a:gd name="connsiteY10" fmla="*/ 0 h 369332"/>
+              <a:gd name="csX0" fmla="*/ 0 w 2333625"/>
+              <a:gd name="csY0" fmla="*/ 0 h 369332"/>
+              <a:gd name="csX1" fmla="*/ 583406 w 2333625"/>
+              <a:gd name="csY1" fmla="*/ 0 h 369332"/>
+              <a:gd name="csX2" fmla="*/ 1213485 w 2333625"/>
+              <a:gd name="csY2" fmla="*/ 0 h 369332"/>
+              <a:gd name="csX3" fmla="*/ 1773555 w 2333625"/>
+              <a:gd name="csY3" fmla="*/ 0 h 369332"/>
+              <a:gd name="csX4" fmla="*/ 2333625 w 2333625"/>
+              <a:gd name="csY4" fmla="*/ 0 h 369332"/>
+              <a:gd name="csX5" fmla="*/ 2333625 w 2333625"/>
+              <a:gd name="csY5" fmla="*/ 369332 h 369332"/>
+              <a:gd name="csX6" fmla="*/ 1703546 w 2333625"/>
+              <a:gd name="csY6" fmla="*/ 369332 h 369332"/>
+              <a:gd name="csX7" fmla="*/ 1143476 w 2333625"/>
+              <a:gd name="csY7" fmla="*/ 369332 h 369332"/>
+              <a:gd name="csX8" fmla="*/ 583406 w 2333625"/>
+              <a:gd name="csY8" fmla="*/ 369332 h 369332"/>
+              <a:gd name="csX9" fmla="*/ 0 w 2333625"/>
+              <a:gd name="csY9" fmla="*/ 369332 h 369332"/>
+              <a:gd name="csX10" fmla="*/ 0 w 2333625"/>
+              <a:gd name="csY10" fmla="*/ 0 h 369332"/>
             </a:gdLst>
             <a:ahLst/>
             <a:cxnLst>
               <a:cxn ang="0">
-                <a:pos x="connsiteX0" y="connsiteY0"/>
-              </a:cxn>
-              <a:cxn ang="0">
-                <a:pos x="connsiteX1" y="connsiteY1"/>
-              </a:cxn>
-              <a:cxn ang="0">
-                <a:pos x="connsiteX2" y="connsiteY2"/>
-              </a:cxn>
-              <a:cxn ang="0">
-                <a:pos x="connsiteX3" y="connsiteY3"/>
-              </a:cxn>
-              <a:cxn ang="0">
-                <a:pos x="connsiteX4" y="connsiteY4"/>
-              </a:cxn>
-              <a:cxn ang="0">
-                <a:pos x="connsiteX5" y="connsiteY5"/>
-              </a:cxn>
-              <a:cxn ang="0">
-                <a:pos x="connsiteX6" y="connsiteY6"/>
-              </a:cxn>
-              <a:cxn ang="0">
-                <a:pos x="connsiteX7" y="connsiteY7"/>
-              </a:cxn>
-              <a:cxn ang="0">
-                <a:pos x="connsiteX8" y="connsiteY8"/>
-              </a:cxn>
-              <a:cxn ang="0">
-                <a:pos x="connsiteX9" y="connsiteY9"/>
-              </a:cxn>
-              <a:cxn ang="0">
-                <a:pos x="connsiteX10" y="connsiteY10"/>
+                <a:pos x="csX0" y="csY0"/>
+              </a:cxn>
+              <a:cxn ang="0">
+                <a:pos x="csX1" y="csY1"/>
+              </a:cxn>
+              <a:cxn ang="0">
+                <a:pos x="csX2" y="csY2"/>
+              </a:cxn>
+              <a:cxn ang="0">
+                <a:pos x="csX3" y="csY3"/>
+              </a:cxn>
+              <a:cxn ang="0">
+                <a:pos x="csX4" y="csY4"/>
+              </a:cxn>
+              <a:cxn ang="0">
+                <a:pos x="csX5" y="csY5"/>
+              </a:cxn>
+              <a:cxn ang="0">
+                <a:pos x="csX6" y="csY6"/>
+              </a:cxn>
+              <a:cxn ang="0">
+                <a:pos x="csX7" y="csY7"/>
+              </a:cxn>
+              <a:cxn ang="0">
+                <a:pos x="csX8" y="csY8"/>
+              </a:cxn>
+              <a:cxn ang="0">
+                <a:pos x="csX9" y="csY9"/>
+              </a:cxn>
+              <a:cxn ang="0">
+                <a:pos x="csX10" y="csY10"/>
               </a:cxn>
             </a:cxnLst>
             <a:rect l="l" t="t" r="r" b="b"/>
@@ -12239,63 +12239,63 @@
           <a:custGeom>
             <a:avLst/>
             <a:gdLst>
-              <a:gd name="connsiteX0" fmla="*/ 0 w 2333625"/>
-              <a:gd name="connsiteY0" fmla="*/ 0 h 369332"/>
-              <a:gd name="connsiteX1" fmla="*/ 583406 w 2333625"/>
-              <a:gd name="connsiteY1" fmla="*/ 0 h 369332"/>
-              <a:gd name="connsiteX2" fmla="*/ 1213485 w 2333625"/>
-              <a:gd name="connsiteY2" fmla="*/ 0 h 369332"/>
-              <a:gd name="connsiteX3" fmla="*/ 1773555 w 2333625"/>
-              <a:gd name="connsiteY3" fmla="*/ 0 h 369332"/>
-              <a:gd name="connsiteX4" fmla="*/ 2333625 w 2333625"/>
-              <a:gd name="connsiteY4" fmla="*/ 0 h 369332"/>
-              <a:gd name="connsiteX5" fmla="*/ 2333625 w 2333625"/>
-              <a:gd name="connsiteY5" fmla="*/ 369332 h 369332"/>
-              <a:gd name="connsiteX6" fmla="*/ 1703546 w 2333625"/>
-              <a:gd name="connsiteY6" fmla="*/ 369332 h 369332"/>
-              <a:gd name="connsiteX7" fmla="*/ 1143476 w 2333625"/>
-              <a:gd name="connsiteY7" fmla="*/ 369332 h 369332"/>
-              <a:gd name="connsiteX8" fmla="*/ 583406 w 2333625"/>
-              <a:gd name="connsiteY8" fmla="*/ 369332 h 369332"/>
-              <a:gd name="connsiteX9" fmla="*/ 0 w 2333625"/>
-              <a:gd name="connsiteY9" fmla="*/ 369332 h 369332"/>
-              <a:gd name="connsiteX10" fmla="*/ 0 w 2333625"/>
-              <a:gd name="connsiteY10" fmla="*/ 0 h 369332"/>
+              <a:gd name="csX0" fmla="*/ 0 w 2333625"/>
+              <a:gd name="csY0" fmla="*/ 0 h 369332"/>
+              <a:gd name="csX1" fmla="*/ 583406 w 2333625"/>
+              <a:gd name="csY1" fmla="*/ 0 h 369332"/>
+              <a:gd name="csX2" fmla="*/ 1213485 w 2333625"/>
+              <a:gd name="csY2" fmla="*/ 0 h 369332"/>
+              <a:gd name="csX3" fmla="*/ 1773555 w 2333625"/>
+              <a:gd name="csY3" fmla="*/ 0 h 369332"/>
+              <a:gd name="csX4" fmla="*/ 2333625 w 2333625"/>
+              <a:gd name="csY4" fmla="*/ 0 h 369332"/>
+              <a:gd name="csX5" fmla="*/ 2333625 w 2333625"/>
+              <a:gd name="csY5" fmla="*/ 369332 h 369332"/>
+              <a:gd name="csX6" fmla="*/ 1703546 w 2333625"/>
+              <a:gd name="csY6" fmla="*/ 369332 h 369332"/>
+              <a:gd name="csX7" fmla="*/ 1143476 w 2333625"/>
+              <a:gd name="csY7" fmla="*/ 369332 h 369332"/>
+              <a:gd name="csX8" fmla="*/ 583406 w 2333625"/>
+              <a:gd name="csY8" fmla="*/ 369332 h 369332"/>
+              <a:gd name="csX9" fmla="*/ 0 w 2333625"/>
+              <a:gd name="csY9" fmla="*/ 369332 h 369332"/>
+              <a:gd name="csX10" fmla="*/ 0 w 2333625"/>
+              <a:gd name="csY10" fmla="*/ 0 h 369332"/>
             </a:gdLst>
             <a:ahLst/>
             <a:cxnLst>
               <a:cxn ang="0">
-                <a:pos x="connsiteX0" y="connsiteY0"/>
-              </a:cxn>
-              <a:cxn ang="0">
-                <a:pos x="connsiteX1" y="connsiteY1"/>
-              </a:cxn>
-              <a:cxn ang="0">
-                <a:pos x="connsiteX2" y="connsiteY2"/>
-              </a:cxn>
-              <a:cxn ang="0">
-                <a:pos x="connsiteX3" y="connsiteY3"/>
-              </a:cxn>
-              <a:cxn ang="0">
-                <a:pos x="connsiteX4" y="connsiteY4"/>
-              </a:cxn>
-              <a:cxn ang="0">
-                <a:pos x="connsiteX5" y="connsiteY5"/>
-              </a:cxn>
-              <a:cxn ang="0">
-                <a:pos x="connsiteX6" y="connsiteY6"/>
-              </a:cxn>
-              <a:cxn ang="0">
-                <a:pos x="connsiteX7" y="connsiteY7"/>
-              </a:cxn>
-              <a:cxn ang="0">
-                <a:pos x="connsiteX8" y="connsiteY8"/>
-              </a:cxn>
-              <a:cxn ang="0">
-                <a:pos x="connsiteX9" y="connsiteY9"/>
-              </a:cxn>
-              <a:cxn ang="0">
-                <a:pos x="connsiteX10" y="connsiteY10"/>
+                <a:pos x="csX0" y="csY0"/>
+              </a:cxn>
+              <a:cxn ang="0">
+                <a:pos x="csX1" y="csY1"/>
+              </a:cxn>
+              <a:cxn ang="0">
+                <a:pos x="csX2" y="csY2"/>
+              </a:cxn>
+              <a:cxn ang="0">
+                <a:pos x="csX3" y="csY3"/>
+              </a:cxn>
+              <a:cxn ang="0">
+                <a:pos x="csX4" y="csY4"/>
+              </a:cxn>
+              <a:cxn ang="0">
+                <a:pos x="csX5" y="csY5"/>
+              </a:cxn>
+              <a:cxn ang="0">
+                <a:pos x="csX6" y="csY6"/>
+              </a:cxn>
+              <a:cxn ang="0">
+                <a:pos x="csX7" y="csY7"/>
+              </a:cxn>
+              <a:cxn ang="0">
+                <a:pos x="csX8" y="csY8"/>
+              </a:cxn>
+              <a:cxn ang="0">
+                <a:pos x="csX9" y="csY9"/>
+              </a:cxn>
+              <a:cxn ang="0">
+                <a:pos x="csX10" y="csY10"/>
               </a:cxn>
             </a:cxnLst>
             <a:rect l="l" t="t" r="r" b="b"/>

--- a/slides/1-intro.pptx
+++ b/slides/1-intro.pptx
@@ -5,7 +5,7 @@
     <p:sldMasterId id="2147483696" r:id="rId1"/>
   </p:sldMasterIdLst>
   <p:notesMasterIdLst>
-    <p:notesMasterId r:id="rId21"/>
+    <p:notesMasterId r:id="rId20"/>
   </p:notesMasterIdLst>
   <p:sldIdLst>
     <p:sldId id="256" r:id="rId2"/>
@@ -15,18 +15,17 @@
     <p:sldId id="265" r:id="rId6"/>
     <p:sldId id="258" r:id="rId7"/>
     <p:sldId id="259" r:id="rId8"/>
-    <p:sldId id="260" r:id="rId9"/>
-    <p:sldId id="262" r:id="rId10"/>
-    <p:sldId id="266" r:id="rId11"/>
-    <p:sldId id="267" r:id="rId12"/>
-    <p:sldId id="268" r:id="rId13"/>
-    <p:sldId id="269" r:id="rId14"/>
-    <p:sldId id="270" r:id="rId15"/>
-    <p:sldId id="271" r:id="rId16"/>
-    <p:sldId id="272" r:id="rId17"/>
-    <p:sldId id="273" r:id="rId18"/>
-    <p:sldId id="261" r:id="rId19"/>
-    <p:sldId id="274" r:id="rId20"/>
+    <p:sldId id="262" r:id="rId9"/>
+    <p:sldId id="266" r:id="rId10"/>
+    <p:sldId id="267" r:id="rId11"/>
+    <p:sldId id="268" r:id="rId12"/>
+    <p:sldId id="269" r:id="rId13"/>
+    <p:sldId id="270" r:id="rId14"/>
+    <p:sldId id="271" r:id="rId15"/>
+    <p:sldId id="272" r:id="rId16"/>
+    <p:sldId id="273" r:id="rId17"/>
+    <p:sldId id="261" r:id="rId18"/>
+    <p:sldId id="274" r:id="rId19"/>
   </p:sldIdLst>
   <p:sldSz cx="12192000" cy="6858000"/>
   <p:notesSz cx="6858000" cy="9144000"/>
@@ -627,23 +626,50 @@
           <a:p>
             <a:r>
               <a:rPr lang="en-US" dirty="0"/>
-              <a:t>Recent debates have been clouded by a misleading inference pattern, which we term the “Redescription Fallacy.” This fallacy arises when critics argue that a system cannot model a particular cognitive capacity, simply because its operations can be explained in less abstract and more deflationary terms. In the present context, the fallacy manifests in claims that LLMs could not possibly be good models of some cognitive capacity 𝜙 because their operations merely consist in a collection of statistical calculations, or linear algebra operations, or next-token predictions. Such arguments are only valid if accompanied by evidence demonstrating that a system, defined in these terms, is inherently incapable of implementing 𝜙. To illustrate, consider the flawed logic in asserting that a piano could not possibly produce harmony because it can be described as a collection of hammers striking strings, or (more pointedly) that brain activity could not possibly implement cognition because it can be described as a collection of neural firings. The critical question is not whether the operations of an LLM can be simplistically described in non-mental terms, but whether these operations, when appropriately organized, can implement the same processes or algorithms as the mind, when described at an appropriate level of computational abstraction.</a:t>
-            </a:r>
-          </a:p>
-          <a:p>
-            <a:r>
-              <a:rPr lang="en-US" dirty="0" err="1">
-                <a:ea typeface="Calibri"/>
-                <a:cs typeface="Calibri"/>
-              </a:rPr>
-              <a:t>Milliere</a:t>
-            </a:r>
-            <a:r>
-              <a:rPr lang="en-US" dirty="0">
-                <a:ea typeface="Calibri"/>
-                <a:cs typeface="Calibri"/>
-              </a:rPr>
-              <a:t> and Buckner, 2024</a:t>
+              <a:t>Welcome to introduction to large </a:t>
+            </a:r>
+            <a:r>
+              <a:rPr lang="en-US" dirty="0" err="1"/>
+              <a:t>langauge</a:t>
+            </a:r>
+            <a:r>
+              <a:rPr lang="en-US" dirty="0"/>
+              <a:t> models</a:t>
+            </a:r>
+          </a:p>
+          <a:p>
+            <a:endParaRPr lang="en-US" dirty="0"/>
+          </a:p>
+          <a:p>
+            <a:r>
+              <a:rPr lang="en-US" dirty="0"/>
+              <a:t>I’m Fin – MLE and I will be running workshop today</a:t>
+            </a:r>
+          </a:p>
+          <a:p>
+            <a:endParaRPr lang="en-US" dirty="0"/>
+          </a:p>
+          <a:p>
+            <a:r>
+              <a:rPr lang="en-US" dirty="0"/>
+              <a:t>Radzim and </a:t>
+            </a:r>
+            <a:r>
+              <a:rPr lang="en-US" dirty="0" err="1"/>
+              <a:t>Faibra</a:t>
+            </a:r>
+            <a:r>
+              <a:rPr lang="en-US" dirty="0"/>
+              <a:t> on hand to answer technical questions, who are engineers</a:t>
+            </a:r>
+          </a:p>
+          <a:p>
+            <a:endParaRPr lang="en-US" dirty="0"/>
+          </a:p>
+          <a:p>
+            <a:r>
+              <a:rPr lang="en-US" dirty="0"/>
+              <a:t>Will give you more of an intro on our group:</a:t>
             </a:r>
           </a:p>
         </p:txBody>
@@ -664,16 +690,989 @@
           <a:lstStyle/>
           <a:p>
             <a:fld id="{C2D7E69D-609B-4983-96D1-38CC478AEB14}" type="slidenum">
-              <a:t>8</a:t>
+              <a:rPr lang="en-GB" smtClean="0"/>
+              <a:t>1</a:t>
             </a:fld>
-            <a:endParaRPr lang="en-US"/>
+            <a:endParaRPr lang="en-GB"/>
           </a:p>
         </p:txBody>
       </p:sp>
     </p:spTree>
     <p:extLst>
       <p:ext uri="{BB962C8B-B14F-4D97-AF65-F5344CB8AC3E}">
-        <p14:creationId xmlns:p14="http://schemas.microsoft.com/office/powerpoint/2010/main" val="2758583674"/>
+        <p14:creationId xmlns:p14="http://schemas.microsoft.com/office/powerpoint/2010/main" val="2744497436"/>
+      </p:ext>
+    </p:extLst>
+  </p:cSld>
+  <p:clrMapOvr>
+    <a:masterClrMapping/>
+  </p:clrMapOvr>
+</p:notes>
+</file>
+
+<file path=ppt/notesSlides/notesSlide10.xml><?xml version="1.0" encoding="utf-8"?>
+<p:notes xmlns:a="http://schemas.openxmlformats.org/drawingml/2006/main" xmlns:r="http://schemas.openxmlformats.org/officeDocument/2006/relationships" xmlns:p="http://schemas.openxmlformats.org/presentationml/2006/main">
+  <p:cSld>
+    <p:spTree>
+      <p:nvGrpSpPr>
+        <p:cNvPr id="1" name=""/>
+        <p:cNvGrpSpPr/>
+        <p:nvPr/>
+      </p:nvGrpSpPr>
+      <p:grpSpPr>
+        <a:xfrm>
+          <a:off x="0" y="0"/>
+          <a:ext cx="0" cy="0"/>
+          <a:chOff x="0" y="0"/>
+          <a:chExt cx="0" cy="0"/>
+        </a:xfrm>
+      </p:grpSpPr>
+      <p:sp>
+        <p:nvSpPr>
+          <p:cNvPr id="2" name="Slide Image Placeholder 1"/>
+          <p:cNvSpPr>
+            <a:spLocks noGrp="1" noRot="1" noChangeAspect="1"/>
+          </p:cNvSpPr>
+          <p:nvPr>
+            <p:ph type="sldImg"/>
+          </p:nvPr>
+        </p:nvSpPr>
+        <p:spPr/>
+      </p:sp>
+      <p:sp>
+        <p:nvSpPr>
+          <p:cNvPr id="3" name="Notes Placeholder 2"/>
+          <p:cNvSpPr>
+            <a:spLocks noGrp="1"/>
+          </p:cNvSpPr>
+          <p:nvPr>
+            <p:ph type="body" idx="1"/>
+          </p:nvPr>
+        </p:nvSpPr>
+        <p:spPr/>
+        <p:txBody>
+          <a:bodyPr/>
+          <a:lstStyle/>
+          <a:p>
+            <a:endParaRPr lang="en-US" dirty="0"/>
+          </a:p>
+        </p:txBody>
+      </p:sp>
+      <p:sp>
+        <p:nvSpPr>
+          <p:cNvPr id="4" name="Slide Number Placeholder 3"/>
+          <p:cNvSpPr>
+            <a:spLocks noGrp="1"/>
+          </p:cNvSpPr>
+          <p:nvPr>
+            <p:ph type="sldNum" sz="quarter" idx="5"/>
+          </p:nvPr>
+        </p:nvSpPr>
+        <p:spPr/>
+        <p:txBody>
+          <a:bodyPr/>
+          <a:lstStyle/>
+          <a:p>
+            <a:fld id="{C2D7E69D-609B-4983-96D1-38CC478AEB14}" type="slidenum">
+              <a:rPr lang="en-GB" smtClean="0"/>
+              <a:t>15</a:t>
+            </a:fld>
+            <a:endParaRPr lang="en-GB"/>
+          </a:p>
+        </p:txBody>
+      </p:sp>
+    </p:spTree>
+    <p:extLst>
+      <p:ext uri="{BB962C8B-B14F-4D97-AF65-F5344CB8AC3E}">
+        <p14:creationId xmlns:p14="http://schemas.microsoft.com/office/powerpoint/2010/main" val="1079868011"/>
+      </p:ext>
+    </p:extLst>
+  </p:cSld>
+  <p:clrMapOvr>
+    <a:masterClrMapping/>
+  </p:clrMapOvr>
+</p:notes>
+</file>
+
+<file path=ppt/notesSlides/notesSlide2.xml><?xml version="1.0" encoding="utf-8"?>
+<p:notes xmlns:a="http://schemas.openxmlformats.org/drawingml/2006/main" xmlns:r="http://schemas.openxmlformats.org/officeDocument/2006/relationships" xmlns:p="http://schemas.openxmlformats.org/presentationml/2006/main">
+  <p:cSld>
+    <p:spTree>
+      <p:nvGrpSpPr>
+        <p:cNvPr id="1" name=""/>
+        <p:cNvGrpSpPr/>
+        <p:nvPr/>
+      </p:nvGrpSpPr>
+      <p:grpSpPr>
+        <a:xfrm>
+          <a:off x="0" y="0"/>
+          <a:ext cx="0" cy="0"/>
+          <a:chOff x="0" y="0"/>
+          <a:chExt cx="0" cy="0"/>
+        </a:xfrm>
+      </p:grpSpPr>
+      <p:sp>
+        <p:nvSpPr>
+          <p:cNvPr id="2" name="Slide Image Placeholder 1"/>
+          <p:cNvSpPr>
+            <a:spLocks noGrp="1" noRot="1" noChangeAspect="1"/>
+          </p:cNvSpPr>
+          <p:nvPr>
+            <p:ph type="sldImg"/>
+          </p:nvPr>
+        </p:nvSpPr>
+        <p:spPr/>
+      </p:sp>
+      <p:sp>
+        <p:nvSpPr>
+          <p:cNvPr id="3" name="Notes Placeholder 2"/>
+          <p:cNvSpPr>
+            <a:spLocks noGrp="1"/>
+          </p:cNvSpPr>
+          <p:nvPr>
+            <p:ph type="body" idx="1"/>
+          </p:nvPr>
+        </p:nvSpPr>
+        <p:spPr/>
+        <p:txBody>
+          <a:bodyPr/>
+          <a:lstStyle/>
+          <a:p>
+            <a:endParaRPr lang="en-US" dirty="0"/>
+          </a:p>
+          <a:p>
+            <a:r>
+              <a:rPr lang="en-US" dirty="0"/>
+              <a:t>Just before we get started, I would just like to give a brief overview of the Accelerate program.</a:t>
+            </a:r>
+          </a:p>
+          <a:p>
+            <a:endParaRPr lang="en-US" dirty="0"/>
+          </a:p>
+          <a:p>
+            <a:r>
+              <a:rPr lang="en-US" dirty="0"/>
+              <a:t>We are a group composed of researchers, machine learning engineers and </a:t>
+            </a:r>
+            <a:r>
+              <a:rPr lang="en-US" dirty="0" err="1"/>
+              <a:t>programme</a:t>
+            </a:r>
+            <a:r>
+              <a:rPr lang="en-US" dirty="0"/>
+              <a:t> staff.</a:t>
+            </a:r>
+          </a:p>
+          <a:p>
+            <a:endParaRPr lang="en-US" dirty="0"/>
+          </a:p>
+          <a:p>
+            <a:r>
+              <a:rPr lang="en-US" dirty="0"/>
+              <a:t>Our overarching goal is to support the adoption of AI in research at the university. </a:t>
+            </a:r>
+          </a:p>
+          <a:p>
+            <a:endParaRPr lang="en-US" dirty="0"/>
+          </a:p>
+          <a:p>
+            <a:r>
+              <a:rPr lang="en-US" dirty="0"/>
+              <a:t>We do this through activities such as</a:t>
+            </a:r>
+          </a:p>
+          <a:p>
+            <a:endParaRPr lang="en-US" dirty="0"/>
+          </a:p>
+          <a:p>
+            <a:r>
+              <a:rPr lang="en-US" dirty="0"/>
+              <a:t>Workshops (see in a second), AI Clinic, sections of university-wide workshops / events that are supported by us</a:t>
+            </a:r>
+          </a:p>
+          <a:p>
+            <a:endParaRPr lang="en-US" dirty="0"/>
+          </a:p>
+          <a:p>
+            <a:r>
+              <a:rPr lang="en-US" dirty="0"/>
+              <a:t>But also longer-term involvement on research projects in a research engineering capacity.</a:t>
+            </a:r>
+          </a:p>
+          <a:p>
+            <a:endParaRPr lang="en-US" dirty="0"/>
+          </a:p>
+          <a:p>
+            <a:r>
+              <a:rPr lang="en-US" dirty="0"/>
+              <a:t>Not just intersection of AI and Science!</a:t>
+            </a:r>
+          </a:p>
+          <a:p>
+            <a:endParaRPr lang="en-US" dirty="0"/>
+          </a:p>
+          <a:p>
+            <a:r>
+              <a:rPr lang="en-US" dirty="0"/>
+              <a:t>We’re finding more and more that researchers from the Humanities want to utilize machine learning methods, and we’re having to reassess what we think of as traditional science.</a:t>
+            </a:r>
+          </a:p>
+          <a:p>
+            <a:endParaRPr lang="en-US" dirty="0"/>
+          </a:p>
+        </p:txBody>
+      </p:sp>
+      <p:sp>
+        <p:nvSpPr>
+          <p:cNvPr id="4" name="Slide Number Placeholder 3"/>
+          <p:cNvSpPr>
+            <a:spLocks noGrp="1"/>
+          </p:cNvSpPr>
+          <p:nvPr>
+            <p:ph type="sldNum" sz="quarter" idx="5"/>
+          </p:nvPr>
+        </p:nvSpPr>
+        <p:spPr/>
+        <p:txBody>
+          <a:bodyPr/>
+          <a:lstStyle/>
+          <a:p>
+            <a:fld id="{C2D7E69D-609B-4983-96D1-38CC478AEB14}" type="slidenum">
+              <a:rPr lang="en-GB" smtClean="0"/>
+              <a:t>2</a:t>
+            </a:fld>
+            <a:endParaRPr lang="en-GB"/>
+          </a:p>
+        </p:txBody>
+      </p:sp>
+    </p:spTree>
+    <p:extLst>
+      <p:ext uri="{BB962C8B-B14F-4D97-AF65-F5344CB8AC3E}">
+        <p14:creationId xmlns:p14="http://schemas.microsoft.com/office/powerpoint/2010/main" val="3450249160"/>
+      </p:ext>
+    </p:extLst>
+  </p:cSld>
+  <p:clrMapOvr>
+    <a:masterClrMapping/>
+  </p:clrMapOvr>
+</p:notes>
+</file>
+
+<file path=ppt/notesSlides/notesSlide3.xml><?xml version="1.0" encoding="utf-8"?>
+<p:notes xmlns:a="http://schemas.openxmlformats.org/drawingml/2006/main" xmlns:r="http://schemas.openxmlformats.org/officeDocument/2006/relationships" xmlns:p="http://schemas.openxmlformats.org/presentationml/2006/main">
+  <p:cSld>
+    <p:spTree>
+      <p:nvGrpSpPr>
+        <p:cNvPr id="1" name=""/>
+        <p:cNvGrpSpPr/>
+        <p:nvPr/>
+      </p:nvGrpSpPr>
+      <p:grpSpPr>
+        <a:xfrm>
+          <a:off x="0" y="0"/>
+          <a:ext cx="0" cy="0"/>
+          <a:chOff x="0" y="0"/>
+          <a:chExt cx="0" cy="0"/>
+        </a:xfrm>
+      </p:grpSpPr>
+      <p:sp>
+        <p:nvSpPr>
+          <p:cNvPr id="2" name="Slide Image Placeholder 1"/>
+          <p:cNvSpPr>
+            <a:spLocks noGrp="1" noRot="1" noChangeAspect="1"/>
+          </p:cNvSpPr>
+          <p:nvPr>
+            <p:ph type="sldImg"/>
+          </p:nvPr>
+        </p:nvSpPr>
+        <p:spPr/>
+      </p:sp>
+      <p:sp>
+        <p:nvSpPr>
+          <p:cNvPr id="3" name="Notes Placeholder 2"/>
+          <p:cNvSpPr>
+            <a:spLocks noGrp="1"/>
+          </p:cNvSpPr>
+          <p:nvPr>
+            <p:ph type="body" idx="1"/>
+          </p:nvPr>
+        </p:nvSpPr>
+        <p:spPr/>
+        <p:txBody>
+          <a:bodyPr/>
+          <a:lstStyle/>
+          <a:p>
+            <a:r>
+              <a:rPr lang="en-US" dirty="0"/>
+              <a:t>We are ultimately here to facilitate this process of integrating AI into research.</a:t>
+            </a:r>
+          </a:p>
+          <a:p>
+            <a:endParaRPr lang="en-US" dirty="0"/>
+          </a:p>
+          <a:p>
+            <a:r>
+              <a:rPr lang="en-US" dirty="0"/>
+              <a:t>We run a couple of workshops at the moment: an introduction to large language models, a hands on LLMs, generative AI, diffusion models, docker, a packaging and publishing workshop, and now a new agents 4 science workshop</a:t>
+            </a:r>
+          </a:p>
+        </p:txBody>
+      </p:sp>
+      <p:sp>
+        <p:nvSpPr>
+          <p:cNvPr id="4" name="Slide Number Placeholder 3"/>
+          <p:cNvSpPr>
+            <a:spLocks noGrp="1"/>
+          </p:cNvSpPr>
+          <p:nvPr>
+            <p:ph type="sldNum" sz="quarter" idx="5"/>
+          </p:nvPr>
+        </p:nvSpPr>
+        <p:spPr/>
+        <p:txBody>
+          <a:bodyPr/>
+          <a:lstStyle/>
+          <a:p>
+            <a:fld id="{C2D7E69D-609B-4983-96D1-38CC478AEB14}" type="slidenum">
+              <a:rPr lang="en-GB" smtClean="0"/>
+              <a:t>3</a:t>
+            </a:fld>
+            <a:endParaRPr lang="en-GB"/>
+          </a:p>
+        </p:txBody>
+      </p:sp>
+    </p:spTree>
+    <p:extLst>
+      <p:ext uri="{BB962C8B-B14F-4D97-AF65-F5344CB8AC3E}">
+        <p14:creationId xmlns:p14="http://schemas.microsoft.com/office/powerpoint/2010/main" val="4144999791"/>
+      </p:ext>
+    </p:extLst>
+  </p:cSld>
+  <p:clrMapOvr>
+    <a:masterClrMapping/>
+  </p:clrMapOvr>
+</p:notes>
+</file>
+
+<file path=ppt/notesSlides/notesSlide4.xml><?xml version="1.0" encoding="utf-8"?>
+<p:notes xmlns:a="http://schemas.openxmlformats.org/drawingml/2006/main" xmlns:r="http://schemas.openxmlformats.org/officeDocument/2006/relationships" xmlns:p="http://schemas.openxmlformats.org/presentationml/2006/main">
+  <p:cSld>
+    <p:spTree>
+      <p:nvGrpSpPr>
+        <p:cNvPr id="1" name=""/>
+        <p:cNvGrpSpPr/>
+        <p:nvPr/>
+      </p:nvGrpSpPr>
+      <p:grpSpPr>
+        <a:xfrm>
+          <a:off x="0" y="0"/>
+          <a:ext cx="0" cy="0"/>
+          <a:chOff x="0" y="0"/>
+          <a:chExt cx="0" cy="0"/>
+        </a:xfrm>
+      </p:grpSpPr>
+      <p:sp>
+        <p:nvSpPr>
+          <p:cNvPr id="2" name="Slide Image Placeholder 1"/>
+          <p:cNvSpPr>
+            <a:spLocks noGrp="1" noRot="1" noChangeAspect="1"/>
+          </p:cNvSpPr>
+          <p:nvPr>
+            <p:ph type="sldImg"/>
+          </p:nvPr>
+        </p:nvSpPr>
+        <p:spPr/>
+      </p:sp>
+      <p:sp>
+        <p:nvSpPr>
+          <p:cNvPr id="3" name="Notes Placeholder 2"/>
+          <p:cNvSpPr>
+            <a:spLocks noGrp="1"/>
+          </p:cNvSpPr>
+          <p:nvPr>
+            <p:ph type="body" idx="1"/>
+          </p:nvPr>
+        </p:nvSpPr>
+        <p:spPr/>
+        <p:txBody>
+          <a:bodyPr/>
+          <a:lstStyle/>
+          <a:p>
+            <a:r>
+              <a:rPr lang="en-US" dirty="0"/>
+              <a:t>Allow 5 minutes</a:t>
+            </a:r>
+          </a:p>
+        </p:txBody>
+      </p:sp>
+      <p:sp>
+        <p:nvSpPr>
+          <p:cNvPr id="4" name="Slide Number Placeholder 3"/>
+          <p:cNvSpPr>
+            <a:spLocks noGrp="1"/>
+          </p:cNvSpPr>
+          <p:nvPr>
+            <p:ph type="sldNum" sz="quarter" idx="5"/>
+          </p:nvPr>
+        </p:nvSpPr>
+        <p:spPr/>
+        <p:txBody>
+          <a:bodyPr/>
+          <a:lstStyle/>
+          <a:p>
+            <a:fld id="{C2D7E69D-609B-4983-96D1-38CC478AEB14}" type="slidenum">
+              <a:rPr lang="en-GB" smtClean="0"/>
+              <a:t>5</a:t>
+            </a:fld>
+            <a:endParaRPr lang="en-GB"/>
+          </a:p>
+        </p:txBody>
+      </p:sp>
+    </p:spTree>
+    <p:extLst>
+      <p:ext uri="{BB962C8B-B14F-4D97-AF65-F5344CB8AC3E}">
+        <p14:creationId xmlns:p14="http://schemas.microsoft.com/office/powerpoint/2010/main" val="3075358069"/>
+      </p:ext>
+    </p:extLst>
+  </p:cSld>
+  <p:clrMapOvr>
+    <a:masterClrMapping/>
+  </p:clrMapOvr>
+</p:notes>
+</file>
+
+<file path=ppt/notesSlides/notesSlide5.xml><?xml version="1.0" encoding="utf-8"?>
+<p:notes xmlns:a="http://schemas.openxmlformats.org/drawingml/2006/main" xmlns:r="http://schemas.openxmlformats.org/officeDocument/2006/relationships" xmlns:p="http://schemas.openxmlformats.org/presentationml/2006/main">
+  <p:cSld>
+    <p:spTree>
+      <p:nvGrpSpPr>
+        <p:cNvPr id="1" name=""/>
+        <p:cNvGrpSpPr/>
+        <p:nvPr/>
+      </p:nvGrpSpPr>
+      <p:grpSpPr>
+        <a:xfrm>
+          <a:off x="0" y="0"/>
+          <a:ext cx="0" cy="0"/>
+          <a:chOff x="0" y="0"/>
+          <a:chExt cx="0" cy="0"/>
+        </a:xfrm>
+      </p:grpSpPr>
+      <p:sp>
+        <p:nvSpPr>
+          <p:cNvPr id="2" name="Slide Image Placeholder 1"/>
+          <p:cNvSpPr>
+            <a:spLocks noGrp="1" noRot="1" noChangeAspect="1"/>
+          </p:cNvSpPr>
+          <p:nvPr>
+            <p:ph type="sldImg"/>
+          </p:nvPr>
+        </p:nvSpPr>
+        <p:spPr/>
+      </p:sp>
+      <p:sp>
+        <p:nvSpPr>
+          <p:cNvPr id="3" name="Notes Placeholder 2"/>
+          <p:cNvSpPr>
+            <a:spLocks noGrp="1"/>
+          </p:cNvSpPr>
+          <p:nvPr>
+            <p:ph type="body" idx="1"/>
+          </p:nvPr>
+        </p:nvSpPr>
+        <p:spPr/>
+        <p:txBody>
+          <a:bodyPr/>
+          <a:lstStyle/>
+          <a:p>
+            <a:r>
+              <a:rPr lang="en-US" dirty="0"/>
+              <a:t>Going to think of our model as a Llama</a:t>
+            </a:r>
+          </a:p>
+          <a:p>
+            <a:endParaRPr lang="en-US" dirty="0"/>
+          </a:p>
+          <a:p>
+            <a:r>
+              <a:rPr lang="en-US" dirty="0"/>
+              <a:t>Has a specific meaning in the history of AI</a:t>
+            </a:r>
+          </a:p>
+          <a:p>
+            <a:endParaRPr lang="en-US" dirty="0"/>
+          </a:p>
+          <a:p>
+            <a:r>
+              <a:rPr lang="en-US" dirty="0"/>
+              <a:t>Llama is an acronym: Large Language Model Meta AI</a:t>
+            </a:r>
+          </a:p>
+          <a:p>
+            <a:endParaRPr lang="en-US" dirty="0"/>
+          </a:p>
+          <a:p>
+            <a:r>
+              <a:rPr lang="en-US" dirty="0"/>
+              <a:t>Released for research-only purposes by Meta in February 2023 following success of GPT-3.5 (ChatGPT moment, i.e. finetuned version of GPT-3) to prove you didn't need closed APIs and huge inference budgets</a:t>
+            </a:r>
+          </a:p>
+          <a:p>
+            <a:endParaRPr lang="en-US" dirty="0"/>
+          </a:p>
+          <a:p>
+            <a:r>
+              <a:rPr lang="en-US" dirty="0"/>
+              <a:t>Uses the same underlying architecture - it is an autoregressive decoder-only transformer. We will come back these words</a:t>
+            </a:r>
+          </a:p>
+          <a:p>
+            <a:endParaRPr lang="en-US" dirty="0"/>
+          </a:p>
+          <a:p>
+            <a:r>
+              <a:rPr lang="en-US" dirty="0"/>
+              <a:t>Shortly leaked and spawned the community of open weights models. </a:t>
+            </a:r>
+          </a:p>
+          <a:p>
+            <a:endParaRPr lang="en-US" dirty="0"/>
+          </a:p>
+          <a:p>
+            <a:r>
+              <a:rPr lang="en-US" dirty="0"/>
+              <a:t>As researchers, we tend to prefer open source models for various reasons so we will be using this as the source of our discussion on model architecture. Most differences between frontier models and Llama are too subtle or complex to discuss for the scope of this workshop</a:t>
+            </a:r>
+          </a:p>
+          <a:p>
+            <a:endParaRPr lang="en-US" dirty="0"/>
+          </a:p>
+          <a:p>
+            <a:r>
+              <a:rPr lang="en-US" dirty="0"/>
+              <a:t>The basic pieces, which will ultimately inform the narrative today are [go through]</a:t>
+            </a:r>
+          </a:p>
+          <a:p>
+            <a:endParaRPr lang="en-US" dirty="0"/>
+          </a:p>
+          <a:p>
+            <a:endParaRPr lang="en-US" dirty="0"/>
+          </a:p>
+        </p:txBody>
+      </p:sp>
+      <p:sp>
+        <p:nvSpPr>
+          <p:cNvPr id="4" name="Slide Number Placeholder 3"/>
+          <p:cNvSpPr>
+            <a:spLocks noGrp="1"/>
+          </p:cNvSpPr>
+          <p:nvPr>
+            <p:ph type="sldNum" sz="quarter" idx="5"/>
+          </p:nvPr>
+        </p:nvSpPr>
+        <p:spPr/>
+        <p:txBody>
+          <a:bodyPr/>
+          <a:lstStyle/>
+          <a:p>
+            <a:fld id="{C2D7E69D-609B-4983-96D1-38CC478AEB14}" type="slidenum">
+              <a:rPr lang="en-GB" smtClean="0"/>
+              <a:t>6</a:t>
+            </a:fld>
+            <a:endParaRPr lang="en-GB"/>
+          </a:p>
+        </p:txBody>
+      </p:sp>
+    </p:spTree>
+    <p:extLst>
+      <p:ext uri="{BB962C8B-B14F-4D97-AF65-F5344CB8AC3E}">
+        <p14:creationId xmlns:p14="http://schemas.microsoft.com/office/powerpoint/2010/main" val="243210352"/>
+      </p:ext>
+    </p:extLst>
+  </p:cSld>
+  <p:clrMapOvr>
+    <a:masterClrMapping/>
+  </p:clrMapOvr>
+</p:notes>
+</file>
+
+<file path=ppt/notesSlides/notesSlide6.xml><?xml version="1.0" encoding="utf-8"?>
+<p:notes xmlns:a="http://schemas.openxmlformats.org/drawingml/2006/main" xmlns:r="http://schemas.openxmlformats.org/officeDocument/2006/relationships" xmlns:p="http://schemas.openxmlformats.org/presentationml/2006/main">
+  <p:cSld>
+    <p:spTree>
+      <p:nvGrpSpPr>
+        <p:cNvPr id="1" name=""/>
+        <p:cNvGrpSpPr/>
+        <p:nvPr/>
+      </p:nvGrpSpPr>
+      <p:grpSpPr>
+        <a:xfrm>
+          <a:off x="0" y="0"/>
+          <a:ext cx="0" cy="0"/>
+          <a:chOff x="0" y="0"/>
+          <a:chExt cx="0" cy="0"/>
+        </a:xfrm>
+      </p:grpSpPr>
+      <p:sp>
+        <p:nvSpPr>
+          <p:cNvPr id="2" name="Slide Image Placeholder 1"/>
+          <p:cNvSpPr>
+            <a:spLocks noGrp="1" noRot="1" noChangeAspect="1"/>
+          </p:cNvSpPr>
+          <p:nvPr>
+            <p:ph type="sldImg"/>
+          </p:nvPr>
+        </p:nvSpPr>
+        <p:spPr/>
+      </p:sp>
+      <p:sp>
+        <p:nvSpPr>
+          <p:cNvPr id="3" name="Notes Placeholder 2"/>
+          <p:cNvSpPr>
+            <a:spLocks noGrp="1"/>
+          </p:cNvSpPr>
+          <p:nvPr>
+            <p:ph type="body" idx="1"/>
+          </p:nvPr>
+        </p:nvSpPr>
+        <p:spPr/>
+        <p:txBody>
+          <a:bodyPr/>
+          <a:lstStyle/>
+          <a:p>
+            <a:r>
+              <a:rPr lang="en-US" dirty="0"/>
+              <a:t>LLMs are stateless, so conversation history stuffed in a context window helps create illusion of state and gives models working memory.</a:t>
+            </a:r>
+          </a:p>
+          <a:p>
+            <a:endParaRPr lang="en-US" dirty="0"/>
+          </a:p>
+          <a:p>
+            <a:r>
+              <a:rPr lang="en-US" dirty="0"/>
+              <a:t>RAG; giving LLMs access to information that isn't baked inside its weights. Retrieve relevant information at inference time and stuff it into context window.</a:t>
+            </a:r>
+          </a:p>
+          <a:p>
+            <a:endParaRPr lang="en-US" dirty="0"/>
+          </a:p>
+          <a:p>
+            <a:r>
+              <a:rPr lang="en-US" dirty="0"/>
+              <a:t>Prompting; so-called prompt engineering, a quite atheoretical practice. It works but evidence is mostly restricted to empirical evidence, a recurring theme we will deal with.</a:t>
+            </a:r>
+          </a:p>
+          <a:p>
+            <a:endParaRPr lang="en-US" dirty="0"/>
+          </a:p>
+          <a:p>
+            <a:r>
+              <a:rPr lang="en-US" dirty="0"/>
+              <a:t>Tool-calling; especially relevant in the so-called agentic era</a:t>
+            </a:r>
+          </a:p>
+          <a:p>
+            <a:endParaRPr lang="en-US" dirty="0"/>
+          </a:p>
+          <a:p>
+            <a:r>
+              <a:rPr lang="en-US" dirty="0"/>
+              <a:t>Fine-tuning; or equivalently any post-training methodology, further improving model performance on down-stream tasks by 'fine-tuning' weights </a:t>
+            </a:r>
+          </a:p>
+        </p:txBody>
+      </p:sp>
+      <p:sp>
+        <p:nvSpPr>
+          <p:cNvPr id="4" name="Slide Number Placeholder 3"/>
+          <p:cNvSpPr>
+            <a:spLocks noGrp="1"/>
+          </p:cNvSpPr>
+          <p:nvPr>
+            <p:ph type="sldNum" sz="quarter" idx="5"/>
+          </p:nvPr>
+        </p:nvSpPr>
+        <p:spPr/>
+        <p:txBody>
+          <a:bodyPr/>
+          <a:lstStyle/>
+          <a:p>
+            <a:fld id="{C2D7E69D-609B-4983-96D1-38CC478AEB14}" type="slidenum">
+              <a:rPr lang="en-GB" smtClean="0"/>
+              <a:t>7</a:t>
+            </a:fld>
+            <a:endParaRPr lang="en-GB"/>
+          </a:p>
+        </p:txBody>
+      </p:sp>
+    </p:spTree>
+    <p:extLst>
+      <p:ext uri="{BB962C8B-B14F-4D97-AF65-F5344CB8AC3E}">
+        <p14:creationId xmlns:p14="http://schemas.microsoft.com/office/powerpoint/2010/main" val="2452359087"/>
+      </p:ext>
+    </p:extLst>
+  </p:cSld>
+  <p:clrMapOvr>
+    <a:masterClrMapping/>
+  </p:clrMapOvr>
+</p:notes>
+</file>
+
+<file path=ppt/notesSlides/notesSlide7.xml><?xml version="1.0" encoding="utf-8"?>
+<p:notes xmlns:a="http://schemas.openxmlformats.org/drawingml/2006/main" xmlns:r="http://schemas.openxmlformats.org/officeDocument/2006/relationships" xmlns:p="http://schemas.openxmlformats.org/presentationml/2006/main">
+  <p:cSld>
+    <p:spTree>
+      <p:nvGrpSpPr>
+        <p:cNvPr id="1" name=""/>
+        <p:cNvGrpSpPr/>
+        <p:nvPr/>
+      </p:nvGrpSpPr>
+      <p:grpSpPr>
+        <a:xfrm>
+          <a:off x="0" y="0"/>
+          <a:ext cx="0" cy="0"/>
+          <a:chOff x="0" y="0"/>
+          <a:chExt cx="0" cy="0"/>
+        </a:xfrm>
+      </p:grpSpPr>
+      <p:sp>
+        <p:nvSpPr>
+          <p:cNvPr id="2" name="Slide Image Placeholder 1"/>
+          <p:cNvSpPr>
+            <a:spLocks noGrp="1" noRot="1" noChangeAspect="1"/>
+          </p:cNvSpPr>
+          <p:nvPr>
+            <p:ph type="sldImg"/>
+          </p:nvPr>
+        </p:nvSpPr>
+        <p:spPr/>
+      </p:sp>
+      <p:sp>
+        <p:nvSpPr>
+          <p:cNvPr id="3" name="Notes Placeholder 2"/>
+          <p:cNvSpPr>
+            <a:spLocks noGrp="1"/>
+          </p:cNvSpPr>
+          <p:nvPr>
+            <p:ph type="body" idx="1"/>
+          </p:nvPr>
+        </p:nvSpPr>
+        <p:spPr/>
+        <p:txBody>
+          <a:bodyPr/>
+          <a:lstStyle/>
+          <a:p>
+            <a:r>
+              <a:rPr lang="en-US" dirty="0"/>
+              <a:t>Let's look at actually defining AI</a:t>
+            </a:r>
+          </a:p>
+        </p:txBody>
+      </p:sp>
+      <p:sp>
+        <p:nvSpPr>
+          <p:cNvPr id="4" name="Slide Number Placeholder 3"/>
+          <p:cNvSpPr>
+            <a:spLocks noGrp="1"/>
+          </p:cNvSpPr>
+          <p:nvPr>
+            <p:ph type="sldNum" sz="quarter" idx="5"/>
+          </p:nvPr>
+        </p:nvSpPr>
+        <p:spPr/>
+        <p:txBody>
+          <a:bodyPr/>
+          <a:lstStyle/>
+          <a:p>
+            <a:fld id="{C2D7E69D-609B-4983-96D1-38CC478AEB14}" type="slidenum">
+              <a:rPr lang="en-GB" smtClean="0"/>
+              <a:t>9</a:t>
+            </a:fld>
+            <a:endParaRPr lang="en-GB"/>
+          </a:p>
+        </p:txBody>
+      </p:sp>
+    </p:spTree>
+    <p:extLst>
+      <p:ext uri="{BB962C8B-B14F-4D97-AF65-F5344CB8AC3E}">
+        <p14:creationId xmlns:p14="http://schemas.microsoft.com/office/powerpoint/2010/main" val="2569798653"/>
+      </p:ext>
+    </p:extLst>
+  </p:cSld>
+  <p:clrMapOvr>
+    <a:masterClrMapping/>
+  </p:clrMapOvr>
+</p:notes>
+</file>
+
+<file path=ppt/notesSlides/notesSlide8.xml><?xml version="1.0" encoding="utf-8"?>
+<p:notes xmlns:a="http://schemas.openxmlformats.org/drawingml/2006/main" xmlns:r="http://schemas.openxmlformats.org/officeDocument/2006/relationships" xmlns:p="http://schemas.openxmlformats.org/presentationml/2006/main">
+  <p:cSld>
+    <p:spTree>
+      <p:nvGrpSpPr>
+        <p:cNvPr id="1" name=""/>
+        <p:cNvGrpSpPr/>
+        <p:nvPr/>
+      </p:nvGrpSpPr>
+      <p:grpSpPr>
+        <a:xfrm>
+          <a:off x="0" y="0"/>
+          <a:ext cx="0" cy="0"/>
+          <a:chOff x="0" y="0"/>
+          <a:chExt cx="0" cy="0"/>
+        </a:xfrm>
+      </p:grpSpPr>
+      <p:sp>
+        <p:nvSpPr>
+          <p:cNvPr id="2" name="Slide Image Placeholder 1"/>
+          <p:cNvSpPr>
+            <a:spLocks noGrp="1" noRot="1" noChangeAspect="1"/>
+          </p:cNvSpPr>
+          <p:nvPr>
+            <p:ph type="sldImg"/>
+          </p:nvPr>
+        </p:nvSpPr>
+        <p:spPr/>
+      </p:sp>
+      <p:sp>
+        <p:nvSpPr>
+          <p:cNvPr id="3" name="Notes Placeholder 2"/>
+          <p:cNvSpPr>
+            <a:spLocks noGrp="1"/>
+          </p:cNvSpPr>
+          <p:nvPr>
+            <p:ph type="body" idx="1"/>
+          </p:nvPr>
+        </p:nvSpPr>
+        <p:spPr/>
+        <p:txBody>
+          <a:bodyPr/>
+          <a:lstStyle/>
+          <a:p>
+            <a:r>
+              <a:rPr lang="en-US" dirty="0"/>
+              <a:t>Self supervision is where the training data labels itself. I.e. for next token prediction, don't need human labelling as with conventional supervised learning. The structure of the text already encodes the ground truth.</a:t>
+            </a:r>
+          </a:p>
+        </p:txBody>
+      </p:sp>
+      <p:sp>
+        <p:nvSpPr>
+          <p:cNvPr id="4" name="Slide Number Placeholder 3"/>
+          <p:cNvSpPr>
+            <a:spLocks noGrp="1"/>
+          </p:cNvSpPr>
+          <p:nvPr>
+            <p:ph type="sldNum" sz="quarter" idx="5"/>
+          </p:nvPr>
+        </p:nvSpPr>
+        <p:spPr/>
+        <p:txBody>
+          <a:bodyPr/>
+          <a:lstStyle/>
+          <a:p>
+            <a:fld id="{C2D7E69D-609B-4983-96D1-38CC478AEB14}" type="slidenum">
+              <a:rPr lang="en-GB" smtClean="0"/>
+              <a:t>13</a:t>
+            </a:fld>
+            <a:endParaRPr lang="en-GB"/>
+          </a:p>
+        </p:txBody>
+      </p:sp>
+    </p:spTree>
+    <p:extLst>
+      <p:ext uri="{BB962C8B-B14F-4D97-AF65-F5344CB8AC3E}">
+        <p14:creationId xmlns:p14="http://schemas.microsoft.com/office/powerpoint/2010/main" val="1911962667"/>
+      </p:ext>
+    </p:extLst>
+  </p:cSld>
+  <p:clrMapOvr>
+    <a:masterClrMapping/>
+  </p:clrMapOvr>
+</p:notes>
+</file>
+
+<file path=ppt/notesSlides/notesSlide9.xml><?xml version="1.0" encoding="utf-8"?>
+<p:notes xmlns:a="http://schemas.openxmlformats.org/drawingml/2006/main" xmlns:r="http://schemas.openxmlformats.org/officeDocument/2006/relationships" xmlns:p="http://schemas.openxmlformats.org/presentationml/2006/main">
+  <p:cSld>
+    <p:spTree>
+      <p:nvGrpSpPr>
+        <p:cNvPr id="1" name=""/>
+        <p:cNvGrpSpPr/>
+        <p:nvPr/>
+      </p:nvGrpSpPr>
+      <p:grpSpPr>
+        <a:xfrm>
+          <a:off x="0" y="0"/>
+          <a:ext cx="0" cy="0"/>
+          <a:chOff x="0" y="0"/>
+          <a:chExt cx="0" cy="0"/>
+        </a:xfrm>
+      </p:grpSpPr>
+      <p:sp>
+        <p:nvSpPr>
+          <p:cNvPr id="2" name="Slide Image Placeholder 1"/>
+          <p:cNvSpPr>
+            <a:spLocks noGrp="1" noRot="1" noChangeAspect="1"/>
+          </p:cNvSpPr>
+          <p:nvPr>
+            <p:ph type="sldImg"/>
+          </p:nvPr>
+        </p:nvSpPr>
+        <p:spPr/>
+      </p:sp>
+      <p:sp>
+        <p:nvSpPr>
+          <p:cNvPr id="3" name="Notes Placeholder 2"/>
+          <p:cNvSpPr>
+            <a:spLocks noGrp="1"/>
+          </p:cNvSpPr>
+          <p:nvPr>
+            <p:ph type="body" idx="1"/>
+          </p:nvPr>
+        </p:nvSpPr>
+        <p:spPr/>
+        <p:txBody>
+          <a:bodyPr/>
+          <a:lstStyle/>
+          <a:p>
+            <a:r>
+              <a:rPr lang="en-GB" dirty="0"/>
+              <a:t>The Act needs a practical, auditable way to classify and assess general purpose AI models without being able to directly test every possible capability. These indicators are its solution to that problem. </a:t>
+            </a:r>
+            <a:endParaRPr lang="en-US" dirty="0"/>
+          </a:p>
+        </p:txBody>
+      </p:sp>
+      <p:sp>
+        <p:nvSpPr>
+          <p:cNvPr id="4" name="Slide Number Placeholder 3"/>
+          <p:cNvSpPr>
+            <a:spLocks noGrp="1"/>
+          </p:cNvSpPr>
+          <p:nvPr>
+            <p:ph type="sldNum" sz="quarter" idx="5"/>
+          </p:nvPr>
+        </p:nvSpPr>
+        <p:spPr/>
+        <p:txBody>
+          <a:bodyPr/>
+          <a:lstStyle/>
+          <a:p>
+            <a:fld id="{C2D7E69D-609B-4983-96D1-38CC478AEB14}" type="slidenum">
+              <a:rPr lang="en-GB" smtClean="0"/>
+              <a:t>14</a:t>
+            </a:fld>
+            <a:endParaRPr lang="en-GB"/>
+          </a:p>
+        </p:txBody>
+      </p:sp>
+    </p:spTree>
+    <p:extLst>
+      <p:ext uri="{BB962C8B-B14F-4D97-AF65-F5344CB8AC3E}">
+        <p14:creationId xmlns:p14="http://schemas.microsoft.com/office/powerpoint/2010/main" val="975238628"/>
       </p:ext>
     </p:extLst>
   </p:cSld>
@@ -3587,194 +4586,6 @@
   <p:cSld>
     <p:spTree>
       <p:nvGrpSpPr>
-        <p:cNvPr id="1" name=""/>
-        <p:cNvGrpSpPr/>
-        <p:nvPr/>
-      </p:nvGrpSpPr>
-      <p:grpSpPr>
-        <a:xfrm>
-          <a:off x="0" y="0"/>
-          <a:ext cx="0" cy="0"/>
-          <a:chOff x="0" y="0"/>
-          <a:chExt cx="0" cy="0"/>
-        </a:xfrm>
-      </p:grpSpPr>
-      <p:sp>
-        <p:nvSpPr>
-          <p:cNvPr id="2" name="Title 1">
-            <a:extLst>
-              <a:ext uri="{FF2B5EF4-FFF2-40B4-BE49-F238E27FC236}">
-                <a16:creationId xmlns:a16="http://schemas.microsoft.com/office/drawing/2014/main" id="{7C33511F-8565-6D41-02BF-6E9296DCF3B4}"/>
-              </a:ext>
-            </a:extLst>
-          </p:cNvPr>
-          <p:cNvSpPr>
-            <a:spLocks noGrp="1"/>
-          </p:cNvSpPr>
-          <p:nvPr>
-            <p:ph type="title"/>
-          </p:nvPr>
-        </p:nvSpPr>
-        <p:spPr/>
-        <p:txBody>
-          <a:bodyPr/>
-          <a:lstStyle/>
-          <a:p>
-            <a:r>
-              <a:rPr lang="en-US" dirty="0"/>
-              <a:t>EU AI Act</a:t>
-            </a:r>
-          </a:p>
-        </p:txBody>
-      </p:sp>
-      <p:sp>
-        <p:nvSpPr>
-          <p:cNvPr id="3" name="Content Placeholder 2">
-            <a:extLst>
-              <a:ext uri="{FF2B5EF4-FFF2-40B4-BE49-F238E27FC236}">
-                <a16:creationId xmlns:a16="http://schemas.microsoft.com/office/drawing/2014/main" id="{C10ABB8D-3273-0866-F725-70CD2E52915C}"/>
-              </a:ext>
-            </a:extLst>
-          </p:cNvPr>
-          <p:cNvSpPr>
-            <a:spLocks noGrp="1"/>
-          </p:cNvSpPr>
-          <p:nvPr>
-            <p:ph idx="1"/>
-          </p:nvPr>
-        </p:nvSpPr>
-        <p:spPr/>
-        <p:txBody>
-          <a:bodyPr vert="horz" lIns="91440" tIns="45720" rIns="91440" bIns="45720" rtlCol="0" anchor="t">
-            <a:normAutofit/>
-          </a:bodyPr>
-          <a:lstStyle/>
-          <a:p>
-            <a:pPr marL="0" indent="0">
-              <a:buNone/>
-            </a:pPr>
-            <a:r>
-              <a:rPr lang="en-US" dirty="0"/>
-              <a:t>How does the AI Act define things...?</a:t>
-            </a:r>
-          </a:p>
-          <a:p>
-            <a:pPr marL="0" indent="0">
-              <a:buNone/>
-            </a:pPr>
-            <a:endParaRPr lang="en-US" dirty="0"/>
-          </a:p>
-          <a:p>
-            <a:pPr marL="0" indent="0">
-              <a:buNone/>
-            </a:pPr>
-            <a:endParaRPr lang="en-US" dirty="0">
-              <a:ea typeface="+mn-lt"/>
-              <a:cs typeface="+mn-lt"/>
-            </a:endParaRPr>
-          </a:p>
-        </p:txBody>
-      </p:sp>
-    </p:spTree>
-    <p:extLst>
-      <p:ext uri="{BB962C8B-B14F-4D97-AF65-F5344CB8AC3E}">
-        <p14:creationId xmlns:p14="http://schemas.microsoft.com/office/powerpoint/2010/main" val="1865729139"/>
-      </p:ext>
-    </p:extLst>
-  </p:cSld>
-  <p:clrMapOvr>
-    <a:masterClrMapping/>
-  </p:clrMapOvr>
-  <p:timing>
-    <p:tnLst>
-      <p:par>
-        <p:cTn id="1" dur="indefinite" restart="never" nodeType="tmRoot">
-          <p:childTnLst>
-            <p:seq concurrent="1" nextAc="seek">
-              <p:cTn id="2" dur="indefinite" nodeType="mainSeq">
-                <p:childTnLst>
-                  <p:par>
-                    <p:cTn id="3" fill="hold">
-                      <p:stCondLst>
-                        <p:cond delay="indefinite"/>
-                      </p:stCondLst>
-                      <p:childTnLst>
-                        <p:par>
-                          <p:cTn id="4" fill="hold">
-                            <p:stCondLst>
-                              <p:cond delay="0"/>
-                            </p:stCondLst>
-                            <p:childTnLst>
-                              <p:par>
-                                <p:cTn id="5" presetID="1" presetClass="entr" presetSubtype="0" fill="hold" grpId="0" nodeType="clickEffect">
-                                  <p:stCondLst>
-                                    <p:cond delay="0"/>
-                                  </p:stCondLst>
-                                  <p:childTnLst>
-                                    <p:set>
-                                      <p:cBhvr>
-                                        <p:cTn id="6" dur="1" fill="hold">
-                                          <p:stCondLst>
-                                            <p:cond delay="0"/>
-                                          </p:stCondLst>
-                                        </p:cTn>
-                                        <p:tgtEl>
-                                          <p:spTgt spid="3">
-                                            <p:txEl>
-                                              <p:pRg st="0" end="0"/>
-                                            </p:txEl>
-                                          </p:spTgt>
-                                        </p:tgtEl>
-                                        <p:attrNameLst>
-                                          <p:attrName>style.visibility</p:attrName>
-                                        </p:attrNameLst>
-                                      </p:cBhvr>
-                                      <p:to>
-                                        <p:strVal val="visible"/>
-                                      </p:to>
-                                    </p:set>
-                                  </p:childTnLst>
-                                </p:cTn>
-                              </p:par>
-                            </p:childTnLst>
-                          </p:cTn>
-                        </p:par>
-                      </p:childTnLst>
-                    </p:cTn>
-                  </p:par>
-                </p:childTnLst>
-              </p:cTn>
-              <p:prevCondLst>
-                <p:cond evt="onPrev" delay="0">
-                  <p:tgtEl>
-                    <p:sldTgt/>
-                  </p:tgtEl>
-                </p:cond>
-              </p:prevCondLst>
-              <p:nextCondLst>
-                <p:cond evt="onNext" delay="0">
-                  <p:tgtEl>
-                    <p:sldTgt/>
-                  </p:tgtEl>
-                </p:cond>
-              </p:nextCondLst>
-            </p:seq>
-          </p:childTnLst>
-        </p:cTn>
-      </p:par>
-    </p:tnLst>
-    <p:bldLst>
-      <p:bldP spid="3" grpId="0" build="p"/>
-    </p:bldLst>
-  </p:timing>
-</p:sld>
-</file>
-
-<file path=ppt/slides/slide11.xml><?xml version="1.0" encoding="utf-8"?>
-<p:sld xmlns:a="http://schemas.openxmlformats.org/drawingml/2006/main" xmlns:r="http://schemas.openxmlformats.org/officeDocument/2006/relationships" xmlns:p="http://schemas.openxmlformats.org/presentationml/2006/main">
-  <p:cSld>
-    <p:spTree>
-      <p:nvGrpSpPr>
         <p:cNvPr id="1" name="">
           <a:extLst>
             <a:ext uri="{FF2B5EF4-FFF2-40B4-BE49-F238E27FC236}">
@@ -3795,34 +4606,6 @@
       </p:grpSpPr>
       <p:sp>
         <p:nvSpPr>
-          <p:cNvPr id="2" name="Title 1">
-            <a:extLst>
-              <a:ext uri="{FF2B5EF4-FFF2-40B4-BE49-F238E27FC236}">
-                <a16:creationId xmlns:a16="http://schemas.microsoft.com/office/drawing/2014/main" id="{EFB3DCA2-5CF0-D9D9-D19D-5F184BF62F37}"/>
-              </a:ext>
-            </a:extLst>
-          </p:cNvPr>
-          <p:cNvSpPr>
-            <a:spLocks noGrp="1"/>
-          </p:cNvSpPr>
-          <p:nvPr>
-            <p:ph type="title"/>
-          </p:nvPr>
-        </p:nvSpPr>
-        <p:spPr/>
-        <p:txBody>
-          <a:bodyPr/>
-          <a:lstStyle/>
-          <a:p>
-            <a:r>
-              <a:rPr lang="en-US" dirty="0"/>
-              <a:t>EU AI Act</a:t>
-            </a:r>
-          </a:p>
-        </p:txBody>
-      </p:sp>
-      <p:sp>
-        <p:nvSpPr>
           <p:cNvPr id="3" name="Content Placeholder 2">
             <a:extLst>
               <a:ext uri="{FF2B5EF4-FFF2-40B4-BE49-F238E27FC236}">
@@ -3883,6 +4666,65 @@
           </a:p>
         </p:txBody>
       </p:sp>
+      <p:sp>
+        <p:nvSpPr>
+          <p:cNvPr id="5" name="Title 4">
+            <a:extLst>
+              <a:ext uri="{FF2B5EF4-FFF2-40B4-BE49-F238E27FC236}">
+                <a16:creationId xmlns:a16="http://schemas.microsoft.com/office/drawing/2014/main" id="{1700A706-5A9A-B94A-5E5E-F6185319F000}"/>
+              </a:ext>
+            </a:extLst>
+          </p:cNvPr>
+          <p:cNvSpPr>
+            <a:spLocks noGrp="1"/>
+          </p:cNvSpPr>
+          <p:nvPr>
+            <p:ph type="title"/>
+          </p:nvPr>
+        </p:nvSpPr>
+        <p:spPr/>
+        <p:txBody>
+          <a:bodyPr/>
+          <a:lstStyle/>
+          <a:p>
+            <a:r>
+              <a:rPr lang="en-US" dirty="0"/>
+              <a:t>EU AI Act </a:t>
+            </a:r>
+            <a:r>
+              <a:rPr lang="en-US" i="1" dirty="0">
+                <a:solidFill>
+                  <a:schemeClr val="bg2">
+                    <a:lumMod val="50000"/>
+                  </a:schemeClr>
+                </a:solidFill>
+              </a:rPr>
+              <a:t>(</a:t>
+            </a:r>
+            <a:r>
+              <a:rPr lang="en-GB" i="1" dirty="0">
+                <a:solidFill>
+                  <a:schemeClr val="bg2">
+                    <a:lumMod val="50000"/>
+                  </a:schemeClr>
+                </a:solidFill>
+              </a:rPr>
+              <a:t>August 2024</a:t>
+            </a:r>
+            <a:r>
+              <a:rPr lang="en-US" i="1" dirty="0">
+                <a:solidFill>
+                  <a:schemeClr val="bg2">
+                    <a:lumMod val="50000"/>
+                  </a:schemeClr>
+                </a:solidFill>
+              </a:rPr>
+              <a:t>)</a:t>
+            </a:r>
+            <a:endParaRPr lang="en-US" dirty="0"/>
+          </a:p>
+        </p:txBody>
+      </p:sp>
     </p:spTree>
     <p:extLst>
       <p:ext uri="{BB962C8B-B14F-4D97-AF65-F5344CB8AC3E}">
@@ -3896,7 +4738,7 @@
 </p:sld>
 </file>
 
-<file path=ppt/slides/slide12.xml><?xml version="1.0" encoding="utf-8"?>
+<file path=ppt/slides/slide11.xml><?xml version="1.0" encoding="utf-8"?>
 <p:sld xmlns:a="http://schemas.openxmlformats.org/drawingml/2006/main" xmlns:r="http://schemas.openxmlformats.org/officeDocument/2006/relationships" xmlns:p="http://schemas.openxmlformats.org/presentationml/2006/main">
   <p:cSld>
     <p:spTree>
@@ -3942,8 +4784,39 @@
           <a:p>
             <a:r>
               <a:rPr lang="en-US" dirty="0"/>
-              <a:t>EU AI Act</a:t>
-            </a:r>
+              <a:t>EU AI Act </a:t>
+            </a:r>
+            <a:r>
+              <a:rPr lang="en-US" i="1" dirty="0">
+                <a:solidFill>
+                  <a:schemeClr val="bg2">
+                    <a:lumMod val="50000"/>
+                  </a:schemeClr>
+                </a:solidFill>
+              </a:rPr>
+              <a:t>(</a:t>
+            </a:r>
+            <a:r>
+              <a:rPr lang="en-GB" i="1" dirty="0">
+                <a:solidFill>
+                  <a:schemeClr val="bg2">
+                    <a:lumMod val="50000"/>
+                  </a:schemeClr>
+                </a:solidFill>
+              </a:rPr>
+              <a:t>August 2024</a:t>
+            </a:r>
+            <a:r>
+              <a:rPr lang="en-US" i="1" dirty="0">
+                <a:solidFill>
+                  <a:schemeClr val="bg2">
+                    <a:lumMod val="50000"/>
+                  </a:schemeClr>
+                </a:solidFill>
+              </a:rPr>
+              <a:t>)</a:t>
+            </a:r>
+            <a:endParaRPr lang="en-US" dirty="0"/>
           </a:p>
         </p:txBody>
       </p:sp>
@@ -4022,7 +4895,7 @@
 </p:sld>
 </file>
 
-<file path=ppt/slides/slide13.xml><?xml version="1.0" encoding="utf-8"?>
+<file path=ppt/slides/slide12.xml><?xml version="1.0" encoding="utf-8"?>
 <p:sld xmlns:a="http://schemas.openxmlformats.org/drawingml/2006/main" xmlns:r="http://schemas.openxmlformats.org/officeDocument/2006/relationships" xmlns:p="http://schemas.openxmlformats.org/presentationml/2006/main">
   <p:cSld>
     <p:spTree>
@@ -4068,8 +4941,39 @@
           <a:p>
             <a:r>
               <a:rPr lang="en-US" dirty="0"/>
-              <a:t>EU AI Act</a:t>
-            </a:r>
+              <a:t>EU AI Act </a:t>
+            </a:r>
+            <a:r>
+              <a:rPr lang="en-US" i="1" dirty="0">
+                <a:solidFill>
+                  <a:schemeClr val="bg2">
+                    <a:lumMod val="50000"/>
+                  </a:schemeClr>
+                </a:solidFill>
+              </a:rPr>
+              <a:t>(</a:t>
+            </a:r>
+            <a:r>
+              <a:rPr lang="en-GB" i="1" dirty="0">
+                <a:solidFill>
+                  <a:schemeClr val="bg2">
+                    <a:lumMod val="50000"/>
+                  </a:schemeClr>
+                </a:solidFill>
+              </a:rPr>
+              <a:t>August 2024</a:t>
+            </a:r>
+            <a:r>
+              <a:rPr lang="en-US" i="1" dirty="0">
+                <a:solidFill>
+                  <a:schemeClr val="bg2">
+                    <a:lumMod val="50000"/>
+                  </a:schemeClr>
+                </a:solidFill>
+              </a:rPr>
+              <a:t>)</a:t>
+            </a:r>
+            <a:endParaRPr lang="en-US" dirty="0"/>
           </a:p>
         </p:txBody>
       </p:sp>
@@ -4148,7 +5052,7 @@
 </p:sld>
 </file>
 
-<file path=ppt/slides/slide14.xml><?xml version="1.0" encoding="utf-8"?>
+<file path=ppt/slides/slide13.xml><?xml version="1.0" encoding="utf-8"?>
 <p:sld xmlns:a="http://schemas.openxmlformats.org/drawingml/2006/main" xmlns:r="http://schemas.openxmlformats.org/officeDocument/2006/relationships" xmlns:p="http://schemas.openxmlformats.org/presentationml/2006/main">
   <p:cSld>
     <p:spTree>
@@ -4194,8 +5098,39 @@
           <a:p>
             <a:r>
               <a:rPr lang="en-US" dirty="0"/>
-              <a:t>EU AI Act</a:t>
-            </a:r>
+              <a:t>EU AI Act </a:t>
+            </a:r>
+            <a:r>
+              <a:rPr lang="en-US" i="1" dirty="0">
+                <a:solidFill>
+                  <a:schemeClr val="bg2">
+                    <a:lumMod val="50000"/>
+                  </a:schemeClr>
+                </a:solidFill>
+              </a:rPr>
+              <a:t>(</a:t>
+            </a:r>
+            <a:r>
+              <a:rPr lang="en-GB" i="1" dirty="0">
+                <a:solidFill>
+                  <a:schemeClr val="bg2">
+                    <a:lumMod val="50000"/>
+                  </a:schemeClr>
+                </a:solidFill>
+              </a:rPr>
+              <a:t>August 2024</a:t>
+            </a:r>
+            <a:r>
+              <a:rPr lang="en-US" i="1" dirty="0">
+                <a:solidFill>
+                  <a:schemeClr val="bg2">
+                    <a:lumMod val="50000"/>
+                  </a:schemeClr>
+                </a:solidFill>
+              </a:rPr>
+              <a:t>)</a:t>
+            </a:r>
+            <a:endParaRPr lang="en-US" dirty="0"/>
           </a:p>
         </p:txBody>
       </p:sp>
@@ -4376,7 +5311,7 @@
 </p:sld>
 </file>
 
-<file path=ppt/slides/slide15.xml><?xml version="1.0" encoding="utf-8"?>
+<file path=ppt/slides/slide14.xml><?xml version="1.0" encoding="utf-8"?>
 <p:sld xmlns:a="http://schemas.openxmlformats.org/drawingml/2006/main" xmlns:r="http://schemas.openxmlformats.org/officeDocument/2006/relationships" xmlns:p="http://schemas.openxmlformats.org/presentationml/2006/main">
   <p:cSld>
     <p:spTree>
@@ -4450,9 +5385,6 @@
           </a:bodyPr>
           <a:lstStyle/>
           <a:p>
-            <a:pPr marL="514350" indent="-514350">
-              <a:buAutoNum type="alphaLcPeriod"/>
-            </a:pPr>
             <a:r>
               <a:rPr lang="en-US" dirty="0">
                 <a:ea typeface="+mn-lt"/>
@@ -4463,9 +5395,6 @@
             <a:endParaRPr lang="en-US" dirty="0"/>
           </a:p>
           <a:p>
-            <a:pPr marL="514350" indent="-514350">
-              <a:buAutoNum type="alphaLcPeriod"/>
-            </a:pPr>
             <a:r>
               <a:rPr lang="en-US" dirty="0">
                 <a:ea typeface="+mn-lt"/>
@@ -4475,9 +5404,6 @@
             </a:r>
           </a:p>
           <a:p>
-            <a:pPr marL="514350" indent="-514350">
-              <a:buAutoNum type="alphaLcPeriod"/>
-            </a:pPr>
             <a:r>
               <a:rPr lang="en-US" dirty="0">
                 <a:ea typeface="+mn-lt"/>
@@ -4866,7 +5792,7 @@
 </p:sld>
 </file>
 
-<file path=ppt/slides/slide16.xml><?xml version="1.0" encoding="utf-8"?>
+<file path=ppt/slides/slide15.xml><?xml version="1.0" encoding="utf-8"?>
 <p:sld xmlns:a="http://schemas.openxmlformats.org/drawingml/2006/main" xmlns:r="http://schemas.openxmlformats.org/officeDocument/2006/relationships" xmlns:p="http://schemas.openxmlformats.org/presentationml/2006/main">
   <p:cSld>
     <p:spTree>
@@ -4940,9 +5866,6 @@
           </a:bodyPr>
           <a:lstStyle/>
           <a:p>
-            <a:pPr marL="514350" indent="-514350">
-              <a:buAutoNum type="alphaLcPeriod"/>
-            </a:pPr>
             <a:r>
               <a:rPr lang="en-US" dirty="0">
                 <a:ea typeface="+mn-lt"/>
@@ -4952,9 +5875,6 @@
             </a:r>
           </a:p>
           <a:p>
-            <a:pPr marL="514350" indent="-514350">
-              <a:buAutoNum type="alphaLcPeriod"/>
-            </a:pPr>
             <a:r>
               <a:rPr lang="en-US" dirty="0">
                 <a:ea typeface="+mn-lt"/>
@@ -4990,9 +5910,6 @@
             </a:r>
           </a:p>
           <a:p>
-            <a:pPr marL="514350" indent="-514350">
-              <a:buAutoNum type="alphaLcPeriod"/>
-            </a:pPr>
             <a:r>
               <a:rPr lang="en-US" dirty="0">
                 <a:ea typeface="+mn-lt"/>
@@ -5444,7 +6361,7 @@
 </p:sld>
 </file>
 
-<file path=ppt/slides/slide17.xml><?xml version="1.0" encoding="utf-8"?>
+<file path=ppt/slides/slide16.xml><?xml version="1.0" encoding="utf-8"?>
 <p:sld xmlns:a="http://schemas.openxmlformats.org/drawingml/2006/main" xmlns:r="http://schemas.openxmlformats.org/officeDocument/2006/relationships" xmlns:p="http://schemas.openxmlformats.org/presentationml/2006/main">
   <p:cSld>
     <p:spTree>
@@ -5672,7 +6589,7 @@
 </p:sld>
 </file>
 
-<file path=ppt/slides/slide18.xml><?xml version="1.0" encoding="utf-8"?>
+<file path=ppt/slides/slide17.xml><?xml version="1.0" encoding="utf-8"?>
 <p:sld xmlns:a="http://schemas.openxmlformats.org/drawingml/2006/main" xmlns:r="http://schemas.openxmlformats.org/officeDocument/2006/relationships" xmlns:p="http://schemas.openxmlformats.org/presentationml/2006/main">
   <p:cSld>
     <p:spTree>
@@ -5934,7 +6851,7 @@
 </p:sld>
 </file>
 
-<file path=ppt/slides/slide19.xml><?xml version="1.0" encoding="utf-8"?>
+<file path=ppt/slides/slide18.xml><?xml version="1.0" encoding="utf-8"?>
 <p:sld xmlns:a="http://schemas.openxmlformats.org/drawingml/2006/main" xmlns:r="http://schemas.openxmlformats.org/officeDocument/2006/relationships" xmlns:p="http://schemas.openxmlformats.org/presentationml/2006/main">
   <p:cSld>
     <p:spTree>
@@ -9047,6 +9964,36 @@
           </a:p>
         </p:txBody>
       </p:sp>
+      <p:pic>
+        <p:nvPicPr>
+          <p:cNvPr id="4" name="Picture 3">
+            <a:extLst>
+              <a:ext uri="{FF2B5EF4-FFF2-40B4-BE49-F238E27FC236}">
+                <a16:creationId xmlns:a16="http://schemas.microsoft.com/office/drawing/2014/main" id="{62F90085-2CFA-E241-70E3-58E8EC79428C}"/>
+              </a:ext>
+            </a:extLst>
+          </p:cNvPr>
+          <p:cNvPicPr>
+            <a:picLocks noChangeAspect="1"/>
+          </p:cNvPicPr>
+          <p:nvPr/>
+        </p:nvPicPr>
+        <p:blipFill>
+          <a:blip r:embed="rId3"/>
+          <a:stretch>
+            <a:fillRect/>
+          </a:stretch>
+        </p:blipFill>
+        <p:spPr>
+          <a:xfrm>
+            <a:off x="4798195" y="3429000"/>
+            <a:ext cx="2595609" cy="2609471"/>
+          </a:xfrm>
+          <a:prstGeom prst="rect">
+            <a:avLst/>
+          </a:prstGeom>
+        </p:spPr>
+      </p:pic>
     </p:spTree>
     <p:extLst>
       <p:ext uri="{BB962C8B-B14F-4D97-AF65-F5344CB8AC3E}">
@@ -9100,7 +10047,7 @@
           <a:p>
             <a:r>
               <a:rPr lang="en-US" dirty="0"/>
-              <a:t>Our goals</a:t>
+              <a:t>Workshop Goals</a:t>
             </a:r>
           </a:p>
         </p:txBody>
@@ -9154,14 +10101,7 @@
                 <a:ea typeface="+mn-lt"/>
                 <a:cs typeface="+mn-lt"/>
               </a:rPr>
-              <a:t>Better understand the challenges that researchers </a:t>
-            </a:r>
-            <a:r>
-              <a:rPr lang="en-US">
-                <a:ea typeface="+mn-lt"/>
-                <a:cs typeface="+mn-lt"/>
-              </a:rPr>
-              <a:t>face.</a:t>
+              <a:t>Better understand the challenges that researchers face.</a:t>
             </a:r>
           </a:p>
           <a:p>
@@ -9197,14 +10137,7 @@
                 <a:ea typeface="+mn-lt"/>
                 <a:cs typeface="+mn-lt"/>
               </a:rPr>
-              <a:t>Including </a:t>
-            </a:r>
-            <a:r>
-              <a:rPr lang="en-US">
-                <a:ea typeface="+mn-lt"/>
-                <a:cs typeface="+mn-lt"/>
-              </a:rPr>
-              <a:t>shared code</a:t>
+              <a:t>Including shared code</a:t>
             </a:r>
           </a:p>
           <a:p>
@@ -9215,7 +10148,7 @@
               </a:rPr>
               <a:t>Start to build a community of like-minded researchers across the university.</a:t>
             </a:r>
-            <a:endParaRPr lang="en-US"/>
+            <a:endParaRPr lang="en-US" dirty="0"/>
           </a:p>
         </p:txBody>
       </p:sp>
@@ -9636,6 +10569,239 @@
           </a:graphicData>
         </a:graphic>
       </p:graphicFrame>
+      <p:sp>
+        <p:nvSpPr>
+          <p:cNvPr id="6" name="Content Placeholder 2">
+            <a:extLst>
+              <a:ext uri="{FF2B5EF4-FFF2-40B4-BE49-F238E27FC236}">
+                <a16:creationId xmlns:a16="http://schemas.microsoft.com/office/drawing/2014/main" id="{13040332-75D0-405E-6D35-DCBEE6D0BE3E}"/>
+              </a:ext>
+            </a:extLst>
+          </p:cNvPr>
+          <p:cNvSpPr txBox="1">
+            <a:spLocks/>
+          </p:cNvSpPr>
+          <p:nvPr/>
+        </p:nvSpPr>
+        <p:spPr>
+          <a:xfrm>
+            <a:off x="838200" y="5196522"/>
+            <a:ext cx="10515600" cy="1661477"/>
+          </a:xfrm>
+          <a:prstGeom prst="rect">
+            <a:avLst/>
+          </a:prstGeom>
+        </p:spPr>
+        <p:txBody>
+          <a:bodyPr vert="horz" lIns="91440" tIns="45720" rIns="91440" bIns="45720" rtlCol="0" anchor="t">
+            <a:normAutofit/>
+          </a:bodyPr>
+          <a:lstStyle>
+            <a:lvl1pPr marL="228600" indent="-228600" algn="l" defTabSz="914400" rtl="0" eaLnBrk="1" latinLnBrk="0" hangingPunct="1">
+              <a:lnSpc>
+                <a:spcPct val="90000"/>
+              </a:lnSpc>
+              <a:spcBef>
+                <a:spcPts val="1000"/>
+              </a:spcBef>
+              <a:buFont typeface="Arial" panose="020B0604020202020204" pitchFamily="34" charset="0"/>
+              <a:buChar char="•"/>
+              <a:defRPr sz="2800" kern="1200">
+                <a:solidFill>
+                  <a:schemeClr val="tx1"/>
+                </a:solidFill>
+                <a:latin typeface="+mn-lt"/>
+                <a:ea typeface="+mn-ea"/>
+                <a:cs typeface="+mn-cs"/>
+              </a:defRPr>
+            </a:lvl1pPr>
+            <a:lvl2pPr marL="685800" indent="-228600" algn="l" defTabSz="914400" rtl="0" eaLnBrk="1" latinLnBrk="0" hangingPunct="1">
+              <a:lnSpc>
+                <a:spcPct val="90000"/>
+              </a:lnSpc>
+              <a:spcBef>
+                <a:spcPts val="500"/>
+              </a:spcBef>
+              <a:buFont typeface="Arial" panose="020B0604020202020204" pitchFamily="34" charset="0"/>
+              <a:buChar char="•"/>
+              <a:defRPr sz="2400" kern="1200">
+                <a:solidFill>
+                  <a:schemeClr val="tx1"/>
+                </a:solidFill>
+                <a:latin typeface="+mn-lt"/>
+                <a:ea typeface="+mn-ea"/>
+                <a:cs typeface="+mn-cs"/>
+              </a:defRPr>
+            </a:lvl2pPr>
+            <a:lvl3pPr marL="1143000" indent="-228600" algn="l" defTabSz="914400" rtl="0" eaLnBrk="1" latinLnBrk="0" hangingPunct="1">
+              <a:lnSpc>
+                <a:spcPct val="90000"/>
+              </a:lnSpc>
+              <a:spcBef>
+                <a:spcPts val="500"/>
+              </a:spcBef>
+              <a:buFont typeface="Arial" panose="020B0604020202020204" pitchFamily="34" charset="0"/>
+              <a:buChar char="•"/>
+              <a:defRPr sz="2000" kern="1200">
+                <a:solidFill>
+                  <a:schemeClr val="tx1"/>
+                </a:solidFill>
+                <a:latin typeface="+mn-lt"/>
+                <a:ea typeface="+mn-ea"/>
+                <a:cs typeface="+mn-cs"/>
+              </a:defRPr>
+            </a:lvl3pPr>
+            <a:lvl4pPr marL="1600200" indent="-228600" algn="l" defTabSz="914400" rtl="0" eaLnBrk="1" latinLnBrk="0" hangingPunct="1">
+              <a:lnSpc>
+                <a:spcPct val="90000"/>
+              </a:lnSpc>
+              <a:spcBef>
+                <a:spcPts val="500"/>
+              </a:spcBef>
+              <a:buFont typeface="Arial" panose="020B0604020202020204" pitchFamily="34" charset="0"/>
+              <a:buChar char="•"/>
+              <a:defRPr sz="1800" kern="1200">
+                <a:solidFill>
+                  <a:schemeClr val="tx1"/>
+                </a:solidFill>
+                <a:latin typeface="+mn-lt"/>
+                <a:ea typeface="+mn-ea"/>
+                <a:cs typeface="+mn-cs"/>
+              </a:defRPr>
+            </a:lvl4pPr>
+            <a:lvl5pPr marL="2057400" indent="-228600" algn="l" defTabSz="914400" rtl="0" eaLnBrk="1" latinLnBrk="0" hangingPunct="1">
+              <a:lnSpc>
+                <a:spcPct val="90000"/>
+              </a:lnSpc>
+              <a:spcBef>
+                <a:spcPts val="500"/>
+              </a:spcBef>
+              <a:buFont typeface="Arial" panose="020B0604020202020204" pitchFamily="34" charset="0"/>
+              <a:buChar char="•"/>
+              <a:defRPr sz="1800" kern="1200">
+                <a:solidFill>
+                  <a:schemeClr val="tx1"/>
+                </a:solidFill>
+                <a:latin typeface="+mn-lt"/>
+                <a:ea typeface="+mn-ea"/>
+                <a:cs typeface="+mn-cs"/>
+              </a:defRPr>
+            </a:lvl5pPr>
+            <a:lvl6pPr marL="2514600" indent="-228600" algn="l" defTabSz="914400" rtl="0" eaLnBrk="1" latinLnBrk="0" hangingPunct="1">
+              <a:lnSpc>
+                <a:spcPct val="90000"/>
+              </a:lnSpc>
+              <a:spcBef>
+                <a:spcPts val="500"/>
+              </a:spcBef>
+              <a:buFont typeface="Arial" panose="020B0604020202020204" pitchFamily="34" charset="0"/>
+              <a:buChar char="•"/>
+              <a:defRPr sz="1800" kern="1200">
+                <a:solidFill>
+                  <a:schemeClr val="tx1"/>
+                </a:solidFill>
+                <a:latin typeface="+mn-lt"/>
+                <a:ea typeface="+mn-ea"/>
+                <a:cs typeface="+mn-cs"/>
+              </a:defRPr>
+            </a:lvl6pPr>
+            <a:lvl7pPr marL="2971800" indent="-228600" algn="l" defTabSz="914400" rtl="0" eaLnBrk="1" latinLnBrk="0" hangingPunct="1">
+              <a:lnSpc>
+                <a:spcPct val="90000"/>
+              </a:lnSpc>
+              <a:spcBef>
+                <a:spcPts val="500"/>
+              </a:spcBef>
+              <a:buFont typeface="Arial" panose="020B0604020202020204" pitchFamily="34" charset="0"/>
+              <a:buChar char="•"/>
+              <a:defRPr sz="1800" kern="1200">
+                <a:solidFill>
+                  <a:schemeClr val="tx1"/>
+                </a:solidFill>
+                <a:latin typeface="+mn-lt"/>
+                <a:ea typeface="+mn-ea"/>
+                <a:cs typeface="+mn-cs"/>
+              </a:defRPr>
+            </a:lvl7pPr>
+            <a:lvl8pPr marL="3429000" indent="-228600" algn="l" defTabSz="914400" rtl="0" eaLnBrk="1" latinLnBrk="0" hangingPunct="1">
+              <a:lnSpc>
+                <a:spcPct val="90000"/>
+              </a:lnSpc>
+              <a:spcBef>
+                <a:spcPts val="500"/>
+              </a:spcBef>
+              <a:buFont typeface="Arial" panose="020B0604020202020204" pitchFamily="34" charset="0"/>
+              <a:buChar char="•"/>
+              <a:defRPr sz="1800" kern="1200">
+                <a:solidFill>
+                  <a:schemeClr val="tx1"/>
+                </a:solidFill>
+                <a:latin typeface="+mn-lt"/>
+                <a:ea typeface="+mn-ea"/>
+                <a:cs typeface="+mn-cs"/>
+              </a:defRPr>
+            </a:lvl8pPr>
+            <a:lvl9pPr marL="3886200" indent="-228600" algn="l" defTabSz="914400" rtl="0" eaLnBrk="1" latinLnBrk="0" hangingPunct="1">
+              <a:lnSpc>
+                <a:spcPct val="90000"/>
+              </a:lnSpc>
+              <a:spcBef>
+                <a:spcPts val="500"/>
+              </a:spcBef>
+              <a:buFont typeface="Arial" panose="020B0604020202020204" pitchFamily="34" charset="0"/>
+              <a:buChar char="•"/>
+              <a:defRPr sz="1800" kern="1200">
+                <a:solidFill>
+                  <a:schemeClr val="tx1"/>
+                </a:solidFill>
+                <a:latin typeface="+mn-lt"/>
+                <a:ea typeface="+mn-ea"/>
+                <a:cs typeface="+mn-cs"/>
+              </a:defRPr>
+            </a:lvl9pPr>
+          </a:lstStyle>
+          <a:p>
+            <a:pPr marL="0" indent="0">
+              <a:buNone/>
+            </a:pPr>
+            <a:r>
+              <a:rPr lang="en-US" dirty="0">
+                <a:solidFill>
+                  <a:schemeClr val="bg2">
+                    <a:lumMod val="50000"/>
+                  </a:schemeClr>
+                </a:solidFill>
+              </a:rPr>
+              <a:t>Slides available at:</a:t>
+            </a:r>
+          </a:p>
+          <a:p>
+            <a:pPr marL="0" indent="0">
+              <a:buNone/>
+            </a:pPr>
+            <a:r>
+              <a:rPr lang="en-US" b="1" dirty="0" err="1">
+                <a:solidFill>
+                  <a:schemeClr val="bg2">
+                    <a:lumMod val="50000"/>
+                  </a:schemeClr>
+                </a:solidFill>
+              </a:rPr>
+              <a:t>docs.science.ai.cam.ac.uk</a:t>
+            </a:r>
+            <a:r>
+              <a:rPr lang="en-US" b="1" dirty="0">
+                <a:solidFill>
+                  <a:schemeClr val="bg2">
+                    <a:lumMod val="50000"/>
+                  </a:schemeClr>
+                </a:solidFill>
+              </a:rPr>
+              <a:t>/large-language-models/</a:t>
+            </a:r>
+          </a:p>
+        </p:txBody>
+      </p:sp>
     </p:spTree>
     <p:extLst>
       <p:ext uri="{BB962C8B-B14F-4D97-AF65-F5344CB8AC3E}">
@@ -10164,7 +11330,7 @@
           <p:nvPr/>
         </p:nvPicPr>
         <p:blipFill>
-          <a:blip r:embed="rId2"/>
+          <a:blip r:embed="rId3"/>
           <a:stretch>
             <a:fillRect/>
           </a:stretch>
@@ -13026,11 +14192,11 @@
           <p:nvPr/>
         </p:nvPicPr>
         <p:blipFill>
-          <a:blip r:embed="rId2">
+          <a:blip r:embed="rId3">
             <a:extLst>
               <a:ext uri="{BEBA8EAE-BF5A-486C-A8C5-ECC9F3942E4B}">
                 <a14:imgProps xmlns:a14="http://schemas.microsoft.com/office/drawing/2010/main">
-                  <a14:imgLayer r:embed="rId3">
+                  <a14:imgLayer r:embed="rId4">
                     <a14:imgEffect>
                       <a14:backgroundRemoval t="10000" b="90000" l="10000" r="90000"/>
                     </a14:imgEffect>
@@ -13516,7 +14682,7 @@
           <p:cNvPr id="2" name="Title 1">
             <a:extLst>
               <a:ext uri="{FF2B5EF4-FFF2-40B4-BE49-F238E27FC236}">
-                <a16:creationId xmlns:a16="http://schemas.microsoft.com/office/drawing/2014/main" id="{2622F7F8-D800-192B-AA88-485BF564DAB3}"/>
+                <a16:creationId xmlns:a16="http://schemas.microsoft.com/office/drawing/2014/main" id="{96041BF3-F107-F9B0-5EDB-4373BB4196B4}"/>
               </a:ext>
             </a:extLst>
           </p:cNvPr>
@@ -13534,7 +14700,7 @@
           <a:p>
             <a:r>
               <a:rPr lang="en-US" dirty="0"/>
-              <a:t>A comparison with humans</a:t>
+              <a:t>Some definitions</a:t>
             </a:r>
           </a:p>
         </p:txBody>
@@ -13544,7 +14710,7 @@
           <p:cNvPr id="3" name="Content Placeholder 2">
             <a:extLst>
               <a:ext uri="{FF2B5EF4-FFF2-40B4-BE49-F238E27FC236}">
-                <a16:creationId xmlns:a16="http://schemas.microsoft.com/office/drawing/2014/main" id="{39D4A751-4A71-6574-70A1-136794DB1F1C}"/>
+                <a16:creationId xmlns:a16="http://schemas.microsoft.com/office/drawing/2014/main" id="{BACC3A7C-33D4-2896-0AC9-9DA08F6ED357}"/>
               </a:ext>
             </a:extLst>
           </p:cNvPr>
@@ -13555,10 +14721,15 @@
             <p:ph idx="1"/>
           </p:nvPr>
         </p:nvSpPr>
-        <p:spPr/>
+        <p:spPr>
+          <a:xfrm>
+            <a:off x="838200" y="1825624"/>
+            <a:ext cx="10900410" cy="5032375"/>
+          </a:xfrm>
+        </p:spPr>
         <p:txBody>
           <a:bodyPr vert="horz" lIns="91440" tIns="45720" rIns="91440" bIns="45720" rtlCol="0" anchor="t">
-            <a:normAutofit/>
+            <a:normAutofit fontScale="70000" lnSpcReduction="20000"/>
           </a:bodyPr>
           <a:lstStyle/>
           <a:p>
@@ -13566,184 +14737,322 @@
               <a:buNone/>
             </a:pPr>
             <a:r>
-              <a:rPr lang="en-US" dirty="0"/>
-              <a:t>Is it reasonable to say that a large language model cannot do some cognitive tasks?</a:t>
+              <a:rPr lang="en-US" b="1" dirty="0">
+                <a:solidFill>
+                  <a:srgbClr val="7030A0"/>
+                </a:solidFill>
+                <a:ea typeface="+mn-lt"/>
+                <a:cs typeface="+mn-lt"/>
+              </a:rPr>
+              <a:t>Model </a:t>
+            </a:r>
+            <a:r>
+              <a:rPr lang="en-US" dirty="0">
+                <a:ea typeface="+mn-lt"/>
+                <a:cs typeface="+mn-lt"/>
+              </a:rPr>
+              <a:t>The thing you train and use to generate text.</a:t>
             </a:r>
           </a:p>
           <a:p>
             <a:pPr marL="0" indent="0">
               <a:buNone/>
             </a:pPr>
-            <a:endParaRPr lang="en-US" dirty="0"/>
+            <a:r>
+              <a:rPr lang="en-US" b="1" dirty="0">
+                <a:solidFill>
+                  <a:srgbClr val="7030A0"/>
+                </a:solidFill>
+                <a:ea typeface="+mn-lt"/>
+                <a:cs typeface="+mn-lt"/>
+              </a:rPr>
+              <a:t>Architecture </a:t>
+            </a:r>
+            <a:r>
+              <a:rPr lang="en-US" dirty="0">
+                <a:ea typeface="+mn-lt"/>
+                <a:cs typeface="+mn-lt"/>
+              </a:rPr>
+              <a:t>The high-level structure of the model.</a:t>
+            </a:r>
           </a:p>
           <a:p>
             <a:pPr marL="0" indent="0">
               <a:buNone/>
             </a:pPr>
             <a:r>
-              <a:rPr lang="en-US" dirty="0"/>
-              <a:t>What do you mean when you say </a:t>
-            </a:r>
-            <a:r>
-              <a:rPr lang="en-US" b="1" i="1" dirty="0">
+              <a:rPr lang="en-US" b="1" dirty="0">
                 <a:solidFill>
                   <a:srgbClr val="7030A0"/>
                 </a:solidFill>
+                <a:ea typeface="+mn-lt"/>
+                <a:cs typeface="+mn-lt"/>
               </a:rPr>
-              <a:t>AI</a:t>
-            </a:r>
-            <a:r>
-              <a:rPr lang="en-US" i="1" dirty="0"/>
-              <a:t>...</a:t>
-            </a:r>
-            <a:r>
-              <a:rPr lang="en-US" dirty="0"/>
-              <a:t>?</a:t>
-            </a:r>
+              <a:t>Parameters </a:t>
+            </a:r>
+            <a:r>
+              <a:rPr lang="en-US" dirty="0">
+                <a:ea typeface="+mn-lt"/>
+                <a:cs typeface="+mn-lt"/>
+              </a:rPr>
+              <a:t>(or weights) The internal knobs and dials that get altered during the course of training.</a:t>
+            </a:r>
+          </a:p>
+          <a:p>
+            <a:pPr marL="0" indent="0">
+              <a:buNone/>
+            </a:pPr>
+            <a:r>
+              <a:rPr lang="en-US" b="1" dirty="0">
+                <a:solidFill>
+                  <a:srgbClr val="7030A0"/>
+                </a:solidFill>
+                <a:ea typeface="+mn-lt"/>
+                <a:cs typeface="+mn-lt"/>
+              </a:rPr>
+              <a:t>Context </a:t>
+            </a:r>
+            <a:r>
+              <a:rPr lang="en-US" dirty="0">
+                <a:ea typeface="+mn-lt"/>
+                <a:cs typeface="+mn-lt"/>
+              </a:rPr>
+              <a:t>The input to the LLM.</a:t>
+            </a:r>
+          </a:p>
+          <a:p>
+            <a:pPr marL="0" indent="0">
+              <a:buNone/>
+            </a:pPr>
+            <a:r>
+              <a:rPr lang="en-US" b="1" dirty="0">
+                <a:solidFill>
+                  <a:srgbClr val="7030A0"/>
+                </a:solidFill>
+                <a:ea typeface="+mn-lt"/>
+                <a:cs typeface="+mn-lt"/>
+              </a:rPr>
+              <a:t>Embedding </a:t>
+            </a:r>
+            <a:r>
+              <a:rPr lang="en-US" dirty="0">
+                <a:ea typeface="+mn-lt"/>
+                <a:cs typeface="+mn-lt"/>
+              </a:rPr>
+              <a:t>A high-dimensional representation of text.</a:t>
+            </a:r>
+          </a:p>
+          <a:p>
+            <a:pPr marL="0" indent="0">
+              <a:buNone/>
+            </a:pPr>
+            <a:r>
+              <a:rPr lang="en-US" b="1" dirty="0">
+                <a:solidFill>
+                  <a:srgbClr val="7030A0"/>
+                </a:solidFill>
+                <a:ea typeface="+mn-lt"/>
+                <a:cs typeface="+mn-lt"/>
+              </a:rPr>
+              <a:t>Token </a:t>
+            </a:r>
+            <a:r>
+              <a:rPr lang="en-US" dirty="0">
+                <a:ea typeface="+mn-lt"/>
+                <a:cs typeface="+mn-lt"/>
+              </a:rPr>
+              <a:t>The smallest unit of text fed into a model.</a:t>
+            </a:r>
+          </a:p>
+          <a:p>
+            <a:pPr marL="0" indent="0">
+              <a:buNone/>
+            </a:pPr>
+            <a:r>
+              <a:rPr lang="en-US" b="1" dirty="0">
+                <a:solidFill>
+                  <a:srgbClr val="7030A0"/>
+                </a:solidFill>
+                <a:ea typeface="+mn-lt"/>
+                <a:cs typeface="+mn-lt"/>
+              </a:rPr>
+              <a:t>Pre-training </a:t>
+            </a:r>
+            <a:r>
+              <a:rPr lang="en-US" dirty="0">
+                <a:ea typeface="+mn-lt"/>
+                <a:cs typeface="+mn-lt"/>
+              </a:rPr>
+              <a:t>The first stage of training the LLM, and usually the most expensive.</a:t>
+            </a:r>
+          </a:p>
+          <a:p>
+            <a:pPr marL="0" indent="0">
+              <a:buNone/>
+            </a:pPr>
+            <a:r>
+              <a:rPr lang="en-US" b="1" dirty="0">
+                <a:solidFill>
+                  <a:srgbClr val="7030A0"/>
+                </a:solidFill>
+                <a:ea typeface="+mn-lt"/>
+                <a:cs typeface="+mn-lt"/>
+              </a:rPr>
+              <a:t>Post-training </a:t>
+            </a:r>
+            <a:r>
+              <a:rPr lang="en-US" dirty="0">
+                <a:ea typeface="+mn-lt"/>
+                <a:cs typeface="+mn-lt"/>
+              </a:rPr>
+              <a:t>The second stage of training for working beyond general language understanding</a:t>
+            </a:r>
+          </a:p>
+          <a:p>
+            <a:pPr marL="0" indent="0">
+              <a:buNone/>
+            </a:pPr>
+            <a:r>
+              <a:rPr lang="en-US" b="1" dirty="0">
+                <a:solidFill>
+                  <a:srgbClr val="7030A0"/>
+                </a:solidFill>
+                <a:ea typeface="+mn-lt"/>
+                <a:cs typeface="+mn-lt"/>
+              </a:rPr>
+              <a:t>Fine-tuning </a:t>
+            </a:r>
+            <a:r>
+              <a:rPr lang="en-US" dirty="0">
+                <a:ea typeface="+mn-lt"/>
+                <a:cs typeface="+mn-lt"/>
+              </a:rPr>
+              <a:t>Training the LLM to do a particular task.</a:t>
+            </a:r>
+          </a:p>
+          <a:p>
+            <a:pPr marL="0" indent="0">
+              <a:buNone/>
+            </a:pPr>
+            <a:r>
+              <a:rPr lang="en-US" b="1" dirty="0">
+                <a:solidFill>
+                  <a:srgbClr val="7030A0"/>
+                </a:solidFill>
+                <a:ea typeface="+mn-lt"/>
+                <a:cs typeface="+mn-lt"/>
+              </a:rPr>
+              <a:t>Inference </a:t>
+            </a:r>
+            <a:r>
+              <a:rPr lang="en-US" dirty="0">
+                <a:ea typeface="+mn-lt"/>
+                <a:cs typeface="+mn-lt"/>
+              </a:rPr>
+              <a:t>The act of calling the model for text generation.</a:t>
+            </a:r>
+          </a:p>
+          <a:p>
+            <a:pPr marL="0" indent="0">
+              <a:buNone/>
+            </a:pPr>
+            <a:r>
+              <a:rPr lang="en-US" b="1" dirty="0">
+                <a:solidFill>
+                  <a:srgbClr val="7030A0"/>
+                </a:solidFill>
+                <a:ea typeface="+mn-lt"/>
+                <a:cs typeface="+mn-lt"/>
+              </a:rPr>
+              <a:t>Quantization </a:t>
+            </a:r>
+            <a:r>
+              <a:rPr lang="en-US" dirty="0">
+                <a:ea typeface="+mn-lt"/>
+                <a:cs typeface="+mn-lt"/>
+              </a:rPr>
+              <a:t>Reducing the size of a model.</a:t>
+            </a:r>
+          </a:p>
+          <a:p>
+            <a:pPr marL="0" indent="0">
+              <a:buNone/>
+            </a:pPr>
+            <a:r>
+              <a:rPr lang="en-US" b="1" dirty="0">
+                <a:solidFill>
+                  <a:srgbClr val="7030A0"/>
+                </a:solidFill>
+                <a:ea typeface="+mn-lt"/>
+                <a:cs typeface="+mn-lt"/>
+              </a:rPr>
+              <a:t>Source </a:t>
+            </a:r>
+            <a:r>
+              <a:rPr lang="en-US" dirty="0">
+                <a:ea typeface="+mn-lt"/>
+                <a:cs typeface="+mn-lt"/>
+              </a:rPr>
+              <a:t>The availability of the model (can be open or closed).</a:t>
+            </a:r>
+          </a:p>
+          <a:p>
+            <a:pPr marL="0" indent="0">
+              <a:buNone/>
+            </a:pPr>
+            <a:r>
+              <a:rPr lang="en-US" b="1" dirty="0">
+                <a:solidFill>
+                  <a:srgbClr val="7030A0"/>
+                </a:solidFill>
+                <a:ea typeface="+mn-lt"/>
+                <a:cs typeface="+mn-lt"/>
+              </a:rPr>
+              <a:t>Modality </a:t>
+            </a:r>
+            <a:r>
+              <a:rPr lang="en-US" dirty="0">
+                <a:ea typeface="+mn-lt"/>
+                <a:cs typeface="+mn-lt"/>
+              </a:rPr>
+              <a:t>Defined by the type of data the model is trained on (e.g. text or images).</a:t>
+            </a:r>
+          </a:p>
+          <a:p>
+            <a:pPr marL="0" indent="0">
+              <a:buNone/>
+            </a:pPr>
+            <a:r>
+              <a:rPr lang="en-US" b="1" dirty="0">
+                <a:solidFill>
+                  <a:srgbClr val="7030A0"/>
+                </a:solidFill>
+                <a:ea typeface="+mn-lt"/>
+                <a:cs typeface="+mn-lt"/>
+              </a:rPr>
+              <a:t>API </a:t>
+            </a:r>
+            <a:r>
+              <a:rPr lang="en-US" dirty="0">
+                <a:ea typeface="+mn-lt"/>
+                <a:cs typeface="+mn-lt"/>
+              </a:rPr>
+              <a:t>(Application Programming Interface) The means by which you can interact with a model.</a:t>
+            </a:r>
+            <a:endParaRPr lang="en-US" dirty="0"/>
           </a:p>
         </p:txBody>
       </p:sp>
     </p:spTree>
     <p:extLst>
       <p:ext uri="{BB962C8B-B14F-4D97-AF65-F5344CB8AC3E}">
-        <p14:creationId xmlns:p14="http://schemas.microsoft.com/office/powerpoint/2010/main" val="3408820217"/>
+        <p14:creationId xmlns:p14="http://schemas.microsoft.com/office/powerpoint/2010/main" val="2828243406"/>
       </p:ext>
     </p:extLst>
   </p:cSld>
   <p:clrMapOvr>
     <a:masterClrMapping/>
   </p:clrMapOvr>
-  <p:timing>
-    <p:tnLst>
-      <p:par>
-        <p:cTn id="1" dur="indefinite" restart="never" nodeType="tmRoot">
-          <p:childTnLst>
-            <p:seq concurrent="1" nextAc="seek">
-              <p:cTn id="2" dur="indefinite" nodeType="mainSeq">
-                <p:childTnLst>
-                  <p:par>
-                    <p:cTn id="3" fill="hold">
-                      <p:stCondLst>
-                        <p:cond delay="indefinite"/>
-                      </p:stCondLst>
-                      <p:childTnLst>
-                        <p:par>
-                          <p:cTn id="4" fill="hold">
-                            <p:stCondLst>
-                              <p:cond delay="0"/>
-                            </p:stCondLst>
-                            <p:childTnLst>
-                              <p:par>
-                                <p:cTn id="5" presetID="1" presetClass="entr" presetSubtype="0" fill="hold" grpId="0" nodeType="clickEffect">
-                                  <p:stCondLst>
-                                    <p:cond delay="0"/>
-                                  </p:stCondLst>
-                                  <p:childTnLst>
-                                    <p:set>
-                                      <p:cBhvr>
-                                        <p:cTn id="6" dur="1" fill="hold">
-                                          <p:stCondLst>
-                                            <p:cond delay="0"/>
-                                          </p:stCondLst>
-                                        </p:cTn>
-                                        <p:tgtEl>
-                                          <p:spTgt spid="3">
-                                            <p:txEl>
-                                              <p:pRg st="0" end="0"/>
-                                            </p:txEl>
-                                          </p:spTgt>
-                                        </p:tgtEl>
-                                        <p:attrNameLst>
-                                          <p:attrName>style.visibility</p:attrName>
-                                        </p:attrNameLst>
-                                      </p:cBhvr>
-                                      <p:to>
-                                        <p:strVal val="visible"/>
-                                      </p:to>
-                                    </p:set>
-                                  </p:childTnLst>
-                                </p:cTn>
-                              </p:par>
-                            </p:childTnLst>
-                          </p:cTn>
-                        </p:par>
-                      </p:childTnLst>
-                    </p:cTn>
-                  </p:par>
-                  <p:par>
-                    <p:cTn id="7" fill="hold">
-                      <p:stCondLst>
-                        <p:cond delay="indefinite"/>
-                      </p:stCondLst>
-                      <p:childTnLst>
-                        <p:par>
-                          <p:cTn id="8" fill="hold">
-                            <p:stCondLst>
-                              <p:cond delay="0"/>
-                            </p:stCondLst>
-                            <p:childTnLst>
-                              <p:par>
-                                <p:cTn id="9" presetID="1" presetClass="entr" presetSubtype="0" fill="hold" grpId="0" nodeType="clickEffect">
-                                  <p:stCondLst>
-                                    <p:cond delay="0"/>
-                                  </p:stCondLst>
-                                  <p:childTnLst>
-                                    <p:set>
-                                      <p:cBhvr>
-                                        <p:cTn id="10" dur="1" fill="hold">
-                                          <p:stCondLst>
-                                            <p:cond delay="0"/>
-                                          </p:stCondLst>
-                                        </p:cTn>
-                                        <p:tgtEl>
-                                          <p:spTgt spid="3">
-                                            <p:txEl>
-                                              <p:pRg st="2" end="2"/>
-                                            </p:txEl>
-                                          </p:spTgt>
-                                        </p:tgtEl>
-                                        <p:attrNameLst>
-                                          <p:attrName>style.visibility</p:attrName>
-                                        </p:attrNameLst>
-                                      </p:cBhvr>
-                                      <p:to>
-                                        <p:strVal val="visible"/>
-                                      </p:to>
-                                    </p:set>
-                                  </p:childTnLst>
-                                </p:cTn>
-                              </p:par>
-                            </p:childTnLst>
-                          </p:cTn>
-                        </p:par>
-                      </p:childTnLst>
-                    </p:cTn>
-                  </p:par>
-                </p:childTnLst>
-              </p:cTn>
-              <p:prevCondLst>
-                <p:cond evt="onPrev" delay="0">
-                  <p:tgtEl>
-                    <p:sldTgt/>
-                  </p:tgtEl>
-                </p:cond>
-              </p:prevCondLst>
-              <p:nextCondLst>
-                <p:cond evt="onNext" delay="0">
-                  <p:tgtEl>
-                    <p:sldTgt/>
-                  </p:tgtEl>
-                </p:cond>
-              </p:nextCondLst>
-            </p:seq>
-          </p:childTnLst>
-        </p:cTn>
-      </p:par>
-    </p:tnLst>
-    <p:bldLst>
-      <p:bldP spid="3" grpId="0" build="p"/>
-    </p:bldLst>
-  </p:timing>
 </p:sld>
 </file>
 
@@ -13769,7 +15078,7 @@
           <p:cNvPr id="2" name="Title 1">
             <a:extLst>
               <a:ext uri="{FF2B5EF4-FFF2-40B4-BE49-F238E27FC236}">
-                <a16:creationId xmlns:a16="http://schemas.microsoft.com/office/drawing/2014/main" id="{96041BF3-F107-F9B0-5EDB-4373BB4196B4}"/>
+                <a16:creationId xmlns:a16="http://schemas.microsoft.com/office/drawing/2014/main" id="{7C33511F-8565-6D41-02BF-6E9296DCF3B4}"/>
               </a:ext>
             </a:extLst>
           </p:cNvPr>
@@ -13787,7 +15096,37 @@
           <a:p>
             <a:r>
               <a:rPr lang="en-US" dirty="0"/>
-              <a:t>Some definitions</a:t>
+              <a:t>EU AI Act </a:t>
+            </a:r>
+            <a:r>
+              <a:rPr lang="en-US" i="1" dirty="0">
+                <a:solidFill>
+                  <a:schemeClr val="bg2">
+                    <a:lumMod val="50000"/>
+                  </a:schemeClr>
+                </a:solidFill>
+              </a:rPr>
+              <a:t>(</a:t>
+            </a:r>
+            <a:r>
+              <a:rPr lang="en-GB" i="1" dirty="0">
+                <a:solidFill>
+                  <a:schemeClr val="bg2">
+                    <a:lumMod val="50000"/>
+                  </a:schemeClr>
+                </a:solidFill>
+              </a:rPr>
+              <a:t>August 2024</a:t>
+            </a:r>
+            <a:r>
+              <a:rPr lang="en-US" i="1" dirty="0">
+                <a:solidFill>
+                  <a:schemeClr val="bg2">
+                    <a:lumMod val="50000"/>
+                  </a:schemeClr>
+                </a:solidFill>
+              </a:rPr>
+              <a:t>)</a:t>
             </a:r>
           </a:p>
         </p:txBody>
@@ -13797,7 +15136,7 @@
           <p:cNvPr id="3" name="Content Placeholder 2">
             <a:extLst>
               <a:ext uri="{FF2B5EF4-FFF2-40B4-BE49-F238E27FC236}">
-                <a16:creationId xmlns:a16="http://schemas.microsoft.com/office/drawing/2014/main" id="{BACC3A7C-33D4-2896-0AC9-9DA08F6ED357}"/>
+                <a16:creationId xmlns:a16="http://schemas.microsoft.com/office/drawing/2014/main" id="{C10ABB8D-3273-0866-F725-70CD2E52915C}"/>
               </a:ext>
             </a:extLst>
           </p:cNvPr>
@@ -13811,7 +15150,7 @@
         <p:spPr/>
         <p:txBody>
           <a:bodyPr vert="horz" lIns="91440" tIns="45720" rIns="91440" bIns="45720" rtlCol="0" anchor="t">
-            <a:normAutofit fontScale="62500" lnSpcReduction="20000"/>
+            <a:normAutofit/>
           </a:bodyPr>
           <a:lstStyle/>
           <a:p>
@@ -13819,340 +15158,31 @@
               <a:buNone/>
             </a:pPr>
             <a:r>
-              <a:rPr lang="en-US" b="1">
-                <a:solidFill>
-                  <a:srgbClr val="7030A0"/>
-                </a:solidFill>
-                <a:ea typeface="+mn-lt"/>
-                <a:cs typeface="+mn-lt"/>
-              </a:rPr>
-              <a:t>Model </a:t>
-            </a:r>
-            <a:r>
-              <a:rPr lang="en-US">
-                <a:ea typeface="+mn-lt"/>
-                <a:cs typeface="+mn-lt"/>
-              </a:rPr>
-              <a:t>The thing you train and use to generate text.</a:t>
-            </a:r>
+              <a:rPr lang="en-US" dirty="0"/>
+              <a:t>How does the AI Act define things...?</a:t>
+            </a:r>
+          </a:p>
+          <a:p>
+            <a:pPr marL="0" indent="0">
+              <a:buNone/>
+            </a:pPr>
+            <a:endParaRPr lang="en-US" dirty="0"/>
+          </a:p>
+          <a:p>
+            <a:pPr marL="0" indent="0">
+              <a:buNone/>
+            </a:pPr>
             <a:endParaRPr lang="en-US" dirty="0">
               <a:ea typeface="+mn-lt"/>
               <a:cs typeface="+mn-lt"/>
             </a:endParaRPr>
           </a:p>
-          <a:p>
-            <a:pPr marL="0" indent="0">
-              <a:buNone/>
-            </a:pPr>
-            <a:r>
-              <a:rPr lang="en-US" b="1" dirty="0">
-                <a:solidFill>
-                  <a:srgbClr val="7030A0"/>
-                </a:solidFill>
-                <a:ea typeface="+mn-lt"/>
-                <a:cs typeface="+mn-lt"/>
-              </a:rPr>
-              <a:t>Architecture </a:t>
-            </a:r>
-            <a:r>
-              <a:rPr lang="en-US" dirty="0">
-                <a:ea typeface="+mn-lt"/>
-                <a:cs typeface="+mn-lt"/>
-              </a:rPr>
-              <a:t>The </a:t>
-            </a:r>
-            <a:r>
-              <a:rPr lang="en-US">
-                <a:ea typeface="+mn-lt"/>
-                <a:cs typeface="+mn-lt"/>
-              </a:rPr>
-              <a:t>high-level structure of the model.</a:t>
-            </a:r>
-          </a:p>
-          <a:p>
-            <a:pPr marL="0" indent="0">
-              <a:buNone/>
-            </a:pPr>
-            <a:r>
-              <a:rPr lang="en-US" b="1" dirty="0">
-                <a:solidFill>
-                  <a:srgbClr val="7030A0"/>
-                </a:solidFill>
-                <a:ea typeface="+mn-lt"/>
-                <a:cs typeface="+mn-lt"/>
-              </a:rPr>
-              <a:t>Parameters </a:t>
-            </a:r>
-            <a:r>
-              <a:rPr lang="en-US" dirty="0">
-                <a:ea typeface="+mn-lt"/>
-                <a:cs typeface="+mn-lt"/>
-              </a:rPr>
-              <a:t>(or weights) The internal knobs and dials that get altered </a:t>
-            </a:r>
-            <a:r>
-              <a:rPr lang="en-US">
-                <a:ea typeface="+mn-lt"/>
-                <a:cs typeface="+mn-lt"/>
-              </a:rPr>
-              <a:t>during the course of training.</a:t>
-            </a:r>
-          </a:p>
-          <a:p>
-            <a:pPr marL="0" indent="0">
-              <a:buNone/>
-            </a:pPr>
-            <a:r>
-              <a:rPr lang="en-US" b="1" dirty="0">
-                <a:solidFill>
-                  <a:srgbClr val="7030A0"/>
-                </a:solidFill>
-                <a:ea typeface="+mn-lt"/>
-                <a:cs typeface="+mn-lt"/>
-              </a:rPr>
-              <a:t>Context </a:t>
-            </a:r>
-            <a:r>
-              <a:rPr lang="en-US" dirty="0">
-                <a:ea typeface="+mn-lt"/>
-                <a:cs typeface="+mn-lt"/>
-              </a:rPr>
-              <a:t>The input to the LLM.</a:t>
-            </a:r>
-          </a:p>
-          <a:p>
-            <a:pPr marL="0" indent="0">
-              <a:buNone/>
-            </a:pPr>
-            <a:r>
-              <a:rPr lang="en-US" b="1" dirty="0">
-                <a:solidFill>
-                  <a:srgbClr val="7030A0"/>
-                </a:solidFill>
-                <a:ea typeface="+mn-lt"/>
-                <a:cs typeface="+mn-lt"/>
-              </a:rPr>
-              <a:t>Embedding </a:t>
-            </a:r>
-            <a:r>
-              <a:rPr lang="en-US" dirty="0">
-                <a:ea typeface="+mn-lt"/>
-                <a:cs typeface="+mn-lt"/>
-              </a:rPr>
-              <a:t>A high-dimensional representation of text.</a:t>
-            </a:r>
-          </a:p>
-          <a:p>
-            <a:pPr marL="0" indent="0">
-              <a:buNone/>
-            </a:pPr>
-            <a:r>
-              <a:rPr lang="en-US" b="1" dirty="0">
-                <a:solidFill>
-                  <a:srgbClr val="7030A0"/>
-                </a:solidFill>
-                <a:ea typeface="+mn-lt"/>
-                <a:cs typeface="+mn-lt"/>
-              </a:rPr>
-              <a:t>Token </a:t>
-            </a:r>
-            <a:r>
-              <a:rPr lang="en-US" dirty="0">
-                <a:ea typeface="+mn-lt"/>
-                <a:cs typeface="+mn-lt"/>
-              </a:rPr>
-              <a:t>The smallest unit of text fed into a model.</a:t>
-            </a:r>
-          </a:p>
-          <a:p>
-            <a:pPr marL="0" indent="0">
-              <a:buNone/>
-            </a:pPr>
-            <a:r>
-              <a:rPr lang="en-US" b="1" dirty="0">
-                <a:solidFill>
-                  <a:srgbClr val="7030A0"/>
-                </a:solidFill>
-                <a:ea typeface="+mn-lt"/>
-                <a:cs typeface="+mn-lt"/>
-              </a:rPr>
-              <a:t>Pretraining </a:t>
-            </a:r>
-            <a:r>
-              <a:rPr lang="en-US" dirty="0">
-                <a:ea typeface="+mn-lt"/>
-                <a:cs typeface="+mn-lt"/>
-              </a:rPr>
-              <a:t>The first stage of </a:t>
-            </a:r>
-            <a:r>
-              <a:rPr lang="en-US">
-                <a:ea typeface="+mn-lt"/>
-                <a:cs typeface="+mn-lt"/>
-              </a:rPr>
-              <a:t>training the LLM, and usually the most expensive.</a:t>
-            </a:r>
-          </a:p>
-          <a:p>
-            <a:pPr marL="0" indent="0">
-              <a:buNone/>
-            </a:pPr>
-            <a:r>
-              <a:rPr lang="en-US" dirty="0">
-                <a:ea typeface="+mn-lt"/>
-                <a:cs typeface="+mn-lt"/>
-              </a:rPr>
-              <a:t> </a:t>
-            </a:r>
-            <a:r>
-              <a:rPr lang="en-US" b="1">
-                <a:solidFill>
-                  <a:srgbClr val="7030A0"/>
-                </a:solidFill>
-                <a:ea typeface="+mn-lt"/>
-                <a:cs typeface="+mn-lt"/>
-              </a:rPr>
-              <a:t>Finetuning </a:t>
-            </a:r>
-            <a:r>
-              <a:rPr lang="en-US">
-                <a:ea typeface="+mn-lt"/>
-                <a:cs typeface="+mn-lt"/>
-              </a:rPr>
-              <a:t>Training the LLM to do a particular task.</a:t>
-            </a:r>
-          </a:p>
-          <a:p>
-            <a:pPr marL="0" indent="0">
-              <a:buNone/>
-            </a:pPr>
-            <a:r>
-              <a:rPr lang="en-US" b="1" dirty="0">
-                <a:solidFill>
-                  <a:srgbClr val="7030A0"/>
-                </a:solidFill>
-                <a:ea typeface="+mn-lt"/>
-                <a:cs typeface="+mn-lt"/>
-              </a:rPr>
-              <a:t>Inference </a:t>
-            </a:r>
-            <a:r>
-              <a:rPr lang="en-US" dirty="0">
-                <a:ea typeface="+mn-lt"/>
-                <a:cs typeface="+mn-lt"/>
-              </a:rPr>
-              <a:t>The act of calling the model for text generation.</a:t>
-            </a:r>
-          </a:p>
-          <a:p>
-            <a:pPr marL="0" indent="0">
-              <a:buNone/>
-            </a:pPr>
-            <a:r>
-              <a:rPr lang="en-US" b="1" dirty="0">
-                <a:solidFill>
-                  <a:srgbClr val="7030A0"/>
-                </a:solidFill>
-                <a:ea typeface="+mn-lt"/>
-                <a:cs typeface="+mn-lt"/>
-              </a:rPr>
-              <a:t>Quantization </a:t>
-            </a:r>
-            <a:r>
-              <a:rPr lang="en-US" dirty="0">
-                <a:ea typeface="+mn-lt"/>
-                <a:cs typeface="+mn-lt"/>
-              </a:rPr>
-              <a:t>Reducing the size of a model.</a:t>
-            </a:r>
-          </a:p>
-          <a:p>
-            <a:pPr marL="0" indent="0">
-              <a:buNone/>
-            </a:pPr>
-            <a:r>
-              <a:rPr lang="en-US" b="1" dirty="0">
-                <a:solidFill>
-                  <a:srgbClr val="7030A0"/>
-                </a:solidFill>
-                <a:ea typeface="+mn-lt"/>
-                <a:cs typeface="+mn-lt"/>
-              </a:rPr>
-              <a:t>Source </a:t>
-            </a:r>
-            <a:r>
-              <a:rPr lang="en-US" dirty="0">
-                <a:ea typeface="+mn-lt"/>
-                <a:cs typeface="+mn-lt"/>
-              </a:rPr>
-              <a:t>The availability of the model (can be open </a:t>
-            </a:r>
-            <a:r>
-              <a:rPr lang="en-US">
-                <a:ea typeface="+mn-lt"/>
-                <a:cs typeface="+mn-lt"/>
-              </a:rPr>
-              <a:t>or closed).</a:t>
-            </a:r>
-          </a:p>
-          <a:p>
-            <a:pPr marL="0" indent="0">
-              <a:buNone/>
-            </a:pPr>
-            <a:r>
-              <a:rPr lang="en-US" b="1" dirty="0">
-                <a:solidFill>
-                  <a:srgbClr val="7030A0"/>
-                </a:solidFill>
-                <a:ea typeface="+mn-lt"/>
-                <a:cs typeface="+mn-lt"/>
-              </a:rPr>
-              <a:t>Modality </a:t>
-            </a:r>
-            <a:r>
-              <a:rPr lang="en-US" dirty="0">
-                <a:ea typeface="+mn-lt"/>
-                <a:cs typeface="+mn-lt"/>
-              </a:rPr>
-              <a:t>Defined by the type of data the model is trained on (e.g.</a:t>
-            </a:r>
-            <a:r>
-              <a:rPr lang="en-US">
-                <a:ea typeface="+mn-lt"/>
-                <a:cs typeface="+mn-lt"/>
-              </a:rPr>
-              <a:t> text or images).</a:t>
-            </a:r>
-          </a:p>
-          <a:p>
-            <a:pPr marL="0" indent="0">
-              <a:buNone/>
-            </a:pPr>
-            <a:r>
-              <a:rPr lang="en-US" b="1" dirty="0">
-                <a:solidFill>
-                  <a:srgbClr val="7030A0"/>
-                </a:solidFill>
-                <a:ea typeface="+mn-lt"/>
-                <a:cs typeface="+mn-lt"/>
-              </a:rPr>
-              <a:t>API </a:t>
-            </a:r>
-            <a:r>
-              <a:rPr lang="en-US" dirty="0">
-                <a:ea typeface="+mn-lt"/>
-                <a:cs typeface="+mn-lt"/>
-              </a:rPr>
-              <a:t>(Application Programming Interface) The means by which you can interact with a model.</a:t>
-            </a:r>
-            <a:endParaRPr lang="en-US"/>
-          </a:p>
         </p:txBody>
       </p:sp>
     </p:spTree>
     <p:extLst>
       <p:ext uri="{BB962C8B-B14F-4D97-AF65-F5344CB8AC3E}">
-        <p14:creationId xmlns:p14="http://schemas.microsoft.com/office/powerpoint/2010/main" val="2828243406"/>
+        <p14:creationId xmlns:p14="http://schemas.microsoft.com/office/powerpoint/2010/main" val="1865729139"/>
       </p:ext>
     </p:extLst>
   </p:cSld>

--- a/slides/1-intro.pptx
+++ b/slides/1-intro.pptx
@@ -314,7 +314,7 @@
           </a:lstStyle>
           <a:p>
             <a:fld id="{2DE082D9-00CE-4FDC-82D3-FDE16CD37225}" type="datetimeFigureOut">
-              <a:t>4/30/26</a:t>
+              <a:t>5/1/26</a:t>
             </a:fld>
             <a:endParaRPr lang="en-US"/>
           </a:p>
@@ -626,6 +626,54 @@
           <a:p>
             <a:r>
               <a:rPr lang="en-US" dirty="0"/>
+              <a:t>[TIMINGS]</a:t>
+            </a:r>
+          </a:p>
+          <a:p>
+            <a:endParaRPr lang="en-US" dirty="0"/>
+          </a:p>
+          <a:p>
+            <a:r>
+              <a:rPr lang="en-US" dirty="0"/>
+              <a:t>Practice: 40m</a:t>
+            </a:r>
+          </a:p>
+          <a:p>
+            <a:r>
+              <a:rPr lang="en-US" dirty="0"/>
+              <a:t>Target: 45m</a:t>
+            </a:r>
+          </a:p>
+          <a:p>
+            <a:endParaRPr lang="en-US" dirty="0"/>
+          </a:p>
+          <a:p>
+            <a:r>
+              <a:rPr lang="en-US" dirty="0"/>
+              <a:t>Start time: 9:35</a:t>
+            </a:r>
+          </a:p>
+          <a:p>
+            <a:r>
+              <a:rPr lang="en-US" dirty="0"/>
+              <a:t>End time: 10:20</a:t>
+            </a:r>
+          </a:p>
+          <a:p>
+            <a:endParaRPr lang="en-US" dirty="0"/>
+          </a:p>
+          <a:p>
+            <a:r>
+              <a:rPr lang="en-US" dirty="0"/>
+              <a:t>---</a:t>
+            </a:r>
+          </a:p>
+          <a:p>
+            <a:endParaRPr lang="en-US" dirty="0"/>
+          </a:p>
+          <a:p>
+            <a:r>
+              <a:rPr lang="en-US" dirty="0"/>
               <a:t>Welcome to introduction to large </a:t>
             </a:r>
             <a:r>
@@ -1013,7 +1061,7 @@
           <a:p>
             <a:r>
               <a:rPr lang="en-US" dirty="0"/>
-              <a:t>We run a couple of workshops at the moment: an introduction to large language models, a hands on LLMs, generative AI, diffusion models, docker, a packaging and publishing workshop, and now a new agents 4 science workshop</a:t>
+              <a:t>We run a couple of workshops at the moment: an introduction to large language models, a hands on LLMs, generative AI, diffusion models, docker, a packaging and publishing workshop.</a:t>
             </a:r>
           </a:p>
         </p:txBody>
@@ -1811,7 +1859,7 @@
           <a:p>
             <a:fld id="{C764DE79-268F-4C1A-8933-263129D2AF90}" type="datetimeFigureOut">
               <a:rPr lang="en-US" dirty="0"/>
-              <a:t>4/30/26</a:t>
+              <a:t>5/1/26</a:t>
             </a:fld>
             <a:endParaRPr lang="en-US" dirty="0"/>
           </a:p>
@@ -1979,7 +2027,7 @@
           <a:p>
             <a:fld id="{C764DE79-268F-4C1A-8933-263129D2AF90}" type="datetimeFigureOut">
               <a:rPr lang="en-US" dirty="0"/>
-              <a:t>4/30/26</a:t>
+              <a:t>5/1/26</a:t>
             </a:fld>
             <a:endParaRPr lang="en-US" dirty="0"/>
           </a:p>
@@ -2157,7 +2205,7 @@
           <a:p>
             <a:fld id="{C764DE79-268F-4C1A-8933-263129D2AF90}" type="datetimeFigureOut">
               <a:rPr lang="en-US" dirty="0"/>
-              <a:t>4/30/26</a:t>
+              <a:t>5/1/26</a:t>
             </a:fld>
             <a:endParaRPr lang="en-US" dirty="0"/>
           </a:p>
@@ -2325,7 +2373,7 @@
           <a:p>
             <a:fld id="{C764DE79-268F-4C1A-8933-263129D2AF90}" type="datetimeFigureOut">
               <a:rPr lang="en-US" dirty="0"/>
-              <a:t>4/30/26</a:t>
+              <a:t>5/1/26</a:t>
             </a:fld>
             <a:endParaRPr lang="en-US" dirty="0"/>
           </a:p>
@@ -2570,7 +2618,7 @@
           <a:p>
             <a:fld id="{C764DE79-268F-4C1A-8933-263129D2AF90}" type="datetimeFigureOut">
               <a:rPr lang="en-US" dirty="0"/>
-              <a:t>4/30/26</a:t>
+              <a:t>5/1/26</a:t>
             </a:fld>
             <a:endParaRPr lang="en-US" dirty="0"/>
           </a:p>
@@ -2799,7 +2847,7 @@
           <a:p>
             <a:fld id="{C764DE79-268F-4C1A-8933-263129D2AF90}" type="datetimeFigureOut">
               <a:rPr lang="en-US" dirty="0"/>
-              <a:t>4/30/26</a:t>
+              <a:t>5/1/26</a:t>
             </a:fld>
             <a:endParaRPr lang="en-US" dirty="0"/>
           </a:p>
@@ -3163,7 +3211,7 @@
           <a:p>
             <a:fld id="{C764DE79-268F-4C1A-8933-263129D2AF90}" type="datetimeFigureOut">
               <a:rPr lang="en-US" dirty="0"/>
-              <a:t>4/30/26</a:t>
+              <a:t>5/1/26</a:t>
             </a:fld>
             <a:endParaRPr lang="en-US" dirty="0"/>
           </a:p>
@@ -3280,7 +3328,7 @@
           <a:p>
             <a:fld id="{C764DE79-268F-4C1A-8933-263129D2AF90}" type="datetimeFigureOut">
               <a:rPr lang="en-US" dirty="0"/>
-              <a:t>4/30/26</a:t>
+              <a:t>5/1/26</a:t>
             </a:fld>
             <a:endParaRPr lang="en-US" dirty="0"/>
           </a:p>
@@ -3375,7 +3423,7 @@
           <a:p>
             <a:fld id="{C764DE79-268F-4C1A-8933-263129D2AF90}" type="datetimeFigureOut">
               <a:rPr lang="en-US" dirty="0"/>
-              <a:t>4/30/26</a:t>
+              <a:t>5/1/26</a:t>
             </a:fld>
             <a:endParaRPr lang="en-US" dirty="0"/>
           </a:p>
@@ -3650,7 +3698,7 @@
           <a:p>
             <a:fld id="{C764DE79-268F-4C1A-8933-263129D2AF90}" type="datetimeFigureOut">
               <a:rPr lang="en-US" dirty="0"/>
-              <a:t>4/30/26</a:t>
+              <a:t>5/1/26</a:t>
             </a:fld>
             <a:endParaRPr lang="en-US" dirty="0"/>
           </a:p>
@@ -3902,7 +3950,7 @@
           <a:p>
             <a:fld id="{C764DE79-268F-4C1A-8933-263129D2AF90}" type="datetimeFigureOut">
               <a:rPr lang="en-US" dirty="0"/>
-              <a:t>4/30/26</a:t>
+              <a:t>5/1/26</a:t>
             </a:fld>
             <a:endParaRPr lang="en-US" dirty="0"/>
           </a:p>
@@ -4113,7 +4161,7 @@
           <a:p>
             <a:fld id="{C764DE79-268F-4C1A-8933-263129D2AF90}" type="datetimeFigureOut">
               <a:rPr lang="en-US" dirty="0"/>
-              <a:t>4/30/26</a:t>
+              <a:t>5/1/26</a:t>
             </a:fld>
             <a:endParaRPr lang="en-US" dirty="0"/>
           </a:p>

--- a/slides/1-intro.pptx
+++ b/slides/1-intro.pptx
@@ -314,7 +314,7 @@
           </a:lstStyle>
           <a:p>
             <a:fld id="{2DE082D9-00CE-4FDC-82D3-FDE16CD37225}" type="datetimeFigureOut">
-              <a:t>5/1/26</a:t>
+              <a:t>5/8/26</a:t>
             </a:fld>
             <a:endParaRPr lang="en-US"/>
           </a:p>
@@ -1859,7 +1859,7 @@
           <a:p>
             <a:fld id="{C764DE79-268F-4C1A-8933-263129D2AF90}" type="datetimeFigureOut">
               <a:rPr lang="en-US" dirty="0"/>
-              <a:t>5/1/26</a:t>
+              <a:t>5/8/26</a:t>
             </a:fld>
             <a:endParaRPr lang="en-US" dirty="0"/>
           </a:p>
@@ -2027,7 +2027,7 @@
           <a:p>
             <a:fld id="{C764DE79-268F-4C1A-8933-263129D2AF90}" type="datetimeFigureOut">
               <a:rPr lang="en-US" dirty="0"/>
-              <a:t>5/1/26</a:t>
+              <a:t>5/8/26</a:t>
             </a:fld>
             <a:endParaRPr lang="en-US" dirty="0"/>
           </a:p>
@@ -2205,7 +2205,7 @@
           <a:p>
             <a:fld id="{C764DE79-268F-4C1A-8933-263129D2AF90}" type="datetimeFigureOut">
               <a:rPr lang="en-US" dirty="0"/>
-              <a:t>5/1/26</a:t>
+              <a:t>5/8/26</a:t>
             </a:fld>
             <a:endParaRPr lang="en-US" dirty="0"/>
           </a:p>
@@ -2373,7 +2373,7 @@
           <a:p>
             <a:fld id="{C764DE79-268F-4C1A-8933-263129D2AF90}" type="datetimeFigureOut">
               <a:rPr lang="en-US" dirty="0"/>
-              <a:t>5/1/26</a:t>
+              <a:t>5/8/26</a:t>
             </a:fld>
             <a:endParaRPr lang="en-US" dirty="0"/>
           </a:p>
@@ -2618,7 +2618,7 @@
           <a:p>
             <a:fld id="{C764DE79-268F-4C1A-8933-263129D2AF90}" type="datetimeFigureOut">
               <a:rPr lang="en-US" dirty="0"/>
-              <a:t>5/1/26</a:t>
+              <a:t>5/8/26</a:t>
             </a:fld>
             <a:endParaRPr lang="en-US" dirty="0"/>
           </a:p>
@@ -2847,7 +2847,7 @@
           <a:p>
             <a:fld id="{C764DE79-268F-4C1A-8933-263129D2AF90}" type="datetimeFigureOut">
               <a:rPr lang="en-US" dirty="0"/>
-              <a:t>5/1/26</a:t>
+              <a:t>5/8/26</a:t>
             </a:fld>
             <a:endParaRPr lang="en-US" dirty="0"/>
           </a:p>
@@ -3211,7 +3211,7 @@
           <a:p>
             <a:fld id="{C764DE79-268F-4C1A-8933-263129D2AF90}" type="datetimeFigureOut">
               <a:rPr lang="en-US" dirty="0"/>
-              <a:t>5/1/26</a:t>
+              <a:t>5/8/26</a:t>
             </a:fld>
             <a:endParaRPr lang="en-US" dirty="0"/>
           </a:p>
@@ -3328,7 +3328,7 @@
           <a:p>
             <a:fld id="{C764DE79-268F-4C1A-8933-263129D2AF90}" type="datetimeFigureOut">
               <a:rPr lang="en-US" dirty="0"/>
-              <a:t>5/1/26</a:t>
+              <a:t>5/8/26</a:t>
             </a:fld>
             <a:endParaRPr lang="en-US" dirty="0"/>
           </a:p>
@@ -3423,7 +3423,7 @@
           <a:p>
             <a:fld id="{C764DE79-268F-4C1A-8933-263129D2AF90}" type="datetimeFigureOut">
               <a:rPr lang="en-US" dirty="0"/>
-              <a:t>5/1/26</a:t>
+              <a:t>5/8/26</a:t>
             </a:fld>
             <a:endParaRPr lang="en-US" dirty="0"/>
           </a:p>
@@ -3698,7 +3698,7 @@
           <a:p>
             <a:fld id="{C764DE79-268F-4C1A-8933-263129D2AF90}" type="datetimeFigureOut">
               <a:rPr lang="en-US" dirty="0"/>
-              <a:t>5/1/26</a:t>
+              <a:t>5/8/26</a:t>
             </a:fld>
             <a:endParaRPr lang="en-US" dirty="0"/>
           </a:p>
@@ -3950,7 +3950,7 @@
           <a:p>
             <a:fld id="{C764DE79-268F-4C1A-8933-263129D2AF90}" type="datetimeFigureOut">
               <a:rPr lang="en-US" dirty="0"/>
-              <a:t>5/1/26</a:t>
+              <a:t>5/8/26</a:t>
             </a:fld>
             <a:endParaRPr lang="en-US" dirty="0"/>
           </a:p>
@@ -4161,7 +4161,7 @@
           <a:p>
             <a:fld id="{C764DE79-268F-4C1A-8933-263129D2AF90}" type="datetimeFigureOut">
               <a:rPr lang="en-US" dirty="0"/>
-              <a:t>5/1/26</a:t>
+              <a:t>5/8/26</a:t>
             </a:fld>
             <a:endParaRPr lang="en-US" dirty="0"/>
           </a:p>

--- a/slides/1-intro.pptx
+++ b/slides/1-intro.pptx
@@ -5,7 +5,7 @@
     <p:sldMasterId id="2147483696" r:id="rId1"/>
   </p:sldMasterIdLst>
   <p:notesMasterIdLst>
-    <p:notesMasterId r:id="rId20"/>
+    <p:notesMasterId r:id="rId21"/>
   </p:notesMasterIdLst>
   <p:sldIdLst>
     <p:sldId id="256" r:id="rId2"/>
@@ -15,17 +15,18 @@
     <p:sldId id="265" r:id="rId6"/>
     <p:sldId id="258" r:id="rId7"/>
     <p:sldId id="259" r:id="rId8"/>
-    <p:sldId id="262" r:id="rId9"/>
-    <p:sldId id="266" r:id="rId10"/>
-    <p:sldId id="267" r:id="rId11"/>
-    <p:sldId id="268" r:id="rId12"/>
-    <p:sldId id="269" r:id="rId13"/>
-    <p:sldId id="270" r:id="rId14"/>
-    <p:sldId id="271" r:id="rId15"/>
-    <p:sldId id="272" r:id="rId16"/>
-    <p:sldId id="273" r:id="rId17"/>
-    <p:sldId id="261" r:id="rId18"/>
-    <p:sldId id="274" r:id="rId19"/>
+    <p:sldId id="260" r:id="rId9"/>
+    <p:sldId id="262" r:id="rId10"/>
+    <p:sldId id="266" r:id="rId11"/>
+    <p:sldId id="267" r:id="rId12"/>
+    <p:sldId id="268" r:id="rId13"/>
+    <p:sldId id="269" r:id="rId14"/>
+    <p:sldId id="270" r:id="rId15"/>
+    <p:sldId id="271" r:id="rId16"/>
+    <p:sldId id="272" r:id="rId17"/>
+    <p:sldId id="273" r:id="rId18"/>
+    <p:sldId id="261" r:id="rId19"/>
+    <p:sldId id="274" r:id="rId20"/>
   </p:sldIdLst>
   <p:sldSz cx="12192000" cy="6858000"/>
   <p:notesSz cx="6858000" cy="9144000"/>
@@ -314,7 +315,7 @@
           </a:lstStyle>
           <a:p>
             <a:fld id="{2DE082D9-00CE-4FDC-82D3-FDE16CD37225}" type="datetimeFigureOut">
-              <a:t>5/8/26</a:t>
+              <a:t>9/30/2025</a:t>
             </a:fld>
             <a:endParaRPr lang="en-US"/>
           </a:p>
@@ -626,98 +627,23 @@
           <a:p>
             <a:r>
               <a:rPr lang="en-US" dirty="0"/>
-              <a:t>[TIMINGS]</a:t>
-            </a:r>
-          </a:p>
-          <a:p>
-            <a:endParaRPr lang="en-US" dirty="0"/>
-          </a:p>
-          <a:p>
-            <a:r>
-              <a:rPr lang="en-US" dirty="0"/>
-              <a:t>Practice: 40m</a:t>
-            </a:r>
-          </a:p>
-          <a:p>
-            <a:r>
-              <a:rPr lang="en-US" dirty="0"/>
-              <a:t>Target: 45m</a:t>
-            </a:r>
-          </a:p>
-          <a:p>
-            <a:endParaRPr lang="en-US" dirty="0"/>
-          </a:p>
-          <a:p>
-            <a:r>
-              <a:rPr lang="en-US" dirty="0"/>
-              <a:t>Start time: 9:35</a:t>
-            </a:r>
-          </a:p>
-          <a:p>
-            <a:r>
-              <a:rPr lang="en-US" dirty="0"/>
-              <a:t>End time: 10:20</a:t>
-            </a:r>
-          </a:p>
-          <a:p>
-            <a:endParaRPr lang="en-US" dirty="0"/>
-          </a:p>
-          <a:p>
-            <a:r>
-              <a:rPr lang="en-US" dirty="0"/>
-              <a:t>---</a:t>
-            </a:r>
-          </a:p>
-          <a:p>
-            <a:endParaRPr lang="en-US" dirty="0"/>
-          </a:p>
-          <a:p>
-            <a:r>
-              <a:rPr lang="en-US" dirty="0"/>
-              <a:t>Welcome to introduction to large </a:t>
-            </a:r>
-            <a:r>
-              <a:rPr lang="en-US" dirty="0" err="1"/>
-              <a:t>langauge</a:t>
-            </a:r>
-            <a:r>
-              <a:rPr lang="en-US" dirty="0"/>
-              <a:t> models</a:t>
-            </a:r>
-          </a:p>
-          <a:p>
-            <a:endParaRPr lang="en-US" dirty="0"/>
-          </a:p>
-          <a:p>
-            <a:r>
-              <a:rPr lang="en-US" dirty="0"/>
-              <a:t>I’m Fin – MLE and I will be running workshop today</a:t>
-            </a:r>
-          </a:p>
-          <a:p>
-            <a:endParaRPr lang="en-US" dirty="0"/>
-          </a:p>
-          <a:p>
-            <a:r>
-              <a:rPr lang="en-US" dirty="0"/>
-              <a:t>Radzim and </a:t>
-            </a:r>
-            <a:r>
-              <a:rPr lang="en-US" dirty="0" err="1"/>
-              <a:t>Faibra</a:t>
-            </a:r>
-            <a:r>
-              <a:rPr lang="en-US" dirty="0"/>
-              <a:t> on hand to answer technical questions, who are engineers</a:t>
-            </a:r>
-          </a:p>
-          <a:p>
-            <a:endParaRPr lang="en-US" dirty="0"/>
-          </a:p>
-          <a:p>
-            <a:r>
-              <a:rPr lang="en-US" dirty="0"/>
-              <a:t>Will give you more of an intro on our group:</a:t>
+              <a:t>Recent debates have been clouded by a misleading inference pattern, which we term the “Redescription Fallacy.” This fallacy arises when critics argue that a system cannot model a particular cognitive capacity, simply because its operations can be explained in less abstract and more deflationary terms. In the present context, the fallacy manifests in claims that LLMs could not possibly be good models of some cognitive capacity 𝜙 because their operations merely consist in a collection of statistical calculations, or linear algebra operations, or next-token predictions. Such arguments are only valid if accompanied by evidence demonstrating that a system, defined in these terms, is inherently incapable of implementing 𝜙. To illustrate, consider the flawed logic in asserting that a piano could not possibly produce harmony because it can be described as a collection of hammers striking strings, or (more pointedly) that brain activity could not possibly implement cognition because it can be described as a collection of neural firings. The critical question is not whether the operations of an LLM can be simplistically described in non-mental terms, but whether these operations, when appropriately organized, can implement the same processes or algorithms as the mind, when described at an appropriate level of computational abstraction.</a:t>
+            </a:r>
+          </a:p>
+          <a:p>
+            <a:r>
+              <a:rPr lang="en-US" dirty="0" err="1">
+                <a:ea typeface="Calibri"/>
+                <a:cs typeface="Calibri"/>
+              </a:rPr>
+              <a:t>Milliere</a:t>
+            </a:r>
+            <a:r>
+              <a:rPr lang="en-US" dirty="0">
+                <a:ea typeface="Calibri"/>
+                <a:cs typeface="Calibri"/>
+              </a:rPr>
+              <a:t> and Buckner, 2024</a:t>
             </a:r>
           </a:p>
         </p:txBody>
@@ -738,989 +664,16 @@
           <a:lstStyle/>
           <a:p>
             <a:fld id="{C2D7E69D-609B-4983-96D1-38CC478AEB14}" type="slidenum">
-              <a:rPr lang="en-GB" smtClean="0"/>
-              <a:t>1</a:t>
+              <a:t>8</a:t>
             </a:fld>
-            <a:endParaRPr lang="en-GB"/>
+            <a:endParaRPr lang="en-US"/>
           </a:p>
         </p:txBody>
       </p:sp>
     </p:spTree>
     <p:extLst>
       <p:ext uri="{BB962C8B-B14F-4D97-AF65-F5344CB8AC3E}">
-        <p14:creationId xmlns:p14="http://schemas.microsoft.com/office/powerpoint/2010/main" val="2744497436"/>
-      </p:ext>
-    </p:extLst>
-  </p:cSld>
-  <p:clrMapOvr>
-    <a:masterClrMapping/>
-  </p:clrMapOvr>
-</p:notes>
-</file>
-
-<file path=ppt/notesSlides/notesSlide10.xml><?xml version="1.0" encoding="utf-8"?>
-<p:notes xmlns:a="http://schemas.openxmlformats.org/drawingml/2006/main" xmlns:r="http://schemas.openxmlformats.org/officeDocument/2006/relationships" xmlns:p="http://schemas.openxmlformats.org/presentationml/2006/main">
-  <p:cSld>
-    <p:spTree>
-      <p:nvGrpSpPr>
-        <p:cNvPr id="1" name=""/>
-        <p:cNvGrpSpPr/>
-        <p:nvPr/>
-      </p:nvGrpSpPr>
-      <p:grpSpPr>
-        <a:xfrm>
-          <a:off x="0" y="0"/>
-          <a:ext cx="0" cy="0"/>
-          <a:chOff x="0" y="0"/>
-          <a:chExt cx="0" cy="0"/>
-        </a:xfrm>
-      </p:grpSpPr>
-      <p:sp>
-        <p:nvSpPr>
-          <p:cNvPr id="2" name="Slide Image Placeholder 1"/>
-          <p:cNvSpPr>
-            <a:spLocks noGrp="1" noRot="1" noChangeAspect="1"/>
-          </p:cNvSpPr>
-          <p:nvPr>
-            <p:ph type="sldImg"/>
-          </p:nvPr>
-        </p:nvSpPr>
-        <p:spPr/>
-      </p:sp>
-      <p:sp>
-        <p:nvSpPr>
-          <p:cNvPr id="3" name="Notes Placeholder 2"/>
-          <p:cNvSpPr>
-            <a:spLocks noGrp="1"/>
-          </p:cNvSpPr>
-          <p:nvPr>
-            <p:ph type="body" idx="1"/>
-          </p:nvPr>
-        </p:nvSpPr>
-        <p:spPr/>
-        <p:txBody>
-          <a:bodyPr/>
-          <a:lstStyle/>
-          <a:p>
-            <a:endParaRPr lang="en-US" dirty="0"/>
-          </a:p>
-        </p:txBody>
-      </p:sp>
-      <p:sp>
-        <p:nvSpPr>
-          <p:cNvPr id="4" name="Slide Number Placeholder 3"/>
-          <p:cNvSpPr>
-            <a:spLocks noGrp="1"/>
-          </p:cNvSpPr>
-          <p:nvPr>
-            <p:ph type="sldNum" sz="quarter" idx="5"/>
-          </p:nvPr>
-        </p:nvSpPr>
-        <p:spPr/>
-        <p:txBody>
-          <a:bodyPr/>
-          <a:lstStyle/>
-          <a:p>
-            <a:fld id="{C2D7E69D-609B-4983-96D1-38CC478AEB14}" type="slidenum">
-              <a:rPr lang="en-GB" smtClean="0"/>
-              <a:t>15</a:t>
-            </a:fld>
-            <a:endParaRPr lang="en-GB"/>
-          </a:p>
-        </p:txBody>
-      </p:sp>
-    </p:spTree>
-    <p:extLst>
-      <p:ext uri="{BB962C8B-B14F-4D97-AF65-F5344CB8AC3E}">
-        <p14:creationId xmlns:p14="http://schemas.microsoft.com/office/powerpoint/2010/main" val="1079868011"/>
-      </p:ext>
-    </p:extLst>
-  </p:cSld>
-  <p:clrMapOvr>
-    <a:masterClrMapping/>
-  </p:clrMapOvr>
-</p:notes>
-</file>
-
-<file path=ppt/notesSlides/notesSlide2.xml><?xml version="1.0" encoding="utf-8"?>
-<p:notes xmlns:a="http://schemas.openxmlformats.org/drawingml/2006/main" xmlns:r="http://schemas.openxmlformats.org/officeDocument/2006/relationships" xmlns:p="http://schemas.openxmlformats.org/presentationml/2006/main">
-  <p:cSld>
-    <p:spTree>
-      <p:nvGrpSpPr>
-        <p:cNvPr id="1" name=""/>
-        <p:cNvGrpSpPr/>
-        <p:nvPr/>
-      </p:nvGrpSpPr>
-      <p:grpSpPr>
-        <a:xfrm>
-          <a:off x="0" y="0"/>
-          <a:ext cx="0" cy="0"/>
-          <a:chOff x="0" y="0"/>
-          <a:chExt cx="0" cy="0"/>
-        </a:xfrm>
-      </p:grpSpPr>
-      <p:sp>
-        <p:nvSpPr>
-          <p:cNvPr id="2" name="Slide Image Placeholder 1"/>
-          <p:cNvSpPr>
-            <a:spLocks noGrp="1" noRot="1" noChangeAspect="1"/>
-          </p:cNvSpPr>
-          <p:nvPr>
-            <p:ph type="sldImg"/>
-          </p:nvPr>
-        </p:nvSpPr>
-        <p:spPr/>
-      </p:sp>
-      <p:sp>
-        <p:nvSpPr>
-          <p:cNvPr id="3" name="Notes Placeholder 2"/>
-          <p:cNvSpPr>
-            <a:spLocks noGrp="1"/>
-          </p:cNvSpPr>
-          <p:nvPr>
-            <p:ph type="body" idx="1"/>
-          </p:nvPr>
-        </p:nvSpPr>
-        <p:spPr/>
-        <p:txBody>
-          <a:bodyPr/>
-          <a:lstStyle/>
-          <a:p>
-            <a:endParaRPr lang="en-US" dirty="0"/>
-          </a:p>
-          <a:p>
-            <a:r>
-              <a:rPr lang="en-US" dirty="0"/>
-              <a:t>Just before we get started, I would just like to give a brief overview of the Accelerate program.</a:t>
-            </a:r>
-          </a:p>
-          <a:p>
-            <a:endParaRPr lang="en-US" dirty="0"/>
-          </a:p>
-          <a:p>
-            <a:r>
-              <a:rPr lang="en-US" dirty="0"/>
-              <a:t>We are a group composed of researchers, machine learning engineers and </a:t>
-            </a:r>
-            <a:r>
-              <a:rPr lang="en-US" dirty="0" err="1"/>
-              <a:t>programme</a:t>
-            </a:r>
-            <a:r>
-              <a:rPr lang="en-US" dirty="0"/>
-              <a:t> staff.</a:t>
-            </a:r>
-          </a:p>
-          <a:p>
-            <a:endParaRPr lang="en-US" dirty="0"/>
-          </a:p>
-          <a:p>
-            <a:r>
-              <a:rPr lang="en-US" dirty="0"/>
-              <a:t>Our overarching goal is to support the adoption of AI in research at the university. </a:t>
-            </a:r>
-          </a:p>
-          <a:p>
-            <a:endParaRPr lang="en-US" dirty="0"/>
-          </a:p>
-          <a:p>
-            <a:r>
-              <a:rPr lang="en-US" dirty="0"/>
-              <a:t>We do this through activities such as</a:t>
-            </a:r>
-          </a:p>
-          <a:p>
-            <a:endParaRPr lang="en-US" dirty="0"/>
-          </a:p>
-          <a:p>
-            <a:r>
-              <a:rPr lang="en-US" dirty="0"/>
-              <a:t>Workshops (see in a second), AI Clinic, sections of university-wide workshops / events that are supported by us</a:t>
-            </a:r>
-          </a:p>
-          <a:p>
-            <a:endParaRPr lang="en-US" dirty="0"/>
-          </a:p>
-          <a:p>
-            <a:r>
-              <a:rPr lang="en-US" dirty="0"/>
-              <a:t>But also longer-term involvement on research projects in a research engineering capacity.</a:t>
-            </a:r>
-          </a:p>
-          <a:p>
-            <a:endParaRPr lang="en-US" dirty="0"/>
-          </a:p>
-          <a:p>
-            <a:r>
-              <a:rPr lang="en-US" dirty="0"/>
-              <a:t>Not just intersection of AI and Science!</a:t>
-            </a:r>
-          </a:p>
-          <a:p>
-            <a:endParaRPr lang="en-US" dirty="0"/>
-          </a:p>
-          <a:p>
-            <a:r>
-              <a:rPr lang="en-US" dirty="0"/>
-              <a:t>We’re finding more and more that researchers from the Humanities want to utilize machine learning methods, and we’re having to reassess what we think of as traditional science.</a:t>
-            </a:r>
-          </a:p>
-          <a:p>
-            <a:endParaRPr lang="en-US" dirty="0"/>
-          </a:p>
-        </p:txBody>
-      </p:sp>
-      <p:sp>
-        <p:nvSpPr>
-          <p:cNvPr id="4" name="Slide Number Placeholder 3"/>
-          <p:cNvSpPr>
-            <a:spLocks noGrp="1"/>
-          </p:cNvSpPr>
-          <p:nvPr>
-            <p:ph type="sldNum" sz="quarter" idx="5"/>
-          </p:nvPr>
-        </p:nvSpPr>
-        <p:spPr/>
-        <p:txBody>
-          <a:bodyPr/>
-          <a:lstStyle/>
-          <a:p>
-            <a:fld id="{C2D7E69D-609B-4983-96D1-38CC478AEB14}" type="slidenum">
-              <a:rPr lang="en-GB" smtClean="0"/>
-              <a:t>2</a:t>
-            </a:fld>
-            <a:endParaRPr lang="en-GB"/>
-          </a:p>
-        </p:txBody>
-      </p:sp>
-    </p:spTree>
-    <p:extLst>
-      <p:ext uri="{BB962C8B-B14F-4D97-AF65-F5344CB8AC3E}">
-        <p14:creationId xmlns:p14="http://schemas.microsoft.com/office/powerpoint/2010/main" val="3450249160"/>
-      </p:ext>
-    </p:extLst>
-  </p:cSld>
-  <p:clrMapOvr>
-    <a:masterClrMapping/>
-  </p:clrMapOvr>
-</p:notes>
-</file>
-
-<file path=ppt/notesSlides/notesSlide3.xml><?xml version="1.0" encoding="utf-8"?>
-<p:notes xmlns:a="http://schemas.openxmlformats.org/drawingml/2006/main" xmlns:r="http://schemas.openxmlformats.org/officeDocument/2006/relationships" xmlns:p="http://schemas.openxmlformats.org/presentationml/2006/main">
-  <p:cSld>
-    <p:spTree>
-      <p:nvGrpSpPr>
-        <p:cNvPr id="1" name=""/>
-        <p:cNvGrpSpPr/>
-        <p:nvPr/>
-      </p:nvGrpSpPr>
-      <p:grpSpPr>
-        <a:xfrm>
-          <a:off x="0" y="0"/>
-          <a:ext cx="0" cy="0"/>
-          <a:chOff x="0" y="0"/>
-          <a:chExt cx="0" cy="0"/>
-        </a:xfrm>
-      </p:grpSpPr>
-      <p:sp>
-        <p:nvSpPr>
-          <p:cNvPr id="2" name="Slide Image Placeholder 1"/>
-          <p:cNvSpPr>
-            <a:spLocks noGrp="1" noRot="1" noChangeAspect="1"/>
-          </p:cNvSpPr>
-          <p:nvPr>
-            <p:ph type="sldImg"/>
-          </p:nvPr>
-        </p:nvSpPr>
-        <p:spPr/>
-      </p:sp>
-      <p:sp>
-        <p:nvSpPr>
-          <p:cNvPr id="3" name="Notes Placeholder 2"/>
-          <p:cNvSpPr>
-            <a:spLocks noGrp="1"/>
-          </p:cNvSpPr>
-          <p:nvPr>
-            <p:ph type="body" idx="1"/>
-          </p:nvPr>
-        </p:nvSpPr>
-        <p:spPr/>
-        <p:txBody>
-          <a:bodyPr/>
-          <a:lstStyle/>
-          <a:p>
-            <a:r>
-              <a:rPr lang="en-US" dirty="0"/>
-              <a:t>We are ultimately here to facilitate this process of integrating AI into research.</a:t>
-            </a:r>
-          </a:p>
-          <a:p>
-            <a:endParaRPr lang="en-US" dirty="0"/>
-          </a:p>
-          <a:p>
-            <a:r>
-              <a:rPr lang="en-US" dirty="0"/>
-              <a:t>We run a couple of workshops at the moment: an introduction to large language models, a hands on LLMs, generative AI, diffusion models, docker, a packaging and publishing workshop.</a:t>
-            </a:r>
-          </a:p>
-        </p:txBody>
-      </p:sp>
-      <p:sp>
-        <p:nvSpPr>
-          <p:cNvPr id="4" name="Slide Number Placeholder 3"/>
-          <p:cNvSpPr>
-            <a:spLocks noGrp="1"/>
-          </p:cNvSpPr>
-          <p:nvPr>
-            <p:ph type="sldNum" sz="quarter" idx="5"/>
-          </p:nvPr>
-        </p:nvSpPr>
-        <p:spPr/>
-        <p:txBody>
-          <a:bodyPr/>
-          <a:lstStyle/>
-          <a:p>
-            <a:fld id="{C2D7E69D-609B-4983-96D1-38CC478AEB14}" type="slidenum">
-              <a:rPr lang="en-GB" smtClean="0"/>
-              <a:t>3</a:t>
-            </a:fld>
-            <a:endParaRPr lang="en-GB"/>
-          </a:p>
-        </p:txBody>
-      </p:sp>
-    </p:spTree>
-    <p:extLst>
-      <p:ext uri="{BB962C8B-B14F-4D97-AF65-F5344CB8AC3E}">
-        <p14:creationId xmlns:p14="http://schemas.microsoft.com/office/powerpoint/2010/main" val="4144999791"/>
-      </p:ext>
-    </p:extLst>
-  </p:cSld>
-  <p:clrMapOvr>
-    <a:masterClrMapping/>
-  </p:clrMapOvr>
-</p:notes>
-</file>
-
-<file path=ppt/notesSlides/notesSlide4.xml><?xml version="1.0" encoding="utf-8"?>
-<p:notes xmlns:a="http://schemas.openxmlformats.org/drawingml/2006/main" xmlns:r="http://schemas.openxmlformats.org/officeDocument/2006/relationships" xmlns:p="http://schemas.openxmlformats.org/presentationml/2006/main">
-  <p:cSld>
-    <p:spTree>
-      <p:nvGrpSpPr>
-        <p:cNvPr id="1" name=""/>
-        <p:cNvGrpSpPr/>
-        <p:nvPr/>
-      </p:nvGrpSpPr>
-      <p:grpSpPr>
-        <a:xfrm>
-          <a:off x="0" y="0"/>
-          <a:ext cx="0" cy="0"/>
-          <a:chOff x="0" y="0"/>
-          <a:chExt cx="0" cy="0"/>
-        </a:xfrm>
-      </p:grpSpPr>
-      <p:sp>
-        <p:nvSpPr>
-          <p:cNvPr id="2" name="Slide Image Placeholder 1"/>
-          <p:cNvSpPr>
-            <a:spLocks noGrp="1" noRot="1" noChangeAspect="1"/>
-          </p:cNvSpPr>
-          <p:nvPr>
-            <p:ph type="sldImg"/>
-          </p:nvPr>
-        </p:nvSpPr>
-        <p:spPr/>
-      </p:sp>
-      <p:sp>
-        <p:nvSpPr>
-          <p:cNvPr id="3" name="Notes Placeholder 2"/>
-          <p:cNvSpPr>
-            <a:spLocks noGrp="1"/>
-          </p:cNvSpPr>
-          <p:nvPr>
-            <p:ph type="body" idx="1"/>
-          </p:nvPr>
-        </p:nvSpPr>
-        <p:spPr/>
-        <p:txBody>
-          <a:bodyPr/>
-          <a:lstStyle/>
-          <a:p>
-            <a:r>
-              <a:rPr lang="en-US" dirty="0"/>
-              <a:t>Allow 5 minutes</a:t>
-            </a:r>
-          </a:p>
-        </p:txBody>
-      </p:sp>
-      <p:sp>
-        <p:nvSpPr>
-          <p:cNvPr id="4" name="Slide Number Placeholder 3"/>
-          <p:cNvSpPr>
-            <a:spLocks noGrp="1"/>
-          </p:cNvSpPr>
-          <p:nvPr>
-            <p:ph type="sldNum" sz="quarter" idx="5"/>
-          </p:nvPr>
-        </p:nvSpPr>
-        <p:spPr/>
-        <p:txBody>
-          <a:bodyPr/>
-          <a:lstStyle/>
-          <a:p>
-            <a:fld id="{C2D7E69D-609B-4983-96D1-38CC478AEB14}" type="slidenum">
-              <a:rPr lang="en-GB" smtClean="0"/>
-              <a:t>5</a:t>
-            </a:fld>
-            <a:endParaRPr lang="en-GB"/>
-          </a:p>
-        </p:txBody>
-      </p:sp>
-    </p:spTree>
-    <p:extLst>
-      <p:ext uri="{BB962C8B-B14F-4D97-AF65-F5344CB8AC3E}">
-        <p14:creationId xmlns:p14="http://schemas.microsoft.com/office/powerpoint/2010/main" val="3075358069"/>
-      </p:ext>
-    </p:extLst>
-  </p:cSld>
-  <p:clrMapOvr>
-    <a:masterClrMapping/>
-  </p:clrMapOvr>
-</p:notes>
-</file>
-
-<file path=ppt/notesSlides/notesSlide5.xml><?xml version="1.0" encoding="utf-8"?>
-<p:notes xmlns:a="http://schemas.openxmlformats.org/drawingml/2006/main" xmlns:r="http://schemas.openxmlformats.org/officeDocument/2006/relationships" xmlns:p="http://schemas.openxmlformats.org/presentationml/2006/main">
-  <p:cSld>
-    <p:spTree>
-      <p:nvGrpSpPr>
-        <p:cNvPr id="1" name=""/>
-        <p:cNvGrpSpPr/>
-        <p:nvPr/>
-      </p:nvGrpSpPr>
-      <p:grpSpPr>
-        <a:xfrm>
-          <a:off x="0" y="0"/>
-          <a:ext cx="0" cy="0"/>
-          <a:chOff x="0" y="0"/>
-          <a:chExt cx="0" cy="0"/>
-        </a:xfrm>
-      </p:grpSpPr>
-      <p:sp>
-        <p:nvSpPr>
-          <p:cNvPr id="2" name="Slide Image Placeholder 1"/>
-          <p:cNvSpPr>
-            <a:spLocks noGrp="1" noRot="1" noChangeAspect="1"/>
-          </p:cNvSpPr>
-          <p:nvPr>
-            <p:ph type="sldImg"/>
-          </p:nvPr>
-        </p:nvSpPr>
-        <p:spPr/>
-      </p:sp>
-      <p:sp>
-        <p:nvSpPr>
-          <p:cNvPr id="3" name="Notes Placeholder 2"/>
-          <p:cNvSpPr>
-            <a:spLocks noGrp="1"/>
-          </p:cNvSpPr>
-          <p:nvPr>
-            <p:ph type="body" idx="1"/>
-          </p:nvPr>
-        </p:nvSpPr>
-        <p:spPr/>
-        <p:txBody>
-          <a:bodyPr/>
-          <a:lstStyle/>
-          <a:p>
-            <a:r>
-              <a:rPr lang="en-US" dirty="0"/>
-              <a:t>Going to think of our model as a Llama</a:t>
-            </a:r>
-          </a:p>
-          <a:p>
-            <a:endParaRPr lang="en-US" dirty="0"/>
-          </a:p>
-          <a:p>
-            <a:r>
-              <a:rPr lang="en-US" dirty="0"/>
-              <a:t>Has a specific meaning in the history of AI</a:t>
-            </a:r>
-          </a:p>
-          <a:p>
-            <a:endParaRPr lang="en-US" dirty="0"/>
-          </a:p>
-          <a:p>
-            <a:r>
-              <a:rPr lang="en-US" dirty="0"/>
-              <a:t>Llama is an acronym: Large Language Model Meta AI</a:t>
-            </a:r>
-          </a:p>
-          <a:p>
-            <a:endParaRPr lang="en-US" dirty="0"/>
-          </a:p>
-          <a:p>
-            <a:r>
-              <a:rPr lang="en-US" dirty="0"/>
-              <a:t>Released for research-only purposes by Meta in February 2023 following success of GPT-3.5 (ChatGPT moment, i.e. finetuned version of GPT-3) to prove you didn't need closed APIs and huge inference budgets</a:t>
-            </a:r>
-          </a:p>
-          <a:p>
-            <a:endParaRPr lang="en-US" dirty="0"/>
-          </a:p>
-          <a:p>
-            <a:r>
-              <a:rPr lang="en-US" dirty="0"/>
-              <a:t>Uses the same underlying architecture - it is an autoregressive decoder-only transformer. We will come back these words</a:t>
-            </a:r>
-          </a:p>
-          <a:p>
-            <a:endParaRPr lang="en-US" dirty="0"/>
-          </a:p>
-          <a:p>
-            <a:r>
-              <a:rPr lang="en-US" dirty="0"/>
-              <a:t>Shortly leaked and spawned the community of open weights models. </a:t>
-            </a:r>
-          </a:p>
-          <a:p>
-            <a:endParaRPr lang="en-US" dirty="0"/>
-          </a:p>
-          <a:p>
-            <a:r>
-              <a:rPr lang="en-US" dirty="0"/>
-              <a:t>As researchers, we tend to prefer open source models for various reasons so we will be using this as the source of our discussion on model architecture. Most differences between frontier models and Llama are too subtle or complex to discuss for the scope of this workshop</a:t>
-            </a:r>
-          </a:p>
-          <a:p>
-            <a:endParaRPr lang="en-US" dirty="0"/>
-          </a:p>
-          <a:p>
-            <a:r>
-              <a:rPr lang="en-US" dirty="0"/>
-              <a:t>The basic pieces, which will ultimately inform the narrative today are [go through]</a:t>
-            </a:r>
-          </a:p>
-          <a:p>
-            <a:endParaRPr lang="en-US" dirty="0"/>
-          </a:p>
-          <a:p>
-            <a:endParaRPr lang="en-US" dirty="0"/>
-          </a:p>
-        </p:txBody>
-      </p:sp>
-      <p:sp>
-        <p:nvSpPr>
-          <p:cNvPr id="4" name="Slide Number Placeholder 3"/>
-          <p:cNvSpPr>
-            <a:spLocks noGrp="1"/>
-          </p:cNvSpPr>
-          <p:nvPr>
-            <p:ph type="sldNum" sz="quarter" idx="5"/>
-          </p:nvPr>
-        </p:nvSpPr>
-        <p:spPr/>
-        <p:txBody>
-          <a:bodyPr/>
-          <a:lstStyle/>
-          <a:p>
-            <a:fld id="{C2D7E69D-609B-4983-96D1-38CC478AEB14}" type="slidenum">
-              <a:rPr lang="en-GB" smtClean="0"/>
-              <a:t>6</a:t>
-            </a:fld>
-            <a:endParaRPr lang="en-GB"/>
-          </a:p>
-        </p:txBody>
-      </p:sp>
-    </p:spTree>
-    <p:extLst>
-      <p:ext uri="{BB962C8B-B14F-4D97-AF65-F5344CB8AC3E}">
-        <p14:creationId xmlns:p14="http://schemas.microsoft.com/office/powerpoint/2010/main" val="243210352"/>
-      </p:ext>
-    </p:extLst>
-  </p:cSld>
-  <p:clrMapOvr>
-    <a:masterClrMapping/>
-  </p:clrMapOvr>
-</p:notes>
-</file>
-
-<file path=ppt/notesSlides/notesSlide6.xml><?xml version="1.0" encoding="utf-8"?>
-<p:notes xmlns:a="http://schemas.openxmlformats.org/drawingml/2006/main" xmlns:r="http://schemas.openxmlformats.org/officeDocument/2006/relationships" xmlns:p="http://schemas.openxmlformats.org/presentationml/2006/main">
-  <p:cSld>
-    <p:spTree>
-      <p:nvGrpSpPr>
-        <p:cNvPr id="1" name=""/>
-        <p:cNvGrpSpPr/>
-        <p:nvPr/>
-      </p:nvGrpSpPr>
-      <p:grpSpPr>
-        <a:xfrm>
-          <a:off x="0" y="0"/>
-          <a:ext cx="0" cy="0"/>
-          <a:chOff x="0" y="0"/>
-          <a:chExt cx="0" cy="0"/>
-        </a:xfrm>
-      </p:grpSpPr>
-      <p:sp>
-        <p:nvSpPr>
-          <p:cNvPr id="2" name="Slide Image Placeholder 1"/>
-          <p:cNvSpPr>
-            <a:spLocks noGrp="1" noRot="1" noChangeAspect="1"/>
-          </p:cNvSpPr>
-          <p:nvPr>
-            <p:ph type="sldImg"/>
-          </p:nvPr>
-        </p:nvSpPr>
-        <p:spPr/>
-      </p:sp>
-      <p:sp>
-        <p:nvSpPr>
-          <p:cNvPr id="3" name="Notes Placeholder 2"/>
-          <p:cNvSpPr>
-            <a:spLocks noGrp="1"/>
-          </p:cNvSpPr>
-          <p:nvPr>
-            <p:ph type="body" idx="1"/>
-          </p:nvPr>
-        </p:nvSpPr>
-        <p:spPr/>
-        <p:txBody>
-          <a:bodyPr/>
-          <a:lstStyle/>
-          <a:p>
-            <a:r>
-              <a:rPr lang="en-US" dirty="0"/>
-              <a:t>LLMs are stateless, so conversation history stuffed in a context window helps create illusion of state and gives models working memory.</a:t>
-            </a:r>
-          </a:p>
-          <a:p>
-            <a:endParaRPr lang="en-US" dirty="0"/>
-          </a:p>
-          <a:p>
-            <a:r>
-              <a:rPr lang="en-US" dirty="0"/>
-              <a:t>RAG; giving LLMs access to information that isn't baked inside its weights. Retrieve relevant information at inference time and stuff it into context window.</a:t>
-            </a:r>
-          </a:p>
-          <a:p>
-            <a:endParaRPr lang="en-US" dirty="0"/>
-          </a:p>
-          <a:p>
-            <a:r>
-              <a:rPr lang="en-US" dirty="0"/>
-              <a:t>Prompting; so-called prompt engineering, a quite atheoretical practice. It works but evidence is mostly restricted to empirical evidence, a recurring theme we will deal with.</a:t>
-            </a:r>
-          </a:p>
-          <a:p>
-            <a:endParaRPr lang="en-US" dirty="0"/>
-          </a:p>
-          <a:p>
-            <a:r>
-              <a:rPr lang="en-US" dirty="0"/>
-              <a:t>Tool-calling; especially relevant in the so-called agentic era</a:t>
-            </a:r>
-          </a:p>
-          <a:p>
-            <a:endParaRPr lang="en-US" dirty="0"/>
-          </a:p>
-          <a:p>
-            <a:r>
-              <a:rPr lang="en-US" dirty="0"/>
-              <a:t>Fine-tuning; or equivalently any post-training methodology, further improving model performance on down-stream tasks by 'fine-tuning' weights </a:t>
-            </a:r>
-          </a:p>
-        </p:txBody>
-      </p:sp>
-      <p:sp>
-        <p:nvSpPr>
-          <p:cNvPr id="4" name="Slide Number Placeholder 3"/>
-          <p:cNvSpPr>
-            <a:spLocks noGrp="1"/>
-          </p:cNvSpPr>
-          <p:nvPr>
-            <p:ph type="sldNum" sz="quarter" idx="5"/>
-          </p:nvPr>
-        </p:nvSpPr>
-        <p:spPr/>
-        <p:txBody>
-          <a:bodyPr/>
-          <a:lstStyle/>
-          <a:p>
-            <a:fld id="{C2D7E69D-609B-4983-96D1-38CC478AEB14}" type="slidenum">
-              <a:rPr lang="en-GB" smtClean="0"/>
-              <a:t>7</a:t>
-            </a:fld>
-            <a:endParaRPr lang="en-GB"/>
-          </a:p>
-        </p:txBody>
-      </p:sp>
-    </p:spTree>
-    <p:extLst>
-      <p:ext uri="{BB962C8B-B14F-4D97-AF65-F5344CB8AC3E}">
-        <p14:creationId xmlns:p14="http://schemas.microsoft.com/office/powerpoint/2010/main" val="2452359087"/>
-      </p:ext>
-    </p:extLst>
-  </p:cSld>
-  <p:clrMapOvr>
-    <a:masterClrMapping/>
-  </p:clrMapOvr>
-</p:notes>
-</file>
-
-<file path=ppt/notesSlides/notesSlide7.xml><?xml version="1.0" encoding="utf-8"?>
-<p:notes xmlns:a="http://schemas.openxmlformats.org/drawingml/2006/main" xmlns:r="http://schemas.openxmlformats.org/officeDocument/2006/relationships" xmlns:p="http://schemas.openxmlformats.org/presentationml/2006/main">
-  <p:cSld>
-    <p:spTree>
-      <p:nvGrpSpPr>
-        <p:cNvPr id="1" name=""/>
-        <p:cNvGrpSpPr/>
-        <p:nvPr/>
-      </p:nvGrpSpPr>
-      <p:grpSpPr>
-        <a:xfrm>
-          <a:off x="0" y="0"/>
-          <a:ext cx="0" cy="0"/>
-          <a:chOff x="0" y="0"/>
-          <a:chExt cx="0" cy="0"/>
-        </a:xfrm>
-      </p:grpSpPr>
-      <p:sp>
-        <p:nvSpPr>
-          <p:cNvPr id="2" name="Slide Image Placeholder 1"/>
-          <p:cNvSpPr>
-            <a:spLocks noGrp="1" noRot="1" noChangeAspect="1"/>
-          </p:cNvSpPr>
-          <p:nvPr>
-            <p:ph type="sldImg"/>
-          </p:nvPr>
-        </p:nvSpPr>
-        <p:spPr/>
-      </p:sp>
-      <p:sp>
-        <p:nvSpPr>
-          <p:cNvPr id="3" name="Notes Placeholder 2"/>
-          <p:cNvSpPr>
-            <a:spLocks noGrp="1"/>
-          </p:cNvSpPr>
-          <p:nvPr>
-            <p:ph type="body" idx="1"/>
-          </p:nvPr>
-        </p:nvSpPr>
-        <p:spPr/>
-        <p:txBody>
-          <a:bodyPr/>
-          <a:lstStyle/>
-          <a:p>
-            <a:r>
-              <a:rPr lang="en-US" dirty="0"/>
-              <a:t>Let's look at actually defining AI</a:t>
-            </a:r>
-          </a:p>
-        </p:txBody>
-      </p:sp>
-      <p:sp>
-        <p:nvSpPr>
-          <p:cNvPr id="4" name="Slide Number Placeholder 3"/>
-          <p:cNvSpPr>
-            <a:spLocks noGrp="1"/>
-          </p:cNvSpPr>
-          <p:nvPr>
-            <p:ph type="sldNum" sz="quarter" idx="5"/>
-          </p:nvPr>
-        </p:nvSpPr>
-        <p:spPr/>
-        <p:txBody>
-          <a:bodyPr/>
-          <a:lstStyle/>
-          <a:p>
-            <a:fld id="{C2D7E69D-609B-4983-96D1-38CC478AEB14}" type="slidenum">
-              <a:rPr lang="en-GB" smtClean="0"/>
-              <a:t>9</a:t>
-            </a:fld>
-            <a:endParaRPr lang="en-GB"/>
-          </a:p>
-        </p:txBody>
-      </p:sp>
-    </p:spTree>
-    <p:extLst>
-      <p:ext uri="{BB962C8B-B14F-4D97-AF65-F5344CB8AC3E}">
-        <p14:creationId xmlns:p14="http://schemas.microsoft.com/office/powerpoint/2010/main" val="2569798653"/>
-      </p:ext>
-    </p:extLst>
-  </p:cSld>
-  <p:clrMapOvr>
-    <a:masterClrMapping/>
-  </p:clrMapOvr>
-</p:notes>
-</file>
-
-<file path=ppt/notesSlides/notesSlide8.xml><?xml version="1.0" encoding="utf-8"?>
-<p:notes xmlns:a="http://schemas.openxmlformats.org/drawingml/2006/main" xmlns:r="http://schemas.openxmlformats.org/officeDocument/2006/relationships" xmlns:p="http://schemas.openxmlformats.org/presentationml/2006/main">
-  <p:cSld>
-    <p:spTree>
-      <p:nvGrpSpPr>
-        <p:cNvPr id="1" name=""/>
-        <p:cNvGrpSpPr/>
-        <p:nvPr/>
-      </p:nvGrpSpPr>
-      <p:grpSpPr>
-        <a:xfrm>
-          <a:off x="0" y="0"/>
-          <a:ext cx="0" cy="0"/>
-          <a:chOff x="0" y="0"/>
-          <a:chExt cx="0" cy="0"/>
-        </a:xfrm>
-      </p:grpSpPr>
-      <p:sp>
-        <p:nvSpPr>
-          <p:cNvPr id="2" name="Slide Image Placeholder 1"/>
-          <p:cNvSpPr>
-            <a:spLocks noGrp="1" noRot="1" noChangeAspect="1"/>
-          </p:cNvSpPr>
-          <p:nvPr>
-            <p:ph type="sldImg"/>
-          </p:nvPr>
-        </p:nvSpPr>
-        <p:spPr/>
-      </p:sp>
-      <p:sp>
-        <p:nvSpPr>
-          <p:cNvPr id="3" name="Notes Placeholder 2"/>
-          <p:cNvSpPr>
-            <a:spLocks noGrp="1"/>
-          </p:cNvSpPr>
-          <p:nvPr>
-            <p:ph type="body" idx="1"/>
-          </p:nvPr>
-        </p:nvSpPr>
-        <p:spPr/>
-        <p:txBody>
-          <a:bodyPr/>
-          <a:lstStyle/>
-          <a:p>
-            <a:r>
-              <a:rPr lang="en-US" dirty="0"/>
-              <a:t>Self supervision is where the training data labels itself. I.e. for next token prediction, don't need human labelling as with conventional supervised learning. The structure of the text already encodes the ground truth.</a:t>
-            </a:r>
-          </a:p>
-        </p:txBody>
-      </p:sp>
-      <p:sp>
-        <p:nvSpPr>
-          <p:cNvPr id="4" name="Slide Number Placeholder 3"/>
-          <p:cNvSpPr>
-            <a:spLocks noGrp="1"/>
-          </p:cNvSpPr>
-          <p:nvPr>
-            <p:ph type="sldNum" sz="quarter" idx="5"/>
-          </p:nvPr>
-        </p:nvSpPr>
-        <p:spPr/>
-        <p:txBody>
-          <a:bodyPr/>
-          <a:lstStyle/>
-          <a:p>
-            <a:fld id="{C2D7E69D-609B-4983-96D1-38CC478AEB14}" type="slidenum">
-              <a:rPr lang="en-GB" smtClean="0"/>
-              <a:t>13</a:t>
-            </a:fld>
-            <a:endParaRPr lang="en-GB"/>
-          </a:p>
-        </p:txBody>
-      </p:sp>
-    </p:spTree>
-    <p:extLst>
-      <p:ext uri="{BB962C8B-B14F-4D97-AF65-F5344CB8AC3E}">
-        <p14:creationId xmlns:p14="http://schemas.microsoft.com/office/powerpoint/2010/main" val="1911962667"/>
-      </p:ext>
-    </p:extLst>
-  </p:cSld>
-  <p:clrMapOvr>
-    <a:masterClrMapping/>
-  </p:clrMapOvr>
-</p:notes>
-</file>
-
-<file path=ppt/notesSlides/notesSlide9.xml><?xml version="1.0" encoding="utf-8"?>
-<p:notes xmlns:a="http://schemas.openxmlformats.org/drawingml/2006/main" xmlns:r="http://schemas.openxmlformats.org/officeDocument/2006/relationships" xmlns:p="http://schemas.openxmlformats.org/presentationml/2006/main">
-  <p:cSld>
-    <p:spTree>
-      <p:nvGrpSpPr>
-        <p:cNvPr id="1" name=""/>
-        <p:cNvGrpSpPr/>
-        <p:nvPr/>
-      </p:nvGrpSpPr>
-      <p:grpSpPr>
-        <a:xfrm>
-          <a:off x="0" y="0"/>
-          <a:ext cx="0" cy="0"/>
-          <a:chOff x="0" y="0"/>
-          <a:chExt cx="0" cy="0"/>
-        </a:xfrm>
-      </p:grpSpPr>
-      <p:sp>
-        <p:nvSpPr>
-          <p:cNvPr id="2" name="Slide Image Placeholder 1"/>
-          <p:cNvSpPr>
-            <a:spLocks noGrp="1" noRot="1" noChangeAspect="1"/>
-          </p:cNvSpPr>
-          <p:nvPr>
-            <p:ph type="sldImg"/>
-          </p:nvPr>
-        </p:nvSpPr>
-        <p:spPr/>
-      </p:sp>
-      <p:sp>
-        <p:nvSpPr>
-          <p:cNvPr id="3" name="Notes Placeholder 2"/>
-          <p:cNvSpPr>
-            <a:spLocks noGrp="1"/>
-          </p:cNvSpPr>
-          <p:nvPr>
-            <p:ph type="body" idx="1"/>
-          </p:nvPr>
-        </p:nvSpPr>
-        <p:spPr/>
-        <p:txBody>
-          <a:bodyPr/>
-          <a:lstStyle/>
-          <a:p>
-            <a:r>
-              <a:rPr lang="en-GB" dirty="0"/>
-              <a:t>The Act needs a practical, auditable way to classify and assess general purpose AI models without being able to directly test every possible capability. These indicators are its solution to that problem. </a:t>
-            </a:r>
-            <a:endParaRPr lang="en-US" dirty="0"/>
-          </a:p>
-        </p:txBody>
-      </p:sp>
-      <p:sp>
-        <p:nvSpPr>
-          <p:cNvPr id="4" name="Slide Number Placeholder 3"/>
-          <p:cNvSpPr>
-            <a:spLocks noGrp="1"/>
-          </p:cNvSpPr>
-          <p:nvPr>
-            <p:ph type="sldNum" sz="quarter" idx="5"/>
-          </p:nvPr>
-        </p:nvSpPr>
-        <p:spPr/>
-        <p:txBody>
-          <a:bodyPr/>
-          <a:lstStyle/>
-          <a:p>
-            <a:fld id="{C2D7E69D-609B-4983-96D1-38CC478AEB14}" type="slidenum">
-              <a:rPr lang="en-GB" smtClean="0"/>
-              <a:t>14</a:t>
-            </a:fld>
-            <a:endParaRPr lang="en-GB"/>
-          </a:p>
-        </p:txBody>
-      </p:sp>
-    </p:spTree>
-    <p:extLst>
-      <p:ext uri="{BB962C8B-B14F-4D97-AF65-F5344CB8AC3E}">
-        <p14:creationId xmlns:p14="http://schemas.microsoft.com/office/powerpoint/2010/main" val="975238628"/>
+        <p14:creationId xmlns:p14="http://schemas.microsoft.com/office/powerpoint/2010/main" val="2758583674"/>
       </p:ext>
     </p:extLst>
   </p:cSld>
@@ -1859,7 +812,7 @@
           <a:p>
             <a:fld id="{C764DE79-268F-4C1A-8933-263129D2AF90}" type="datetimeFigureOut">
               <a:rPr lang="en-US" dirty="0"/>
-              <a:t>5/8/26</a:t>
+              <a:t>9/30/2025</a:t>
             </a:fld>
             <a:endParaRPr lang="en-US" dirty="0"/>
           </a:p>
@@ -2027,7 +980,7 @@
           <a:p>
             <a:fld id="{C764DE79-268F-4C1A-8933-263129D2AF90}" type="datetimeFigureOut">
               <a:rPr lang="en-US" dirty="0"/>
-              <a:t>5/8/26</a:t>
+              <a:t>9/30/2025</a:t>
             </a:fld>
             <a:endParaRPr lang="en-US" dirty="0"/>
           </a:p>
@@ -2205,7 +1158,7 @@
           <a:p>
             <a:fld id="{C764DE79-268F-4C1A-8933-263129D2AF90}" type="datetimeFigureOut">
               <a:rPr lang="en-US" dirty="0"/>
-              <a:t>5/8/26</a:t>
+              <a:t>9/30/2025</a:t>
             </a:fld>
             <a:endParaRPr lang="en-US" dirty="0"/>
           </a:p>
@@ -2373,7 +1326,7 @@
           <a:p>
             <a:fld id="{C764DE79-268F-4C1A-8933-263129D2AF90}" type="datetimeFigureOut">
               <a:rPr lang="en-US" dirty="0"/>
-              <a:t>5/8/26</a:t>
+              <a:t>9/30/2025</a:t>
             </a:fld>
             <a:endParaRPr lang="en-US" dirty="0"/>
           </a:p>
@@ -2618,7 +1571,7 @@
           <a:p>
             <a:fld id="{C764DE79-268F-4C1A-8933-263129D2AF90}" type="datetimeFigureOut">
               <a:rPr lang="en-US" dirty="0"/>
-              <a:t>5/8/26</a:t>
+              <a:t>9/30/2025</a:t>
             </a:fld>
             <a:endParaRPr lang="en-US" dirty="0"/>
           </a:p>
@@ -2847,7 +1800,7 @@
           <a:p>
             <a:fld id="{C764DE79-268F-4C1A-8933-263129D2AF90}" type="datetimeFigureOut">
               <a:rPr lang="en-US" dirty="0"/>
-              <a:t>5/8/26</a:t>
+              <a:t>9/30/2025</a:t>
             </a:fld>
             <a:endParaRPr lang="en-US" dirty="0"/>
           </a:p>
@@ -3211,7 +2164,7 @@
           <a:p>
             <a:fld id="{C764DE79-268F-4C1A-8933-263129D2AF90}" type="datetimeFigureOut">
               <a:rPr lang="en-US" dirty="0"/>
-              <a:t>5/8/26</a:t>
+              <a:t>9/30/2025</a:t>
             </a:fld>
             <a:endParaRPr lang="en-US" dirty="0"/>
           </a:p>
@@ -3328,7 +2281,7 @@
           <a:p>
             <a:fld id="{C764DE79-268F-4C1A-8933-263129D2AF90}" type="datetimeFigureOut">
               <a:rPr lang="en-US" dirty="0"/>
-              <a:t>5/8/26</a:t>
+              <a:t>9/30/2025</a:t>
             </a:fld>
             <a:endParaRPr lang="en-US" dirty="0"/>
           </a:p>
@@ -3423,7 +2376,7 @@
           <a:p>
             <a:fld id="{C764DE79-268F-4C1A-8933-263129D2AF90}" type="datetimeFigureOut">
               <a:rPr lang="en-US" dirty="0"/>
-              <a:t>5/8/26</a:t>
+              <a:t>9/30/2025</a:t>
             </a:fld>
             <a:endParaRPr lang="en-US" dirty="0"/>
           </a:p>
@@ -3698,7 +2651,7 @@
           <a:p>
             <a:fld id="{C764DE79-268F-4C1A-8933-263129D2AF90}" type="datetimeFigureOut">
               <a:rPr lang="en-US" dirty="0"/>
-              <a:t>5/8/26</a:t>
+              <a:t>9/30/2025</a:t>
             </a:fld>
             <a:endParaRPr lang="en-US" dirty="0"/>
           </a:p>
@@ -3950,7 +2903,7 @@
           <a:p>
             <a:fld id="{C764DE79-268F-4C1A-8933-263129D2AF90}" type="datetimeFigureOut">
               <a:rPr lang="en-US" dirty="0"/>
-              <a:t>5/8/26</a:t>
+              <a:t>9/30/2025</a:t>
             </a:fld>
             <a:endParaRPr lang="en-US" dirty="0"/>
           </a:p>
@@ -4161,7 +3114,7 @@
           <a:p>
             <a:fld id="{C764DE79-268F-4C1A-8933-263129D2AF90}" type="datetimeFigureOut">
               <a:rPr lang="en-US" dirty="0"/>
-              <a:t>5/8/26</a:t>
+              <a:t>9/30/2025</a:t>
             </a:fld>
             <a:endParaRPr lang="en-US" dirty="0"/>
           </a:p>
@@ -4634,6 +3587,194 @@
   <p:cSld>
     <p:spTree>
       <p:nvGrpSpPr>
+        <p:cNvPr id="1" name=""/>
+        <p:cNvGrpSpPr/>
+        <p:nvPr/>
+      </p:nvGrpSpPr>
+      <p:grpSpPr>
+        <a:xfrm>
+          <a:off x="0" y="0"/>
+          <a:ext cx="0" cy="0"/>
+          <a:chOff x="0" y="0"/>
+          <a:chExt cx="0" cy="0"/>
+        </a:xfrm>
+      </p:grpSpPr>
+      <p:sp>
+        <p:nvSpPr>
+          <p:cNvPr id="2" name="Title 1">
+            <a:extLst>
+              <a:ext uri="{FF2B5EF4-FFF2-40B4-BE49-F238E27FC236}">
+                <a16:creationId xmlns:a16="http://schemas.microsoft.com/office/drawing/2014/main" id="{7C33511F-8565-6D41-02BF-6E9296DCF3B4}"/>
+              </a:ext>
+            </a:extLst>
+          </p:cNvPr>
+          <p:cNvSpPr>
+            <a:spLocks noGrp="1"/>
+          </p:cNvSpPr>
+          <p:nvPr>
+            <p:ph type="title"/>
+          </p:nvPr>
+        </p:nvSpPr>
+        <p:spPr/>
+        <p:txBody>
+          <a:bodyPr/>
+          <a:lstStyle/>
+          <a:p>
+            <a:r>
+              <a:rPr lang="en-US" dirty="0"/>
+              <a:t>EU AI Act</a:t>
+            </a:r>
+          </a:p>
+        </p:txBody>
+      </p:sp>
+      <p:sp>
+        <p:nvSpPr>
+          <p:cNvPr id="3" name="Content Placeholder 2">
+            <a:extLst>
+              <a:ext uri="{FF2B5EF4-FFF2-40B4-BE49-F238E27FC236}">
+                <a16:creationId xmlns:a16="http://schemas.microsoft.com/office/drawing/2014/main" id="{C10ABB8D-3273-0866-F725-70CD2E52915C}"/>
+              </a:ext>
+            </a:extLst>
+          </p:cNvPr>
+          <p:cNvSpPr>
+            <a:spLocks noGrp="1"/>
+          </p:cNvSpPr>
+          <p:nvPr>
+            <p:ph idx="1"/>
+          </p:nvPr>
+        </p:nvSpPr>
+        <p:spPr/>
+        <p:txBody>
+          <a:bodyPr vert="horz" lIns="91440" tIns="45720" rIns="91440" bIns="45720" rtlCol="0" anchor="t">
+            <a:normAutofit/>
+          </a:bodyPr>
+          <a:lstStyle/>
+          <a:p>
+            <a:pPr marL="0" indent="0">
+              <a:buNone/>
+            </a:pPr>
+            <a:r>
+              <a:rPr lang="en-US" dirty="0"/>
+              <a:t>How does the AI Act define things...?</a:t>
+            </a:r>
+          </a:p>
+          <a:p>
+            <a:pPr marL="0" indent="0">
+              <a:buNone/>
+            </a:pPr>
+            <a:endParaRPr lang="en-US" dirty="0"/>
+          </a:p>
+          <a:p>
+            <a:pPr marL="0" indent="0">
+              <a:buNone/>
+            </a:pPr>
+            <a:endParaRPr lang="en-US" dirty="0">
+              <a:ea typeface="+mn-lt"/>
+              <a:cs typeface="+mn-lt"/>
+            </a:endParaRPr>
+          </a:p>
+        </p:txBody>
+      </p:sp>
+    </p:spTree>
+    <p:extLst>
+      <p:ext uri="{BB962C8B-B14F-4D97-AF65-F5344CB8AC3E}">
+        <p14:creationId xmlns:p14="http://schemas.microsoft.com/office/powerpoint/2010/main" val="1865729139"/>
+      </p:ext>
+    </p:extLst>
+  </p:cSld>
+  <p:clrMapOvr>
+    <a:masterClrMapping/>
+  </p:clrMapOvr>
+  <p:timing>
+    <p:tnLst>
+      <p:par>
+        <p:cTn id="1" dur="indefinite" restart="never" nodeType="tmRoot">
+          <p:childTnLst>
+            <p:seq concurrent="1" nextAc="seek">
+              <p:cTn id="2" dur="indefinite" nodeType="mainSeq">
+                <p:childTnLst>
+                  <p:par>
+                    <p:cTn id="3" fill="hold">
+                      <p:stCondLst>
+                        <p:cond delay="indefinite"/>
+                      </p:stCondLst>
+                      <p:childTnLst>
+                        <p:par>
+                          <p:cTn id="4" fill="hold">
+                            <p:stCondLst>
+                              <p:cond delay="0"/>
+                            </p:stCondLst>
+                            <p:childTnLst>
+                              <p:par>
+                                <p:cTn id="5" presetID="1" presetClass="entr" presetSubtype="0" fill="hold" grpId="0" nodeType="clickEffect">
+                                  <p:stCondLst>
+                                    <p:cond delay="0"/>
+                                  </p:stCondLst>
+                                  <p:childTnLst>
+                                    <p:set>
+                                      <p:cBhvr>
+                                        <p:cTn id="6" dur="1" fill="hold">
+                                          <p:stCondLst>
+                                            <p:cond delay="0"/>
+                                          </p:stCondLst>
+                                        </p:cTn>
+                                        <p:tgtEl>
+                                          <p:spTgt spid="3">
+                                            <p:txEl>
+                                              <p:pRg st="0" end="0"/>
+                                            </p:txEl>
+                                          </p:spTgt>
+                                        </p:tgtEl>
+                                        <p:attrNameLst>
+                                          <p:attrName>style.visibility</p:attrName>
+                                        </p:attrNameLst>
+                                      </p:cBhvr>
+                                      <p:to>
+                                        <p:strVal val="visible"/>
+                                      </p:to>
+                                    </p:set>
+                                  </p:childTnLst>
+                                </p:cTn>
+                              </p:par>
+                            </p:childTnLst>
+                          </p:cTn>
+                        </p:par>
+                      </p:childTnLst>
+                    </p:cTn>
+                  </p:par>
+                </p:childTnLst>
+              </p:cTn>
+              <p:prevCondLst>
+                <p:cond evt="onPrev" delay="0">
+                  <p:tgtEl>
+                    <p:sldTgt/>
+                  </p:tgtEl>
+                </p:cond>
+              </p:prevCondLst>
+              <p:nextCondLst>
+                <p:cond evt="onNext" delay="0">
+                  <p:tgtEl>
+                    <p:sldTgt/>
+                  </p:tgtEl>
+                </p:cond>
+              </p:nextCondLst>
+            </p:seq>
+          </p:childTnLst>
+        </p:cTn>
+      </p:par>
+    </p:tnLst>
+    <p:bldLst>
+      <p:bldP spid="3" grpId="0" build="p"/>
+    </p:bldLst>
+  </p:timing>
+</p:sld>
+</file>
+
+<file path=ppt/slides/slide11.xml><?xml version="1.0" encoding="utf-8"?>
+<p:sld xmlns:a="http://schemas.openxmlformats.org/drawingml/2006/main" xmlns:r="http://schemas.openxmlformats.org/officeDocument/2006/relationships" xmlns:p="http://schemas.openxmlformats.org/presentationml/2006/main">
+  <p:cSld>
+    <p:spTree>
+      <p:nvGrpSpPr>
         <p:cNvPr id="1" name="">
           <a:extLst>
             <a:ext uri="{FF2B5EF4-FFF2-40B4-BE49-F238E27FC236}">
@@ -4652,6 +3793,34 @@
           <a:chExt cx="0" cy="0"/>
         </a:xfrm>
       </p:grpSpPr>
+      <p:sp>
+        <p:nvSpPr>
+          <p:cNvPr id="2" name="Title 1">
+            <a:extLst>
+              <a:ext uri="{FF2B5EF4-FFF2-40B4-BE49-F238E27FC236}">
+                <a16:creationId xmlns:a16="http://schemas.microsoft.com/office/drawing/2014/main" id="{EFB3DCA2-5CF0-D9D9-D19D-5F184BF62F37}"/>
+              </a:ext>
+            </a:extLst>
+          </p:cNvPr>
+          <p:cNvSpPr>
+            <a:spLocks noGrp="1"/>
+          </p:cNvSpPr>
+          <p:nvPr>
+            <p:ph type="title"/>
+          </p:nvPr>
+        </p:nvSpPr>
+        <p:spPr/>
+        <p:txBody>
+          <a:bodyPr/>
+          <a:lstStyle/>
+          <a:p>
+            <a:r>
+              <a:rPr lang="en-US" dirty="0"/>
+              <a:t>EU AI Act</a:t>
+            </a:r>
+          </a:p>
+        </p:txBody>
+      </p:sp>
       <p:sp>
         <p:nvSpPr>
           <p:cNvPr id="3" name="Content Placeholder 2">
@@ -4714,65 +3883,6 @@
           </a:p>
         </p:txBody>
       </p:sp>
-      <p:sp>
-        <p:nvSpPr>
-          <p:cNvPr id="5" name="Title 4">
-            <a:extLst>
-              <a:ext uri="{FF2B5EF4-FFF2-40B4-BE49-F238E27FC236}">
-                <a16:creationId xmlns:a16="http://schemas.microsoft.com/office/drawing/2014/main" id="{1700A706-5A9A-B94A-5E5E-F6185319F000}"/>
-              </a:ext>
-            </a:extLst>
-          </p:cNvPr>
-          <p:cNvSpPr>
-            <a:spLocks noGrp="1"/>
-          </p:cNvSpPr>
-          <p:nvPr>
-            <p:ph type="title"/>
-          </p:nvPr>
-        </p:nvSpPr>
-        <p:spPr/>
-        <p:txBody>
-          <a:bodyPr/>
-          <a:lstStyle/>
-          <a:p>
-            <a:r>
-              <a:rPr lang="en-US" dirty="0"/>
-              <a:t>EU AI Act </a:t>
-            </a:r>
-            <a:r>
-              <a:rPr lang="en-US" i="1" dirty="0">
-                <a:solidFill>
-                  <a:schemeClr val="bg2">
-                    <a:lumMod val="50000"/>
-                  </a:schemeClr>
-                </a:solidFill>
-              </a:rPr>
-              <a:t>(</a:t>
-            </a:r>
-            <a:r>
-              <a:rPr lang="en-GB" i="1" dirty="0">
-                <a:solidFill>
-                  <a:schemeClr val="bg2">
-                    <a:lumMod val="50000"/>
-                  </a:schemeClr>
-                </a:solidFill>
-              </a:rPr>
-              <a:t>August 2024</a:t>
-            </a:r>
-            <a:r>
-              <a:rPr lang="en-US" i="1" dirty="0">
-                <a:solidFill>
-                  <a:schemeClr val="bg2">
-                    <a:lumMod val="50000"/>
-                  </a:schemeClr>
-                </a:solidFill>
-              </a:rPr>
-              <a:t>)</a:t>
-            </a:r>
-            <a:endParaRPr lang="en-US" dirty="0"/>
-          </a:p>
-        </p:txBody>
-      </p:sp>
     </p:spTree>
     <p:extLst>
       <p:ext uri="{BB962C8B-B14F-4D97-AF65-F5344CB8AC3E}">
@@ -4786,7 +3896,7 @@
 </p:sld>
 </file>
 
-<file path=ppt/slides/slide11.xml><?xml version="1.0" encoding="utf-8"?>
+<file path=ppt/slides/slide12.xml><?xml version="1.0" encoding="utf-8"?>
 <p:sld xmlns:a="http://schemas.openxmlformats.org/drawingml/2006/main" xmlns:r="http://schemas.openxmlformats.org/officeDocument/2006/relationships" xmlns:p="http://schemas.openxmlformats.org/presentationml/2006/main">
   <p:cSld>
     <p:spTree>
@@ -4832,39 +3942,8 @@
           <a:p>
             <a:r>
               <a:rPr lang="en-US" dirty="0"/>
-              <a:t>EU AI Act </a:t>
-            </a:r>
-            <a:r>
-              <a:rPr lang="en-US" i="1" dirty="0">
-                <a:solidFill>
-                  <a:schemeClr val="bg2">
-                    <a:lumMod val="50000"/>
-                  </a:schemeClr>
-                </a:solidFill>
-              </a:rPr>
-              <a:t>(</a:t>
-            </a:r>
-            <a:r>
-              <a:rPr lang="en-GB" i="1" dirty="0">
-                <a:solidFill>
-                  <a:schemeClr val="bg2">
-                    <a:lumMod val="50000"/>
-                  </a:schemeClr>
-                </a:solidFill>
-              </a:rPr>
-              <a:t>August 2024</a:t>
-            </a:r>
-            <a:r>
-              <a:rPr lang="en-US" i="1" dirty="0">
-                <a:solidFill>
-                  <a:schemeClr val="bg2">
-                    <a:lumMod val="50000"/>
-                  </a:schemeClr>
-                </a:solidFill>
-              </a:rPr>
-              <a:t>)</a:t>
-            </a:r>
-            <a:endParaRPr lang="en-US" dirty="0"/>
+              <a:t>EU AI Act</a:t>
+            </a:r>
           </a:p>
         </p:txBody>
       </p:sp>
@@ -4943,7 +4022,7 @@
 </p:sld>
 </file>
 
-<file path=ppt/slides/slide12.xml><?xml version="1.0" encoding="utf-8"?>
+<file path=ppt/slides/slide13.xml><?xml version="1.0" encoding="utf-8"?>
 <p:sld xmlns:a="http://schemas.openxmlformats.org/drawingml/2006/main" xmlns:r="http://schemas.openxmlformats.org/officeDocument/2006/relationships" xmlns:p="http://schemas.openxmlformats.org/presentationml/2006/main">
   <p:cSld>
     <p:spTree>
@@ -4989,39 +4068,8 @@
           <a:p>
             <a:r>
               <a:rPr lang="en-US" dirty="0"/>
-              <a:t>EU AI Act </a:t>
-            </a:r>
-            <a:r>
-              <a:rPr lang="en-US" i="1" dirty="0">
-                <a:solidFill>
-                  <a:schemeClr val="bg2">
-                    <a:lumMod val="50000"/>
-                  </a:schemeClr>
-                </a:solidFill>
-              </a:rPr>
-              <a:t>(</a:t>
-            </a:r>
-            <a:r>
-              <a:rPr lang="en-GB" i="1" dirty="0">
-                <a:solidFill>
-                  <a:schemeClr val="bg2">
-                    <a:lumMod val="50000"/>
-                  </a:schemeClr>
-                </a:solidFill>
-              </a:rPr>
-              <a:t>August 2024</a:t>
-            </a:r>
-            <a:r>
-              <a:rPr lang="en-US" i="1" dirty="0">
-                <a:solidFill>
-                  <a:schemeClr val="bg2">
-                    <a:lumMod val="50000"/>
-                  </a:schemeClr>
-                </a:solidFill>
-              </a:rPr>
-              <a:t>)</a:t>
-            </a:r>
-            <a:endParaRPr lang="en-US" dirty="0"/>
+              <a:t>EU AI Act</a:t>
+            </a:r>
           </a:p>
         </p:txBody>
       </p:sp>
@@ -5100,7 +4148,7 @@
 </p:sld>
 </file>
 
-<file path=ppt/slides/slide13.xml><?xml version="1.0" encoding="utf-8"?>
+<file path=ppt/slides/slide14.xml><?xml version="1.0" encoding="utf-8"?>
 <p:sld xmlns:a="http://schemas.openxmlformats.org/drawingml/2006/main" xmlns:r="http://schemas.openxmlformats.org/officeDocument/2006/relationships" xmlns:p="http://schemas.openxmlformats.org/presentationml/2006/main">
   <p:cSld>
     <p:spTree>
@@ -5146,39 +4194,8 @@
           <a:p>
             <a:r>
               <a:rPr lang="en-US" dirty="0"/>
-              <a:t>EU AI Act </a:t>
-            </a:r>
-            <a:r>
-              <a:rPr lang="en-US" i="1" dirty="0">
-                <a:solidFill>
-                  <a:schemeClr val="bg2">
-                    <a:lumMod val="50000"/>
-                  </a:schemeClr>
-                </a:solidFill>
-              </a:rPr>
-              <a:t>(</a:t>
-            </a:r>
-            <a:r>
-              <a:rPr lang="en-GB" i="1" dirty="0">
-                <a:solidFill>
-                  <a:schemeClr val="bg2">
-                    <a:lumMod val="50000"/>
-                  </a:schemeClr>
-                </a:solidFill>
-              </a:rPr>
-              <a:t>August 2024</a:t>
-            </a:r>
-            <a:r>
-              <a:rPr lang="en-US" i="1" dirty="0">
-                <a:solidFill>
-                  <a:schemeClr val="bg2">
-                    <a:lumMod val="50000"/>
-                  </a:schemeClr>
-                </a:solidFill>
-              </a:rPr>
-              <a:t>)</a:t>
-            </a:r>
-            <a:endParaRPr lang="en-US" dirty="0"/>
+              <a:t>EU AI Act</a:t>
+            </a:r>
           </a:p>
         </p:txBody>
       </p:sp>
@@ -5359,7 +4376,7 @@
 </p:sld>
 </file>
 
-<file path=ppt/slides/slide14.xml><?xml version="1.0" encoding="utf-8"?>
+<file path=ppt/slides/slide15.xml><?xml version="1.0" encoding="utf-8"?>
 <p:sld xmlns:a="http://schemas.openxmlformats.org/drawingml/2006/main" xmlns:r="http://schemas.openxmlformats.org/officeDocument/2006/relationships" xmlns:p="http://schemas.openxmlformats.org/presentationml/2006/main">
   <p:cSld>
     <p:spTree>
@@ -5433,6 +4450,9 @@
           </a:bodyPr>
           <a:lstStyle/>
           <a:p>
+            <a:pPr marL="514350" indent="-514350">
+              <a:buAutoNum type="alphaLcPeriod"/>
+            </a:pPr>
             <a:r>
               <a:rPr lang="en-US" dirty="0">
                 <a:ea typeface="+mn-lt"/>
@@ -5443,6 +4463,9 @@
             <a:endParaRPr lang="en-US" dirty="0"/>
           </a:p>
           <a:p>
+            <a:pPr marL="514350" indent="-514350">
+              <a:buAutoNum type="alphaLcPeriod"/>
+            </a:pPr>
             <a:r>
               <a:rPr lang="en-US" dirty="0">
                 <a:ea typeface="+mn-lt"/>
@@ -5452,6 +4475,9 @@
             </a:r>
           </a:p>
           <a:p>
+            <a:pPr marL="514350" indent="-514350">
+              <a:buAutoNum type="alphaLcPeriod"/>
+            </a:pPr>
             <a:r>
               <a:rPr lang="en-US" dirty="0">
                 <a:ea typeface="+mn-lt"/>
@@ -5840,7 +4866,7 @@
 </p:sld>
 </file>
 
-<file path=ppt/slides/slide15.xml><?xml version="1.0" encoding="utf-8"?>
+<file path=ppt/slides/slide16.xml><?xml version="1.0" encoding="utf-8"?>
 <p:sld xmlns:a="http://schemas.openxmlformats.org/drawingml/2006/main" xmlns:r="http://schemas.openxmlformats.org/officeDocument/2006/relationships" xmlns:p="http://schemas.openxmlformats.org/presentationml/2006/main">
   <p:cSld>
     <p:spTree>
@@ -5914,6 +4940,9 @@
           </a:bodyPr>
           <a:lstStyle/>
           <a:p>
+            <a:pPr marL="514350" indent="-514350">
+              <a:buAutoNum type="alphaLcPeriod"/>
+            </a:pPr>
             <a:r>
               <a:rPr lang="en-US" dirty="0">
                 <a:ea typeface="+mn-lt"/>
@@ -5923,6 +4952,9 @@
             </a:r>
           </a:p>
           <a:p>
+            <a:pPr marL="514350" indent="-514350">
+              <a:buAutoNum type="alphaLcPeriod"/>
+            </a:pPr>
             <a:r>
               <a:rPr lang="en-US" dirty="0">
                 <a:ea typeface="+mn-lt"/>
@@ -5958,6 +4990,9 @@
             </a:r>
           </a:p>
           <a:p>
+            <a:pPr marL="514350" indent="-514350">
+              <a:buAutoNum type="alphaLcPeriod"/>
+            </a:pPr>
             <a:r>
               <a:rPr lang="en-US" dirty="0">
                 <a:ea typeface="+mn-lt"/>
@@ -6409,7 +5444,7 @@
 </p:sld>
 </file>
 
-<file path=ppt/slides/slide16.xml><?xml version="1.0" encoding="utf-8"?>
+<file path=ppt/slides/slide17.xml><?xml version="1.0" encoding="utf-8"?>
 <p:sld xmlns:a="http://schemas.openxmlformats.org/drawingml/2006/main" xmlns:r="http://schemas.openxmlformats.org/officeDocument/2006/relationships" xmlns:p="http://schemas.openxmlformats.org/presentationml/2006/main">
   <p:cSld>
     <p:spTree>
@@ -6637,7 +5672,7 @@
 </p:sld>
 </file>
 
-<file path=ppt/slides/slide17.xml><?xml version="1.0" encoding="utf-8"?>
+<file path=ppt/slides/slide18.xml><?xml version="1.0" encoding="utf-8"?>
 <p:sld xmlns:a="http://schemas.openxmlformats.org/drawingml/2006/main" xmlns:r="http://schemas.openxmlformats.org/officeDocument/2006/relationships" xmlns:p="http://schemas.openxmlformats.org/presentationml/2006/main">
   <p:cSld>
     <p:spTree>
@@ -6899,7 +5934,7 @@
 </p:sld>
 </file>
 
-<file path=ppt/slides/slide18.xml><?xml version="1.0" encoding="utf-8"?>
+<file path=ppt/slides/slide19.xml><?xml version="1.0" encoding="utf-8"?>
 <p:sld xmlns:a="http://schemas.openxmlformats.org/drawingml/2006/main" xmlns:r="http://schemas.openxmlformats.org/officeDocument/2006/relationships" xmlns:p="http://schemas.openxmlformats.org/presentationml/2006/main">
   <p:cSld>
     <p:spTree>
@@ -7000,33 +6035,33 @@
           <a:custGeom>
             <a:avLst/>
             <a:gdLst>
-              <a:gd name="csX0" fmla="*/ 0 w 457200"/>
-              <a:gd name="csY0" fmla="*/ 228600 h 457200"/>
-              <a:gd name="csX1" fmla="*/ 228600 w 457200"/>
-              <a:gd name="csY1" fmla="*/ 0 h 457200"/>
-              <a:gd name="csX2" fmla="*/ 457200 w 457200"/>
-              <a:gd name="csY2" fmla="*/ 228600 h 457200"/>
-              <a:gd name="csX3" fmla="*/ 228600 w 457200"/>
-              <a:gd name="csY3" fmla="*/ 457200 h 457200"/>
-              <a:gd name="csX4" fmla="*/ 0 w 457200"/>
-              <a:gd name="csY4" fmla="*/ 228600 h 457200"/>
+              <a:gd name="connsiteX0" fmla="*/ 0 w 457200"/>
+              <a:gd name="connsiteY0" fmla="*/ 228600 h 457200"/>
+              <a:gd name="connsiteX1" fmla="*/ 228600 w 457200"/>
+              <a:gd name="connsiteY1" fmla="*/ 0 h 457200"/>
+              <a:gd name="connsiteX2" fmla="*/ 457200 w 457200"/>
+              <a:gd name="connsiteY2" fmla="*/ 228600 h 457200"/>
+              <a:gd name="connsiteX3" fmla="*/ 228600 w 457200"/>
+              <a:gd name="connsiteY3" fmla="*/ 457200 h 457200"/>
+              <a:gd name="connsiteX4" fmla="*/ 0 w 457200"/>
+              <a:gd name="connsiteY4" fmla="*/ 228600 h 457200"/>
             </a:gdLst>
             <a:ahLst/>
             <a:cxnLst>
               <a:cxn ang="0">
-                <a:pos x="csX0" y="csY0"/>
-              </a:cxn>
-              <a:cxn ang="0">
-                <a:pos x="csX1" y="csY1"/>
-              </a:cxn>
-              <a:cxn ang="0">
-                <a:pos x="csX2" y="csY2"/>
-              </a:cxn>
-              <a:cxn ang="0">
-                <a:pos x="csX3" y="csY3"/>
-              </a:cxn>
-              <a:cxn ang="0">
-                <a:pos x="csX4" y="csY4"/>
+                <a:pos x="connsiteX0" y="connsiteY0"/>
+              </a:cxn>
+              <a:cxn ang="0">
+                <a:pos x="connsiteX1" y="connsiteY1"/>
+              </a:cxn>
+              <a:cxn ang="0">
+                <a:pos x="connsiteX2" y="connsiteY2"/>
+              </a:cxn>
+              <a:cxn ang="0">
+                <a:pos x="connsiteX3" y="connsiteY3"/>
+              </a:cxn>
+              <a:cxn ang="0">
+                <a:pos x="connsiteX4" y="connsiteY4"/>
               </a:cxn>
             </a:cxnLst>
             <a:rect l="l" t="t" r="r" b="b"/>
@@ -7267,33 +6302,33 @@
           <a:custGeom>
             <a:avLst/>
             <a:gdLst>
-              <a:gd name="csX0" fmla="*/ 0 w 457200"/>
-              <a:gd name="csY0" fmla="*/ 228600 h 457200"/>
-              <a:gd name="csX1" fmla="*/ 228600 w 457200"/>
-              <a:gd name="csY1" fmla="*/ 0 h 457200"/>
-              <a:gd name="csX2" fmla="*/ 457200 w 457200"/>
-              <a:gd name="csY2" fmla="*/ 228600 h 457200"/>
-              <a:gd name="csX3" fmla="*/ 228600 w 457200"/>
-              <a:gd name="csY3" fmla="*/ 457200 h 457200"/>
-              <a:gd name="csX4" fmla="*/ 0 w 457200"/>
-              <a:gd name="csY4" fmla="*/ 228600 h 457200"/>
+              <a:gd name="connsiteX0" fmla="*/ 0 w 457200"/>
+              <a:gd name="connsiteY0" fmla="*/ 228600 h 457200"/>
+              <a:gd name="connsiteX1" fmla="*/ 228600 w 457200"/>
+              <a:gd name="connsiteY1" fmla="*/ 0 h 457200"/>
+              <a:gd name="connsiteX2" fmla="*/ 457200 w 457200"/>
+              <a:gd name="connsiteY2" fmla="*/ 228600 h 457200"/>
+              <a:gd name="connsiteX3" fmla="*/ 228600 w 457200"/>
+              <a:gd name="connsiteY3" fmla="*/ 457200 h 457200"/>
+              <a:gd name="connsiteX4" fmla="*/ 0 w 457200"/>
+              <a:gd name="connsiteY4" fmla="*/ 228600 h 457200"/>
             </a:gdLst>
             <a:ahLst/>
             <a:cxnLst>
               <a:cxn ang="0">
-                <a:pos x="csX0" y="csY0"/>
-              </a:cxn>
-              <a:cxn ang="0">
-                <a:pos x="csX1" y="csY1"/>
-              </a:cxn>
-              <a:cxn ang="0">
-                <a:pos x="csX2" y="csY2"/>
-              </a:cxn>
-              <a:cxn ang="0">
-                <a:pos x="csX3" y="csY3"/>
-              </a:cxn>
-              <a:cxn ang="0">
-                <a:pos x="csX4" y="csY4"/>
+                <a:pos x="connsiteX0" y="connsiteY0"/>
+              </a:cxn>
+              <a:cxn ang="0">
+                <a:pos x="connsiteX1" y="connsiteY1"/>
+              </a:cxn>
+              <a:cxn ang="0">
+                <a:pos x="connsiteX2" y="connsiteY2"/>
+              </a:cxn>
+              <a:cxn ang="0">
+                <a:pos x="connsiteX3" y="connsiteY3"/>
+              </a:cxn>
+              <a:cxn ang="0">
+                <a:pos x="connsiteX4" y="connsiteY4"/>
               </a:cxn>
             </a:cxnLst>
             <a:rect l="l" t="t" r="r" b="b"/>
@@ -7413,33 +6448,33 @@
           <a:custGeom>
             <a:avLst/>
             <a:gdLst>
-              <a:gd name="csX0" fmla="*/ 0 w 457200"/>
-              <a:gd name="csY0" fmla="*/ 228600 h 457200"/>
-              <a:gd name="csX1" fmla="*/ 228600 w 457200"/>
-              <a:gd name="csY1" fmla="*/ 0 h 457200"/>
-              <a:gd name="csX2" fmla="*/ 457200 w 457200"/>
-              <a:gd name="csY2" fmla="*/ 228600 h 457200"/>
-              <a:gd name="csX3" fmla="*/ 228600 w 457200"/>
-              <a:gd name="csY3" fmla="*/ 457200 h 457200"/>
-              <a:gd name="csX4" fmla="*/ 0 w 457200"/>
-              <a:gd name="csY4" fmla="*/ 228600 h 457200"/>
+              <a:gd name="connsiteX0" fmla="*/ 0 w 457200"/>
+              <a:gd name="connsiteY0" fmla="*/ 228600 h 457200"/>
+              <a:gd name="connsiteX1" fmla="*/ 228600 w 457200"/>
+              <a:gd name="connsiteY1" fmla="*/ 0 h 457200"/>
+              <a:gd name="connsiteX2" fmla="*/ 457200 w 457200"/>
+              <a:gd name="connsiteY2" fmla="*/ 228600 h 457200"/>
+              <a:gd name="connsiteX3" fmla="*/ 228600 w 457200"/>
+              <a:gd name="connsiteY3" fmla="*/ 457200 h 457200"/>
+              <a:gd name="connsiteX4" fmla="*/ 0 w 457200"/>
+              <a:gd name="connsiteY4" fmla="*/ 228600 h 457200"/>
             </a:gdLst>
             <a:ahLst/>
             <a:cxnLst>
               <a:cxn ang="0">
-                <a:pos x="csX0" y="csY0"/>
-              </a:cxn>
-              <a:cxn ang="0">
-                <a:pos x="csX1" y="csY1"/>
-              </a:cxn>
-              <a:cxn ang="0">
-                <a:pos x="csX2" y="csY2"/>
-              </a:cxn>
-              <a:cxn ang="0">
-                <a:pos x="csX3" y="csY3"/>
-              </a:cxn>
-              <a:cxn ang="0">
-                <a:pos x="csX4" y="csY4"/>
+                <a:pos x="connsiteX0" y="connsiteY0"/>
+              </a:cxn>
+              <a:cxn ang="0">
+                <a:pos x="connsiteX1" y="connsiteY1"/>
+              </a:cxn>
+              <a:cxn ang="0">
+                <a:pos x="connsiteX2" y="connsiteY2"/>
+              </a:cxn>
+              <a:cxn ang="0">
+                <a:pos x="connsiteX3" y="connsiteY3"/>
+              </a:cxn>
+              <a:cxn ang="0">
+                <a:pos x="connsiteX4" y="connsiteY4"/>
               </a:cxn>
             </a:cxnLst>
             <a:rect l="l" t="t" r="r" b="b"/>
@@ -7559,33 +6594,33 @@
           <a:custGeom>
             <a:avLst/>
             <a:gdLst>
-              <a:gd name="csX0" fmla="*/ 0 w 457200"/>
-              <a:gd name="csY0" fmla="*/ 228600 h 457200"/>
-              <a:gd name="csX1" fmla="*/ 228600 w 457200"/>
-              <a:gd name="csY1" fmla="*/ 0 h 457200"/>
-              <a:gd name="csX2" fmla="*/ 457200 w 457200"/>
-              <a:gd name="csY2" fmla="*/ 228600 h 457200"/>
-              <a:gd name="csX3" fmla="*/ 228600 w 457200"/>
-              <a:gd name="csY3" fmla="*/ 457200 h 457200"/>
-              <a:gd name="csX4" fmla="*/ 0 w 457200"/>
-              <a:gd name="csY4" fmla="*/ 228600 h 457200"/>
+              <a:gd name="connsiteX0" fmla="*/ 0 w 457200"/>
+              <a:gd name="connsiteY0" fmla="*/ 228600 h 457200"/>
+              <a:gd name="connsiteX1" fmla="*/ 228600 w 457200"/>
+              <a:gd name="connsiteY1" fmla="*/ 0 h 457200"/>
+              <a:gd name="connsiteX2" fmla="*/ 457200 w 457200"/>
+              <a:gd name="connsiteY2" fmla="*/ 228600 h 457200"/>
+              <a:gd name="connsiteX3" fmla="*/ 228600 w 457200"/>
+              <a:gd name="connsiteY3" fmla="*/ 457200 h 457200"/>
+              <a:gd name="connsiteX4" fmla="*/ 0 w 457200"/>
+              <a:gd name="connsiteY4" fmla="*/ 228600 h 457200"/>
             </a:gdLst>
             <a:ahLst/>
             <a:cxnLst>
               <a:cxn ang="0">
-                <a:pos x="csX0" y="csY0"/>
-              </a:cxn>
-              <a:cxn ang="0">
-                <a:pos x="csX1" y="csY1"/>
-              </a:cxn>
-              <a:cxn ang="0">
-                <a:pos x="csX2" y="csY2"/>
-              </a:cxn>
-              <a:cxn ang="0">
-                <a:pos x="csX3" y="csY3"/>
-              </a:cxn>
-              <a:cxn ang="0">
-                <a:pos x="csX4" y="csY4"/>
+                <a:pos x="connsiteX0" y="connsiteY0"/>
+              </a:cxn>
+              <a:cxn ang="0">
+                <a:pos x="connsiteX1" y="connsiteY1"/>
+              </a:cxn>
+              <a:cxn ang="0">
+                <a:pos x="connsiteX2" y="connsiteY2"/>
+              </a:cxn>
+              <a:cxn ang="0">
+                <a:pos x="connsiteX3" y="connsiteY3"/>
+              </a:cxn>
+              <a:cxn ang="0">
+                <a:pos x="connsiteX4" y="connsiteY4"/>
               </a:cxn>
             </a:cxnLst>
             <a:rect l="l" t="t" r="r" b="b"/>
@@ -7705,33 +6740,33 @@
           <a:custGeom>
             <a:avLst/>
             <a:gdLst>
-              <a:gd name="csX0" fmla="*/ 0 w 457200"/>
-              <a:gd name="csY0" fmla="*/ 228600 h 457200"/>
-              <a:gd name="csX1" fmla="*/ 228600 w 457200"/>
-              <a:gd name="csY1" fmla="*/ 0 h 457200"/>
-              <a:gd name="csX2" fmla="*/ 457200 w 457200"/>
-              <a:gd name="csY2" fmla="*/ 228600 h 457200"/>
-              <a:gd name="csX3" fmla="*/ 228600 w 457200"/>
-              <a:gd name="csY3" fmla="*/ 457200 h 457200"/>
-              <a:gd name="csX4" fmla="*/ 0 w 457200"/>
-              <a:gd name="csY4" fmla="*/ 228600 h 457200"/>
+              <a:gd name="connsiteX0" fmla="*/ 0 w 457200"/>
+              <a:gd name="connsiteY0" fmla="*/ 228600 h 457200"/>
+              <a:gd name="connsiteX1" fmla="*/ 228600 w 457200"/>
+              <a:gd name="connsiteY1" fmla="*/ 0 h 457200"/>
+              <a:gd name="connsiteX2" fmla="*/ 457200 w 457200"/>
+              <a:gd name="connsiteY2" fmla="*/ 228600 h 457200"/>
+              <a:gd name="connsiteX3" fmla="*/ 228600 w 457200"/>
+              <a:gd name="connsiteY3" fmla="*/ 457200 h 457200"/>
+              <a:gd name="connsiteX4" fmla="*/ 0 w 457200"/>
+              <a:gd name="connsiteY4" fmla="*/ 228600 h 457200"/>
             </a:gdLst>
             <a:ahLst/>
             <a:cxnLst>
               <a:cxn ang="0">
-                <a:pos x="csX0" y="csY0"/>
-              </a:cxn>
-              <a:cxn ang="0">
-                <a:pos x="csX1" y="csY1"/>
-              </a:cxn>
-              <a:cxn ang="0">
-                <a:pos x="csX2" y="csY2"/>
-              </a:cxn>
-              <a:cxn ang="0">
-                <a:pos x="csX3" y="csY3"/>
-              </a:cxn>
-              <a:cxn ang="0">
-                <a:pos x="csX4" y="csY4"/>
+                <a:pos x="connsiteX0" y="connsiteY0"/>
+              </a:cxn>
+              <a:cxn ang="0">
+                <a:pos x="connsiteX1" y="connsiteY1"/>
+              </a:cxn>
+              <a:cxn ang="0">
+                <a:pos x="connsiteX2" y="connsiteY2"/>
+              </a:cxn>
+              <a:cxn ang="0">
+                <a:pos x="connsiteX3" y="connsiteY3"/>
+              </a:cxn>
+              <a:cxn ang="0">
+                <a:pos x="connsiteX4" y="connsiteY4"/>
               </a:cxn>
             </a:cxnLst>
             <a:rect l="l" t="t" r="r" b="b"/>
@@ -7851,33 +6886,33 @@
           <a:custGeom>
             <a:avLst/>
             <a:gdLst>
-              <a:gd name="csX0" fmla="*/ 0 w 457200"/>
-              <a:gd name="csY0" fmla="*/ 228600 h 457200"/>
-              <a:gd name="csX1" fmla="*/ 228600 w 457200"/>
-              <a:gd name="csY1" fmla="*/ 0 h 457200"/>
-              <a:gd name="csX2" fmla="*/ 457200 w 457200"/>
-              <a:gd name="csY2" fmla="*/ 228600 h 457200"/>
-              <a:gd name="csX3" fmla="*/ 228600 w 457200"/>
-              <a:gd name="csY3" fmla="*/ 457200 h 457200"/>
-              <a:gd name="csX4" fmla="*/ 0 w 457200"/>
-              <a:gd name="csY4" fmla="*/ 228600 h 457200"/>
+              <a:gd name="connsiteX0" fmla="*/ 0 w 457200"/>
+              <a:gd name="connsiteY0" fmla="*/ 228600 h 457200"/>
+              <a:gd name="connsiteX1" fmla="*/ 228600 w 457200"/>
+              <a:gd name="connsiteY1" fmla="*/ 0 h 457200"/>
+              <a:gd name="connsiteX2" fmla="*/ 457200 w 457200"/>
+              <a:gd name="connsiteY2" fmla="*/ 228600 h 457200"/>
+              <a:gd name="connsiteX3" fmla="*/ 228600 w 457200"/>
+              <a:gd name="connsiteY3" fmla="*/ 457200 h 457200"/>
+              <a:gd name="connsiteX4" fmla="*/ 0 w 457200"/>
+              <a:gd name="connsiteY4" fmla="*/ 228600 h 457200"/>
             </a:gdLst>
             <a:ahLst/>
             <a:cxnLst>
               <a:cxn ang="0">
-                <a:pos x="csX0" y="csY0"/>
-              </a:cxn>
-              <a:cxn ang="0">
-                <a:pos x="csX1" y="csY1"/>
-              </a:cxn>
-              <a:cxn ang="0">
-                <a:pos x="csX2" y="csY2"/>
-              </a:cxn>
-              <a:cxn ang="0">
-                <a:pos x="csX3" y="csY3"/>
-              </a:cxn>
-              <a:cxn ang="0">
-                <a:pos x="csX4" y="csY4"/>
+                <a:pos x="connsiteX0" y="connsiteY0"/>
+              </a:cxn>
+              <a:cxn ang="0">
+                <a:pos x="connsiteX1" y="connsiteY1"/>
+              </a:cxn>
+              <a:cxn ang="0">
+                <a:pos x="connsiteX2" y="connsiteY2"/>
+              </a:cxn>
+              <a:cxn ang="0">
+                <a:pos x="connsiteX3" y="connsiteY3"/>
+              </a:cxn>
+              <a:cxn ang="0">
+                <a:pos x="connsiteX4" y="connsiteY4"/>
               </a:cxn>
             </a:cxnLst>
             <a:rect l="l" t="t" r="r" b="b"/>
@@ -7997,33 +7032,33 @@
           <a:custGeom>
             <a:avLst/>
             <a:gdLst>
-              <a:gd name="csX0" fmla="*/ 0 w 457200"/>
-              <a:gd name="csY0" fmla="*/ 228600 h 457200"/>
-              <a:gd name="csX1" fmla="*/ 228600 w 457200"/>
-              <a:gd name="csY1" fmla="*/ 0 h 457200"/>
-              <a:gd name="csX2" fmla="*/ 457200 w 457200"/>
-              <a:gd name="csY2" fmla="*/ 228600 h 457200"/>
-              <a:gd name="csX3" fmla="*/ 228600 w 457200"/>
-              <a:gd name="csY3" fmla="*/ 457200 h 457200"/>
-              <a:gd name="csX4" fmla="*/ 0 w 457200"/>
-              <a:gd name="csY4" fmla="*/ 228600 h 457200"/>
+              <a:gd name="connsiteX0" fmla="*/ 0 w 457200"/>
+              <a:gd name="connsiteY0" fmla="*/ 228600 h 457200"/>
+              <a:gd name="connsiteX1" fmla="*/ 228600 w 457200"/>
+              <a:gd name="connsiteY1" fmla="*/ 0 h 457200"/>
+              <a:gd name="connsiteX2" fmla="*/ 457200 w 457200"/>
+              <a:gd name="connsiteY2" fmla="*/ 228600 h 457200"/>
+              <a:gd name="connsiteX3" fmla="*/ 228600 w 457200"/>
+              <a:gd name="connsiteY3" fmla="*/ 457200 h 457200"/>
+              <a:gd name="connsiteX4" fmla="*/ 0 w 457200"/>
+              <a:gd name="connsiteY4" fmla="*/ 228600 h 457200"/>
             </a:gdLst>
             <a:ahLst/>
             <a:cxnLst>
               <a:cxn ang="0">
-                <a:pos x="csX0" y="csY0"/>
-              </a:cxn>
-              <a:cxn ang="0">
-                <a:pos x="csX1" y="csY1"/>
-              </a:cxn>
-              <a:cxn ang="0">
-                <a:pos x="csX2" y="csY2"/>
-              </a:cxn>
-              <a:cxn ang="0">
-                <a:pos x="csX3" y="csY3"/>
-              </a:cxn>
-              <a:cxn ang="0">
-                <a:pos x="csX4" y="csY4"/>
+                <a:pos x="connsiteX0" y="connsiteY0"/>
+              </a:cxn>
+              <a:cxn ang="0">
+                <a:pos x="connsiteX1" y="connsiteY1"/>
+              </a:cxn>
+              <a:cxn ang="0">
+                <a:pos x="connsiteX2" y="connsiteY2"/>
+              </a:cxn>
+              <a:cxn ang="0">
+                <a:pos x="connsiteX3" y="connsiteY3"/>
+              </a:cxn>
+              <a:cxn ang="0">
+                <a:pos x="connsiteX4" y="connsiteY4"/>
               </a:cxn>
             </a:cxnLst>
             <a:rect l="l" t="t" r="r" b="b"/>
@@ -8143,33 +7178,33 @@
           <a:custGeom>
             <a:avLst/>
             <a:gdLst>
-              <a:gd name="csX0" fmla="*/ 0 w 457200"/>
-              <a:gd name="csY0" fmla="*/ 228600 h 457200"/>
-              <a:gd name="csX1" fmla="*/ 228600 w 457200"/>
-              <a:gd name="csY1" fmla="*/ 0 h 457200"/>
-              <a:gd name="csX2" fmla="*/ 457200 w 457200"/>
-              <a:gd name="csY2" fmla="*/ 228600 h 457200"/>
-              <a:gd name="csX3" fmla="*/ 228600 w 457200"/>
-              <a:gd name="csY3" fmla="*/ 457200 h 457200"/>
-              <a:gd name="csX4" fmla="*/ 0 w 457200"/>
-              <a:gd name="csY4" fmla="*/ 228600 h 457200"/>
+              <a:gd name="connsiteX0" fmla="*/ 0 w 457200"/>
+              <a:gd name="connsiteY0" fmla="*/ 228600 h 457200"/>
+              <a:gd name="connsiteX1" fmla="*/ 228600 w 457200"/>
+              <a:gd name="connsiteY1" fmla="*/ 0 h 457200"/>
+              <a:gd name="connsiteX2" fmla="*/ 457200 w 457200"/>
+              <a:gd name="connsiteY2" fmla="*/ 228600 h 457200"/>
+              <a:gd name="connsiteX3" fmla="*/ 228600 w 457200"/>
+              <a:gd name="connsiteY3" fmla="*/ 457200 h 457200"/>
+              <a:gd name="connsiteX4" fmla="*/ 0 w 457200"/>
+              <a:gd name="connsiteY4" fmla="*/ 228600 h 457200"/>
             </a:gdLst>
             <a:ahLst/>
             <a:cxnLst>
               <a:cxn ang="0">
-                <a:pos x="csX0" y="csY0"/>
-              </a:cxn>
-              <a:cxn ang="0">
-                <a:pos x="csX1" y="csY1"/>
-              </a:cxn>
-              <a:cxn ang="0">
-                <a:pos x="csX2" y="csY2"/>
-              </a:cxn>
-              <a:cxn ang="0">
-                <a:pos x="csX3" y="csY3"/>
-              </a:cxn>
-              <a:cxn ang="0">
-                <a:pos x="csX4" y="csY4"/>
+                <a:pos x="connsiteX0" y="connsiteY0"/>
+              </a:cxn>
+              <a:cxn ang="0">
+                <a:pos x="connsiteX1" y="connsiteY1"/>
+              </a:cxn>
+              <a:cxn ang="0">
+                <a:pos x="connsiteX2" y="connsiteY2"/>
+              </a:cxn>
+              <a:cxn ang="0">
+                <a:pos x="connsiteX3" y="connsiteY3"/>
+              </a:cxn>
+              <a:cxn ang="0">
+                <a:pos x="connsiteX4" y="connsiteY4"/>
               </a:cxn>
             </a:cxnLst>
             <a:rect l="l" t="t" r="r" b="b"/>
@@ -8289,63 +7324,63 @@
           <a:custGeom>
             <a:avLst/>
             <a:gdLst>
-              <a:gd name="csX0" fmla="*/ 0 w 2333625"/>
-              <a:gd name="csY0" fmla="*/ 0 h 369332"/>
-              <a:gd name="csX1" fmla="*/ 583406 w 2333625"/>
-              <a:gd name="csY1" fmla="*/ 0 h 369332"/>
-              <a:gd name="csX2" fmla="*/ 1213485 w 2333625"/>
-              <a:gd name="csY2" fmla="*/ 0 h 369332"/>
-              <a:gd name="csX3" fmla="*/ 1773555 w 2333625"/>
-              <a:gd name="csY3" fmla="*/ 0 h 369332"/>
-              <a:gd name="csX4" fmla="*/ 2333625 w 2333625"/>
-              <a:gd name="csY4" fmla="*/ 0 h 369332"/>
-              <a:gd name="csX5" fmla="*/ 2333625 w 2333625"/>
-              <a:gd name="csY5" fmla="*/ 369332 h 369332"/>
-              <a:gd name="csX6" fmla="*/ 1703546 w 2333625"/>
-              <a:gd name="csY6" fmla="*/ 369332 h 369332"/>
-              <a:gd name="csX7" fmla="*/ 1143476 w 2333625"/>
-              <a:gd name="csY7" fmla="*/ 369332 h 369332"/>
-              <a:gd name="csX8" fmla="*/ 583406 w 2333625"/>
-              <a:gd name="csY8" fmla="*/ 369332 h 369332"/>
-              <a:gd name="csX9" fmla="*/ 0 w 2333625"/>
-              <a:gd name="csY9" fmla="*/ 369332 h 369332"/>
-              <a:gd name="csX10" fmla="*/ 0 w 2333625"/>
-              <a:gd name="csY10" fmla="*/ 0 h 369332"/>
+              <a:gd name="connsiteX0" fmla="*/ 0 w 2333625"/>
+              <a:gd name="connsiteY0" fmla="*/ 0 h 369332"/>
+              <a:gd name="connsiteX1" fmla="*/ 583406 w 2333625"/>
+              <a:gd name="connsiteY1" fmla="*/ 0 h 369332"/>
+              <a:gd name="connsiteX2" fmla="*/ 1213485 w 2333625"/>
+              <a:gd name="connsiteY2" fmla="*/ 0 h 369332"/>
+              <a:gd name="connsiteX3" fmla="*/ 1773555 w 2333625"/>
+              <a:gd name="connsiteY3" fmla="*/ 0 h 369332"/>
+              <a:gd name="connsiteX4" fmla="*/ 2333625 w 2333625"/>
+              <a:gd name="connsiteY4" fmla="*/ 0 h 369332"/>
+              <a:gd name="connsiteX5" fmla="*/ 2333625 w 2333625"/>
+              <a:gd name="connsiteY5" fmla="*/ 369332 h 369332"/>
+              <a:gd name="connsiteX6" fmla="*/ 1703546 w 2333625"/>
+              <a:gd name="connsiteY6" fmla="*/ 369332 h 369332"/>
+              <a:gd name="connsiteX7" fmla="*/ 1143476 w 2333625"/>
+              <a:gd name="connsiteY7" fmla="*/ 369332 h 369332"/>
+              <a:gd name="connsiteX8" fmla="*/ 583406 w 2333625"/>
+              <a:gd name="connsiteY8" fmla="*/ 369332 h 369332"/>
+              <a:gd name="connsiteX9" fmla="*/ 0 w 2333625"/>
+              <a:gd name="connsiteY9" fmla="*/ 369332 h 369332"/>
+              <a:gd name="connsiteX10" fmla="*/ 0 w 2333625"/>
+              <a:gd name="connsiteY10" fmla="*/ 0 h 369332"/>
             </a:gdLst>
             <a:ahLst/>
             <a:cxnLst>
               <a:cxn ang="0">
-                <a:pos x="csX0" y="csY0"/>
-              </a:cxn>
-              <a:cxn ang="0">
-                <a:pos x="csX1" y="csY1"/>
-              </a:cxn>
-              <a:cxn ang="0">
-                <a:pos x="csX2" y="csY2"/>
-              </a:cxn>
-              <a:cxn ang="0">
-                <a:pos x="csX3" y="csY3"/>
-              </a:cxn>
-              <a:cxn ang="0">
-                <a:pos x="csX4" y="csY4"/>
-              </a:cxn>
-              <a:cxn ang="0">
-                <a:pos x="csX5" y="csY5"/>
-              </a:cxn>
-              <a:cxn ang="0">
-                <a:pos x="csX6" y="csY6"/>
-              </a:cxn>
-              <a:cxn ang="0">
-                <a:pos x="csX7" y="csY7"/>
-              </a:cxn>
-              <a:cxn ang="0">
-                <a:pos x="csX8" y="csY8"/>
-              </a:cxn>
-              <a:cxn ang="0">
-                <a:pos x="csX9" y="csY9"/>
-              </a:cxn>
-              <a:cxn ang="0">
-                <a:pos x="csX10" y="csY10"/>
+                <a:pos x="connsiteX0" y="connsiteY0"/>
+              </a:cxn>
+              <a:cxn ang="0">
+                <a:pos x="connsiteX1" y="connsiteY1"/>
+              </a:cxn>
+              <a:cxn ang="0">
+                <a:pos x="connsiteX2" y="connsiteY2"/>
+              </a:cxn>
+              <a:cxn ang="0">
+                <a:pos x="connsiteX3" y="connsiteY3"/>
+              </a:cxn>
+              <a:cxn ang="0">
+                <a:pos x="connsiteX4" y="connsiteY4"/>
+              </a:cxn>
+              <a:cxn ang="0">
+                <a:pos x="connsiteX5" y="connsiteY5"/>
+              </a:cxn>
+              <a:cxn ang="0">
+                <a:pos x="connsiteX6" y="connsiteY6"/>
+              </a:cxn>
+              <a:cxn ang="0">
+                <a:pos x="connsiteX7" y="connsiteY7"/>
+              </a:cxn>
+              <a:cxn ang="0">
+                <a:pos x="connsiteX8" y="connsiteY8"/>
+              </a:cxn>
+              <a:cxn ang="0">
+                <a:pos x="connsiteX9" y="connsiteY9"/>
+              </a:cxn>
+              <a:cxn ang="0">
+                <a:pos x="connsiteX10" y="connsiteY10"/>
               </a:cxn>
             </a:cxnLst>
             <a:rect l="l" t="t" r="r" b="b"/>
@@ -8530,63 +7565,63 @@
           <a:custGeom>
             <a:avLst/>
             <a:gdLst>
-              <a:gd name="csX0" fmla="*/ 0 w 2333625"/>
-              <a:gd name="csY0" fmla="*/ 0 h 369332"/>
-              <a:gd name="csX1" fmla="*/ 583406 w 2333625"/>
-              <a:gd name="csY1" fmla="*/ 0 h 369332"/>
-              <a:gd name="csX2" fmla="*/ 1213485 w 2333625"/>
-              <a:gd name="csY2" fmla="*/ 0 h 369332"/>
-              <a:gd name="csX3" fmla="*/ 1773555 w 2333625"/>
-              <a:gd name="csY3" fmla="*/ 0 h 369332"/>
-              <a:gd name="csX4" fmla="*/ 2333625 w 2333625"/>
-              <a:gd name="csY4" fmla="*/ 0 h 369332"/>
-              <a:gd name="csX5" fmla="*/ 2333625 w 2333625"/>
-              <a:gd name="csY5" fmla="*/ 369332 h 369332"/>
-              <a:gd name="csX6" fmla="*/ 1703546 w 2333625"/>
-              <a:gd name="csY6" fmla="*/ 369332 h 369332"/>
-              <a:gd name="csX7" fmla="*/ 1143476 w 2333625"/>
-              <a:gd name="csY7" fmla="*/ 369332 h 369332"/>
-              <a:gd name="csX8" fmla="*/ 583406 w 2333625"/>
-              <a:gd name="csY8" fmla="*/ 369332 h 369332"/>
-              <a:gd name="csX9" fmla="*/ 0 w 2333625"/>
-              <a:gd name="csY9" fmla="*/ 369332 h 369332"/>
-              <a:gd name="csX10" fmla="*/ 0 w 2333625"/>
-              <a:gd name="csY10" fmla="*/ 0 h 369332"/>
+              <a:gd name="connsiteX0" fmla="*/ 0 w 2333625"/>
+              <a:gd name="connsiteY0" fmla="*/ 0 h 369332"/>
+              <a:gd name="connsiteX1" fmla="*/ 583406 w 2333625"/>
+              <a:gd name="connsiteY1" fmla="*/ 0 h 369332"/>
+              <a:gd name="connsiteX2" fmla="*/ 1213485 w 2333625"/>
+              <a:gd name="connsiteY2" fmla="*/ 0 h 369332"/>
+              <a:gd name="connsiteX3" fmla="*/ 1773555 w 2333625"/>
+              <a:gd name="connsiteY3" fmla="*/ 0 h 369332"/>
+              <a:gd name="connsiteX4" fmla="*/ 2333625 w 2333625"/>
+              <a:gd name="connsiteY4" fmla="*/ 0 h 369332"/>
+              <a:gd name="connsiteX5" fmla="*/ 2333625 w 2333625"/>
+              <a:gd name="connsiteY5" fmla="*/ 369332 h 369332"/>
+              <a:gd name="connsiteX6" fmla="*/ 1703546 w 2333625"/>
+              <a:gd name="connsiteY6" fmla="*/ 369332 h 369332"/>
+              <a:gd name="connsiteX7" fmla="*/ 1143476 w 2333625"/>
+              <a:gd name="connsiteY7" fmla="*/ 369332 h 369332"/>
+              <a:gd name="connsiteX8" fmla="*/ 583406 w 2333625"/>
+              <a:gd name="connsiteY8" fmla="*/ 369332 h 369332"/>
+              <a:gd name="connsiteX9" fmla="*/ 0 w 2333625"/>
+              <a:gd name="connsiteY9" fmla="*/ 369332 h 369332"/>
+              <a:gd name="connsiteX10" fmla="*/ 0 w 2333625"/>
+              <a:gd name="connsiteY10" fmla="*/ 0 h 369332"/>
             </a:gdLst>
             <a:ahLst/>
             <a:cxnLst>
               <a:cxn ang="0">
-                <a:pos x="csX0" y="csY0"/>
-              </a:cxn>
-              <a:cxn ang="0">
-                <a:pos x="csX1" y="csY1"/>
-              </a:cxn>
-              <a:cxn ang="0">
-                <a:pos x="csX2" y="csY2"/>
-              </a:cxn>
-              <a:cxn ang="0">
-                <a:pos x="csX3" y="csY3"/>
-              </a:cxn>
-              <a:cxn ang="0">
-                <a:pos x="csX4" y="csY4"/>
-              </a:cxn>
-              <a:cxn ang="0">
-                <a:pos x="csX5" y="csY5"/>
-              </a:cxn>
-              <a:cxn ang="0">
-                <a:pos x="csX6" y="csY6"/>
-              </a:cxn>
-              <a:cxn ang="0">
-                <a:pos x="csX7" y="csY7"/>
-              </a:cxn>
-              <a:cxn ang="0">
-                <a:pos x="csX8" y="csY8"/>
-              </a:cxn>
-              <a:cxn ang="0">
-                <a:pos x="csX9" y="csY9"/>
-              </a:cxn>
-              <a:cxn ang="0">
-                <a:pos x="csX10" y="csY10"/>
+                <a:pos x="connsiteX0" y="connsiteY0"/>
+              </a:cxn>
+              <a:cxn ang="0">
+                <a:pos x="connsiteX1" y="connsiteY1"/>
+              </a:cxn>
+              <a:cxn ang="0">
+                <a:pos x="connsiteX2" y="connsiteY2"/>
+              </a:cxn>
+              <a:cxn ang="0">
+                <a:pos x="connsiteX3" y="connsiteY3"/>
+              </a:cxn>
+              <a:cxn ang="0">
+                <a:pos x="connsiteX4" y="connsiteY4"/>
+              </a:cxn>
+              <a:cxn ang="0">
+                <a:pos x="connsiteX5" y="connsiteY5"/>
+              </a:cxn>
+              <a:cxn ang="0">
+                <a:pos x="connsiteX6" y="connsiteY6"/>
+              </a:cxn>
+              <a:cxn ang="0">
+                <a:pos x="connsiteX7" y="connsiteY7"/>
+              </a:cxn>
+              <a:cxn ang="0">
+                <a:pos x="connsiteX8" y="connsiteY8"/>
+              </a:cxn>
+              <a:cxn ang="0">
+                <a:pos x="connsiteX9" y="connsiteY9"/>
+              </a:cxn>
+              <a:cxn ang="0">
+                <a:pos x="connsiteX10" y="connsiteY10"/>
               </a:cxn>
             </a:cxnLst>
             <a:rect l="l" t="t" r="r" b="b"/>
@@ -8771,63 +7806,63 @@
           <a:custGeom>
             <a:avLst/>
             <a:gdLst>
-              <a:gd name="csX0" fmla="*/ 0 w 2333625"/>
-              <a:gd name="csY0" fmla="*/ 0 h 369332"/>
-              <a:gd name="csX1" fmla="*/ 583406 w 2333625"/>
-              <a:gd name="csY1" fmla="*/ 0 h 369332"/>
-              <a:gd name="csX2" fmla="*/ 1213485 w 2333625"/>
-              <a:gd name="csY2" fmla="*/ 0 h 369332"/>
-              <a:gd name="csX3" fmla="*/ 1773555 w 2333625"/>
-              <a:gd name="csY3" fmla="*/ 0 h 369332"/>
-              <a:gd name="csX4" fmla="*/ 2333625 w 2333625"/>
-              <a:gd name="csY4" fmla="*/ 0 h 369332"/>
-              <a:gd name="csX5" fmla="*/ 2333625 w 2333625"/>
-              <a:gd name="csY5" fmla="*/ 369332 h 369332"/>
-              <a:gd name="csX6" fmla="*/ 1703546 w 2333625"/>
-              <a:gd name="csY6" fmla="*/ 369332 h 369332"/>
-              <a:gd name="csX7" fmla="*/ 1143476 w 2333625"/>
-              <a:gd name="csY7" fmla="*/ 369332 h 369332"/>
-              <a:gd name="csX8" fmla="*/ 583406 w 2333625"/>
-              <a:gd name="csY8" fmla="*/ 369332 h 369332"/>
-              <a:gd name="csX9" fmla="*/ 0 w 2333625"/>
-              <a:gd name="csY9" fmla="*/ 369332 h 369332"/>
-              <a:gd name="csX10" fmla="*/ 0 w 2333625"/>
-              <a:gd name="csY10" fmla="*/ 0 h 369332"/>
+              <a:gd name="connsiteX0" fmla="*/ 0 w 2333625"/>
+              <a:gd name="connsiteY0" fmla="*/ 0 h 369332"/>
+              <a:gd name="connsiteX1" fmla="*/ 583406 w 2333625"/>
+              <a:gd name="connsiteY1" fmla="*/ 0 h 369332"/>
+              <a:gd name="connsiteX2" fmla="*/ 1213485 w 2333625"/>
+              <a:gd name="connsiteY2" fmla="*/ 0 h 369332"/>
+              <a:gd name="connsiteX3" fmla="*/ 1773555 w 2333625"/>
+              <a:gd name="connsiteY3" fmla="*/ 0 h 369332"/>
+              <a:gd name="connsiteX4" fmla="*/ 2333625 w 2333625"/>
+              <a:gd name="connsiteY4" fmla="*/ 0 h 369332"/>
+              <a:gd name="connsiteX5" fmla="*/ 2333625 w 2333625"/>
+              <a:gd name="connsiteY5" fmla="*/ 369332 h 369332"/>
+              <a:gd name="connsiteX6" fmla="*/ 1703546 w 2333625"/>
+              <a:gd name="connsiteY6" fmla="*/ 369332 h 369332"/>
+              <a:gd name="connsiteX7" fmla="*/ 1143476 w 2333625"/>
+              <a:gd name="connsiteY7" fmla="*/ 369332 h 369332"/>
+              <a:gd name="connsiteX8" fmla="*/ 583406 w 2333625"/>
+              <a:gd name="connsiteY8" fmla="*/ 369332 h 369332"/>
+              <a:gd name="connsiteX9" fmla="*/ 0 w 2333625"/>
+              <a:gd name="connsiteY9" fmla="*/ 369332 h 369332"/>
+              <a:gd name="connsiteX10" fmla="*/ 0 w 2333625"/>
+              <a:gd name="connsiteY10" fmla="*/ 0 h 369332"/>
             </a:gdLst>
             <a:ahLst/>
             <a:cxnLst>
               <a:cxn ang="0">
-                <a:pos x="csX0" y="csY0"/>
-              </a:cxn>
-              <a:cxn ang="0">
-                <a:pos x="csX1" y="csY1"/>
-              </a:cxn>
-              <a:cxn ang="0">
-                <a:pos x="csX2" y="csY2"/>
-              </a:cxn>
-              <a:cxn ang="0">
-                <a:pos x="csX3" y="csY3"/>
-              </a:cxn>
-              <a:cxn ang="0">
-                <a:pos x="csX4" y="csY4"/>
-              </a:cxn>
-              <a:cxn ang="0">
-                <a:pos x="csX5" y="csY5"/>
-              </a:cxn>
-              <a:cxn ang="0">
-                <a:pos x="csX6" y="csY6"/>
-              </a:cxn>
-              <a:cxn ang="0">
-                <a:pos x="csX7" y="csY7"/>
-              </a:cxn>
-              <a:cxn ang="0">
-                <a:pos x="csX8" y="csY8"/>
-              </a:cxn>
-              <a:cxn ang="0">
-                <a:pos x="csX9" y="csY9"/>
-              </a:cxn>
-              <a:cxn ang="0">
-                <a:pos x="csX10" y="csY10"/>
+                <a:pos x="connsiteX0" y="connsiteY0"/>
+              </a:cxn>
+              <a:cxn ang="0">
+                <a:pos x="connsiteX1" y="connsiteY1"/>
+              </a:cxn>
+              <a:cxn ang="0">
+                <a:pos x="connsiteX2" y="connsiteY2"/>
+              </a:cxn>
+              <a:cxn ang="0">
+                <a:pos x="connsiteX3" y="connsiteY3"/>
+              </a:cxn>
+              <a:cxn ang="0">
+                <a:pos x="connsiteX4" y="connsiteY4"/>
+              </a:cxn>
+              <a:cxn ang="0">
+                <a:pos x="connsiteX5" y="connsiteY5"/>
+              </a:cxn>
+              <a:cxn ang="0">
+                <a:pos x="connsiteX6" y="connsiteY6"/>
+              </a:cxn>
+              <a:cxn ang="0">
+                <a:pos x="connsiteX7" y="connsiteY7"/>
+              </a:cxn>
+              <a:cxn ang="0">
+                <a:pos x="connsiteX8" y="connsiteY8"/>
+              </a:cxn>
+              <a:cxn ang="0">
+                <a:pos x="connsiteX9" y="connsiteY9"/>
+              </a:cxn>
+              <a:cxn ang="0">
+                <a:pos x="connsiteX10" y="connsiteY10"/>
               </a:cxn>
             </a:cxnLst>
             <a:rect l="l" t="t" r="r" b="b"/>
@@ -9012,63 +8047,63 @@
           <a:custGeom>
             <a:avLst/>
             <a:gdLst>
-              <a:gd name="csX0" fmla="*/ 0 w 2333625"/>
-              <a:gd name="csY0" fmla="*/ 0 h 369332"/>
-              <a:gd name="csX1" fmla="*/ 583406 w 2333625"/>
-              <a:gd name="csY1" fmla="*/ 0 h 369332"/>
-              <a:gd name="csX2" fmla="*/ 1213485 w 2333625"/>
-              <a:gd name="csY2" fmla="*/ 0 h 369332"/>
-              <a:gd name="csX3" fmla="*/ 1773555 w 2333625"/>
-              <a:gd name="csY3" fmla="*/ 0 h 369332"/>
-              <a:gd name="csX4" fmla="*/ 2333625 w 2333625"/>
-              <a:gd name="csY4" fmla="*/ 0 h 369332"/>
-              <a:gd name="csX5" fmla="*/ 2333625 w 2333625"/>
-              <a:gd name="csY5" fmla="*/ 369332 h 369332"/>
-              <a:gd name="csX6" fmla="*/ 1703546 w 2333625"/>
-              <a:gd name="csY6" fmla="*/ 369332 h 369332"/>
-              <a:gd name="csX7" fmla="*/ 1143476 w 2333625"/>
-              <a:gd name="csY7" fmla="*/ 369332 h 369332"/>
-              <a:gd name="csX8" fmla="*/ 583406 w 2333625"/>
-              <a:gd name="csY8" fmla="*/ 369332 h 369332"/>
-              <a:gd name="csX9" fmla="*/ 0 w 2333625"/>
-              <a:gd name="csY9" fmla="*/ 369332 h 369332"/>
-              <a:gd name="csX10" fmla="*/ 0 w 2333625"/>
-              <a:gd name="csY10" fmla="*/ 0 h 369332"/>
+              <a:gd name="connsiteX0" fmla="*/ 0 w 2333625"/>
+              <a:gd name="connsiteY0" fmla="*/ 0 h 369332"/>
+              <a:gd name="connsiteX1" fmla="*/ 583406 w 2333625"/>
+              <a:gd name="connsiteY1" fmla="*/ 0 h 369332"/>
+              <a:gd name="connsiteX2" fmla="*/ 1213485 w 2333625"/>
+              <a:gd name="connsiteY2" fmla="*/ 0 h 369332"/>
+              <a:gd name="connsiteX3" fmla="*/ 1773555 w 2333625"/>
+              <a:gd name="connsiteY3" fmla="*/ 0 h 369332"/>
+              <a:gd name="connsiteX4" fmla="*/ 2333625 w 2333625"/>
+              <a:gd name="connsiteY4" fmla="*/ 0 h 369332"/>
+              <a:gd name="connsiteX5" fmla="*/ 2333625 w 2333625"/>
+              <a:gd name="connsiteY5" fmla="*/ 369332 h 369332"/>
+              <a:gd name="connsiteX6" fmla="*/ 1703546 w 2333625"/>
+              <a:gd name="connsiteY6" fmla="*/ 369332 h 369332"/>
+              <a:gd name="connsiteX7" fmla="*/ 1143476 w 2333625"/>
+              <a:gd name="connsiteY7" fmla="*/ 369332 h 369332"/>
+              <a:gd name="connsiteX8" fmla="*/ 583406 w 2333625"/>
+              <a:gd name="connsiteY8" fmla="*/ 369332 h 369332"/>
+              <a:gd name="connsiteX9" fmla="*/ 0 w 2333625"/>
+              <a:gd name="connsiteY9" fmla="*/ 369332 h 369332"/>
+              <a:gd name="connsiteX10" fmla="*/ 0 w 2333625"/>
+              <a:gd name="connsiteY10" fmla="*/ 0 h 369332"/>
             </a:gdLst>
             <a:ahLst/>
             <a:cxnLst>
               <a:cxn ang="0">
-                <a:pos x="csX0" y="csY0"/>
-              </a:cxn>
-              <a:cxn ang="0">
-                <a:pos x="csX1" y="csY1"/>
-              </a:cxn>
-              <a:cxn ang="0">
-                <a:pos x="csX2" y="csY2"/>
-              </a:cxn>
-              <a:cxn ang="0">
-                <a:pos x="csX3" y="csY3"/>
-              </a:cxn>
-              <a:cxn ang="0">
-                <a:pos x="csX4" y="csY4"/>
-              </a:cxn>
-              <a:cxn ang="0">
-                <a:pos x="csX5" y="csY5"/>
-              </a:cxn>
-              <a:cxn ang="0">
-                <a:pos x="csX6" y="csY6"/>
-              </a:cxn>
-              <a:cxn ang="0">
-                <a:pos x="csX7" y="csY7"/>
-              </a:cxn>
-              <a:cxn ang="0">
-                <a:pos x="csX8" y="csY8"/>
-              </a:cxn>
-              <a:cxn ang="0">
-                <a:pos x="csX9" y="csY9"/>
-              </a:cxn>
-              <a:cxn ang="0">
-                <a:pos x="csX10" y="csY10"/>
+                <a:pos x="connsiteX0" y="connsiteY0"/>
+              </a:cxn>
+              <a:cxn ang="0">
+                <a:pos x="connsiteX1" y="connsiteY1"/>
+              </a:cxn>
+              <a:cxn ang="0">
+                <a:pos x="connsiteX2" y="connsiteY2"/>
+              </a:cxn>
+              <a:cxn ang="0">
+                <a:pos x="connsiteX3" y="connsiteY3"/>
+              </a:cxn>
+              <a:cxn ang="0">
+                <a:pos x="connsiteX4" y="connsiteY4"/>
+              </a:cxn>
+              <a:cxn ang="0">
+                <a:pos x="connsiteX5" y="connsiteY5"/>
+              </a:cxn>
+              <a:cxn ang="0">
+                <a:pos x="connsiteX6" y="connsiteY6"/>
+              </a:cxn>
+              <a:cxn ang="0">
+                <a:pos x="connsiteX7" y="connsiteY7"/>
+              </a:cxn>
+              <a:cxn ang="0">
+                <a:pos x="connsiteX8" y="connsiteY8"/>
+              </a:cxn>
+              <a:cxn ang="0">
+                <a:pos x="connsiteX9" y="connsiteY9"/>
+              </a:cxn>
+              <a:cxn ang="0">
+                <a:pos x="connsiteX10" y="connsiteY10"/>
               </a:cxn>
             </a:cxnLst>
             <a:rect l="l" t="t" r="r" b="b"/>
@@ -9253,33 +8288,33 @@
           <a:custGeom>
             <a:avLst/>
             <a:gdLst>
-              <a:gd name="csX0" fmla="*/ 0 w 457200"/>
-              <a:gd name="csY0" fmla="*/ 228600 h 457200"/>
-              <a:gd name="csX1" fmla="*/ 228600 w 457200"/>
-              <a:gd name="csY1" fmla="*/ 0 h 457200"/>
-              <a:gd name="csX2" fmla="*/ 457200 w 457200"/>
-              <a:gd name="csY2" fmla="*/ 228600 h 457200"/>
-              <a:gd name="csX3" fmla="*/ 228600 w 457200"/>
-              <a:gd name="csY3" fmla="*/ 457200 h 457200"/>
-              <a:gd name="csX4" fmla="*/ 0 w 457200"/>
-              <a:gd name="csY4" fmla="*/ 228600 h 457200"/>
+              <a:gd name="connsiteX0" fmla="*/ 0 w 457200"/>
+              <a:gd name="connsiteY0" fmla="*/ 228600 h 457200"/>
+              <a:gd name="connsiteX1" fmla="*/ 228600 w 457200"/>
+              <a:gd name="connsiteY1" fmla="*/ 0 h 457200"/>
+              <a:gd name="connsiteX2" fmla="*/ 457200 w 457200"/>
+              <a:gd name="connsiteY2" fmla="*/ 228600 h 457200"/>
+              <a:gd name="connsiteX3" fmla="*/ 228600 w 457200"/>
+              <a:gd name="connsiteY3" fmla="*/ 457200 h 457200"/>
+              <a:gd name="connsiteX4" fmla="*/ 0 w 457200"/>
+              <a:gd name="connsiteY4" fmla="*/ 228600 h 457200"/>
             </a:gdLst>
             <a:ahLst/>
             <a:cxnLst>
               <a:cxn ang="0">
-                <a:pos x="csX0" y="csY0"/>
-              </a:cxn>
-              <a:cxn ang="0">
-                <a:pos x="csX1" y="csY1"/>
-              </a:cxn>
-              <a:cxn ang="0">
-                <a:pos x="csX2" y="csY2"/>
-              </a:cxn>
-              <a:cxn ang="0">
-                <a:pos x="csX3" y="csY3"/>
-              </a:cxn>
-              <a:cxn ang="0">
-                <a:pos x="csX4" y="csY4"/>
+                <a:pos x="connsiteX0" y="connsiteY0"/>
+              </a:cxn>
+              <a:cxn ang="0">
+                <a:pos x="connsiteX1" y="connsiteY1"/>
+              </a:cxn>
+              <a:cxn ang="0">
+                <a:pos x="connsiteX2" y="connsiteY2"/>
+              </a:cxn>
+              <a:cxn ang="0">
+                <a:pos x="connsiteX3" y="connsiteY3"/>
+              </a:cxn>
+              <a:cxn ang="0">
+                <a:pos x="connsiteX4" y="connsiteY4"/>
               </a:cxn>
             </a:cxnLst>
             <a:rect l="l" t="t" r="r" b="b"/>
@@ -9399,33 +8434,33 @@
           <a:custGeom>
             <a:avLst/>
             <a:gdLst>
-              <a:gd name="csX0" fmla="*/ 0 w 457200"/>
-              <a:gd name="csY0" fmla="*/ 228600 h 457200"/>
-              <a:gd name="csX1" fmla="*/ 228600 w 457200"/>
-              <a:gd name="csY1" fmla="*/ 0 h 457200"/>
-              <a:gd name="csX2" fmla="*/ 457200 w 457200"/>
-              <a:gd name="csY2" fmla="*/ 228600 h 457200"/>
-              <a:gd name="csX3" fmla="*/ 228600 w 457200"/>
-              <a:gd name="csY3" fmla="*/ 457200 h 457200"/>
-              <a:gd name="csX4" fmla="*/ 0 w 457200"/>
-              <a:gd name="csY4" fmla="*/ 228600 h 457200"/>
+              <a:gd name="connsiteX0" fmla="*/ 0 w 457200"/>
+              <a:gd name="connsiteY0" fmla="*/ 228600 h 457200"/>
+              <a:gd name="connsiteX1" fmla="*/ 228600 w 457200"/>
+              <a:gd name="connsiteY1" fmla="*/ 0 h 457200"/>
+              <a:gd name="connsiteX2" fmla="*/ 457200 w 457200"/>
+              <a:gd name="connsiteY2" fmla="*/ 228600 h 457200"/>
+              <a:gd name="connsiteX3" fmla="*/ 228600 w 457200"/>
+              <a:gd name="connsiteY3" fmla="*/ 457200 h 457200"/>
+              <a:gd name="connsiteX4" fmla="*/ 0 w 457200"/>
+              <a:gd name="connsiteY4" fmla="*/ 228600 h 457200"/>
             </a:gdLst>
             <a:ahLst/>
             <a:cxnLst>
               <a:cxn ang="0">
-                <a:pos x="csX0" y="csY0"/>
-              </a:cxn>
-              <a:cxn ang="0">
-                <a:pos x="csX1" y="csY1"/>
-              </a:cxn>
-              <a:cxn ang="0">
-                <a:pos x="csX2" y="csY2"/>
-              </a:cxn>
-              <a:cxn ang="0">
-                <a:pos x="csX3" y="csY3"/>
-              </a:cxn>
-              <a:cxn ang="0">
-                <a:pos x="csX4" y="csY4"/>
+                <a:pos x="connsiteX0" y="connsiteY0"/>
+              </a:cxn>
+              <a:cxn ang="0">
+                <a:pos x="connsiteX1" y="connsiteY1"/>
+              </a:cxn>
+              <a:cxn ang="0">
+                <a:pos x="connsiteX2" y="connsiteY2"/>
+              </a:cxn>
+              <a:cxn ang="0">
+                <a:pos x="connsiteX3" y="connsiteY3"/>
+              </a:cxn>
+              <a:cxn ang="0">
+                <a:pos x="connsiteX4" y="connsiteY4"/>
               </a:cxn>
             </a:cxnLst>
             <a:rect l="l" t="t" r="r" b="b"/>
@@ -9545,63 +8580,63 @@
           <a:custGeom>
             <a:avLst/>
             <a:gdLst>
-              <a:gd name="csX0" fmla="*/ 0 w 2333625"/>
-              <a:gd name="csY0" fmla="*/ 0 h 369332"/>
-              <a:gd name="csX1" fmla="*/ 583406 w 2333625"/>
-              <a:gd name="csY1" fmla="*/ 0 h 369332"/>
-              <a:gd name="csX2" fmla="*/ 1213485 w 2333625"/>
-              <a:gd name="csY2" fmla="*/ 0 h 369332"/>
-              <a:gd name="csX3" fmla="*/ 1773555 w 2333625"/>
-              <a:gd name="csY3" fmla="*/ 0 h 369332"/>
-              <a:gd name="csX4" fmla="*/ 2333625 w 2333625"/>
-              <a:gd name="csY4" fmla="*/ 0 h 369332"/>
-              <a:gd name="csX5" fmla="*/ 2333625 w 2333625"/>
-              <a:gd name="csY5" fmla="*/ 369332 h 369332"/>
-              <a:gd name="csX6" fmla="*/ 1703546 w 2333625"/>
-              <a:gd name="csY6" fmla="*/ 369332 h 369332"/>
-              <a:gd name="csX7" fmla="*/ 1143476 w 2333625"/>
-              <a:gd name="csY7" fmla="*/ 369332 h 369332"/>
-              <a:gd name="csX8" fmla="*/ 583406 w 2333625"/>
-              <a:gd name="csY8" fmla="*/ 369332 h 369332"/>
-              <a:gd name="csX9" fmla="*/ 0 w 2333625"/>
-              <a:gd name="csY9" fmla="*/ 369332 h 369332"/>
-              <a:gd name="csX10" fmla="*/ 0 w 2333625"/>
-              <a:gd name="csY10" fmla="*/ 0 h 369332"/>
+              <a:gd name="connsiteX0" fmla="*/ 0 w 2333625"/>
+              <a:gd name="connsiteY0" fmla="*/ 0 h 369332"/>
+              <a:gd name="connsiteX1" fmla="*/ 583406 w 2333625"/>
+              <a:gd name="connsiteY1" fmla="*/ 0 h 369332"/>
+              <a:gd name="connsiteX2" fmla="*/ 1213485 w 2333625"/>
+              <a:gd name="connsiteY2" fmla="*/ 0 h 369332"/>
+              <a:gd name="connsiteX3" fmla="*/ 1773555 w 2333625"/>
+              <a:gd name="connsiteY3" fmla="*/ 0 h 369332"/>
+              <a:gd name="connsiteX4" fmla="*/ 2333625 w 2333625"/>
+              <a:gd name="connsiteY4" fmla="*/ 0 h 369332"/>
+              <a:gd name="connsiteX5" fmla="*/ 2333625 w 2333625"/>
+              <a:gd name="connsiteY5" fmla="*/ 369332 h 369332"/>
+              <a:gd name="connsiteX6" fmla="*/ 1703546 w 2333625"/>
+              <a:gd name="connsiteY6" fmla="*/ 369332 h 369332"/>
+              <a:gd name="connsiteX7" fmla="*/ 1143476 w 2333625"/>
+              <a:gd name="connsiteY7" fmla="*/ 369332 h 369332"/>
+              <a:gd name="connsiteX8" fmla="*/ 583406 w 2333625"/>
+              <a:gd name="connsiteY8" fmla="*/ 369332 h 369332"/>
+              <a:gd name="connsiteX9" fmla="*/ 0 w 2333625"/>
+              <a:gd name="connsiteY9" fmla="*/ 369332 h 369332"/>
+              <a:gd name="connsiteX10" fmla="*/ 0 w 2333625"/>
+              <a:gd name="connsiteY10" fmla="*/ 0 h 369332"/>
             </a:gdLst>
             <a:ahLst/>
             <a:cxnLst>
               <a:cxn ang="0">
-                <a:pos x="csX0" y="csY0"/>
-              </a:cxn>
-              <a:cxn ang="0">
-                <a:pos x="csX1" y="csY1"/>
-              </a:cxn>
-              <a:cxn ang="0">
-                <a:pos x="csX2" y="csY2"/>
-              </a:cxn>
-              <a:cxn ang="0">
-                <a:pos x="csX3" y="csY3"/>
-              </a:cxn>
-              <a:cxn ang="0">
-                <a:pos x="csX4" y="csY4"/>
-              </a:cxn>
-              <a:cxn ang="0">
-                <a:pos x="csX5" y="csY5"/>
-              </a:cxn>
-              <a:cxn ang="0">
-                <a:pos x="csX6" y="csY6"/>
-              </a:cxn>
-              <a:cxn ang="0">
-                <a:pos x="csX7" y="csY7"/>
-              </a:cxn>
-              <a:cxn ang="0">
-                <a:pos x="csX8" y="csY8"/>
-              </a:cxn>
-              <a:cxn ang="0">
-                <a:pos x="csX9" y="csY9"/>
-              </a:cxn>
-              <a:cxn ang="0">
-                <a:pos x="csX10" y="csY10"/>
+                <a:pos x="connsiteX0" y="connsiteY0"/>
+              </a:cxn>
+              <a:cxn ang="0">
+                <a:pos x="connsiteX1" y="connsiteY1"/>
+              </a:cxn>
+              <a:cxn ang="0">
+                <a:pos x="connsiteX2" y="connsiteY2"/>
+              </a:cxn>
+              <a:cxn ang="0">
+                <a:pos x="connsiteX3" y="connsiteY3"/>
+              </a:cxn>
+              <a:cxn ang="0">
+                <a:pos x="connsiteX4" y="connsiteY4"/>
+              </a:cxn>
+              <a:cxn ang="0">
+                <a:pos x="connsiteX5" y="connsiteY5"/>
+              </a:cxn>
+              <a:cxn ang="0">
+                <a:pos x="connsiteX6" y="connsiteY6"/>
+              </a:cxn>
+              <a:cxn ang="0">
+                <a:pos x="connsiteX7" y="connsiteY7"/>
+              </a:cxn>
+              <a:cxn ang="0">
+                <a:pos x="connsiteX8" y="connsiteY8"/>
+              </a:cxn>
+              <a:cxn ang="0">
+                <a:pos x="connsiteX9" y="connsiteY9"/>
+              </a:cxn>
+              <a:cxn ang="0">
+                <a:pos x="connsiteX10" y="connsiteY10"/>
               </a:cxn>
             </a:cxnLst>
             <a:rect l="l" t="t" r="r" b="b"/>
@@ -10012,36 +9047,6 @@
           </a:p>
         </p:txBody>
       </p:sp>
-      <p:pic>
-        <p:nvPicPr>
-          <p:cNvPr id="4" name="Picture 3">
-            <a:extLst>
-              <a:ext uri="{FF2B5EF4-FFF2-40B4-BE49-F238E27FC236}">
-                <a16:creationId xmlns:a16="http://schemas.microsoft.com/office/drawing/2014/main" id="{62F90085-2CFA-E241-70E3-58E8EC79428C}"/>
-              </a:ext>
-            </a:extLst>
-          </p:cNvPr>
-          <p:cNvPicPr>
-            <a:picLocks noChangeAspect="1"/>
-          </p:cNvPicPr>
-          <p:nvPr/>
-        </p:nvPicPr>
-        <p:blipFill>
-          <a:blip r:embed="rId3"/>
-          <a:stretch>
-            <a:fillRect/>
-          </a:stretch>
-        </p:blipFill>
-        <p:spPr>
-          <a:xfrm>
-            <a:off x="4798195" y="3429000"/>
-            <a:ext cx="2595609" cy="2609471"/>
-          </a:xfrm>
-          <a:prstGeom prst="rect">
-            <a:avLst/>
-          </a:prstGeom>
-        </p:spPr>
-      </p:pic>
     </p:spTree>
     <p:extLst>
       <p:ext uri="{BB962C8B-B14F-4D97-AF65-F5344CB8AC3E}">
@@ -10095,7 +9100,7 @@
           <a:p>
             <a:r>
               <a:rPr lang="en-US" dirty="0"/>
-              <a:t>Workshop Goals</a:t>
+              <a:t>Our goals</a:t>
             </a:r>
           </a:p>
         </p:txBody>
@@ -10149,7 +9154,14 @@
                 <a:ea typeface="+mn-lt"/>
                 <a:cs typeface="+mn-lt"/>
               </a:rPr>
-              <a:t>Better understand the challenges that researchers face.</a:t>
+              <a:t>Better understand the challenges that researchers </a:t>
+            </a:r>
+            <a:r>
+              <a:rPr lang="en-US">
+                <a:ea typeface="+mn-lt"/>
+                <a:cs typeface="+mn-lt"/>
+              </a:rPr>
+              <a:t>face.</a:t>
             </a:r>
           </a:p>
           <a:p>
@@ -10185,7 +9197,14 @@
                 <a:ea typeface="+mn-lt"/>
                 <a:cs typeface="+mn-lt"/>
               </a:rPr>
-              <a:t>Including shared code</a:t>
+              <a:t>Including </a:t>
+            </a:r>
+            <a:r>
+              <a:rPr lang="en-US">
+                <a:ea typeface="+mn-lt"/>
+                <a:cs typeface="+mn-lt"/>
+              </a:rPr>
+              <a:t>shared code</a:t>
             </a:r>
           </a:p>
           <a:p>
@@ -10196,7 +9215,7 @@
               </a:rPr>
               <a:t>Start to build a community of like-minded researchers across the university.</a:t>
             </a:r>
-            <a:endParaRPr lang="en-US" dirty="0"/>
+            <a:endParaRPr lang="en-US"/>
           </a:p>
         </p:txBody>
       </p:sp>
@@ -10617,239 +9636,6 @@
           </a:graphicData>
         </a:graphic>
       </p:graphicFrame>
-      <p:sp>
-        <p:nvSpPr>
-          <p:cNvPr id="6" name="Content Placeholder 2">
-            <a:extLst>
-              <a:ext uri="{FF2B5EF4-FFF2-40B4-BE49-F238E27FC236}">
-                <a16:creationId xmlns:a16="http://schemas.microsoft.com/office/drawing/2014/main" id="{13040332-75D0-405E-6D35-DCBEE6D0BE3E}"/>
-              </a:ext>
-            </a:extLst>
-          </p:cNvPr>
-          <p:cNvSpPr txBox="1">
-            <a:spLocks/>
-          </p:cNvSpPr>
-          <p:nvPr/>
-        </p:nvSpPr>
-        <p:spPr>
-          <a:xfrm>
-            <a:off x="838200" y="5196522"/>
-            <a:ext cx="10515600" cy="1661477"/>
-          </a:xfrm>
-          <a:prstGeom prst="rect">
-            <a:avLst/>
-          </a:prstGeom>
-        </p:spPr>
-        <p:txBody>
-          <a:bodyPr vert="horz" lIns="91440" tIns="45720" rIns="91440" bIns="45720" rtlCol="0" anchor="t">
-            <a:normAutofit/>
-          </a:bodyPr>
-          <a:lstStyle>
-            <a:lvl1pPr marL="228600" indent="-228600" algn="l" defTabSz="914400" rtl="0" eaLnBrk="1" latinLnBrk="0" hangingPunct="1">
-              <a:lnSpc>
-                <a:spcPct val="90000"/>
-              </a:lnSpc>
-              <a:spcBef>
-                <a:spcPts val="1000"/>
-              </a:spcBef>
-              <a:buFont typeface="Arial" panose="020B0604020202020204" pitchFamily="34" charset="0"/>
-              <a:buChar char="•"/>
-              <a:defRPr sz="2800" kern="1200">
-                <a:solidFill>
-                  <a:schemeClr val="tx1"/>
-                </a:solidFill>
-                <a:latin typeface="+mn-lt"/>
-                <a:ea typeface="+mn-ea"/>
-                <a:cs typeface="+mn-cs"/>
-              </a:defRPr>
-            </a:lvl1pPr>
-            <a:lvl2pPr marL="685800" indent="-228600" algn="l" defTabSz="914400" rtl="0" eaLnBrk="1" latinLnBrk="0" hangingPunct="1">
-              <a:lnSpc>
-                <a:spcPct val="90000"/>
-              </a:lnSpc>
-              <a:spcBef>
-                <a:spcPts val="500"/>
-              </a:spcBef>
-              <a:buFont typeface="Arial" panose="020B0604020202020204" pitchFamily="34" charset="0"/>
-              <a:buChar char="•"/>
-              <a:defRPr sz="2400" kern="1200">
-                <a:solidFill>
-                  <a:schemeClr val="tx1"/>
-                </a:solidFill>
-                <a:latin typeface="+mn-lt"/>
-                <a:ea typeface="+mn-ea"/>
-                <a:cs typeface="+mn-cs"/>
-              </a:defRPr>
-            </a:lvl2pPr>
-            <a:lvl3pPr marL="1143000" indent="-228600" algn="l" defTabSz="914400" rtl="0" eaLnBrk="1" latinLnBrk="0" hangingPunct="1">
-              <a:lnSpc>
-                <a:spcPct val="90000"/>
-              </a:lnSpc>
-              <a:spcBef>
-                <a:spcPts val="500"/>
-              </a:spcBef>
-              <a:buFont typeface="Arial" panose="020B0604020202020204" pitchFamily="34" charset="0"/>
-              <a:buChar char="•"/>
-              <a:defRPr sz="2000" kern="1200">
-                <a:solidFill>
-                  <a:schemeClr val="tx1"/>
-                </a:solidFill>
-                <a:latin typeface="+mn-lt"/>
-                <a:ea typeface="+mn-ea"/>
-                <a:cs typeface="+mn-cs"/>
-              </a:defRPr>
-            </a:lvl3pPr>
-            <a:lvl4pPr marL="1600200" indent="-228600" algn="l" defTabSz="914400" rtl="0" eaLnBrk="1" latinLnBrk="0" hangingPunct="1">
-              <a:lnSpc>
-                <a:spcPct val="90000"/>
-              </a:lnSpc>
-              <a:spcBef>
-                <a:spcPts val="500"/>
-              </a:spcBef>
-              <a:buFont typeface="Arial" panose="020B0604020202020204" pitchFamily="34" charset="0"/>
-              <a:buChar char="•"/>
-              <a:defRPr sz="1800" kern="1200">
-                <a:solidFill>
-                  <a:schemeClr val="tx1"/>
-                </a:solidFill>
-                <a:latin typeface="+mn-lt"/>
-                <a:ea typeface="+mn-ea"/>
-                <a:cs typeface="+mn-cs"/>
-              </a:defRPr>
-            </a:lvl4pPr>
-            <a:lvl5pPr marL="2057400" indent="-228600" algn="l" defTabSz="914400" rtl="0" eaLnBrk="1" latinLnBrk="0" hangingPunct="1">
-              <a:lnSpc>
-                <a:spcPct val="90000"/>
-              </a:lnSpc>
-              <a:spcBef>
-                <a:spcPts val="500"/>
-              </a:spcBef>
-              <a:buFont typeface="Arial" panose="020B0604020202020204" pitchFamily="34" charset="0"/>
-              <a:buChar char="•"/>
-              <a:defRPr sz="1800" kern="1200">
-                <a:solidFill>
-                  <a:schemeClr val="tx1"/>
-                </a:solidFill>
-                <a:latin typeface="+mn-lt"/>
-                <a:ea typeface="+mn-ea"/>
-                <a:cs typeface="+mn-cs"/>
-              </a:defRPr>
-            </a:lvl5pPr>
-            <a:lvl6pPr marL="2514600" indent="-228600" algn="l" defTabSz="914400" rtl="0" eaLnBrk="1" latinLnBrk="0" hangingPunct="1">
-              <a:lnSpc>
-                <a:spcPct val="90000"/>
-              </a:lnSpc>
-              <a:spcBef>
-                <a:spcPts val="500"/>
-              </a:spcBef>
-              <a:buFont typeface="Arial" panose="020B0604020202020204" pitchFamily="34" charset="0"/>
-              <a:buChar char="•"/>
-              <a:defRPr sz="1800" kern="1200">
-                <a:solidFill>
-                  <a:schemeClr val="tx1"/>
-                </a:solidFill>
-                <a:latin typeface="+mn-lt"/>
-                <a:ea typeface="+mn-ea"/>
-                <a:cs typeface="+mn-cs"/>
-              </a:defRPr>
-            </a:lvl6pPr>
-            <a:lvl7pPr marL="2971800" indent="-228600" algn="l" defTabSz="914400" rtl="0" eaLnBrk="1" latinLnBrk="0" hangingPunct="1">
-              <a:lnSpc>
-                <a:spcPct val="90000"/>
-              </a:lnSpc>
-              <a:spcBef>
-                <a:spcPts val="500"/>
-              </a:spcBef>
-              <a:buFont typeface="Arial" panose="020B0604020202020204" pitchFamily="34" charset="0"/>
-              <a:buChar char="•"/>
-              <a:defRPr sz="1800" kern="1200">
-                <a:solidFill>
-                  <a:schemeClr val="tx1"/>
-                </a:solidFill>
-                <a:latin typeface="+mn-lt"/>
-                <a:ea typeface="+mn-ea"/>
-                <a:cs typeface="+mn-cs"/>
-              </a:defRPr>
-            </a:lvl7pPr>
-            <a:lvl8pPr marL="3429000" indent="-228600" algn="l" defTabSz="914400" rtl="0" eaLnBrk="1" latinLnBrk="0" hangingPunct="1">
-              <a:lnSpc>
-                <a:spcPct val="90000"/>
-              </a:lnSpc>
-              <a:spcBef>
-                <a:spcPts val="500"/>
-              </a:spcBef>
-              <a:buFont typeface="Arial" panose="020B0604020202020204" pitchFamily="34" charset="0"/>
-              <a:buChar char="•"/>
-              <a:defRPr sz="1800" kern="1200">
-                <a:solidFill>
-                  <a:schemeClr val="tx1"/>
-                </a:solidFill>
-                <a:latin typeface="+mn-lt"/>
-                <a:ea typeface="+mn-ea"/>
-                <a:cs typeface="+mn-cs"/>
-              </a:defRPr>
-            </a:lvl8pPr>
-            <a:lvl9pPr marL="3886200" indent="-228600" algn="l" defTabSz="914400" rtl="0" eaLnBrk="1" latinLnBrk="0" hangingPunct="1">
-              <a:lnSpc>
-                <a:spcPct val="90000"/>
-              </a:lnSpc>
-              <a:spcBef>
-                <a:spcPts val="500"/>
-              </a:spcBef>
-              <a:buFont typeface="Arial" panose="020B0604020202020204" pitchFamily="34" charset="0"/>
-              <a:buChar char="•"/>
-              <a:defRPr sz="1800" kern="1200">
-                <a:solidFill>
-                  <a:schemeClr val="tx1"/>
-                </a:solidFill>
-                <a:latin typeface="+mn-lt"/>
-                <a:ea typeface="+mn-ea"/>
-                <a:cs typeface="+mn-cs"/>
-              </a:defRPr>
-            </a:lvl9pPr>
-          </a:lstStyle>
-          <a:p>
-            <a:pPr marL="0" indent="0">
-              <a:buNone/>
-            </a:pPr>
-            <a:r>
-              <a:rPr lang="en-US" dirty="0">
-                <a:solidFill>
-                  <a:schemeClr val="bg2">
-                    <a:lumMod val="50000"/>
-                  </a:schemeClr>
-                </a:solidFill>
-              </a:rPr>
-              <a:t>Slides available at:</a:t>
-            </a:r>
-          </a:p>
-          <a:p>
-            <a:pPr marL="0" indent="0">
-              <a:buNone/>
-            </a:pPr>
-            <a:r>
-              <a:rPr lang="en-US" b="1" dirty="0" err="1">
-                <a:solidFill>
-                  <a:schemeClr val="bg2">
-                    <a:lumMod val="50000"/>
-                  </a:schemeClr>
-                </a:solidFill>
-              </a:rPr>
-              <a:t>docs.science.ai.cam.ac.uk</a:t>
-            </a:r>
-            <a:r>
-              <a:rPr lang="en-US" b="1" dirty="0">
-                <a:solidFill>
-                  <a:schemeClr val="bg2">
-                    <a:lumMod val="50000"/>
-                  </a:schemeClr>
-                </a:solidFill>
-              </a:rPr>
-              <a:t>/large-language-models/</a:t>
-            </a:r>
-          </a:p>
-        </p:txBody>
-      </p:sp>
     </p:spTree>
     <p:extLst>
       <p:ext uri="{BB962C8B-B14F-4D97-AF65-F5344CB8AC3E}">
@@ -11378,7 +10164,7 @@
           <p:nvPr/>
         </p:nvPicPr>
         <p:blipFill>
-          <a:blip r:embed="rId3"/>
+          <a:blip r:embed="rId2"/>
           <a:stretch>
             <a:fillRect/>
           </a:stretch>
@@ -11441,33 +10227,33 @@
           <a:custGeom>
             <a:avLst/>
             <a:gdLst>
-              <a:gd name="csX0" fmla="*/ 0 w 457200"/>
-              <a:gd name="csY0" fmla="*/ 228600 h 457200"/>
-              <a:gd name="csX1" fmla="*/ 228600 w 457200"/>
-              <a:gd name="csY1" fmla="*/ 0 h 457200"/>
-              <a:gd name="csX2" fmla="*/ 457200 w 457200"/>
-              <a:gd name="csY2" fmla="*/ 228600 h 457200"/>
-              <a:gd name="csX3" fmla="*/ 228600 w 457200"/>
-              <a:gd name="csY3" fmla="*/ 457200 h 457200"/>
-              <a:gd name="csX4" fmla="*/ 0 w 457200"/>
-              <a:gd name="csY4" fmla="*/ 228600 h 457200"/>
+              <a:gd name="connsiteX0" fmla="*/ 0 w 457200"/>
+              <a:gd name="connsiteY0" fmla="*/ 228600 h 457200"/>
+              <a:gd name="connsiteX1" fmla="*/ 228600 w 457200"/>
+              <a:gd name="connsiteY1" fmla="*/ 0 h 457200"/>
+              <a:gd name="connsiteX2" fmla="*/ 457200 w 457200"/>
+              <a:gd name="connsiteY2" fmla="*/ 228600 h 457200"/>
+              <a:gd name="connsiteX3" fmla="*/ 228600 w 457200"/>
+              <a:gd name="connsiteY3" fmla="*/ 457200 h 457200"/>
+              <a:gd name="connsiteX4" fmla="*/ 0 w 457200"/>
+              <a:gd name="connsiteY4" fmla="*/ 228600 h 457200"/>
             </a:gdLst>
             <a:ahLst/>
             <a:cxnLst>
               <a:cxn ang="0">
-                <a:pos x="csX0" y="csY0"/>
-              </a:cxn>
-              <a:cxn ang="0">
-                <a:pos x="csX1" y="csY1"/>
-              </a:cxn>
-              <a:cxn ang="0">
-                <a:pos x="csX2" y="csY2"/>
-              </a:cxn>
-              <a:cxn ang="0">
-                <a:pos x="csX3" y="csY3"/>
-              </a:cxn>
-              <a:cxn ang="0">
-                <a:pos x="csX4" y="csY4"/>
+                <a:pos x="connsiteX0" y="connsiteY0"/>
+              </a:cxn>
+              <a:cxn ang="0">
+                <a:pos x="connsiteX1" y="connsiteY1"/>
+              </a:cxn>
+              <a:cxn ang="0">
+                <a:pos x="connsiteX2" y="connsiteY2"/>
+              </a:cxn>
+              <a:cxn ang="0">
+                <a:pos x="connsiteX3" y="connsiteY3"/>
+              </a:cxn>
+              <a:cxn ang="0">
+                <a:pos x="connsiteX4" y="connsiteY4"/>
               </a:cxn>
             </a:cxnLst>
             <a:rect l="l" t="t" r="r" b="b"/>
@@ -11708,33 +10494,33 @@
           <a:custGeom>
             <a:avLst/>
             <a:gdLst>
-              <a:gd name="csX0" fmla="*/ 0 w 457200"/>
-              <a:gd name="csY0" fmla="*/ 228600 h 457200"/>
-              <a:gd name="csX1" fmla="*/ 228600 w 457200"/>
-              <a:gd name="csY1" fmla="*/ 0 h 457200"/>
-              <a:gd name="csX2" fmla="*/ 457200 w 457200"/>
-              <a:gd name="csY2" fmla="*/ 228600 h 457200"/>
-              <a:gd name="csX3" fmla="*/ 228600 w 457200"/>
-              <a:gd name="csY3" fmla="*/ 457200 h 457200"/>
-              <a:gd name="csX4" fmla="*/ 0 w 457200"/>
-              <a:gd name="csY4" fmla="*/ 228600 h 457200"/>
+              <a:gd name="connsiteX0" fmla="*/ 0 w 457200"/>
+              <a:gd name="connsiteY0" fmla="*/ 228600 h 457200"/>
+              <a:gd name="connsiteX1" fmla="*/ 228600 w 457200"/>
+              <a:gd name="connsiteY1" fmla="*/ 0 h 457200"/>
+              <a:gd name="connsiteX2" fmla="*/ 457200 w 457200"/>
+              <a:gd name="connsiteY2" fmla="*/ 228600 h 457200"/>
+              <a:gd name="connsiteX3" fmla="*/ 228600 w 457200"/>
+              <a:gd name="connsiteY3" fmla="*/ 457200 h 457200"/>
+              <a:gd name="connsiteX4" fmla="*/ 0 w 457200"/>
+              <a:gd name="connsiteY4" fmla="*/ 228600 h 457200"/>
             </a:gdLst>
             <a:ahLst/>
             <a:cxnLst>
               <a:cxn ang="0">
-                <a:pos x="csX0" y="csY0"/>
-              </a:cxn>
-              <a:cxn ang="0">
-                <a:pos x="csX1" y="csY1"/>
-              </a:cxn>
-              <a:cxn ang="0">
-                <a:pos x="csX2" y="csY2"/>
-              </a:cxn>
-              <a:cxn ang="0">
-                <a:pos x="csX3" y="csY3"/>
-              </a:cxn>
-              <a:cxn ang="0">
-                <a:pos x="csX4" y="csY4"/>
+                <a:pos x="connsiteX0" y="connsiteY0"/>
+              </a:cxn>
+              <a:cxn ang="0">
+                <a:pos x="connsiteX1" y="connsiteY1"/>
+              </a:cxn>
+              <a:cxn ang="0">
+                <a:pos x="connsiteX2" y="connsiteY2"/>
+              </a:cxn>
+              <a:cxn ang="0">
+                <a:pos x="connsiteX3" y="connsiteY3"/>
+              </a:cxn>
+              <a:cxn ang="0">
+                <a:pos x="connsiteX4" y="connsiteY4"/>
               </a:cxn>
             </a:cxnLst>
             <a:rect l="l" t="t" r="r" b="b"/>
@@ -11854,33 +10640,33 @@
           <a:custGeom>
             <a:avLst/>
             <a:gdLst>
-              <a:gd name="csX0" fmla="*/ 0 w 457200"/>
-              <a:gd name="csY0" fmla="*/ 228600 h 457200"/>
-              <a:gd name="csX1" fmla="*/ 228600 w 457200"/>
-              <a:gd name="csY1" fmla="*/ 0 h 457200"/>
-              <a:gd name="csX2" fmla="*/ 457200 w 457200"/>
-              <a:gd name="csY2" fmla="*/ 228600 h 457200"/>
-              <a:gd name="csX3" fmla="*/ 228600 w 457200"/>
-              <a:gd name="csY3" fmla="*/ 457200 h 457200"/>
-              <a:gd name="csX4" fmla="*/ 0 w 457200"/>
-              <a:gd name="csY4" fmla="*/ 228600 h 457200"/>
+              <a:gd name="connsiteX0" fmla="*/ 0 w 457200"/>
+              <a:gd name="connsiteY0" fmla="*/ 228600 h 457200"/>
+              <a:gd name="connsiteX1" fmla="*/ 228600 w 457200"/>
+              <a:gd name="connsiteY1" fmla="*/ 0 h 457200"/>
+              <a:gd name="connsiteX2" fmla="*/ 457200 w 457200"/>
+              <a:gd name="connsiteY2" fmla="*/ 228600 h 457200"/>
+              <a:gd name="connsiteX3" fmla="*/ 228600 w 457200"/>
+              <a:gd name="connsiteY3" fmla="*/ 457200 h 457200"/>
+              <a:gd name="connsiteX4" fmla="*/ 0 w 457200"/>
+              <a:gd name="connsiteY4" fmla="*/ 228600 h 457200"/>
             </a:gdLst>
             <a:ahLst/>
             <a:cxnLst>
               <a:cxn ang="0">
-                <a:pos x="csX0" y="csY0"/>
-              </a:cxn>
-              <a:cxn ang="0">
-                <a:pos x="csX1" y="csY1"/>
-              </a:cxn>
-              <a:cxn ang="0">
-                <a:pos x="csX2" y="csY2"/>
-              </a:cxn>
-              <a:cxn ang="0">
-                <a:pos x="csX3" y="csY3"/>
-              </a:cxn>
-              <a:cxn ang="0">
-                <a:pos x="csX4" y="csY4"/>
+                <a:pos x="connsiteX0" y="connsiteY0"/>
+              </a:cxn>
+              <a:cxn ang="0">
+                <a:pos x="connsiteX1" y="connsiteY1"/>
+              </a:cxn>
+              <a:cxn ang="0">
+                <a:pos x="connsiteX2" y="connsiteY2"/>
+              </a:cxn>
+              <a:cxn ang="0">
+                <a:pos x="connsiteX3" y="connsiteY3"/>
+              </a:cxn>
+              <a:cxn ang="0">
+                <a:pos x="connsiteX4" y="connsiteY4"/>
               </a:cxn>
             </a:cxnLst>
             <a:rect l="l" t="t" r="r" b="b"/>
@@ -12000,33 +10786,33 @@
           <a:custGeom>
             <a:avLst/>
             <a:gdLst>
-              <a:gd name="csX0" fmla="*/ 0 w 457200"/>
-              <a:gd name="csY0" fmla="*/ 228600 h 457200"/>
-              <a:gd name="csX1" fmla="*/ 228600 w 457200"/>
-              <a:gd name="csY1" fmla="*/ 0 h 457200"/>
-              <a:gd name="csX2" fmla="*/ 457200 w 457200"/>
-              <a:gd name="csY2" fmla="*/ 228600 h 457200"/>
-              <a:gd name="csX3" fmla="*/ 228600 w 457200"/>
-              <a:gd name="csY3" fmla="*/ 457200 h 457200"/>
-              <a:gd name="csX4" fmla="*/ 0 w 457200"/>
-              <a:gd name="csY4" fmla="*/ 228600 h 457200"/>
+              <a:gd name="connsiteX0" fmla="*/ 0 w 457200"/>
+              <a:gd name="connsiteY0" fmla="*/ 228600 h 457200"/>
+              <a:gd name="connsiteX1" fmla="*/ 228600 w 457200"/>
+              <a:gd name="connsiteY1" fmla="*/ 0 h 457200"/>
+              <a:gd name="connsiteX2" fmla="*/ 457200 w 457200"/>
+              <a:gd name="connsiteY2" fmla="*/ 228600 h 457200"/>
+              <a:gd name="connsiteX3" fmla="*/ 228600 w 457200"/>
+              <a:gd name="connsiteY3" fmla="*/ 457200 h 457200"/>
+              <a:gd name="connsiteX4" fmla="*/ 0 w 457200"/>
+              <a:gd name="connsiteY4" fmla="*/ 228600 h 457200"/>
             </a:gdLst>
             <a:ahLst/>
             <a:cxnLst>
               <a:cxn ang="0">
-                <a:pos x="csX0" y="csY0"/>
-              </a:cxn>
-              <a:cxn ang="0">
-                <a:pos x="csX1" y="csY1"/>
-              </a:cxn>
-              <a:cxn ang="0">
-                <a:pos x="csX2" y="csY2"/>
-              </a:cxn>
-              <a:cxn ang="0">
-                <a:pos x="csX3" y="csY3"/>
-              </a:cxn>
-              <a:cxn ang="0">
-                <a:pos x="csX4" y="csY4"/>
+                <a:pos x="connsiteX0" y="connsiteY0"/>
+              </a:cxn>
+              <a:cxn ang="0">
+                <a:pos x="connsiteX1" y="connsiteY1"/>
+              </a:cxn>
+              <a:cxn ang="0">
+                <a:pos x="connsiteX2" y="connsiteY2"/>
+              </a:cxn>
+              <a:cxn ang="0">
+                <a:pos x="connsiteX3" y="connsiteY3"/>
+              </a:cxn>
+              <a:cxn ang="0">
+                <a:pos x="connsiteX4" y="connsiteY4"/>
               </a:cxn>
             </a:cxnLst>
             <a:rect l="l" t="t" r="r" b="b"/>
@@ -12146,33 +10932,33 @@
           <a:custGeom>
             <a:avLst/>
             <a:gdLst>
-              <a:gd name="csX0" fmla="*/ 0 w 457200"/>
-              <a:gd name="csY0" fmla="*/ 228600 h 457200"/>
-              <a:gd name="csX1" fmla="*/ 228600 w 457200"/>
-              <a:gd name="csY1" fmla="*/ 0 h 457200"/>
-              <a:gd name="csX2" fmla="*/ 457200 w 457200"/>
-              <a:gd name="csY2" fmla="*/ 228600 h 457200"/>
-              <a:gd name="csX3" fmla="*/ 228600 w 457200"/>
-              <a:gd name="csY3" fmla="*/ 457200 h 457200"/>
-              <a:gd name="csX4" fmla="*/ 0 w 457200"/>
-              <a:gd name="csY4" fmla="*/ 228600 h 457200"/>
+              <a:gd name="connsiteX0" fmla="*/ 0 w 457200"/>
+              <a:gd name="connsiteY0" fmla="*/ 228600 h 457200"/>
+              <a:gd name="connsiteX1" fmla="*/ 228600 w 457200"/>
+              <a:gd name="connsiteY1" fmla="*/ 0 h 457200"/>
+              <a:gd name="connsiteX2" fmla="*/ 457200 w 457200"/>
+              <a:gd name="connsiteY2" fmla="*/ 228600 h 457200"/>
+              <a:gd name="connsiteX3" fmla="*/ 228600 w 457200"/>
+              <a:gd name="connsiteY3" fmla="*/ 457200 h 457200"/>
+              <a:gd name="connsiteX4" fmla="*/ 0 w 457200"/>
+              <a:gd name="connsiteY4" fmla="*/ 228600 h 457200"/>
             </a:gdLst>
             <a:ahLst/>
             <a:cxnLst>
               <a:cxn ang="0">
-                <a:pos x="csX0" y="csY0"/>
-              </a:cxn>
-              <a:cxn ang="0">
-                <a:pos x="csX1" y="csY1"/>
-              </a:cxn>
-              <a:cxn ang="0">
-                <a:pos x="csX2" y="csY2"/>
-              </a:cxn>
-              <a:cxn ang="0">
-                <a:pos x="csX3" y="csY3"/>
-              </a:cxn>
-              <a:cxn ang="0">
-                <a:pos x="csX4" y="csY4"/>
+                <a:pos x="connsiteX0" y="connsiteY0"/>
+              </a:cxn>
+              <a:cxn ang="0">
+                <a:pos x="connsiteX1" y="connsiteY1"/>
+              </a:cxn>
+              <a:cxn ang="0">
+                <a:pos x="connsiteX2" y="connsiteY2"/>
+              </a:cxn>
+              <a:cxn ang="0">
+                <a:pos x="connsiteX3" y="connsiteY3"/>
+              </a:cxn>
+              <a:cxn ang="0">
+                <a:pos x="connsiteX4" y="connsiteY4"/>
               </a:cxn>
             </a:cxnLst>
             <a:rect l="l" t="t" r="r" b="b"/>
@@ -12292,33 +11078,33 @@
           <a:custGeom>
             <a:avLst/>
             <a:gdLst>
-              <a:gd name="csX0" fmla="*/ 0 w 457200"/>
-              <a:gd name="csY0" fmla="*/ 228600 h 457200"/>
-              <a:gd name="csX1" fmla="*/ 228600 w 457200"/>
-              <a:gd name="csY1" fmla="*/ 0 h 457200"/>
-              <a:gd name="csX2" fmla="*/ 457200 w 457200"/>
-              <a:gd name="csY2" fmla="*/ 228600 h 457200"/>
-              <a:gd name="csX3" fmla="*/ 228600 w 457200"/>
-              <a:gd name="csY3" fmla="*/ 457200 h 457200"/>
-              <a:gd name="csX4" fmla="*/ 0 w 457200"/>
-              <a:gd name="csY4" fmla="*/ 228600 h 457200"/>
+              <a:gd name="connsiteX0" fmla="*/ 0 w 457200"/>
+              <a:gd name="connsiteY0" fmla="*/ 228600 h 457200"/>
+              <a:gd name="connsiteX1" fmla="*/ 228600 w 457200"/>
+              <a:gd name="connsiteY1" fmla="*/ 0 h 457200"/>
+              <a:gd name="connsiteX2" fmla="*/ 457200 w 457200"/>
+              <a:gd name="connsiteY2" fmla="*/ 228600 h 457200"/>
+              <a:gd name="connsiteX3" fmla="*/ 228600 w 457200"/>
+              <a:gd name="connsiteY3" fmla="*/ 457200 h 457200"/>
+              <a:gd name="connsiteX4" fmla="*/ 0 w 457200"/>
+              <a:gd name="connsiteY4" fmla="*/ 228600 h 457200"/>
             </a:gdLst>
             <a:ahLst/>
             <a:cxnLst>
               <a:cxn ang="0">
-                <a:pos x="csX0" y="csY0"/>
-              </a:cxn>
-              <a:cxn ang="0">
-                <a:pos x="csX1" y="csY1"/>
-              </a:cxn>
-              <a:cxn ang="0">
-                <a:pos x="csX2" y="csY2"/>
-              </a:cxn>
-              <a:cxn ang="0">
-                <a:pos x="csX3" y="csY3"/>
-              </a:cxn>
-              <a:cxn ang="0">
-                <a:pos x="csX4" y="csY4"/>
+                <a:pos x="connsiteX0" y="connsiteY0"/>
+              </a:cxn>
+              <a:cxn ang="0">
+                <a:pos x="connsiteX1" y="connsiteY1"/>
+              </a:cxn>
+              <a:cxn ang="0">
+                <a:pos x="connsiteX2" y="connsiteY2"/>
+              </a:cxn>
+              <a:cxn ang="0">
+                <a:pos x="connsiteX3" y="connsiteY3"/>
+              </a:cxn>
+              <a:cxn ang="0">
+                <a:pos x="connsiteX4" y="connsiteY4"/>
               </a:cxn>
             </a:cxnLst>
             <a:rect l="l" t="t" r="r" b="b"/>
@@ -12438,33 +11224,33 @@
           <a:custGeom>
             <a:avLst/>
             <a:gdLst>
-              <a:gd name="csX0" fmla="*/ 0 w 457200"/>
-              <a:gd name="csY0" fmla="*/ 228600 h 457200"/>
-              <a:gd name="csX1" fmla="*/ 228600 w 457200"/>
-              <a:gd name="csY1" fmla="*/ 0 h 457200"/>
-              <a:gd name="csX2" fmla="*/ 457200 w 457200"/>
-              <a:gd name="csY2" fmla="*/ 228600 h 457200"/>
-              <a:gd name="csX3" fmla="*/ 228600 w 457200"/>
-              <a:gd name="csY3" fmla="*/ 457200 h 457200"/>
-              <a:gd name="csX4" fmla="*/ 0 w 457200"/>
-              <a:gd name="csY4" fmla="*/ 228600 h 457200"/>
+              <a:gd name="connsiteX0" fmla="*/ 0 w 457200"/>
+              <a:gd name="connsiteY0" fmla="*/ 228600 h 457200"/>
+              <a:gd name="connsiteX1" fmla="*/ 228600 w 457200"/>
+              <a:gd name="connsiteY1" fmla="*/ 0 h 457200"/>
+              <a:gd name="connsiteX2" fmla="*/ 457200 w 457200"/>
+              <a:gd name="connsiteY2" fmla="*/ 228600 h 457200"/>
+              <a:gd name="connsiteX3" fmla="*/ 228600 w 457200"/>
+              <a:gd name="connsiteY3" fmla="*/ 457200 h 457200"/>
+              <a:gd name="connsiteX4" fmla="*/ 0 w 457200"/>
+              <a:gd name="connsiteY4" fmla="*/ 228600 h 457200"/>
             </a:gdLst>
             <a:ahLst/>
             <a:cxnLst>
               <a:cxn ang="0">
-                <a:pos x="csX0" y="csY0"/>
-              </a:cxn>
-              <a:cxn ang="0">
-                <a:pos x="csX1" y="csY1"/>
-              </a:cxn>
-              <a:cxn ang="0">
-                <a:pos x="csX2" y="csY2"/>
-              </a:cxn>
-              <a:cxn ang="0">
-                <a:pos x="csX3" y="csY3"/>
-              </a:cxn>
-              <a:cxn ang="0">
-                <a:pos x="csX4" y="csY4"/>
+                <a:pos x="connsiteX0" y="connsiteY0"/>
+              </a:cxn>
+              <a:cxn ang="0">
+                <a:pos x="connsiteX1" y="connsiteY1"/>
+              </a:cxn>
+              <a:cxn ang="0">
+                <a:pos x="connsiteX2" y="connsiteY2"/>
+              </a:cxn>
+              <a:cxn ang="0">
+                <a:pos x="connsiteX3" y="connsiteY3"/>
+              </a:cxn>
+              <a:cxn ang="0">
+                <a:pos x="connsiteX4" y="connsiteY4"/>
               </a:cxn>
             </a:cxnLst>
             <a:rect l="l" t="t" r="r" b="b"/>
@@ -12584,33 +11370,33 @@
           <a:custGeom>
             <a:avLst/>
             <a:gdLst>
-              <a:gd name="csX0" fmla="*/ 0 w 457200"/>
-              <a:gd name="csY0" fmla="*/ 228600 h 457200"/>
-              <a:gd name="csX1" fmla="*/ 228600 w 457200"/>
-              <a:gd name="csY1" fmla="*/ 0 h 457200"/>
-              <a:gd name="csX2" fmla="*/ 457200 w 457200"/>
-              <a:gd name="csY2" fmla="*/ 228600 h 457200"/>
-              <a:gd name="csX3" fmla="*/ 228600 w 457200"/>
-              <a:gd name="csY3" fmla="*/ 457200 h 457200"/>
-              <a:gd name="csX4" fmla="*/ 0 w 457200"/>
-              <a:gd name="csY4" fmla="*/ 228600 h 457200"/>
+              <a:gd name="connsiteX0" fmla="*/ 0 w 457200"/>
+              <a:gd name="connsiteY0" fmla="*/ 228600 h 457200"/>
+              <a:gd name="connsiteX1" fmla="*/ 228600 w 457200"/>
+              <a:gd name="connsiteY1" fmla="*/ 0 h 457200"/>
+              <a:gd name="connsiteX2" fmla="*/ 457200 w 457200"/>
+              <a:gd name="connsiteY2" fmla="*/ 228600 h 457200"/>
+              <a:gd name="connsiteX3" fmla="*/ 228600 w 457200"/>
+              <a:gd name="connsiteY3" fmla="*/ 457200 h 457200"/>
+              <a:gd name="connsiteX4" fmla="*/ 0 w 457200"/>
+              <a:gd name="connsiteY4" fmla="*/ 228600 h 457200"/>
             </a:gdLst>
             <a:ahLst/>
             <a:cxnLst>
               <a:cxn ang="0">
-                <a:pos x="csX0" y="csY0"/>
-              </a:cxn>
-              <a:cxn ang="0">
-                <a:pos x="csX1" y="csY1"/>
-              </a:cxn>
-              <a:cxn ang="0">
-                <a:pos x="csX2" y="csY2"/>
-              </a:cxn>
-              <a:cxn ang="0">
-                <a:pos x="csX3" y="csY3"/>
-              </a:cxn>
-              <a:cxn ang="0">
-                <a:pos x="csX4" y="csY4"/>
+                <a:pos x="connsiteX0" y="connsiteY0"/>
+              </a:cxn>
+              <a:cxn ang="0">
+                <a:pos x="connsiteX1" y="connsiteY1"/>
+              </a:cxn>
+              <a:cxn ang="0">
+                <a:pos x="connsiteX2" y="connsiteY2"/>
+              </a:cxn>
+              <a:cxn ang="0">
+                <a:pos x="connsiteX3" y="connsiteY3"/>
+              </a:cxn>
+              <a:cxn ang="0">
+                <a:pos x="connsiteX4" y="connsiteY4"/>
               </a:cxn>
             </a:cxnLst>
             <a:rect l="l" t="t" r="r" b="b"/>
@@ -12730,63 +11516,63 @@
           <a:custGeom>
             <a:avLst/>
             <a:gdLst>
-              <a:gd name="csX0" fmla="*/ 0 w 2333625"/>
-              <a:gd name="csY0" fmla="*/ 0 h 369332"/>
-              <a:gd name="csX1" fmla="*/ 583406 w 2333625"/>
-              <a:gd name="csY1" fmla="*/ 0 h 369332"/>
-              <a:gd name="csX2" fmla="*/ 1213485 w 2333625"/>
-              <a:gd name="csY2" fmla="*/ 0 h 369332"/>
-              <a:gd name="csX3" fmla="*/ 1773555 w 2333625"/>
-              <a:gd name="csY3" fmla="*/ 0 h 369332"/>
-              <a:gd name="csX4" fmla="*/ 2333625 w 2333625"/>
-              <a:gd name="csY4" fmla="*/ 0 h 369332"/>
-              <a:gd name="csX5" fmla="*/ 2333625 w 2333625"/>
-              <a:gd name="csY5" fmla="*/ 369332 h 369332"/>
-              <a:gd name="csX6" fmla="*/ 1703546 w 2333625"/>
-              <a:gd name="csY6" fmla="*/ 369332 h 369332"/>
-              <a:gd name="csX7" fmla="*/ 1143476 w 2333625"/>
-              <a:gd name="csY7" fmla="*/ 369332 h 369332"/>
-              <a:gd name="csX8" fmla="*/ 583406 w 2333625"/>
-              <a:gd name="csY8" fmla="*/ 369332 h 369332"/>
-              <a:gd name="csX9" fmla="*/ 0 w 2333625"/>
-              <a:gd name="csY9" fmla="*/ 369332 h 369332"/>
-              <a:gd name="csX10" fmla="*/ 0 w 2333625"/>
-              <a:gd name="csY10" fmla="*/ 0 h 369332"/>
+              <a:gd name="connsiteX0" fmla="*/ 0 w 2333625"/>
+              <a:gd name="connsiteY0" fmla="*/ 0 h 369332"/>
+              <a:gd name="connsiteX1" fmla="*/ 583406 w 2333625"/>
+              <a:gd name="connsiteY1" fmla="*/ 0 h 369332"/>
+              <a:gd name="connsiteX2" fmla="*/ 1213485 w 2333625"/>
+              <a:gd name="connsiteY2" fmla="*/ 0 h 369332"/>
+              <a:gd name="connsiteX3" fmla="*/ 1773555 w 2333625"/>
+              <a:gd name="connsiteY3" fmla="*/ 0 h 369332"/>
+              <a:gd name="connsiteX4" fmla="*/ 2333625 w 2333625"/>
+              <a:gd name="connsiteY4" fmla="*/ 0 h 369332"/>
+              <a:gd name="connsiteX5" fmla="*/ 2333625 w 2333625"/>
+              <a:gd name="connsiteY5" fmla="*/ 369332 h 369332"/>
+              <a:gd name="connsiteX6" fmla="*/ 1703546 w 2333625"/>
+              <a:gd name="connsiteY6" fmla="*/ 369332 h 369332"/>
+              <a:gd name="connsiteX7" fmla="*/ 1143476 w 2333625"/>
+              <a:gd name="connsiteY7" fmla="*/ 369332 h 369332"/>
+              <a:gd name="connsiteX8" fmla="*/ 583406 w 2333625"/>
+              <a:gd name="connsiteY8" fmla="*/ 369332 h 369332"/>
+              <a:gd name="connsiteX9" fmla="*/ 0 w 2333625"/>
+              <a:gd name="connsiteY9" fmla="*/ 369332 h 369332"/>
+              <a:gd name="connsiteX10" fmla="*/ 0 w 2333625"/>
+              <a:gd name="connsiteY10" fmla="*/ 0 h 369332"/>
             </a:gdLst>
             <a:ahLst/>
             <a:cxnLst>
               <a:cxn ang="0">
-                <a:pos x="csX0" y="csY0"/>
-              </a:cxn>
-              <a:cxn ang="0">
-                <a:pos x="csX1" y="csY1"/>
-              </a:cxn>
-              <a:cxn ang="0">
-                <a:pos x="csX2" y="csY2"/>
-              </a:cxn>
-              <a:cxn ang="0">
-                <a:pos x="csX3" y="csY3"/>
-              </a:cxn>
-              <a:cxn ang="0">
-                <a:pos x="csX4" y="csY4"/>
-              </a:cxn>
-              <a:cxn ang="0">
-                <a:pos x="csX5" y="csY5"/>
-              </a:cxn>
-              <a:cxn ang="0">
-                <a:pos x="csX6" y="csY6"/>
-              </a:cxn>
-              <a:cxn ang="0">
-                <a:pos x="csX7" y="csY7"/>
-              </a:cxn>
-              <a:cxn ang="0">
-                <a:pos x="csX8" y="csY8"/>
-              </a:cxn>
-              <a:cxn ang="0">
-                <a:pos x="csX9" y="csY9"/>
-              </a:cxn>
-              <a:cxn ang="0">
-                <a:pos x="csX10" y="csY10"/>
+                <a:pos x="connsiteX0" y="connsiteY0"/>
+              </a:cxn>
+              <a:cxn ang="0">
+                <a:pos x="connsiteX1" y="connsiteY1"/>
+              </a:cxn>
+              <a:cxn ang="0">
+                <a:pos x="connsiteX2" y="connsiteY2"/>
+              </a:cxn>
+              <a:cxn ang="0">
+                <a:pos x="connsiteX3" y="connsiteY3"/>
+              </a:cxn>
+              <a:cxn ang="0">
+                <a:pos x="connsiteX4" y="connsiteY4"/>
+              </a:cxn>
+              <a:cxn ang="0">
+                <a:pos x="connsiteX5" y="connsiteY5"/>
+              </a:cxn>
+              <a:cxn ang="0">
+                <a:pos x="connsiteX6" y="connsiteY6"/>
+              </a:cxn>
+              <a:cxn ang="0">
+                <a:pos x="connsiteX7" y="connsiteY7"/>
+              </a:cxn>
+              <a:cxn ang="0">
+                <a:pos x="connsiteX8" y="connsiteY8"/>
+              </a:cxn>
+              <a:cxn ang="0">
+                <a:pos x="connsiteX9" y="connsiteY9"/>
+              </a:cxn>
+              <a:cxn ang="0">
+                <a:pos x="connsiteX10" y="connsiteY10"/>
               </a:cxn>
             </a:cxnLst>
             <a:rect l="l" t="t" r="r" b="b"/>
@@ -12971,63 +11757,63 @@
           <a:custGeom>
             <a:avLst/>
             <a:gdLst>
-              <a:gd name="csX0" fmla="*/ 0 w 2333625"/>
-              <a:gd name="csY0" fmla="*/ 0 h 369332"/>
-              <a:gd name="csX1" fmla="*/ 583406 w 2333625"/>
-              <a:gd name="csY1" fmla="*/ 0 h 369332"/>
-              <a:gd name="csX2" fmla="*/ 1213485 w 2333625"/>
-              <a:gd name="csY2" fmla="*/ 0 h 369332"/>
-              <a:gd name="csX3" fmla="*/ 1773555 w 2333625"/>
-              <a:gd name="csY3" fmla="*/ 0 h 369332"/>
-              <a:gd name="csX4" fmla="*/ 2333625 w 2333625"/>
-              <a:gd name="csY4" fmla="*/ 0 h 369332"/>
-              <a:gd name="csX5" fmla="*/ 2333625 w 2333625"/>
-              <a:gd name="csY5" fmla="*/ 369332 h 369332"/>
-              <a:gd name="csX6" fmla="*/ 1703546 w 2333625"/>
-              <a:gd name="csY6" fmla="*/ 369332 h 369332"/>
-              <a:gd name="csX7" fmla="*/ 1143476 w 2333625"/>
-              <a:gd name="csY7" fmla="*/ 369332 h 369332"/>
-              <a:gd name="csX8" fmla="*/ 583406 w 2333625"/>
-              <a:gd name="csY8" fmla="*/ 369332 h 369332"/>
-              <a:gd name="csX9" fmla="*/ 0 w 2333625"/>
-              <a:gd name="csY9" fmla="*/ 369332 h 369332"/>
-              <a:gd name="csX10" fmla="*/ 0 w 2333625"/>
-              <a:gd name="csY10" fmla="*/ 0 h 369332"/>
+              <a:gd name="connsiteX0" fmla="*/ 0 w 2333625"/>
+              <a:gd name="connsiteY0" fmla="*/ 0 h 369332"/>
+              <a:gd name="connsiteX1" fmla="*/ 583406 w 2333625"/>
+              <a:gd name="connsiteY1" fmla="*/ 0 h 369332"/>
+              <a:gd name="connsiteX2" fmla="*/ 1213485 w 2333625"/>
+              <a:gd name="connsiteY2" fmla="*/ 0 h 369332"/>
+              <a:gd name="connsiteX3" fmla="*/ 1773555 w 2333625"/>
+              <a:gd name="connsiteY3" fmla="*/ 0 h 369332"/>
+              <a:gd name="connsiteX4" fmla="*/ 2333625 w 2333625"/>
+              <a:gd name="connsiteY4" fmla="*/ 0 h 369332"/>
+              <a:gd name="connsiteX5" fmla="*/ 2333625 w 2333625"/>
+              <a:gd name="connsiteY5" fmla="*/ 369332 h 369332"/>
+              <a:gd name="connsiteX6" fmla="*/ 1703546 w 2333625"/>
+              <a:gd name="connsiteY6" fmla="*/ 369332 h 369332"/>
+              <a:gd name="connsiteX7" fmla="*/ 1143476 w 2333625"/>
+              <a:gd name="connsiteY7" fmla="*/ 369332 h 369332"/>
+              <a:gd name="connsiteX8" fmla="*/ 583406 w 2333625"/>
+              <a:gd name="connsiteY8" fmla="*/ 369332 h 369332"/>
+              <a:gd name="connsiteX9" fmla="*/ 0 w 2333625"/>
+              <a:gd name="connsiteY9" fmla="*/ 369332 h 369332"/>
+              <a:gd name="connsiteX10" fmla="*/ 0 w 2333625"/>
+              <a:gd name="connsiteY10" fmla="*/ 0 h 369332"/>
             </a:gdLst>
             <a:ahLst/>
             <a:cxnLst>
               <a:cxn ang="0">
-                <a:pos x="csX0" y="csY0"/>
-              </a:cxn>
-              <a:cxn ang="0">
-                <a:pos x="csX1" y="csY1"/>
-              </a:cxn>
-              <a:cxn ang="0">
-                <a:pos x="csX2" y="csY2"/>
-              </a:cxn>
-              <a:cxn ang="0">
-                <a:pos x="csX3" y="csY3"/>
-              </a:cxn>
-              <a:cxn ang="0">
-                <a:pos x="csX4" y="csY4"/>
-              </a:cxn>
-              <a:cxn ang="0">
-                <a:pos x="csX5" y="csY5"/>
-              </a:cxn>
-              <a:cxn ang="0">
-                <a:pos x="csX6" y="csY6"/>
-              </a:cxn>
-              <a:cxn ang="0">
-                <a:pos x="csX7" y="csY7"/>
-              </a:cxn>
-              <a:cxn ang="0">
-                <a:pos x="csX8" y="csY8"/>
-              </a:cxn>
-              <a:cxn ang="0">
-                <a:pos x="csX9" y="csY9"/>
-              </a:cxn>
-              <a:cxn ang="0">
-                <a:pos x="csX10" y="csY10"/>
+                <a:pos x="connsiteX0" y="connsiteY0"/>
+              </a:cxn>
+              <a:cxn ang="0">
+                <a:pos x="connsiteX1" y="connsiteY1"/>
+              </a:cxn>
+              <a:cxn ang="0">
+                <a:pos x="connsiteX2" y="connsiteY2"/>
+              </a:cxn>
+              <a:cxn ang="0">
+                <a:pos x="connsiteX3" y="connsiteY3"/>
+              </a:cxn>
+              <a:cxn ang="0">
+                <a:pos x="connsiteX4" y="connsiteY4"/>
+              </a:cxn>
+              <a:cxn ang="0">
+                <a:pos x="connsiteX5" y="connsiteY5"/>
+              </a:cxn>
+              <a:cxn ang="0">
+                <a:pos x="connsiteX6" y="connsiteY6"/>
+              </a:cxn>
+              <a:cxn ang="0">
+                <a:pos x="connsiteX7" y="connsiteY7"/>
+              </a:cxn>
+              <a:cxn ang="0">
+                <a:pos x="connsiteX8" y="connsiteY8"/>
+              </a:cxn>
+              <a:cxn ang="0">
+                <a:pos x="connsiteX9" y="connsiteY9"/>
+              </a:cxn>
+              <a:cxn ang="0">
+                <a:pos x="connsiteX10" y="connsiteY10"/>
               </a:cxn>
             </a:cxnLst>
             <a:rect l="l" t="t" r="r" b="b"/>
@@ -13212,63 +11998,63 @@
           <a:custGeom>
             <a:avLst/>
             <a:gdLst>
-              <a:gd name="csX0" fmla="*/ 0 w 2333625"/>
-              <a:gd name="csY0" fmla="*/ 0 h 369332"/>
-              <a:gd name="csX1" fmla="*/ 583406 w 2333625"/>
-              <a:gd name="csY1" fmla="*/ 0 h 369332"/>
-              <a:gd name="csX2" fmla="*/ 1213485 w 2333625"/>
-              <a:gd name="csY2" fmla="*/ 0 h 369332"/>
-              <a:gd name="csX3" fmla="*/ 1773555 w 2333625"/>
-              <a:gd name="csY3" fmla="*/ 0 h 369332"/>
-              <a:gd name="csX4" fmla="*/ 2333625 w 2333625"/>
-              <a:gd name="csY4" fmla="*/ 0 h 369332"/>
-              <a:gd name="csX5" fmla="*/ 2333625 w 2333625"/>
-              <a:gd name="csY5" fmla="*/ 369332 h 369332"/>
-              <a:gd name="csX6" fmla="*/ 1703546 w 2333625"/>
-              <a:gd name="csY6" fmla="*/ 369332 h 369332"/>
-              <a:gd name="csX7" fmla="*/ 1143476 w 2333625"/>
-              <a:gd name="csY7" fmla="*/ 369332 h 369332"/>
-              <a:gd name="csX8" fmla="*/ 583406 w 2333625"/>
-              <a:gd name="csY8" fmla="*/ 369332 h 369332"/>
-              <a:gd name="csX9" fmla="*/ 0 w 2333625"/>
-              <a:gd name="csY9" fmla="*/ 369332 h 369332"/>
-              <a:gd name="csX10" fmla="*/ 0 w 2333625"/>
-              <a:gd name="csY10" fmla="*/ 0 h 369332"/>
+              <a:gd name="connsiteX0" fmla="*/ 0 w 2333625"/>
+              <a:gd name="connsiteY0" fmla="*/ 0 h 369332"/>
+              <a:gd name="connsiteX1" fmla="*/ 583406 w 2333625"/>
+              <a:gd name="connsiteY1" fmla="*/ 0 h 369332"/>
+              <a:gd name="connsiteX2" fmla="*/ 1213485 w 2333625"/>
+              <a:gd name="connsiteY2" fmla="*/ 0 h 369332"/>
+              <a:gd name="connsiteX3" fmla="*/ 1773555 w 2333625"/>
+              <a:gd name="connsiteY3" fmla="*/ 0 h 369332"/>
+              <a:gd name="connsiteX4" fmla="*/ 2333625 w 2333625"/>
+              <a:gd name="connsiteY4" fmla="*/ 0 h 369332"/>
+              <a:gd name="connsiteX5" fmla="*/ 2333625 w 2333625"/>
+              <a:gd name="connsiteY5" fmla="*/ 369332 h 369332"/>
+              <a:gd name="connsiteX6" fmla="*/ 1703546 w 2333625"/>
+              <a:gd name="connsiteY6" fmla="*/ 369332 h 369332"/>
+              <a:gd name="connsiteX7" fmla="*/ 1143476 w 2333625"/>
+              <a:gd name="connsiteY7" fmla="*/ 369332 h 369332"/>
+              <a:gd name="connsiteX8" fmla="*/ 583406 w 2333625"/>
+              <a:gd name="connsiteY8" fmla="*/ 369332 h 369332"/>
+              <a:gd name="connsiteX9" fmla="*/ 0 w 2333625"/>
+              <a:gd name="connsiteY9" fmla="*/ 369332 h 369332"/>
+              <a:gd name="connsiteX10" fmla="*/ 0 w 2333625"/>
+              <a:gd name="connsiteY10" fmla="*/ 0 h 369332"/>
             </a:gdLst>
             <a:ahLst/>
             <a:cxnLst>
               <a:cxn ang="0">
-                <a:pos x="csX0" y="csY0"/>
-              </a:cxn>
-              <a:cxn ang="0">
-                <a:pos x="csX1" y="csY1"/>
-              </a:cxn>
-              <a:cxn ang="0">
-                <a:pos x="csX2" y="csY2"/>
-              </a:cxn>
-              <a:cxn ang="0">
-                <a:pos x="csX3" y="csY3"/>
-              </a:cxn>
-              <a:cxn ang="0">
-                <a:pos x="csX4" y="csY4"/>
-              </a:cxn>
-              <a:cxn ang="0">
-                <a:pos x="csX5" y="csY5"/>
-              </a:cxn>
-              <a:cxn ang="0">
-                <a:pos x="csX6" y="csY6"/>
-              </a:cxn>
-              <a:cxn ang="0">
-                <a:pos x="csX7" y="csY7"/>
-              </a:cxn>
-              <a:cxn ang="0">
-                <a:pos x="csX8" y="csY8"/>
-              </a:cxn>
-              <a:cxn ang="0">
-                <a:pos x="csX9" y="csY9"/>
-              </a:cxn>
-              <a:cxn ang="0">
-                <a:pos x="csX10" y="csY10"/>
+                <a:pos x="connsiteX0" y="connsiteY0"/>
+              </a:cxn>
+              <a:cxn ang="0">
+                <a:pos x="connsiteX1" y="connsiteY1"/>
+              </a:cxn>
+              <a:cxn ang="0">
+                <a:pos x="connsiteX2" y="connsiteY2"/>
+              </a:cxn>
+              <a:cxn ang="0">
+                <a:pos x="connsiteX3" y="connsiteY3"/>
+              </a:cxn>
+              <a:cxn ang="0">
+                <a:pos x="connsiteX4" y="connsiteY4"/>
+              </a:cxn>
+              <a:cxn ang="0">
+                <a:pos x="connsiteX5" y="connsiteY5"/>
+              </a:cxn>
+              <a:cxn ang="0">
+                <a:pos x="connsiteX6" y="connsiteY6"/>
+              </a:cxn>
+              <a:cxn ang="0">
+                <a:pos x="connsiteX7" y="connsiteY7"/>
+              </a:cxn>
+              <a:cxn ang="0">
+                <a:pos x="connsiteX8" y="connsiteY8"/>
+              </a:cxn>
+              <a:cxn ang="0">
+                <a:pos x="connsiteX9" y="connsiteY9"/>
+              </a:cxn>
+              <a:cxn ang="0">
+                <a:pos x="connsiteX10" y="connsiteY10"/>
               </a:cxn>
             </a:cxnLst>
             <a:rect l="l" t="t" r="r" b="b"/>
@@ -13453,63 +12239,63 @@
           <a:custGeom>
             <a:avLst/>
             <a:gdLst>
-              <a:gd name="csX0" fmla="*/ 0 w 2333625"/>
-              <a:gd name="csY0" fmla="*/ 0 h 369332"/>
-              <a:gd name="csX1" fmla="*/ 583406 w 2333625"/>
-              <a:gd name="csY1" fmla="*/ 0 h 369332"/>
-              <a:gd name="csX2" fmla="*/ 1213485 w 2333625"/>
-              <a:gd name="csY2" fmla="*/ 0 h 369332"/>
-              <a:gd name="csX3" fmla="*/ 1773555 w 2333625"/>
-              <a:gd name="csY3" fmla="*/ 0 h 369332"/>
-              <a:gd name="csX4" fmla="*/ 2333625 w 2333625"/>
-              <a:gd name="csY4" fmla="*/ 0 h 369332"/>
-              <a:gd name="csX5" fmla="*/ 2333625 w 2333625"/>
-              <a:gd name="csY5" fmla="*/ 369332 h 369332"/>
-              <a:gd name="csX6" fmla="*/ 1703546 w 2333625"/>
-              <a:gd name="csY6" fmla="*/ 369332 h 369332"/>
-              <a:gd name="csX7" fmla="*/ 1143476 w 2333625"/>
-              <a:gd name="csY7" fmla="*/ 369332 h 369332"/>
-              <a:gd name="csX8" fmla="*/ 583406 w 2333625"/>
-              <a:gd name="csY8" fmla="*/ 369332 h 369332"/>
-              <a:gd name="csX9" fmla="*/ 0 w 2333625"/>
-              <a:gd name="csY9" fmla="*/ 369332 h 369332"/>
-              <a:gd name="csX10" fmla="*/ 0 w 2333625"/>
-              <a:gd name="csY10" fmla="*/ 0 h 369332"/>
+              <a:gd name="connsiteX0" fmla="*/ 0 w 2333625"/>
+              <a:gd name="connsiteY0" fmla="*/ 0 h 369332"/>
+              <a:gd name="connsiteX1" fmla="*/ 583406 w 2333625"/>
+              <a:gd name="connsiteY1" fmla="*/ 0 h 369332"/>
+              <a:gd name="connsiteX2" fmla="*/ 1213485 w 2333625"/>
+              <a:gd name="connsiteY2" fmla="*/ 0 h 369332"/>
+              <a:gd name="connsiteX3" fmla="*/ 1773555 w 2333625"/>
+              <a:gd name="connsiteY3" fmla="*/ 0 h 369332"/>
+              <a:gd name="connsiteX4" fmla="*/ 2333625 w 2333625"/>
+              <a:gd name="connsiteY4" fmla="*/ 0 h 369332"/>
+              <a:gd name="connsiteX5" fmla="*/ 2333625 w 2333625"/>
+              <a:gd name="connsiteY5" fmla="*/ 369332 h 369332"/>
+              <a:gd name="connsiteX6" fmla="*/ 1703546 w 2333625"/>
+              <a:gd name="connsiteY6" fmla="*/ 369332 h 369332"/>
+              <a:gd name="connsiteX7" fmla="*/ 1143476 w 2333625"/>
+              <a:gd name="connsiteY7" fmla="*/ 369332 h 369332"/>
+              <a:gd name="connsiteX8" fmla="*/ 583406 w 2333625"/>
+              <a:gd name="connsiteY8" fmla="*/ 369332 h 369332"/>
+              <a:gd name="connsiteX9" fmla="*/ 0 w 2333625"/>
+              <a:gd name="connsiteY9" fmla="*/ 369332 h 369332"/>
+              <a:gd name="connsiteX10" fmla="*/ 0 w 2333625"/>
+              <a:gd name="connsiteY10" fmla="*/ 0 h 369332"/>
             </a:gdLst>
             <a:ahLst/>
             <a:cxnLst>
               <a:cxn ang="0">
-                <a:pos x="csX0" y="csY0"/>
-              </a:cxn>
-              <a:cxn ang="0">
-                <a:pos x="csX1" y="csY1"/>
-              </a:cxn>
-              <a:cxn ang="0">
-                <a:pos x="csX2" y="csY2"/>
-              </a:cxn>
-              <a:cxn ang="0">
-                <a:pos x="csX3" y="csY3"/>
-              </a:cxn>
-              <a:cxn ang="0">
-                <a:pos x="csX4" y="csY4"/>
-              </a:cxn>
-              <a:cxn ang="0">
-                <a:pos x="csX5" y="csY5"/>
-              </a:cxn>
-              <a:cxn ang="0">
-                <a:pos x="csX6" y="csY6"/>
-              </a:cxn>
-              <a:cxn ang="0">
-                <a:pos x="csX7" y="csY7"/>
-              </a:cxn>
-              <a:cxn ang="0">
-                <a:pos x="csX8" y="csY8"/>
-              </a:cxn>
-              <a:cxn ang="0">
-                <a:pos x="csX9" y="csY9"/>
-              </a:cxn>
-              <a:cxn ang="0">
-                <a:pos x="csX10" y="csY10"/>
+                <a:pos x="connsiteX0" y="connsiteY0"/>
+              </a:cxn>
+              <a:cxn ang="0">
+                <a:pos x="connsiteX1" y="connsiteY1"/>
+              </a:cxn>
+              <a:cxn ang="0">
+                <a:pos x="connsiteX2" y="connsiteY2"/>
+              </a:cxn>
+              <a:cxn ang="0">
+                <a:pos x="connsiteX3" y="connsiteY3"/>
+              </a:cxn>
+              <a:cxn ang="0">
+                <a:pos x="connsiteX4" y="connsiteY4"/>
+              </a:cxn>
+              <a:cxn ang="0">
+                <a:pos x="connsiteX5" y="connsiteY5"/>
+              </a:cxn>
+              <a:cxn ang="0">
+                <a:pos x="connsiteX6" y="connsiteY6"/>
+              </a:cxn>
+              <a:cxn ang="0">
+                <a:pos x="connsiteX7" y="connsiteY7"/>
+              </a:cxn>
+              <a:cxn ang="0">
+                <a:pos x="connsiteX8" y="connsiteY8"/>
+              </a:cxn>
+              <a:cxn ang="0">
+                <a:pos x="connsiteX9" y="connsiteY9"/>
+              </a:cxn>
+              <a:cxn ang="0">
+                <a:pos x="connsiteX10" y="connsiteY10"/>
               </a:cxn>
             </a:cxnLst>
             <a:rect l="l" t="t" r="r" b="b"/>
@@ -14240,11 +13026,11 @@
           <p:nvPr/>
         </p:nvPicPr>
         <p:blipFill>
-          <a:blip r:embed="rId3">
+          <a:blip r:embed="rId2">
             <a:extLst>
               <a:ext uri="{BEBA8EAE-BF5A-486C-A8C5-ECC9F3942E4B}">
                 <a14:imgProps xmlns:a14="http://schemas.microsoft.com/office/drawing/2010/main">
-                  <a14:imgLayer r:embed="rId4">
+                  <a14:imgLayer r:embed="rId3">
                     <a14:imgEffect>
                       <a14:backgroundRemoval t="10000" b="90000" l="10000" r="90000"/>
                     </a14:imgEffect>
@@ -14730,7 +13516,7 @@
           <p:cNvPr id="2" name="Title 1">
             <a:extLst>
               <a:ext uri="{FF2B5EF4-FFF2-40B4-BE49-F238E27FC236}">
-                <a16:creationId xmlns:a16="http://schemas.microsoft.com/office/drawing/2014/main" id="{96041BF3-F107-F9B0-5EDB-4373BB4196B4}"/>
+                <a16:creationId xmlns:a16="http://schemas.microsoft.com/office/drawing/2014/main" id="{2622F7F8-D800-192B-AA88-485BF564DAB3}"/>
               </a:ext>
             </a:extLst>
           </p:cNvPr>
@@ -14748,7 +13534,7 @@
           <a:p>
             <a:r>
               <a:rPr lang="en-US" dirty="0"/>
-              <a:t>Some definitions</a:t>
+              <a:t>A comparison with humans</a:t>
             </a:r>
           </a:p>
         </p:txBody>
@@ -14758,7 +13544,7 @@
           <p:cNvPr id="3" name="Content Placeholder 2">
             <a:extLst>
               <a:ext uri="{FF2B5EF4-FFF2-40B4-BE49-F238E27FC236}">
-                <a16:creationId xmlns:a16="http://schemas.microsoft.com/office/drawing/2014/main" id="{BACC3A7C-33D4-2896-0AC9-9DA08F6ED357}"/>
+                <a16:creationId xmlns:a16="http://schemas.microsoft.com/office/drawing/2014/main" id="{39D4A751-4A71-6574-70A1-136794DB1F1C}"/>
               </a:ext>
             </a:extLst>
           </p:cNvPr>
@@ -14769,15 +13555,10 @@
             <p:ph idx="1"/>
           </p:nvPr>
         </p:nvSpPr>
-        <p:spPr>
-          <a:xfrm>
-            <a:off x="838200" y="1825624"/>
-            <a:ext cx="10900410" cy="5032375"/>
-          </a:xfrm>
-        </p:spPr>
+        <p:spPr/>
         <p:txBody>
           <a:bodyPr vert="horz" lIns="91440" tIns="45720" rIns="91440" bIns="45720" rtlCol="0" anchor="t">
-            <a:normAutofit fontScale="70000" lnSpcReduction="20000"/>
+            <a:normAutofit/>
           </a:bodyPr>
           <a:lstStyle/>
           <a:p>
@@ -14785,322 +13566,184 @@
               <a:buNone/>
             </a:pPr>
             <a:r>
-              <a:rPr lang="en-US" b="1" dirty="0">
+              <a:rPr lang="en-US" dirty="0"/>
+              <a:t>Is it reasonable to say that a large language model cannot do some cognitive tasks?</a:t>
+            </a:r>
+          </a:p>
+          <a:p>
+            <a:pPr marL="0" indent="0">
+              <a:buNone/>
+            </a:pPr>
+            <a:endParaRPr lang="en-US" dirty="0"/>
+          </a:p>
+          <a:p>
+            <a:pPr marL="0" indent="0">
+              <a:buNone/>
+            </a:pPr>
+            <a:r>
+              <a:rPr lang="en-US" dirty="0"/>
+              <a:t>What do you mean when you say </a:t>
+            </a:r>
+            <a:r>
+              <a:rPr lang="en-US" b="1" i="1" dirty="0">
                 <a:solidFill>
                   <a:srgbClr val="7030A0"/>
                 </a:solidFill>
-                <a:ea typeface="+mn-lt"/>
-                <a:cs typeface="+mn-lt"/>
               </a:rPr>
-              <a:t>Model </a:t>
-            </a:r>
-            <a:r>
-              <a:rPr lang="en-US" dirty="0">
-                <a:ea typeface="+mn-lt"/>
-                <a:cs typeface="+mn-lt"/>
-              </a:rPr>
-              <a:t>The thing you train and use to generate text.</a:t>
-            </a:r>
-          </a:p>
-          <a:p>
-            <a:pPr marL="0" indent="0">
-              <a:buNone/>
-            </a:pPr>
-            <a:r>
-              <a:rPr lang="en-US" b="1" dirty="0">
-                <a:solidFill>
-                  <a:srgbClr val="7030A0"/>
-                </a:solidFill>
-                <a:ea typeface="+mn-lt"/>
-                <a:cs typeface="+mn-lt"/>
-              </a:rPr>
-              <a:t>Architecture </a:t>
-            </a:r>
-            <a:r>
-              <a:rPr lang="en-US" dirty="0">
-                <a:ea typeface="+mn-lt"/>
-                <a:cs typeface="+mn-lt"/>
-              </a:rPr>
-              <a:t>The high-level structure of the model.</a:t>
-            </a:r>
-          </a:p>
-          <a:p>
-            <a:pPr marL="0" indent="0">
-              <a:buNone/>
-            </a:pPr>
-            <a:r>
-              <a:rPr lang="en-US" b="1" dirty="0">
-                <a:solidFill>
-                  <a:srgbClr val="7030A0"/>
-                </a:solidFill>
-                <a:ea typeface="+mn-lt"/>
-                <a:cs typeface="+mn-lt"/>
-              </a:rPr>
-              <a:t>Parameters </a:t>
-            </a:r>
-            <a:r>
-              <a:rPr lang="en-US" dirty="0">
-                <a:ea typeface="+mn-lt"/>
-                <a:cs typeface="+mn-lt"/>
-              </a:rPr>
-              <a:t>(or weights) The internal knobs and dials that get altered during the course of training.</a:t>
-            </a:r>
-          </a:p>
-          <a:p>
-            <a:pPr marL="0" indent="0">
-              <a:buNone/>
-            </a:pPr>
-            <a:r>
-              <a:rPr lang="en-US" b="1" dirty="0">
-                <a:solidFill>
-                  <a:srgbClr val="7030A0"/>
-                </a:solidFill>
-                <a:ea typeface="+mn-lt"/>
-                <a:cs typeface="+mn-lt"/>
-              </a:rPr>
-              <a:t>Context </a:t>
-            </a:r>
-            <a:r>
-              <a:rPr lang="en-US" dirty="0">
-                <a:ea typeface="+mn-lt"/>
-                <a:cs typeface="+mn-lt"/>
-              </a:rPr>
-              <a:t>The input to the LLM.</a:t>
-            </a:r>
-          </a:p>
-          <a:p>
-            <a:pPr marL="0" indent="0">
-              <a:buNone/>
-            </a:pPr>
-            <a:r>
-              <a:rPr lang="en-US" b="1" dirty="0">
-                <a:solidFill>
-                  <a:srgbClr val="7030A0"/>
-                </a:solidFill>
-                <a:ea typeface="+mn-lt"/>
-                <a:cs typeface="+mn-lt"/>
-              </a:rPr>
-              <a:t>Embedding </a:t>
-            </a:r>
-            <a:r>
-              <a:rPr lang="en-US" dirty="0">
-                <a:ea typeface="+mn-lt"/>
-                <a:cs typeface="+mn-lt"/>
-              </a:rPr>
-              <a:t>A high-dimensional representation of text.</a:t>
-            </a:r>
-          </a:p>
-          <a:p>
-            <a:pPr marL="0" indent="0">
-              <a:buNone/>
-            </a:pPr>
-            <a:r>
-              <a:rPr lang="en-US" b="1" dirty="0">
-                <a:solidFill>
-                  <a:srgbClr val="7030A0"/>
-                </a:solidFill>
-                <a:ea typeface="+mn-lt"/>
-                <a:cs typeface="+mn-lt"/>
-              </a:rPr>
-              <a:t>Token </a:t>
-            </a:r>
-            <a:r>
-              <a:rPr lang="en-US" dirty="0">
-                <a:ea typeface="+mn-lt"/>
-                <a:cs typeface="+mn-lt"/>
-              </a:rPr>
-              <a:t>The smallest unit of text fed into a model.</a:t>
-            </a:r>
-          </a:p>
-          <a:p>
-            <a:pPr marL="0" indent="0">
-              <a:buNone/>
-            </a:pPr>
-            <a:r>
-              <a:rPr lang="en-US" b="1" dirty="0">
-                <a:solidFill>
-                  <a:srgbClr val="7030A0"/>
-                </a:solidFill>
-                <a:ea typeface="+mn-lt"/>
-                <a:cs typeface="+mn-lt"/>
-              </a:rPr>
-              <a:t>Pre-training </a:t>
-            </a:r>
-            <a:r>
-              <a:rPr lang="en-US" dirty="0">
-                <a:ea typeface="+mn-lt"/>
-                <a:cs typeface="+mn-lt"/>
-              </a:rPr>
-              <a:t>The first stage of training the LLM, and usually the most expensive.</a:t>
-            </a:r>
-          </a:p>
-          <a:p>
-            <a:pPr marL="0" indent="0">
-              <a:buNone/>
-            </a:pPr>
-            <a:r>
-              <a:rPr lang="en-US" b="1" dirty="0">
-                <a:solidFill>
-                  <a:srgbClr val="7030A0"/>
-                </a:solidFill>
-                <a:ea typeface="+mn-lt"/>
-                <a:cs typeface="+mn-lt"/>
-              </a:rPr>
-              <a:t>Post-training </a:t>
-            </a:r>
-            <a:r>
-              <a:rPr lang="en-US" dirty="0">
-                <a:ea typeface="+mn-lt"/>
-                <a:cs typeface="+mn-lt"/>
-              </a:rPr>
-              <a:t>The second stage of training for working beyond general language understanding</a:t>
-            </a:r>
-          </a:p>
-          <a:p>
-            <a:pPr marL="0" indent="0">
-              <a:buNone/>
-            </a:pPr>
-            <a:r>
-              <a:rPr lang="en-US" b="1" dirty="0">
-                <a:solidFill>
-                  <a:srgbClr val="7030A0"/>
-                </a:solidFill>
-                <a:ea typeface="+mn-lt"/>
-                <a:cs typeface="+mn-lt"/>
-              </a:rPr>
-              <a:t>Fine-tuning </a:t>
-            </a:r>
-            <a:r>
-              <a:rPr lang="en-US" dirty="0">
-                <a:ea typeface="+mn-lt"/>
-                <a:cs typeface="+mn-lt"/>
-              </a:rPr>
-              <a:t>Training the LLM to do a particular task.</a:t>
-            </a:r>
-          </a:p>
-          <a:p>
-            <a:pPr marL="0" indent="0">
-              <a:buNone/>
-            </a:pPr>
-            <a:r>
-              <a:rPr lang="en-US" b="1" dirty="0">
-                <a:solidFill>
-                  <a:srgbClr val="7030A0"/>
-                </a:solidFill>
-                <a:ea typeface="+mn-lt"/>
-                <a:cs typeface="+mn-lt"/>
-              </a:rPr>
-              <a:t>Inference </a:t>
-            </a:r>
-            <a:r>
-              <a:rPr lang="en-US" dirty="0">
-                <a:ea typeface="+mn-lt"/>
-                <a:cs typeface="+mn-lt"/>
-              </a:rPr>
-              <a:t>The act of calling the model for text generation.</a:t>
-            </a:r>
-          </a:p>
-          <a:p>
-            <a:pPr marL="0" indent="0">
-              <a:buNone/>
-            </a:pPr>
-            <a:r>
-              <a:rPr lang="en-US" b="1" dirty="0">
-                <a:solidFill>
-                  <a:srgbClr val="7030A0"/>
-                </a:solidFill>
-                <a:ea typeface="+mn-lt"/>
-                <a:cs typeface="+mn-lt"/>
-              </a:rPr>
-              <a:t>Quantization </a:t>
-            </a:r>
-            <a:r>
-              <a:rPr lang="en-US" dirty="0">
-                <a:ea typeface="+mn-lt"/>
-                <a:cs typeface="+mn-lt"/>
-              </a:rPr>
-              <a:t>Reducing the size of a model.</a:t>
-            </a:r>
-          </a:p>
-          <a:p>
-            <a:pPr marL="0" indent="0">
-              <a:buNone/>
-            </a:pPr>
-            <a:r>
-              <a:rPr lang="en-US" b="1" dirty="0">
-                <a:solidFill>
-                  <a:srgbClr val="7030A0"/>
-                </a:solidFill>
-                <a:ea typeface="+mn-lt"/>
-                <a:cs typeface="+mn-lt"/>
-              </a:rPr>
-              <a:t>Source </a:t>
-            </a:r>
-            <a:r>
-              <a:rPr lang="en-US" dirty="0">
-                <a:ea typeface="+mn-lt"/>
-                <a:cs typeface="+mn-lt"/>
-              </a:rPr>
-              <a:t>The availability of the model (can be open or closed).</a:t>
-            </a:r>
-          </a:p>
-          <a:p>
-            <a:pPr marL="0" indent="0">
-              <a:buNone/>
-            </a:pPr>
-            <a:r>
-              <a:rPr lang="en-US" b="1" dirty="0">
-                <a:solidFill>
-                  <a:srgbClr val="7030A0"/>
-                </a:solidFill>
-                <a:ea typeface="+mn-lt"/>
-                <a:cs typeface="+mn-lt"/>
-              </a:rPr>
-              <a:t>Modality </a:t>
-            </a:r>
-            <a:r>
-              <a:rPr lang="en-US" dirty="0">
-                <a:ea typeface="+mn-lt"/>
-                <a:cs typeface="+mn-lt"/>
-              </a:rPr>
-              <a:t>Defined by the type of data the model is trained on (e.g. text or images).</a:t>
-            </a:r>
-          </a:p>
-          <a:p>
-            <a:pPr marL="0" indent="0">
-              <a:buNone/>
-            </a:pPr>
-            <a:r>
-              <a:rPr lang="en-US" b="1" dirty="0">
-                <a:solidFill>
-                  <a:srgbClr val="7030A0"/>
-                </a:solidFill>
-                <a:ea typeface="+mn-lt"/>
-                <a:cs typeface="+mn-lt"/>
-              </a:rPr>
-              <a:t>API </a:t>
-            </a:r>
-            <a:r>
-              <a:rPr lang="en-US" dirty="0">
-                <a:ea typeface="+mn-lt"/>
-                <a:cs typeface="+mn-lt"/>
-              </a:rPr>
-              <a:t>(Application Programming Interface) The means by which you can interact with a model.</a:t>
-            </a:r>
-            <a:endParaRPr lang="en-US" dirty="0"/>
+              <a:t>AI</a:t>
+            </a:r>
+            <a:r>
+              <a:rPr lang="en-US" i="1" dirty="0"/>
+              <a:t>...</a:t>
+            </a:r>
+            <a:r>
+              <a:rPr lang="en-US" dirty="0"/>
+              <a:t>?</a:t>
+            </a:r>
           </a:p>
         </p:txBody>
       </p:sp>
     </p:spTree>
     <p:extLst>
       <p:ext uri="{BB962C8B-B14F-4D97-AF65-F5344CB8AC3E}">
-        <p14:creationId xmlns:p14="http://schemas.microsoft.com/office/powerpoint/2010/main" val="2828243406"/>
+        <p14:creationId xmlns:p14="http://schemas.microsoft.com/office/powerpoint/2010/main" val="3408820217"/>
       </p:ext>
     </p:extLst>
   </p:cSld>
   <p:clrMapOvr>
     <a:masterClrMapping/>
   </p:clrMapOvr>
+  <p:timing>
+    <p:tnLst>
+      <p:par>
+        <p:cTn id="1" dur="indefinite" restart="never" nodeType="tmRoot">
+          <p:childTnLst>
+            <p:seq concurrent="1" nextAc="seek">
+              <p:cTn id="2" dur="indefinite" nodeType="mainSeq">
+                <p:childTnLst>
+                  <p:par>
+                    <p:cTn id="3" fill="hold">
+                      <p:stCondLst>
+                        <p:cond delay="indefinite"/>
+                      </p:stCondLst>
+                      <p:childTnLst>
+                        <p:par>
+                          <p:cTn id="4" fill="hold">
+                            <p:stCondLst>
+                              <p:cond delay="0"/>
+                            </p:stCondLst>
+                            <p:childTnLst>
+                              <p:par>
+                                <p:cTn id="5" presetID="1" presetClass="entr" presetSubtype="0" fill="hold" grpId="0" nodeType="clickEffect">
+                                  <p:stCondLst>
+                                    <p:cond delay="0"/>
+                                  </p:stCondLst>
+                                  <p:childTnLst>
+                                    <p:set>
+                                      <p:cBhvr>
+                                        <p:cTn id="6" dur="1" fill="hold">
+                                          <p:stCondLst>
+                                            <p:cond delay="0"/>
+                                          </p:stCondLst>
+                                        </p:cTn>
+                                        <p:tgtEl>
+                                          <p:spTgt spid="3">
+                                            <p:txEl>
+                                              <p:pRg st="0" end="0"/>
+                                            </p:txEl>
+                                          </p:spTgt>
+                                        </p:tgtEl>
+                                        <p:attrNameLst>
+                                          <p:attrName>style.visibility</p:attrName>
+                                        </p:attrNameLst>
+                                      </p:cBhvr>
+                                      <p:to>
+                                        <p:strVal val="visible"/>
+                                      </p:to>
+                                    </p:set>
+                                  </p:childTnLst>
+                                </p:cTn>
+                              </p:par>
+                            </p:childTnLst>
+                          </p:cTn>
+                        </p:par>
+                      </p:childTnLst>
+                    </p:cTn>
+                  </p:par>
+                  <p:par>
+                    <p:cTn id="7" fill="hold">
+                      <p:stCondLst>
+                        <p:cond delay="indefinite"/>
+                      </p:stCondLst>
+                      <p:childTnLst>
+                        <p:par>
+                          <p:cTn id="8" fill="hold">
+                            <p:stCondLst>
+                              <p:cond delay="0"/>
+                            </p:stCondLst>
+                            <p:childTnLst>
+                              <p:par>
+                                <p:cTn id="9" presetID="1" presetClass="entr" presetSubtype="0" fill="hold" grpId="0" nodeType="clickEffect">
+                                  <p:stCondLst>
+                                    <p:cond delay="0"/>
+                                  </p:stCondLst>
+                                  <p:childTnLst>
+                                    <p:set>
+                                      <p:cBhvr>
+                                        <p:cTn id="10" dur="1" fill="hold">
+                                          <p:stCondLst>
+                                            <p:cond delay="0"/>
+                                          </p:stCondLst>
+                                        </p:cTn>
+                                        <p:tgtEl>
+                                          <p:spTgt spid="3">
+                                            <p:txEl>
+                                              <p:pRg st="2" end="2"/>
+                                            </p:txEl>
+                                          </p:spTgt>
+                                        </p:tgtEl>
+                                        <p:attrNameLst>
+                                          <p:attrName>style.visibility</p:attrName>
+                                        </p:attrNameLst>
+                                      </p:cBhvr>
+                                      <p:to>
+                                        <p:strVal val="visible"/>
+                                      </p:to>
+                                    </p:set>
+                                  </p:childTnLst>
+                                </p:cTn>
+                              </p:par>
+                            </p:childTnLst>
+                          </p:cTn>
+                        </p:par>
+                      </p:childTnLst>
+                    </p:cTn>
+                  </p:par>
+                </p:childTnLst>
+              </p:cTn>
+              <p:prevCondLst>
+                <p:cond evt="onPrev" delay="0">
+                  <p:tgtEl>
+                    <p:sldTgt/>
+                  </p:tgtEl>
+                </p:cond>
+              </p:prevCondLst>
+              <p:nextCondLst>
+                <p:cond evt="onNext" delay="0">
+                  <p:tgtEl>
+                    <p:sldTgt/>
+                  </p:tgtEl>
+                </p:cond>
+              </p:nextCondLst>
+            </p:seq>
+          </p:childTnLst>
+        </p:cTn>
+      </p:par>
+    </p:tnLst>
+    <p:bldLst>
+      <p:bldP spid="3" grpId="0" build="p"/>
+    </p:bldLst>
+  </p:timing>
 </p:sld>
 </file>
 
@@ -15126,7 +13769,7 @@
           <p:cNvPr id="2" name="Title 1">
             <a:extLst>
               <a:ext uri="{FF2B5EF4-FFF2-40B4-BE49-F238E27FC236}">
-                <a16:creationId xmlns:a16="http://schemas.microsoft.com/office/drawing/2014/main" id="{7C33511F-8565-6D41-02BF-6E9296DCF3B4}"/>
+                <a16:creationId xmlns:a16="http://schemas.microsoft.com/office/drawing/2014/main" id="{96041BF3-F107-F9B0-5EDB-4373BB4196B4}"/>
               </a:ext>
             </a:extLst>
           </p:cNvPr>
@@ -15144,37 +13787,7 @@
           <a:p>
             <a:r>
               <a:rPr lang="en-US" dirty="0"/>
-              <a:t>EU AI Act </a:t>
-            </a:r>
-            <a:r>
-              <a:rPr lang="en-US" i="1" dirty="0">
-                <a:solidFill>
-                  <a:schemeClr val="bg2">
-                    <a:lumMod val="50000"/>
-                  </a:schemeClr>
-                </a:solidFill>
-              </a:rPr>
-              <a:t>(</a:t>
-            </a:r>
-            <a:r>
-              <a:rPr lang="en-GB" i="1" dirty="0">
-                <a:solidFill>
-                  <a:schemeClr val="bg2">
-                    <a:lumMod val="50000"/>
-                  </a:schemeClr>
-                </a:solidFill>
-              </a:rPr>
-              <a:t>August 2024</a:t>
-            </a:r>
-            <a:r>
-              <a:rPr lang="en-US" i="1" dirty="0">
-                <a:solidFill>
-                  <a:schemeClr val="bg2">
-                    <a:lumMod val="50000"/>
-                  </a:schemeClr>
-                </a:solidFill>
-              </a:rPr>
-              <a:t>)</a:t>
+              <a:t>Some definitions</a:t>
             </a:r>
           </a:p>
         </p:txBody>
@@ -15184,7 +13797,7 @@
           <p:cNvPr id="3" name="Content Placeholder 2">
             <a:extLst>
               <a:ext uri="{FF2B5EF4-FFF2-40B4-BE49-F238E27FC236}">
-                <a16:creationId xmlns:a16="http://schemas.microsoft.com/office/drawing/2014/main" id="{C10ABB8D-3273-0866-F725-70CD2E52915C}"/>
+                <a16:creationId xmlns:a16="http://schemas.microsoft.com/office/drawing/2014/main" id="{BACC3A7C-33D4-2896-0AC9-9DA08F6ED357}"/>
               </a:ext>
             </a:extLst>
           </p:cNvPr>
@@ -15198,7 +13811,7 @@
         <p:spPr/>
         <p:txBody>
           <a:bodyPr vert="horz" lIns="91440" tIns="45720" rIns="91440" bIns="45720" rtlCol="0" anchor="t">
-            <a:normAutofit/>
+            <a:normAutofit fontScale="62500" lnSpcReduction="20000"/>
           </a:bodyPr>
           <a:lstStyle/>
           <a:p>
@@ -15206,31 +13819,340 @@
               <a:buNone/>
             </a:pPr>
             <a:r>
-              <a:rPr lang="en-US" dirty="0"/>
-              <a:t>How does the AI Act define things...?</a:t>
-            </a:r>
-          </a:p>
-          <a:p>
-            <a:pPr marL="0" indent="0">
-              <a:buNone/>
-            </a:pPr>
-            <a:endParaRPr lang="en-US" dirty="0"/>
-          </a:p>
-          <a:p>
-            <a:pPr marL="0" indent="0">
-              <a:buNone/>
-            </a:pPr>
+              <a:rPr lang="en-US" b="1">
+                <a:solidFill>
+                  <a:srgbClr val="7030A0"/>
+                </a:solidFill>
+                <a:ea typeface="+mn-lt"/>
+                <a:cs typeface="+mn-lt"/>
+              </a:rPr>
+              <a:t>Model </a:t>
+            </a:r>
+            <a:r>
+              <a:rPr lang="en-US">
+                <a:ea typeface="+mn-lt"/>
+                <a:cs typeface="+mn-lt"/>
+              </a:rPr>
+              <a:t>The thing you train and use to generate text.</a:t>
+            </a:r>
             <a:endParaRPr lang="en-US" dirty="0">
               <a:ea typeface="+mn-lt"/>
               <a:cs typeface="+mn-lt"/>
             </a:endParaRPr>
+          </a:p>
+          <a:p>
+            <a:pPr marL="0" indent="0">
+              <a:buNone/>
+            </a:pPr>
+            <a:r>
+              <a:rPr lang="en-US" b="1" dirty="0">
+                <a:solidFill>
+                  <a:srgbClr val="7030A0"/>
+                </a:solidFill>
+                <a:ea typeface="+mn-lt"/>
+                <a:cs typeface="+mn-lt"/>
+              </a:rPr>
+              <a:t>Architecture </a:t>
+            </a:r>
+            <a:r>
+              <a:rPr lang="en-US" dirty="0">
+                <a:ea typeface="+mn-lt"/>
+                <a:cs typeface="+mn-lt"/>
+              </a:rPr>
+              <a:t>The </a:t>
+            </a:r>
+            <a:r>
+              <a:rPr lang="en-US">
+                <a:ea typeface="+mn-lt"/>
+                <a:cs typeface="+mn-lt"/>
+              </a:rPr>
+              <a:t>high-level structure of the model.</a:t>
+            </a:r>
+          </a:p>
+          <a:p>
+            <a:pPr marL="0" indent="0">
+              <a:buNone/>
+            </a:pPr>
+            <a:r>
+              <a:rPr lang="en-US" b="1" dirty="0">
+                <a:solidFill>
+                  <a:srgbClr val="7030A0"/>
+                </a:solidFill>
+                <a:ea typeface="+mn-lt"/>
+                <a:cs typeface="+mn-lt"/>
+              </a:rPr>
+              <a:t>Parameters </a:t>
+            </a:r>
+            <a:r>
+              <a:rPr lang="en-US" dirty="0">
+                <a:ea typeface="+mn-lt"/>
+                <a:cs typeface="+mn-lt"/>
+              </a:rPr>
+              <a:t>(or weights) The internal knobs and dials that get altered </a:t>
+            </a:r>
+            <a:r>
+              <a:rPr lang="en-US">
+                <a:ea typeface="+mn-lt"/>
+                <a:cs typeface="+mn-lt"/>
+              </a:rPr>
+              <a:t>during the course of training.</a:t>
+            </a:r>
+          </a:p>
+          <a:p>
+            <a:pPr marL="0" indent="0">
+              <a:buNone/>
+            </a:pPr>
+            <a:r>
+              <a:rPr lang="en-US" b="1" dirty="0">
+                <a:solidFill>
+                  <a:srgbClr val="7030A0"/>
+                </a:solidFill>
+                <a:ea typeface="+mn-lt"/>
+                <a:cs typeface="+mn-lt"/>
+              </a:rPr>
+              <a:t>Context </a:t>
+            </a:r>
+            <a:r>
+              <a:rPr lang="en-US" dirty="0">
+                <a:ea typeface="+mn-lt"/>
+                <a:cs typeface="+mn-lt"/>
+              </a:rPr>
+              <a:t>The input to the LLM.</a:t>
+            </a:r>
+          </a:p>
+          <a:p>
+            <a:pPr marL="0" indent="0">
+              <a:buNone/>
+            </a:pPr>
+            <a:r>
+              <a:rPr lang="en-US" b="1" dirty="0">
+                <a:solidFill>
+                  <a:srgbClr val="7030A0"/>
+                </a:solidFill>
+                <a:ea typeface="+mn-lt"/>
+                <a:cs typeface="+mn-lt"/>
+              </a:rPr>
+              <a:t>Embedding </a:t>
+            </a:r>
+            <a:r>
+              <a:rPr lang="en-US" dirty="0">
+                <a:ea typeface="+mn-lt"/>
+                <a:cs typeface="+mn-lt"/>
+              </a:rPr>
+              <a:t>A high-dimensional representation of text.</a:t>
+            </a:r>
+          </a:p>
+          <a:p>
+            <a:pPr marL="0" indent="0">
+              <a:buNone/>
+            </a:pPr>
+            <a:r>
+              <a:rPr lang="en-US" b="1" dirty="0">
+                <a:solidFill>
+                  <a:srgbClr val="7030A0"/>
+                </a:solidFill>
+                <a:ea typeface="+mn-lt"/>
+                <a:cs typeface="+mn-lt"/>
+              </a:rPr>
+              <a:t>Token </a:t>
+            </a:r>
+            <a:r>
+              <a:rPr lang="en-US" dirty="0">
+                <a:ea typeface="+mn-lt"/>
+                <a:cs typeface="+mn-lt"/>
+              </a:rPr>
+              <a:t>The smallest unit of text fed into a model.</a:t>
+            </a:r>
+          </a:p>
+          <a:p>
+            <a:pPr marL="0" indent="0">
+              <a:buNone/>
+            </a:pPr>
+            <a:r>
+              <a:rPr lang="en-US" b="1" dirty="0">
+                <a:solidFill>
+                  <a:srgbClr val="7030A0"/>
+                </a:solidFill>
+                <a:ea typeface="+mn-lt"/>
+                <a:cs typeface="+mn-lt"/>
+              </a:rPr>
+              <a:t>Pretraining </a:t>
+            </a:r>
+            <a:r>
+              <a:rPr lang="en-US" dirty="0">
+                <a:ea typeface="+mn-lt"/>
+                <a:cs typeface="+mn-lt"/>
+              </a:rPr>
+              <a:t>The first stage of </a:t>
+            </a:r>
+            <a:r>
+              <a:rPr lang="en-US">
+                <a:ea typeface="+mn-lt"/>
+                <a:cs typeface="+mn-lt"/>
+              </a:rPr>
+              <a:t>training the LLM, and usually the most expensive.</a:t>
+            </a:r>
+          </a:p>
+          <a:p>
+            <a:pPr marL="0" indent="0">
+              <a:buNone/>
+            </a:pPr>
+            <a:r>
+              <a:rPr lang="en-US" dirty="0">
+                <a:ea typeface="+mn-lt"/>
+                <a:cs typeface="+mn-lt"/>
+              </a:rPr>
+              <a:t> </a:t>
+            </a:r>
+            <a:r>
+              <a:rPr lang="en-US" b="1">
+                <a:solidFill>
+                  <a:srgbClr val="7030A0"/>
+                </a:solidFill>
+                <a:ea typeface="+mn-lt"/>
+                <a:cs typeface="+mn-lt"/>
+              </a:rPr>
+              <a:t>Finetuning </a:t>
+            </a:r>
+            <a:r>
+              <a:rPr lang="en-US">
+                <a:ea typeface="+mn-lt"/>
+                <a:cs typeface="+mn-lt"/>
+              </a:rPr>
+              <a:t>Training the LLM to do a particular task.</a:t>
+            </a:r>
+          </a:p>
+          <a:p>
+            <a:pPr marL="0" indent="0">
+              <a:buNone/>
+            </a:pPr>
+            <a:r>
+              <a:rPr lang="en-US" b="1" dirty="0">
+                <a:solidFill>
+                  <a:srgbClr val="7030A0"/>
+                </a:solidFill>
+                <a:ea typeface="+mn-lt"/>
+                <a:cs typeface="+mn-lt"/>
+              </a:rPr>
+              <a:t>Inference </a:t>
+            </a:r>
+            <a:r>
+              <a:rPr lang="en-US" dirty="0">
+                <a:ea typeface="+mn-lt"/>
+                <a:cs typeface="+mn-lt"/>
+              </a:rPr>
+              <a:t>The act of calling the model for text generation.</a:t>
+            </a:r>
+          </a:p>
+          <a:p>
+            <a:pPr marL="0" indent="0">
+              <a:buNone/>
+            </a:pPr>
+            <a:r>
+              <a:rPr lang="en-US" b="1" dirty="0">
+                <a:solidFill>
+                  <a:srgbClr val="7030A0"/>
+                </a:solidFill>
+                <a:ea typeface="+mn-lt"/>
+                <a:cs typeface="+mn-lt"/>
+              </a:rPr>
+              <a:t>Quantization </a:t>
+            </a:r>
+            <a:r>
+              <a:rPr lang="en-US" dirty="0">
+                <a:ea typeface="+mn-lt"/>
+                <a:cs typeface="+mn-lt"/>
+              </a:rPr>
+              <a:t>Reducing the size of a model.</a:t>
+            </a:r>
+          </a:p>
+          <a:p>
+            <a:pPr marL="0" indent="0">
+              <a:buNone/>
+            </a:pPr>
+            <a:r>
+              <a:rPr lang="en-US" b="1" dirty="0">
+                <a:solidFill>
+                  <a:srgbClr val="7030A0"/>
+                </a:solidFill>
+                <a:ea typeface="+mn-lt"/>
+                <a:cs typeface="+mn-lt"/>
+              </a:rPr>
+              <a:t>Source </a:t>
+            </a:r>
+            <a:r>
+              <a:rPr lang="en-US" dirty="0">
+                <a:ea typeface="+mn-lt"/>
+                <a:cs typeface="+mn-lt"/>
+              </a:rPr>
+              <a:t>The availability of the model (can be open </a:t>
+            </a:r>
+            <a:r>
+              <a:rPr lang="en-US">
+                <a:ea typeface="+mn-lt"/>
+                <a:cs typeface="+mn-lt"/>
+              </a:rPr>
+              <a:t>or closed).</a:t>
+            </a:r>
+          </a:p>
+          <a:p>
+            <a:pPr marL="0" indent="0">
+              <a:buNone/>
+            </a:pPr>
+            <a:r>
+              <a:rPr lang="en-US" b="1" dirty="0">
+                <a:solidFill>
+                  <a:srgbClr val="7030A0"/>
+                </a:solidFill>
+                <a:ea typeface="+mn-lt"/>
+                <a:cs typeface="+mn-lt"/>
+              </a:rPr>
+              <a:t>Modality </a:t>
+            </a:r>
+            <a:r>
+              <a:rPr lang="en-US" dirty="0">
+                <a:ea typeface="+mn-lt"/>
+                <a:cs typeface="+mn-lt"/>
+              </a:rPr>
+              <a:t>Defined by the type of data the model is trained on (e.g.</a:t>
+            </a:r>
+            <a:r>
+              <a:rPr lang="en-US">
+                <a:ea typeface="+mn-lt"/>
+                <a:cs typeface="+mn-lt"/>
+              </a:rPr>
+              <a:t> text or images).</a:t>
+            </a:r>
+          </a:p>
+          <a:p>
+            <a:pPr marL="0" indent="0">
+              <a:buNone/>
+            </a:pPr>
+            <a:r>
+              <a:rPr lang="en-US" b="1" dirty="0">
+                <a:solidFill>
+                  <a:srgbClr val="7030A0"/>
+                </a:solidFill>
+                <a:ea typeface="+mn-lt"/>
+                <a:cs typeface="+mn-lt"/>
+              </a:rPr>
+              <a:t>API </a:t>
+            </a:r>
+            <a:r>
+              <a:rPr lang="en-US" dirty="0">
+                <a:ea typeface="+mn-lt"/>
+                <a:cs typeface="+mn-lt"/>
+              </a:rPr>
+              <a:t>(Application Programming Interface) The means by which you can interact with a model.</a:t>
+            </a:r>
+            <a:endParaRPr lang="en-US"/>
           </a:p>
         </p:txBody>
       </p:sp>
     </p:spTree>
     <p:extLst>
       <p:ext uri="{BB962C8B-B14F-4D97-AF65-F5344CB8AC3E}">
-        <p14:creationId xmlns:p14="http://schemas.microsoft.com/office/powerpoint/2010/main" val="1865729139"/>
+        <p14:creationId xmlns:p14="http://schemas.microsoft.com/office/powerpoint/2010/main" val="2828243406"/>
       </p:ext>
     </p:extLst>
   </p:cSld>
